--- a/lectures/L9.pptx
+++ b/lectures/L9.pptx
@@ -21,6 +21,7 @@
     <p:sldId id="285" r:id="rId12"/>
     <p:sldId id="288" r:id="rId13"/>
     <p:sldId id="289" r:id="rId14"/>
+    <p:sldId id="295" r:id="rId23"/>
     <p:sldId id="290" r:id="rId15"/>
     <p:sldId id="286" r:id="rId16"/>
     <p:sldId id="287" r:id="rId17"/>
@@ -28,8 +29,11 @@
     <p:sldId id="291" r:id="rId19"/>
     <p:sldId id="292" r:id="rId20"/>
     <p:sldId id="293" r:id="rId21"/>
+    <p:sldId id="296" r:id="rId33"/>
     <p:sldId id="294" r:id="rId22"/>
-    <p:sldId id="295" r:id="rId23"/>
+    <p:sldId id="299" r:id="rId36"/>
+    <p:sldId id="297" r:id="rId34"/>
+    <p:sldId id="298" r:id="rId35"/>
   </p:sldIdLst>
   <p:sldSz cx="9144000" cy="5715000" type="screen16x10"/>
   <p:notesSz cx="6858000" cy="9144000"/>
@@ -13729,6 +13733,206 @@
           <a:chExt cx="0" cy="0"/>
         </a:xfrm>
       </p:grpSpPr>
+      <mc:AlternateContent xmlns:mc="http://schemas.openxmlformats.org/markup-compatibility/2006" xmlns:a14="http://schemas.microsoft.com/office/drawing/2010/main">
+        <mc:Choice Requires="a14">
+          <p:sp>
+            <p:nvSpPr>
+              <p:cNvPr id="2" name="Title 1">
+                <a:extLst>
+                  <a:ext uri="{FF2B5EF4-FFF2-40B4-BE49-F238E27FC236}">
+                    <a16:creationId xmlns:a16="http://schemas.microsoft.com/office/drawing/2014/main" id="{B21B660B-1E0B-4D01-87CB-4B7D98486F54}"/>
+                  </a:ext>
+                </a:extLst>
+              </p:cNvPr>
+              <p:cNvSpPr>
+                <a:spLocks noGrp="1"/>
+              </p:cNvSpPr>
+              <p:nvPr>
+                <p:ph type="title"/>
+              </p:nvPr>
+            </p:nvSpPr>
+            <p:spPr/>
+            <p:txBody>
+              <a:bodyPr/>
+              <a:lstStyle/>
+              <a:p>
+                <a:pPr algn="ctr"/>
+                <a:r>
+                  <a:rPr lang="it-IT" dirty="0"/>
+                  <a:t>Inflation rate (</a:t>
+                </a:r>
+                <a14:m>
+                  <m:oMath xmlns:m="http://schemas.openxmlformats.org/officeDocument/2006/math">
+                    <m:r>
+                      <a:rPr lang="nb-NO" b="0" i="1" smtClean="0">
+                        <a:latin typeface="Cambria Math" panose="02040503050406030204" pitchFamily="18" charset="0"/>
+                      </a:rPr>
+                      <m:t>𝜋</m:t>
+                    </m:r>
+                    <m:r>
+                      <a:rPr lang="nb-NO" b="0" i="1" smtClean="0">
+                        <a:latin typeface="Cambria Math" panose="02040503050406030204" pitchFamily="18" charset="0"/>
+                      </a:rPr>
+                      <m:t>)</m:t>
+                    </m:r>
+                  </m:oMath>
+                </a14:m>
+                <a:r>
+                  <a:rPr lang="en-US" dirty="0"/>
+                  <a:t> Norway</a:t>
+                </a:r>
+              </a:p>
+            </p:txBody>
+          </p:sp>
+        </mc:Choice>
+        <mc:Fallback xmlns="">
+          <p:sp>
+            <p:nvSpPr>
+              <p:cNvPr id="2" name="Title 1">
+                <a:extLst>
+                  <a:ext uri="{FF2B5EF4-FFF2-40B4-BE49-F238E27FC236}">
+                    <a16:creationId xmlns:a16="http://schemas.microsoft.com/office/drawing/2014/main" id="{B21B660B-1E0B-4D01-87CB-4B7D98486F54}"/>
+                  </a:ext>
+                </a:extLst>
+              </p:cNvPr>
+              <p:cNvSpPr>
+                <a:spLocks noGrp="1" noRot="1" noChangeAspect="1" noMove="1" noResize="1" noEditPoints="1" noAdjustHandles="1" noChangeArrowheads="1" noChangeShapeType="1" noTextEdit="1"/>
+              </p:cNvSpPr>
+              <p:nvPr>
+                <p:ph type="title"/>
+              </p:nvPr>
+            </p:nvSpPr>
+            <p:spPr>
+              <a:blipFill>
+                <a:blip r:embed="rId2"/>
+                <a:stretch>
+                  <a:fillRect/>
+                </a:stretch>
+              </a:blipFill>
+            </p:spPr>
+            <p:txBody>
+              <a:bodyPr/>
+              <a:lstStyle/>
+              <a:p>
+                <a:r>
+                  <a:rPr lang="en-US">
+                    <a:noFill/>
+                  </a:rPr>
+                  <a:t> </a:t>
+                </a:r>
+              </a:p>
+            </p:txBody>
+          </p:sp>
+        </mc:Fallback>
+      </mc:AlternateContent>
+      <p:sp>
+        <p:nvSpPr>
+          <p:cNvPr id="3" name="Content Placeholder 2">
+            <a:extLst>
+              <a:ext uri="{FF2B5EF4-FFF2-40B4-BE49-F238E27FC236}">
+                <a16:creationId xmlns:a16="http://schemas.microsoft.com/office/drawing/2014/main" id="{6285D6BC-086B-479F-9F72-15CA362D665B}"/>
+              </a:ext>
+            </a:extLst>
+          </p:cNvPr>
+          <p:cNvSpPr>
+            <a:spLocks noGrp="1"/>
+          </p:cNvSpPr>
+          <p:nvPr>
+            <p:ph idx="1"/>
+          </p:nvPr>
+        </p:nvSpPr>
+        <p:spPr/>
+        <p:txBody>
+          <a:bodyPr>
+            <a:normAutofit/>
+          </a:bodyPr>
+          <a:lstStyle/>
+          <a:p>
+            <a:r>
+              <a:rPr lang="en-US" sz="2000" dirty="0"/>
+              <a:t>Inflation is a general increase in the price level of goods and services in the economy over time</a:t>
+            </a:r>
+          </a:p>
+          <a:p>
+            <a:pPr lvl="1"/>
+            <a:r>
+              <a:rPr lang="en-US" sz="1800" dirty="0"/>
+              <a:t>Inflation </a:t>
+            </a:r>
+            <a:r>
+              <a:rPr lang="en-US" sz="1800" dirty="0">
+                <a:sym typeface="Wingdings" panose="05000000000000000000" pitchFamily="2" charset="2"/>
+              </a:rPr>
+              <a:t>   future price of goods </a:t>
+            </a:r>
+            <a:endParaRPr lang="en-US" sz="1800" dirty="0"/>
+          </a:p>
+          <a:p>
+            <a:r>
+              <a:rPr lang="en-US" sz="2000" dirty="0"/>
+              <a:t>September 2021 4.1% - August 2021 3.4%</a:t>
+            </a:r>
+          </a:p>
+          <a:p>
+            <a:pPr lvl="1"/>
+            <a:r>
+              <a:rPr lang="en-US" sz="2000" dirty="0"/>
+              <a:t>Highest inflation rate since July 2016</a:t>
+            </a:r>
+          </a:p>
+          <a:p>
+            <a:pPr lvl="2"/>
+            <a:r>
+              <a:rPr lang="en-US" sz="2000" dirty="0"/>
+              <a:t>Faster rise in prices of housing and utilities </a:t>
+            </a:r>
+          </a:p>
+          <a:p>
+            <a:pPr lvl="2"/>
+            <a:r>
+              <a:rPr lang="en-US" sz="2000" dirty="0"/>
+              <a:t>Furnishing household equipment and routine maintenance</a:t>
+            </a:r>
+          </a:p>
+          <a:p>
+            <a:pPr lvl="2"/>
+            <a:r>
+              <a:rPr lang="en-US" sz="2000" dirty="0"/>
+              <a:t>Recreation and culture</a:t>
+            </a:r>
+          </a:p>
+        </p:txBody>
+      </p:sp>
+    </p:spTree>
+    <p:extLst>
+      <p:ext uri="{BB962C8B-B14F-4D97-AF65-F5344CB8AC3E}">
+        <p14:creationId xmlns:p14="http://schemas.microsoft.com/office/powerpoint/2010/main" val="2310254051"/>
+      </p:ext>
+    </p:extLst>
+  </p:cSld>
+  <p:clrMapOvr>
+    <a:masterClrMapping/>
+  </p:clrMapOvr>
+</p:sld>
+</file>
+
+<file path=ppt/slides/slide11.xml><?xml version="1.0" encoding="utf-8"?>
+<p:sld xmlns:a="http://schemas.openxmlformats.org/drawingml/2006/main" xmlns:r="http://schemas.openxmlformats.org/officeDocument/2006/relationships" xmlns:p="http://schemas.openxmlformats.org/presentationml/2006/main">
+  <p:cSld>
+    <p:spTree>
+      <p:nvGrpSpPr>
+        <p:cNvPr id="1" name=""/>
+        <p:cNvGrpSpPr/>
+        <p:nvPr/>
+      </p:nvGrpSpPr>
+      <p:grpSpPr>
+        <a:xfrm>
+          <a:off x="0" y="0"/>
+          <a:ext cx="0" cy="0"/>
+          <a:chOff x="0" y="0"/>
+          <a:chExt cx="0" cy="0"/>
+        </a:xfrm>
+      </p:grpSpPr>
       <p:pic>
         <p:nvPicPr>
           <p:cNvPr id="5" name="Picture 4" descr="Text&#10;&#10;Description automatically generated with medium confidence">
@@ -13772,7 +13976,7 @@
 </p:sld>
 </file>
 
-<file path=ppt/slides/slide11.xml><?xml version="1.0" encoding="utf-8"?>
+<file path=ppt/slides/slide12.xml><?xml version="1.0" encoding="utf-8"?>
 <p:sld xmlns:a="http://schemas.openxmlformats.org/drawingml/2006/main" xmlns:r="http://schemas.openxmlformats.org/officeDocument/2006/relationships" xmlns:p="http://schemas.openxmlformats.org/presentationml/2006/main">
   <p:cSld>
     <p:spTree>
@@ -13850,23 +14054,15 @@
           <a:p>
             <a:pPr lvl="1"/>
             <a:r>
-              <a:rPr lang="it-IT" dirty="0"/>
-              <a:t>Future cash flow </a:t>
-            </a:r>
-            <a:r>
-              <a:rPr lang="it-IT" dirty="0">
-                <a:sym typeface="Wingdings" panose="05000000000000000000" pitchFamily="2" charset="2"/>
-              </a:rPr>
-              <a:t> FV </a:t>
+              <a:rPr lang="en-US" dirty="0"/>
+              <a:t>Money you receive in the future (an incoming cash flow) increases your future value</a:t>
             </a:r>
           </a:p>
           <a:p>
             <a:pPr lvl="1"/>
             <a:r>
-              <a:rPr lang="it-IT" dirty="0">
-                <a:sym typeface="Wingdings" panose="05000000000000000000" pitchFamily="2" charset="2"/>
-              </a:rPr>
-              <a:t>Future  payment  FV </a:t>
+              <a:rPr lang="en-US" dirty="0"/>
+              <a:t>Money you pay out in the future (an outgoing payment) decreases your future value</a:t>
             </a:r>
           </a:p>
           <a:p>
@@ -13937,58 +14133,7 @@
         </p:txBody>
       </p:sp>
       <mc:AlternateContent xmlns:mc="http://schemas.openxmlformats.org/markup-compatibility/2006">
-        <mc:Choice xmlns:pslz="http://schemas.microsoft.com/office/powerpoint/2016/slidezoom" Requires="pslz">
-          <p:graphicFrame>
-            <p:nvGraphicFramePr>
-              <p:cNvPr id="5" name="Slide Zoom 4">
-                <a:extLst>
-                  <a:ext uri="{FF2B5EF4-FFF2-40B4-BE49-F238E27FC236}">
-                    <a16:creationId xmlns:a16="http://schemas.microsoft.com/office/drawing/2014/main" id="{7A106121-6E48-4CDF-A06D-0BB49F2BA4EC}"/>
-                  </a:ext>
-                </a:extLst>
-              </p:cNvPr>
-              <p:cNvGraphicFramePr>
-                <a:graphicFrameLocks noChangeAspect="1"/>
-              </p:cNvGraphicFramePr>
-              <p:nvPr>
-                <p:extLst>
-                  <p:ext uri="{D42A27DB-BD31-4B8C-83A1-F6EECF244321}">
-                    <p14:modId xmlns:p14="http://schemas.microsoft.com/office/powerpoint/2010/main" val="2228535216"/>
-                  </p:ext>
-                </p:extLst>
-              </p:nvPr>
-            </p:nvGraphicFramePr>
-            <p:xfrm>
-              <a:off x="3631804" y="1682255"/>
-              <a:ext cx="1880392" cy="1175245"/>
-            </p:xfrm>
-            <a:graphic>
-              <a:graphicData uri="http://schemas.microsoft.com/office/powerpoint/2016/slidezoom">
-                <pslz:sldZm>
-                  <pslz:sldZmObj sldId="283" cId="1235559135">
-                    <pslz:zmPr id="{5FD83A48-B0BC-4D99-9FD6-814863FBAD1C}" transitionDur="1000" showBg="0">
-                      <p166:blipFill xmlns:p166="http://schemas.microsoft.com/office/powerpoint/2016/6/main">
-                        <a:blip r:embed="rId2"/>
-                        <a:stretch>
-                          <a:fillRect/>
-                        </a:stretch>
-                      </p166:blipFill>
-                      <p166:spPr xmlns:p166="http://schemas.microsoft.com/office/powerpoint/2016/6/main">
-                        <a:xfrm>
-                          <a:off x="0" y="0"/>
-                          <a:ext cx="1880392" cy="1175245"/>
-                        </a:xfrm>
-                        <a:prstGeom prst="rect">
-                          <a:avLst/>
-                        </a:prstGeom>
-                      </p166:spPr>
-                    </pslz:zmPr>
-                  </pslz:sldZmObj>
-                </pslz:sldZm>
-              </a:graphicData>
-            </a:graphic>
-          </p:graphicFrame>
-        </mc:Choice>
+        <mc:Choice xmlns:pslz="http://schemas.microsoft.com/office/powerpoint/2016/slidezoom" Requires="pslz"/>
         <mc:Fallback>
           <p:pic>
             <p:nvPicPr>
@@ -14035,7 +14180,7 @@
 </p:sld>
 </file>
 
-<file path=ppt/slides/slide12.xml><?xml version="1.0" encoding="utf-8"?>
+<file path=ppt/slides/slide13.xml><?xml version="1.0" encoding="utf-8"?>
 <p:sld xmlns:a="http://schemas.openxmlformats.org/drawingml/2006/main" xmlns:r="http://schemas.openxmlformats.org/officeDocument/2006/relationships" xmlns:p="http://schemas.openxmlformats.org/presentationml/2006/main">
   <p:cSld>
     <p:spTree>
@@ -14235,7 +14380,7 @@
 </p:sld>
 </file>
 
-<file path=ppt/slides/slide13.xml><?xml version="1.0" encoding="utf-8"?>
+<file path=ppt/slides/slide14.xml><?xml version="1.0" encoding="utf-8"?>
 <p:sld xmlns:a="http://schemas.openxmlformats.org/drawingml/2006/main" xmlns:r="http://schemas.openxmlformats.org/officeDocument/2006/relationships" xmlns:p="http://schemas.openxmlformats.org/presentationml/2006/main">
   <p:cSld>
     <p:spTree>
@@ -14381,6 +14526,25 @@
               <a:p>
                 <a:pPr lvl="2"/>
                 <a:r>
+                  <a:rPr lang="en-US" i="1" dirty="0"/>
+                  <a:t>Methodology: the bonus is guaranteed; salary is discounted by (1+i)</a:t>
+                </a:r>
+                <a:r>
+                  <a:rPr lang="en-US" i="1" baseline="30000" dirty="0"/>
+                  <a:t>t</a:t>
+                </a:r>
+                <a:r>
+                  <a:rPr lang="en-US" i="1" dirty="0"/>
+                  <a:t> and compounding retention odds p</a:t>
+                </a:r>
+                <a:r>
+                  <a:rPr lang="en-US" i="1" baseline="30000" dirty="0"/>
+                  <a:t>t</a:t>
+                </a:r>
+              </a:p>
+              <a:p>
+                <a:pPr lvl="2"/>
+                <a:r>
                   <a:rPr lang="en-US" dirty="0"/>
                   <a:t>Correlation between probability of remaining in a club and market factors that influence the discount rate (</a:t>
                 </a:r>
@@ -14390,7 +14554,7 @@
                       <a:rPr lang="nb-NO" b="0" i="1" smtClean="0">
                         <a:latin typeface="Cambria Math" panose="02040503050406030204" pitchFamily="18" charset="0"/>
                       </a:rPr>
-                      <m:t>𝛿</m:t>
+                      <m:t>𝑖</m:t>
                     </m:r>
                   </m:oMath>
                 </a14:m>
@@ -14541,7 +14705,104 @@
 </p:sld>
 </file>
 
-<file path=ppt/slides/slide14.xml><?xml version="1.0" encoding="utf-8"?>
+<file path=ppt/slides/slide15.xml><?xml version="1.0" encoding="utf-8"?>
+<p:sld xmlns:a="http://schemas.openxmlformats.org/drawingml/2006/main" xmlns:p="http://schemas.openxmlformats.org/presentationml/2006/main" xmlns:r="http://schemas.openxmlformats.org/officeDocument/2006/relationships">
+  <p:cSld>
+    <p:spTree>
+      <p:nvGrpSpPr>
+        <p:cNvPr id="1" name=""/>
+        <p:cNvGrpSpPr/>
+        <p:nvPr/>
+      </p:nvGrpSpPr>
+      <p:grpSpPr/>
+      <p:sp>
+        <p:nvSpPr>
+          <p:cNvPr id="2" name="Title 1"/>
+          <p:cNvSpPr>
+            <a:spLocks noGrp="1"/>
+          </p:cNvSpPr>
+          <p:nvPr>
+            <p:ph type="title"/>
+          </p:nvPr>
+        </p:nvSpPr>
+        <p:spPr/>
+        <p:txBody>
+          <a:bodyPr/>
+          <a:lstStyle/>
+          <a:p>
+            <a:r>
+              <a:t>Worked Example — Ronde Barber, Year 3</a:t>
+            </a:r>
+          </a:p>
+        </p:txBody>
+      </p:sp>
+      <p:sp>
+        <p:nvSpPr>
+          <p:cNvPr id="3" name="Content Placeholder 2"/>
+          <p:cNvSpPr>
+            <a:spLocks noGrp="1"/>
+          </p:cNvSpPr>
+          <p:nvPr>
+            <p:ph idx="1"/>
+          </p:nvPr>
+        </p:nvSpPr>
+        <p:spPr/>
+        <p:txBody>
+          <a:bodyPr wrap="square"/>
+          <a:lstStyle/>
+          <a:p>
+            <a:pPr/>
+            <a:r>
+              <a:t>Contracted (nominal) salary in Year 3: $3,250K</a:t>
+            </a:r>
+          </a:p>
+          <a:p>
+            <a:pPr/>
+            <a:r>
+              <a:t>Step 1 — discount for time only, at i = 8%:</a:t>
+            </a:r>
+          </a:p>
+          <a:p>
+            <a:pPr lvl="1"/>
+            <a:r>
+              <a:t>PV = 3,250 / (1.08)³ = 3,250 / 1.2597 ≈ $2,580K</a:t>
+            </a:r>
+          </a:p>
+          <a:p>
+            <a:pPr/>
+            <a:r>
+              <a:t>Step 2 — weight by the compounding chance he is still on the roster in year 3, p = 0.8:</a:t>
+            </a:r>
+          </a:p>
+          <a:p>
+            <a:pPr lvl="1"/>
+            <a:r>
+              <a:t>Survival to year 3 = p³ = 0.8³ = 0.512</a:t>
+            </a:r>
+          </a:p>
+          <a:p>
+            <a:pPr lvl="1"/>
+            <a:r>
+              <a:t>Expected PV = 2,580 × 0.512 ≈ $1,321K</a:t>
+            </a:r>
+          </a:p>
+          <a:p>
+            <a:pPr/>
+            <a:r>
+              <a:t>Result: a $3,250K salary line is really worth about $1,321K today — a 59% reduction once time and retention risk are both priced in</a:t>
+            </a:r>
+          </a:p>
+        </p:txBody>
+      </p:sp>
+    </p:spTree>
+  </p:cSld>
+  <p:clrMapOvr>
+    <a:masterClrMapping/>
+  </p:clrMapOvr>
+</p:sld>
+</file>
+
+<file path=ppt/slides/slide16.xml><?xml version="1.0" encoding="utf-8"?>
 <p:sld xmlns:a="http://schemas.openxmlformats.org/drawingml/2006/main" xmlns:r="http://schemas.openxmlformats.org/officeDocument/2006/relationships" xmlns:p="http://schemas.openxmlformats.org/presentationml/2006/main">
   <p:cSld>
     <p:spTree>
@@ -14580,14 +14841,74 @@
         </p:blipFill>
         <p:spPr>
           <a:xfrm>
-            <a:off x="2453832" y="735606"/>
-            <a:ext cx="4535437" cy="4243788"/>
+            <a:off x="2488035" y="950000"/>
+            <a:ext cx="4167930" cy="3900000"/>
           </a:xfrm>
           <a:prstGeom prst="rect">
             <a:avLst/>
           </a:prstGeom>
         </p:spPr>
       </p:pic>
+      <p:sp>
+        <p:nvSpPr>
+          <p:cNvPr id="10" name="Title 1"/>
+          <p:cNvSpPr>
+            <a:spLocks noGrp="1"/>
+          </p:cNvSpPr>
+          <p:nvPr>
+            <p:ph type="title"/>
+          </p:nvPr>
+        </p:nvSpPr>
+        <p:spPr>
+          <a:xfrm>
+            <a:off x="628650" y="180000"/>
+            <a:ext cx="7886700" cy="700000"/>
+          </a:xfrm>
+        </p:spPr>
+        <p:txBody>
+          <a:bodyPr anchor="ctr"/>
+          <a:lstStyle/>
+          <a:p>
+            <a:pPr algn="ctr"/>
+            <a:r>
+              <a:rPr lang="en-US" sz="2400" dirty="0">
+                <a:solidFill>
+                  <a:schemeClr val="bg1"/>
+                </a:solidFill>
+              </a:rPr>
+              <a:t>NFL Contracts — PV vs. Expected PV</a:t>
+            </a:r>
+          </a:p>
+        </p:txBody>
+      </p:sp>
+      <p:sp>
+        <p:nvSpPr>
+          <p:cNvPr id="11" name="Caption"/>
+          <p:cNvSpPr txBox="1"/>
+          <p:nvPr/>
+        </p:nvSpPr>
+        <p:spPr>
+          <a:xfrm>
+            <a:off x="800000" y="4870000"/>
+            <a:ext cx="7544000" cy="320000"/>
+          </a:xfrm>
+          <a:prstGeom prst="rect">
+            <a:avLst/>
+          </a:prstGeom>
+          <a:noFill/>
+        </p:spPr>
+        <p:txBody>
+          <a:bodyPr wrap="square" rtlCol="0"/>
+          <a:lstStyle/>
+          <a:p>
+            <a:pPr algn="ctr"/>
+            <a:r>
+              <a:rPr lang="en-US" sz="1100" i="1" dirty="0"/>
+              <a:t>Note: "r" here denotes the same discount rate as "i" used elsewhere in this lecture.</a:t>
+            </a:r>
+          </a:p>
+        </p:txBody>
+      </p:sp>
     </p:spTree>
     <p:extLst>
       <p:ext uri="{BB962C8B-B14F-4D97-AF65-F5344CB8AC3E}">
@@ -14601,8 +14922,8 @@
 </p:sld>
 </file>
 
-<file path=ppt/slides/slide15.xml><?xml version="1.0" encoding="utf-8"?>
-<p:sld xmlns:a="http://schemas.openxmlformats.org/drawingml/2006/main" xmlns:r="http://schemas.openxmlformats.org/officeDocument/2006/relationships" xmlns:p="http://schemas.openxmlformats.org/presentationml/2006/main">
+<file path=ppt/slides/slide17.xml><?xml version="1.0" encoding="utf-8"?>
+<p:sld xmlns:a="http://schemas.openxmlformats.org/drawingml/2006/main" xmlns:p="http://schemas.openxmlformats.org/presentationml/2006/main" xmlns:r="http://schemas.openxmlformats.org/officeDocument/2006/relationships">
   <p:cSld>
     <p:spTree>
       <p:nvGrpSpPr>
@@ -14610,39 +14931,46 @@
         <p:cNvGrpSpPr/>
         <p:nvPr/>
       </p:nvGrpSpPr>
-      <p:grpSpPr>
-        <a:xfrm>
-          <a:off x="0" y="0"/>
-          <a:ext cx="0" cy="0"/>
-          <a:chOff x="0" y="0"/>
-          <a:chExt cx="0" cy="0"/>
-        </a:xfrm>
-      </p:grpSpPr>
+      <p:grpSpPr/>
+      <p:sp>
+        <p:nvSpPr>
+          <p:cNvPr id="2" name="Title 1"/>
+          <p:cNvSpPr>
+            <a:spLocks noGrp="1"/>
+          </p:cNvSpPr>
+          <p:nvPr>
+            <p:ph type="title"/>
+          </p:nvPr>
+        </p:nvSpPr>
+        <p:spPr/>
+        <p:txBody>
+          <a:bodyPr/>
+          <a:lstStyle/>
+          <a:p>
+            <a:r>
+              <a:t>Sensitivity — How Much Does the Discount Rate Matter?</a:t>
+            </a:r>
+          </a:p>
+        </p:txBody>
+      </p:sp>
       <p:pic>
         <p:nvPicPr>
-          <p:cNvPr id="3" name="Picture 2">
-            <a:hlinkClick r:id="rId2"/>
-            <a:extLst>
-              <a:ext uri="{FF2B5EF4-FFF2-40B4-BE49-F238E27FC236}">
-                <a16:creationId xmlns:a16="http://schemas.microsoft.com/office/drawing/2014/main" id="{C6FDEF4D-DD92-4DE7-9A93-D7A3F0785557}"/>
-              </a:ext>
-            </a:extLst>
-          </p:cNvPr>
+          <p:cNvPr id="3" name="Picture 2" descr="sensitivity_chart.png"/>
           <p:cNvPicPr>
             <a:picLocks noChangeAspect="1"/>
           </p:cNvPicPr>
           <p:nvPr/>
         </p:nvPicPr>
         <p:blipFill>
-          <a:blip r:embed="rId3"/>
+          <a:blip r:embed="rId2"/>
           <a:stretch>
             <a:fillRect/>
           </a:stretch>
         </p:blipFill>
         <p:spPr>
           <a:xfrm>
-            <a:off x="689887" y="1137997"/>
-            <a:ext cx="8002117" cy="3439005"/>
+            <a:off x="2193428" y="1250000"/>
+            <a:ext cx="4757143" cy="3600000"/>
           </a:xfrm>
           <a:prstGeom prst="rect">
             <a:avLst/>
@@ -14650,11 +14978,188 @@
         </p:spPr>
       </p:pic>
     </p:spTree>
-    <p:extLst>
-      <p:ext uri="{BB962C8B-B14F-4D97-AF65-F5344CB8AC3E}">
-        <p14:creationId xmlns:p14="http://schemas.microsoft.com/office/powerpoint/2010/main" val="2402026329"/>
-      </p:ext>
-    </p:extLst>
+  </p:cSld>
+  <p:clrMapOvr>
+    <a:masterClrMapping/>
+  </p:clrMapOvr>
+</p:sld>
+</file>
+
+<file path=ppt/slides/slide18.xml><?xml version="1.0" encoding="utf-8"?>
+<p:sld xmlns:a="http://schemas.openxmlformats.org/drawingml/2006/main" xmlns:p="http://schemas.openxmlformats.org/presentationml/2006/main" xmlns:r="http://schemas.openxmlformats.org/officeDocument/2006/relationships">
+  <p:cSld>
+    <p:spTree>
+      <p:nvGrpSpPr>
+        <p:cNvPr id="1" name=""/>
+        <p:cNvGrpSpPr/>
+        <p:nvPr/>
+      </p:nvGrpSpPr>
+      <p:grpSpPr/>
+      <p:sp>
+        <p:nvSpPr>
+          <p:cNvPr id="2" name="Title 1"/>
+          <p:cNvSpPr>
+            <a:spLocks noGrp="1"/>
+          </p:cNvSpPr>
+          <p:nvPr>
+            <p:ph type="title"/>
+          </p:nvPr>
+        </p:nvSpPr>
+        <p:spPr/>
+        <p:txBody>
+          <a:bodyPr/>
+          <a:lstStyle/>
+          <a:p>
+            <a:r>
+              <a:t>Guaranteed vs. Non-Guaranteed Contracts — NFL vs. NBA</a:t>
+            </a:r>
+          </a:p>
+        </p:txBody>
+      </p:sp>
+      <p:sp>
+        <p:nvSpPr>
+          <p:cNvPr id="3" name="Content Placeholder 2"/>
+          <p:cNvSpPr>
+            <a:spLocks noGrp="1"/>
+          </p:cNvSpPr>
+          <p:nvPr>
+            <p:ph idx="1"/>
+          </p:nvPr>
+        </p:nvSpPr>
+        <p:spPr/>
+        <p:txBody>
+          <a:bodyPr wrap="square"/>
+          <a:lstStyle/>
+          <a:p>
+            <a:pPr/>
+            <a:r>
+              <a:t>NFL: contracts are mostly not guaranteed — a cut player forfeits future salary (keeps only the bonus, per the earlier slide)</a:t>
+            </a:r>
+          </a:p>
+          <a:p>
+            <a:pPr/>
+            <a:r>
+              <a:t>NBA (from Lecture 8): contracts are fully guaranteed — salary is owed even if the player is cut, so p = 1 and only time is discounted</a:t>
+            </a:r>
+          </a:p>
+          <a:p>
+            <a:pPr/>
+            <a:r>
+              <a:t>Same nominal salary → higher expected value under a guaranteed contract</a:t>
+            </a:r>
+          </a:p>
+          <a:p>
+            <a:pPr/>
+            <a:r>
+              <a:t>Ronde Barber, at i = 8%:</a:t>
+            </a:r>
+          </a:p>
+          <a:p>
+            <a:pPr lvl="1"/>
+            <a:r>
+              <a:t>NFL-style (p = 0.8): Expected PV = $7,118K</a:t>
+            </a:r>
+          </a:p>
+          <a:p>
+            <a:pPr lvl="1"/>
+            <a:r>
+              <a:t>If fully guaranteed, NBA-style (p = 1): PV = $13,826K — about 94% more, for the exact same salary numbers</a:t>
+            </a:r>
+          </a:p>
+          <a:p>
+            <a:pPr/>
+            <a:r>
+              <a:t>Guarantee structure is itself a form of value — not just the dollar amount on paper</a:t>
+            </a:r>
+          </a:p>
+        </p:txBody>
+      </p:sp>
+    </p:spTree>
+  </p:cSld>
+  <p:clrMapOvr>
+    <a:masterClrMapping/>
+  </p:clrMapOvr>
+</p:sld>
+</file>
+
+<file path=ppt/slides/slide19.xml><?xml version="1.0" encoding="utf-8"?>
+<p:sld xmlns:a="http://schemas.openxmlformats.org/drawingml/2006/main" xmlns:p="http://schemas.openxmlformats.org/presentationml/2006/main" xmlns:r="http://schemas.openxmlformats.org/officeDocument/2006/relationships">
+  <p:cSld>
+    <p:spTree>
+      <p:nvGrpSpPr>
+        <p:cNvPr id="1" name=""/>
+        <p:cNvGrpSpPr/>
+        <p:nvPr/>
+      </p:nvGrpSpPr>
+      <p:grpSpPr/>
+      <p:sp>
+        <p:nvSpPr>
+          <p:cNvPr id="2" name="Title 1"/>
+          <p:cNvSpPr>
+            <a:spLocks noGrp="1"/>
+          </p:cNvSpPr>
+          <p:nvPr>
+            <p:ph type="title"/>
+          </p:nvPr>
+        </p:nvSpPr>
+        <p:spPr/>
+        <p:txBody>
+          <a:bodyPr/>
+          <a:lstStyle/>
+          <a:p>
+            <a:r>
+              <a:t>Key Takeaways</a:t>
+            </a:r>
+          </a:p>
+        </p:txBody>
+      </p:sp>
+      <p:sp>
+        <p:nvSpPr>
+          <p:cNvPr id="3" name="Content Placeholder 2"/>
+          <p:cNvSpPr>
+            <a:spLocks noGrp="1"/>
+          </p:cNvSpPr>
+          <p:nvPr>
+            <p:ph idx="1"/>
+          </p:nvPr>
+        </p:nvSpPr>
+        <p:spPr/>
+        <p:txBody>
+          <a:bodyPr wrap="square"/>
+          <a:lstStyle/>
+          <a:p>
+            <a:pPr/>
+            <a:r>
+              <a:t>Money today is worth more than the same money tomorrow — always discount future cash flows before comparing them</a:t>
+            </a:r>
+          </a:p>
+          <a:p>
+            <a:pPr/>
+            <a:r>
+              <a:t>Discount rate (i) ≠ inflation (π) — related but distinct concepts</a:t>
+            </a:r>
+          </a:p>
+          <a:p>
+            <a:pPr/>
+            <a:r>
+              <a:t>A contract’s reported (nominal) value overstates its true worth once you account for both time and risk</a:t>
+            </a:r>
+          </a:p>
+          <a:p>
+            <a:pPr/>
+            <a:r>
+              <a:t>Expected PV = discount for time, (1+i)ᵗ, AND for the probability the cash flow actually happens, pᵗ</a:t>
+            </a:r>
+          </a:p>
+          <a:p>
+            <a:pPr/>
+            <a:r>
+              <a:t>Whether a cash flow is guaranteed changes its value — before you’ve even factored in risk aversion</a:t>
+            </a:r>
+          </a:p>
+        </p:txBody>
+      </p:sp>
+    </p:spTree>
   </p:cSld>
   <p:clrMapOvr>
     <a:masterClrMapping/>
@@ -15260,8 +15765,8 @@
               </p:nvPr>
             </p:nvGraphicFramePr>
             <p:xfrm>
-              <a:off x="5240294" y="2490366"/>
-              <a:ext cx="3275056" cy="2046910"/>
+              <a:off x="4950000" y="2300000"/>
+              <a:ext cx="4194000" cy="2620000"/>
             </p:xfrm>
             <a:graphic>
               <a:graphicData uri="http://schemas.microsoft.com/office/powerpoint/2016/slidezoom">
@@ -15346,8 +15851,8 @@
               </p:nvPr>
             </p:nvGraphicFramePr>
             <p:xfrm>
-              <a:off x="1927330" y="3343841"/>
-              <a:ext cx="2286000" cy="1428750"/>
+              <a:off x="1400000" y="3050000"/>
+              <a:ext cx="3200000" cy="2000000"/>
             </p:xfrm>
             <a:graphic>
               <a:graphicData uri="http://schemas.microsoft.com/office/powerpoint/2016/slidezoom">
@@ -15958,6 +16463,97 @@
 </file>
 
 <file path=ppt/slides/slide7.xml><?xml version="1.0" encoding="utf-8"?>
+<p:sld xmlns:a="http://schemas.openxmlformats.org/drawingml/2006/main" xmlns:p="http://schemas.openxmlformats.org/presentationml/2006/main" xmlns:r="http://schemas.openxmlformats.org/officeDocument/2006/relationships">
+  <p:cSld>
+    <p:spTree>
+      <p:nvGrpSpPr>
+        <p:cNvPr id="1" name=""/>
+        <p:cNvGrpSpPr/>
+        <p:nvPr/>
+      </p:nvGrpSpPr>
+      <p:grpSpPr/>
+      <p:sp>
+        <p:nvSpPr>
+          <p:cNvPr id="2" name="Title 1"/>
+          <p:cNvSpPr>
+            <a:spLocks noGrp="1"/>
+          </p:cNvSpPr>
+          <p:nvPr>
+            <p:ph type="title"/>
+          </p:nvPr>
+        </p:nvSpPr>
+        <p:spPr/>
+        <p:txBody>
+          <a:bodyPr/>
+          <a:lstStyle/>
+          <a:p>
+            <a:r>
+              <a:t>PV of Multiple Cash Flows — The Annuity Formula</a:t>
+            </a:r>
+          </a:p>
+        </p:txBody>
+      </p:sp>
+      <p:sp>
+        <p:nvSpPr>
+          <p:cNvPr id="3" name="Content Placeholder 2"/>
+          <p:cNvSpPr>
+            <a:spLocks noGrp="1"/>
+          </p:cNvSpPr>
+          <p:nvPr>
+            <p:ph idx="1"/>
+          </p:nvPr>
+        </p:nvSpPr>
+        <p:spPr/>
+        <p:txBody>
+          <a:bodyPr wrap="square"/>
+          <a:lstStyle/>
+          <a:p>
+            <a:pPr/>
+            <a:r>
+              <a:t>A contract is not a single payment — it is a stream of cash flows spread over several years</a:t>
+            </a:r>
+          </a:p>
+          <a:p>
+            <a:pPr/>
+            <a:r>
+              <a:t>Extend the single-payment PV formula by discounting and summing each year’s cash flow separately:</a:t>
+            </a:r>
+          </a:p>
+          <a:p>
+            <a:pPr lvl="1"/>
+            <a:r>
+              <a:t>PV = Σ CFₜ / (1+i)ᵗ   (t = 1 to n)</a:t>
+            </a:r>
+          </a:p>
+          <a:p>
+            <a:pPr lvl="1"/>
+            <a:r>
+              <a:t>CFₜ = the cash flow in year t (e.g. that year’s salary)</a:t>
+            </a:r>
+          </a:p>
+          <a:p>
+            <a:pPr lvl="1"/>
+            <a:r>
+              <a:t>Every term uses the same discount rate i, but a different exponent t — later cash flows get discounted more</a:t>
+            </a:r>
+          </a:p>
+          <a:p>
+            <a:pPr/>
+            <a:r>
+              <a:t>This is exactly what the NFL contract table (coming up) applies year-by-year to each player’s salary</a:t>
+            </a:r>
+          </a:p>
+        </p:txBody>
+      </p:sp>
+    </p:spTree>
+  </p:cSld>
+  <p:clrMapOvr>
+    <a:masterClrMapping/>
+  </p:clrMapOvr>
+</p:sld>
+</file>
+
+<file path=ppt/slides/slide8.xml><?xml version="1.0" encoding="utf-8"?>
 <p:sld xmlns:a="http://schemas.openxmlformats.org/drawingml/2006/main" xmlns:r="http://schemas.openxmlformats.org/officeDocument/2006/relationships" xmlns:p="http://schemas.openxmlformats.org/presentationml/2006/main">
   <p:cSld>
     <p:spTree>
@@ -16070,7 +16666,7 @@
             <a:pPr lvl="2"/>
             <a:r>
               <a:rPr lang="it-IT" dirty="0"/>
-              <a:t>Difference between the present cash flows and the PV of cash flows over a period of time</a:t>
+              <a:t>The sum of the present values of expected future cash flows, minus the initial cost of the investment</a:t>
             </a:r>
           </a:p>
           <a:p>
@@ -16116,7 +16712,7 @@
 </p:sld>
 </file>
 
-<file path=ppt/slides/slide8.xml><?xml version="1.0" encoding="utf-8"?>
+<file path=ppt/slides/slide9.xml><?xml version="1.0" encoding="utf-8"?>
 <p:sld xmlns:a="http://schemas.openxmlformats.org/drawingml/2006/main" xmlns:r="http://schemas.openxmlformats.org/officeDocument/2006/relationships" xmlns:p="http://schemas.openxmlformats.org/presentationml/2006/main">
   <p:cSld>
     <p:spTree>
@@ -16277,8 +16873,8 @@
               </p:nvPr>
             </p:nvGraphicFramePr>
             <p:xfrm>
-              <a:off x="4942025" y="1622145"/>
-              <a:ext cx="1143000" cy="714375"/>
+              <a:off x="8150000" y="2450000"/>
+              <a:ext cx="900000" cy="562500"/>
             </p:xfrm>
             <a:graphic>
               <a:graphicData uri="http://schemas.microsoft.com/office/powerpoint/2016/slidezoom">
@@ -16354,206 +16950,6 @@
     <p:extLst>
       <p:ext uri="{BB962C8B-B14F-4D97-AF65-F5344CB8AC3E}">
         <p14:creationId xmlns:p14="http://schemas.microsoft.com/office/powerpoint/2010/main" val="4039083811"/>
-      </p:ext>
-    </p:extLst>
-  </p:cSld>
-  <p:clrMapOvr>
-    <a:masterClrMapping/>
-  </p:clrMapOvr>
-</p:sld>
-</file>
-
-<file path=ppt/slides/slide9.xml><?xml version="1.0" encoding="utf-8"?>
-<p:sld xmlns:a="http://schemas.openxmlformats.org/drawingml/2006/main" xmlns:r="http://schemas.openxmlformats.org/officeDocument/2006/relationships" xmlns:p="http://schemas.openxmlformats.org/presentationml/2006/main">
-  <p:cSld>
-    <p:spTree>
-      <p:nvGrpSpPr>
-        <p:cNvPr id="1" name=""/>
-        <p:cNvGrpSpPr/>
-        <p:nvPr/>
-      </p:nvGrpSpPr>
-      <p:grpSpPr>
-        <a:xfrm>
-          <a:off x="0" y="0"/>
-          <a:ext cx="0" cy="0"/>
-          <a:chOff x="0" y="0"/>
-          <a:chExt cx="0" cy="0"/>
-        </a:xfrm>
-      </p:grpSpPr>
-      <mc:AlternateContent xmlns:mc="http://schemas.openxmlformats.org/markup-compatibility/2006" xmlns:a14="http://schemas.microsoft.com/office/drawing/2010/main">
-        <mc:Choice Requires="a14">
-          <p:sp>
-            <p:nvSpPr>
-              <p:cNvPr id="2" name="Title 1">
-                <a:extLst>
-                  <a:ext uri="{FF2B5EF4-FFF2-40B4-BE49-F238E27FC236}">
-                    <a16:creationId xmlns:a16="http://schemas.microsoft.com/office/drawing/2014/main" id="{B21B660B-1E0B-4D01-87CB-4B7D98486F54}"/>
-                  </a:ext>
-                </a:extLst>
-              </p:cNvPr>
-              <p:cNvSpPr>
-                <a:spLocks noGrp="1"/>
-              </p:cNvSpPr>
-              <p:nvPr>
-                <p:ph type="title"/>
-              </p:nvPr>
-            </p:nvSpPr>
-            <p:spPr/>
-            <p:txBody>
-              <a:bodyPr/>
-              <a:lstStyle/>
-              <a:p>
-                <a:pPr algn="ctr"/>
-                <a:r>
-                  <a:rPr lang="it-IT" dirty="0"/>
-                  <a:t>Inflation rate (</a:t>
-                </a:r>
-                <a14:m>
-                  <m:oMath xmlns:m="http://schemas.openxmlformats.org/officeDocument/2006/math">
-                    <m:r>
-                      <a:rPr lang="nb-NO" b="0" i="1" smtClean="0">
-                        <a:latin typeface="Cambria Math" panose="02040503050406030204" pitchFamily="18" charset="0"/>
-                      </a:rPr>
-                      <m:t>𝜋</m:t>
-                    </m:r>
-                    <m:r>
-                      <a:rPr lang="nb-NO" b="0" i="1" smtClean="0">
-                        <a:latin typeface="Cambria Math" panose="02040503050406030204" pitchFamily="18" charset="0"/>
-                      </a:rPr>
-                      <m:t>)</m:t>
-                    </m:r>
-                  </m:oMath>
-                </a14:m>
-                <a:r>
-                  <a:rPr lang="en-US" dirty="0"/>
-                  <a:t> Norway</a:t>
-                </a:r>
-              </a:p>
-            </p:txBody>
-          </p:sp>
-        </mc:Choice>
-        <mc:Fallback xmlns="">
-          <p:sp>
-            <p:nvSpPr>
-              <p:cNvPr id="2" name="Title 1">
-                <a:extLst>
-                  <a:ext uri="{FF2B5EF4-FFF2-40B4-BE49-F238E27FC236}">
-                    <a16:creationId xmlns:a16="http://schemas.microsoft.com/office/drawing/2014/main" id="{B21B660B-1E0B-4D01-87CB-4B7D98486F54}"/>
-                  </a:ext>
-                </a:extLst>
-              </p:cNvPr>
-              <p:cNvSpPr>
-                <a:spLocks noGrp="1" noRot="1" noChangeAspect="1" noMove="1" noResize="1" noEditPoints="1" noAdjustHandles="1" noChangeArrowheads="1" noChangeShapeType="1" noTextEdit="1"/>
-              </p:cNvSpPr>
-              <p:nvPr>
-                <p:ph type="title"/>
-              </p:nvPr>
-            </p:nvSpPr>
-            <p:spPr>
-              <a:blipFill>
-                <a:blip r:embed="rId2"/>
-                <a:stretch>
-                  <a:fillRect/>
-                </a:stretch>
-              </a:blipFill>
-            </p:spPr>
-            <p:txBody>
-              <a:bodyPr/>
-              <a:lstStyle/>
-              <a:p>
-                <a:r>
-                  <a:rPr lang="en-US">
-                    <a:noFill/>
-                  </a:rPr>
-                  <a:t> </a:t>
-                </a:r>
-              </a:p>
-            </p:txBody>
-          </p:sp>
-        </mc:Fallback>
-      </mc:AlternateContent>
-      <p:sp>
-        <p:nvSpPr>
-          <p:cNvPr id="3" name="Content Placeholder 2">
-            <a:extLst>
-              <a:ext uri="{FF2B5EF4-FFF2-40B4-BE49-F238E27FC236}">
-                <a16:creationId xmlns:a16="http://schemas.microsoft.com/office/drawing/2014/main" id="{6285D6BC-086B-479F-9F72-15CA362D665B}"/>
-              </a:ext>
-            </a:extLst>
-          </p:cNvPr>
-          <p:cNvSpPr>
-            <a:spLocks noGrp="1"/>
-          </p:cNvSpPr>
-          <p:nvPr>
-            <p:ph idx="1"/>
-          </p:nvPr>
-        </p:nvSpPr>
-        <p:spPr/>
-        <p:txBody>
-          <a:bodyPr>
-            <a:normAutofit/>
-          </a:bodyPr>
-          <a:lstStyle/>
-          <a:p>
-            <a:r>
-              <a:rPr lang="en-US" sz="2000" dirty="0"/>
-              <a:t>Inflation is a general increase in the price level of goods and services in the economy over time</a:t>
-            </a:r>
-          </a:p>
-          <a:p>
-            <a:pPr lvl="1"/>
-            <a:r>
-              <a:rPr lang="en-US" sz="1800" dirty="0"/>
-              <a:t>Inflation </a:t>
-            </a:r>
-            <a:r>
-              <a:rPr lang="en-US" sz="1800" dirty="0">
-                <a:sym typeface="Wingdings" panose="05000000000000000000" pitchFamily="2" charset="2"/>
-              </a:rPr>
-              <a:t>   future price of goods </a:t>
-            </a:r>
-            <a:endParaRPr lang="en-US" sz="1800" dirty="0"/>
-          </a:p>
-          <a:p>
-            <a:r>
-              <a:rPr lang="en-US" sz="2000" dirty="0"/>
-              <a:t>September 2021 4.1% - August 2021 3.4%</a:t>
-            </a:r>
-          </a:p>
-          <a:p>
-            <a:pPr lvl="1"/>
-            <a:r>
-              <a:rPr lang="en-US" sz="2000" dirty="0"/>
-              <a:t>Highest inflation rate since July 2016</a:t>
-            </a:r>
-          </a:p>
-          <a:p>
-            <a:pPr lvl="2"/>
-            <a:r>
-              <a:rPr lang="en-US" sz="2000" dirty="0"/>
-              <a:t>Faster rise in prices of housing and utilities </a:t>
-            </a:r>
-          </a:p>
-          <a:p>
-            <a:pPr lvl="2"/>
-            <a:r>
-              <a:rPr lang="en-US" sz="2000" dirty="0"/>
-              <a:t>Furnishing household equipment and routine maintenance</a:t>
-            </a:r>
-          </a:p>
-          <a:p>
-            <a:pPr lvl="2"/>
-            <a:r>
-              <a:rPr lang="en-US" sz="2000" dirty="0"/>
-              <a:t>Recreation and culture</a:t>
-            </a:r>
-          </a:p>
-        </p:txBody>
-      </p:sp>
-    </p:spTree>
-    <p:extLst>
-      <p:ext uri="{BB962C8B-B14F-4D97-AF65-F5344CB8AC3E}">
-        <p14:creationId xmlns:p14="http://schemas.microsoft.com/office/powerpoint/2010/main" val="2310254051"/>
       </p:ext>
     </p:extLst>
   </p:cSld>

--- a/lectures/L9.pptx
+++ b/lectures/L9.pptx
@@ -9,10 +9,10 @@
     <p:sldMasterId id="2147483712" r:id="rId8"/>
   </p:sldMasterIdLst>
   <p:notesMasterIdLst>
-    <p:notesMasterId r:id="rId24"/>
+    <p:notesMasterId r:id="rId28"/>
   </p:notesMasterIdLst>
   <p:handoutMasterIdLst>
-    <p:handoutMasterId r:id="rId25"/>
+    <p:handoutMasterId r:id="rId29"/>
   </p:handoutMasterIdLst>
   <p:sldIdLst>
     <p:sldId id="280" r:id="rId9"/>
@@ -21,19 +21,19 @@
     <p:sldId id="285" r:id="rId12"/>
     <p:sldId id="288" r:id="rId13"/>
     <p:sldId id="289" r:id="rId14"/>
-    <p:sldId id="295" r:id="rId23"/>
-    <p:sldId id="290" r:id="rId15"/>
-    <p:sldId id="286" r:id="rId16"/>
-    <p:sldId id="287" r:id="rId17"/>
-    <p:sldId id="283" r:id="rId18"/>
-    <p:sldId id="291" r:id="rId19"/>
-    <p:sldId id="292" r:id="rId20"/>
-    <p:sldId id="293" r:id="rId21"/>
-    <p:sldId id="296" r:id="rId33"/>
-    <p:sldId id="294" r:id="rId22"/>
-    <p:sldId id="299" r:id="rId36"/>
-    <p:sldId id="297" r:id="rId34"/>
-    <p:sldId id="298" r:id="rId35"/>
+    <p:sldId id="295" r:id="rId15"/>
+    <p:sldId id="290" r:id="rId16"/>
+    <p:sldId id="286" r:id="rId17"/>
+    <p:sldId id="287" r:id="rId18"/>
+    <p:sldId id="283" r:id="rId19"/>
+    <p:sldId id="291" r:id="rId20"/>
+    <p:sldId id="292" r:id="rId21"/>
+    <p:sldId id="293" r:id="rId22"/>
+    <p:sldId id="296" r:id="rId23"/>
+    <p:sldId id="294" r:id="rId24"/>
+    <p:sldId id="299" r:id="rId25"/>
+    <p:sldId id="297" r:id="rId26"/>
+    <p:sldId id="298" r:id="rId27"/>
   </p:sldIdLst>
   <p:sldSz cx="9144000" cy="5715000" type="screen16x10"/>
   <p:notesSz cx="6858000" cy="9144000"/>
@@ -166,1576 +166,6 @@
 <file path=ppt/changesInfos/changesInfo1.xml><?xml version="1.0" encoding="utf-8"?>
 <pc:chgInfo xmlns:a="http://schemas.openxmlformats.org/drawingml/2006/main" xmlns:r="http://schemas.openxmlformats.org/officeDocument/2006/relationships" xmlns:ac="http://schemas.microsoft.com/office/drawing/2013/main/command" xmlns:pc="http://schemas.microsoft.com/office/powerpoint/2013/main/command">
   <pc:docChgLst>
-    <pc:chgData name="Di Mattia Alessandro Edoardo Giorgio David" userId="f8954a66-e5ad-4a1c-9536-1d2117047f5f" providerId="ADAL" clId="{CFBF690A-D719-48D2-92B8-B5819DB24AC8}"/>
-    <pc:docChg chg="undo custSel addSld modSld">
-      <pc:chgData name="Di Mattia Alessandro Edoardo Giorgio David" userId="f8954a66-e5ad-4a1c-9536-1d2117047f5f" providerId="ADAL" clId="{CFBF690A-D719-48D2-92B8-B5819DB24AC8}" dt="2021-08-09T15:53:44.291" v="1952" actId="20577"/>
-      <pc:docMkLst>
-        <pc:docMk/>
-      </pc:docMkLst>
-      <pc:sldChg chg="modSp mod">
-        <pc:chgData name="Di Mattia Alessandro Edoardo Giorgio David" userId="f8954a66-e5ad-4a1c-9536-1d2117047f5f" providerId="ADAL" clId="{CFBF690A-D719-48D2-92B8-B5819DB24AC8}" dt="2021-08-09T14:22:54.910" v="1329" actId="207"/>
-        <pc:sldMkLst>
-          <pc:docMk/>
-          <pc:sldMk cId="1478560338" sldId="318"/>
-        </pc:sldMkLst>
-        <pc:spChg chg="mod">
-          <ac:chgData name="Di Mattia Alessandro Edoardo Giorgio David" userId="f8954a66-e5ad-4a1c-9536-1d2117047f5f" providerId="ADAL" clId="{CFBF690A-D719-48D2-92B8-B5819DB24AC8}" dt="2021-08-09T14:22:54.910" v="1329" actId="207"/>
-          <ac:spMkLst>
-            <pc:docMk/>
-            <pc:sldMk cId="1478560338" sldId="318"/>
-            <ac:spMk id="3" creationId="{EE5866AE-9B94-40DE-9A9A-06E3998624FB}"/>
-          </ac:spMkLst>
-        </pc:spChg>
-      </pc:sldChg>
-      <pc:sldChg chg="modSp mod">
-        <pc:chgData name="Di Mattia Alessandro Edoardo Giorgio David" userId="f8954a66-e5ad-4a1c-9536-1d2117047f5f" providerId="ADAL" clId="{CFBF690A-D719-48D2-92B8-B5819DB24AC8}" dt="2021-08-08T17:39:08.540" v="749" actId="108"/>
-        <pc:sldMkLst>
-          <pc:docMk/>
-          <pc:sldMk cId="618932863" sldId="319"/>
-        </pc:sldMkLst>
-        <pc:spChg chg="mod">
-          <ac:chgData name="Di Mattia Alessandro Edoardo Giorgio David" userId="f8954a66-e5ad-4a1c-9536-1d2117047f5f" providerId="ADAL" clId="{CFBF690A-D719-48D2-92B8-B5819DB24AC8}" dt="2021-08-08T17:38:48.221" v="748" actId="108"/>
-          <ac:spMkLst>
-            <pc:docMk/>
-            <pc:sldMk cId="618932863" sldId="319"/>
-            <ac:spMk id="12" creationId="{3487BAA1-91F3-4148-939C-9082D3EFBEC0}"/>
-          </ac:spMkLst>
-        </pc:spChg>
-        <pc:spChg chg="mod">
-          <ac:chgData name="Di Mattia Alessandro Edoardo Giorgio David" userId="f8954a66-e5ad-4a1c-9536-1d2117047f5f" providerId="ADAL" clId="{CFBF690A-D719-48D2-92B8-B5819DB24AC8}" dt="2021-08-08T17:39:08.540" v="749" actId="108"/>
-          <ac:spMkLst>
-            <pc:docMk/>
-            <pc:sldMk cId="618932863" sldId="319"/>
-            <ac:spMk id="14" creationId="{D215CADD-3AA8-4C46-9B2F-7B1B1290C11F}"/>
-          </ac:spMkLst>
-        </pc:spChg>
-      </pc:sldChg>
-      <pc:sldChg chg="modSp mod">
-        <pc:chgData name="Di Mattia Alessandro Edoardo Giorgio David" userId="f8954a66-e5ad-4a1c-9536-1d2117047f5f" providerId="ADAL" clId="{CFBF690A-D719-48D2-92B8-B5819DB24AC8}" dt="2021-08-08T17:39:51.365" v="751" actId="108"/>
-        <pc:sldMkLst>
-          <pc:docMk/>
-          <pc:sldMk cId="3339501348" sldId="320"/>
-        </pc:sldMkLst>
-        <pc:spChg chg="mod">
-          <ac:chgData name="Di Mattia Alessandro Edoardo Giorgio David" userId="f8954a66-e5ad-4a1c-9536-1d2117047f5f" providerId="ADAL" clId="{CFBF690A-D719-48D2-92B8-B5819DB24AC8}" dt="2021-08-08T17:39:51.365" v="751" actId="108"/>
-          <ac:spMkLst>
-            <pc:docMk/>
-            <pc:sldMk cId="3339501348" sldId="320"/>
-            <ac:spMk id="4" creationId="{CFED2F6F-3626-4CAA-B18C-531766945314}"/>
-          </ac:spMkLst>
-        </pc:spChg>
-        <pc:spChg chg="mod">
-          <ac:chgData name="Di Mattia Alessandro Edoardo Giorgio David" userId="f8954a66-e5ad-4a1c-9536-1d2117047f5f" providerId="ADAL" clId="{CFBF690A-D719-48D2-92B8-B5819DB24AC8}" dt="2021-08-08T17:39:47.031" v="750" actId="108"/>
-          <ac:spMkLst>
-            <pc:docMk/>
-            <pc:sldMk cId="3339501348" sldId="320"/>
-            <ac:spMk id="14" creationId="{8616B098-DE37-4A20-94C2-E4684B16E6F0}"/>
-          </ac:spMkLst>
-        </pc:spChg>
-      </pc:sldChg>
-      <pc:sldChg chg="modSp mod">
-        <pc:chgData name="Di Mattia Alessandro Edoardo Giorgio David" userId="f8954a66-e5ad-4a1c-9536-1d2117047f5f" providerId="ADAL" clId="{CFBF690A-D719-48D2-92B8-B5819DB24AC8}" dt="2021-08-08T17:40:03.415" v="753" actId="108"/>
-        <pc:sldMkLst>
-          <pc:docMk/>
-          <pc:sldMk cId="1078668927" sldId="321"/>
-        </pc:sldMkLst>
-        <pc:spChg chg="mod">
-          <ac:chgData name="Di Mattia Alessandro Edoardo Giorgio David" userId="f8954a66-e5ad-4a1c-9536-1d2117047f5f" providerId="ADAL" clId="{CFBF690A-D719-48D2-92B8-B5819DB24AC8}" dt="2021-08-08T17:40:03.415" v="753" actId="108"/>
-          <ac:spMkLst>
-            <pc:docMk/>
-            <pc:sldMk cId="1078668927" sldId="321"/>
-            <ac:spMk id="7" creationId="{0FC3C149-325B-4578-9826-6EF66F667717}"/>
-          </ac:spMkLst>
-        </pc:spChg>
-        <pc:spChg chg="mod">
-          <ac:chgData name="Di Mattia Alessandro Edoardo Giorgio David" userId="f8954a66-e5ad-4a1c-9536-1d2117047f5f" providerId="ADAL" clId="{CFBF690A-D719-48D2-92B8-B5819DB24AC8}" dt="2021-08-08T17:39:59.952" v="752" actId="108"/>
-          <ac:spMkLst>
-            <pc:docMk/>
-            <pc:sldMk cId="1078668927" sldId="321"/>
-            <ac:spMk id="12" creationId="{5B0F863B-F364-4F8B-9D2A-934B17016FD5}"/>
-          </ac:spMkLst>
-        </pc:spChg>
-      </pc:sldChg>
-      <pc:sldChg chg="addSp modSp new mod setBg">
-        <pc:chgData name="Di Mattia Alessandro Edoardo Giorgio David" userId="f8954a66-e5ad-4a1c-9536-1d2117047f5f" providerId="ADAL" clId="{CFBF690A-D719-48D2-92B8-B5819DB24AC8}" dt="2021-08-08T17:40:18.417" v="756"/>
-        <pc:sldMkLst>
-          <pc:docMk/>
-          <pc:sldMk cId="3535521216" sldId="322"/>
-        </pc:sldMkLst>
-        <pc:spChg chg="add mod">
-          <ac:chgData name="Di Mattia Alessandro Edoardo Giorgio David" userId="f8954a66-e5ad-4a1c-9536-1d2117047f5f" providerId="ADAL" clId="{CFBF690A-D719-48D2-92B8-B5819DB24AC8}" dt="2021-08-08T16:39:49.210" v="71" actId="20577"/>
-          <ac:spMkLst>
-            <pc:docMk/>
-            <pc:sldMk cId="3535521216" sldId="322"/>
-            <ac:spMk id="2" creationId="{EC727576-E01C-49B2-B415-6050BEB09417}"/>
-          </ac:spMkLst>
-        </pc:spChg>
-        <pc:spChg chg="add mod">
-          <ac:chgData name="Di Mattia Alessandro Edoardo Giorgio David" userId="f8954a66-e5ad-4a1c-9536-1d2117047f5f" providerId="ADAL" clId="{CFBF690A-D719-48D2-92B8-B5819DB24AC8}" dt="2021-08-08T16:40:59.662" v="157" actId="20577"/>
-          <ac:spMkLst>
-            <pc:docMk/>
-            <pc:sldMk cId="3535521216" sldId="322"/>
-            <ac:spMk id="3" creationId="{679C230D-DEB8-4664-B6E1-70585F169F99}"/>
-          </ac:spMkLst>
-        </pc:spChg>
-        <pc:spChg chg="add mod">
-          <ac:chgData name="Di Mattia Alessandro Edoardo Giorgio David" userId="f8954a66-e5ad-4a1c-9536-1d2117047f5f" providerId="ADAL" clId="{CFBF690A-D719-48D2-92B8-B5819DB24AC8}" dt="2021-08-08T17:40:09.364" v="754" actId="108"/>
-          <ac:spMkLst>
-            <pc:docMk/>
-            <pc:sldMk cId="3535521216" sldId="322"/>
-            <ac:spMk id="4" creationId="{84BA9142-2F18-4393-9507-27745B77C153}"/>
-          </ac:spMkLst>
-        </pc:spChg>
-        <pc:spChg chg="add mod">
-          <ac:chgData name="Di Mattia Alessandro Edoardo Giorgio David" userId="f8954a66-e5ad-4a1c-9536-1d2117047f5f" providerId="ADAL" clId="{CFBF690A-D719-48D2-92B8-B5819DB24AC8}" dt="2021-08-08T17:40:12.691" v="755" actId="108"/>
-          <ac:spMkLst>
-            <pc:docMk/>
-            <pc:sldMk cId="3535521216" sldId="322"/>
-            <ac:spMk id="5" creationId="{2E2022A0-A408-46E5-A774-DEC076549ADC}"/>
-          </ac:spMkLst>
-        </pc:spChg>
-      </pc:sldChg>
-      <pc:sldChg chg="addSp delSp modSp new mod">
-        <pc:chgData name="Di Mattia Alessandro Edoardo Giorgio David" userId="f8954a66-e5ad-4a1c-9536-1d2117047f5f" providerId="ADAL" clId="{CFBF690A-D719-48D2-92B8-B5819DB24AC8}" dt="2021-08-09T10:29:26.169" v="1114" actId="20577"/>
-        <pc:sldMkLst>
-          <pc:docMk/>
-          <pc:sldMk cId="879024289" sldId="323"/>
-        </pc:sldMkLst>
-        <pc:spChg chg="add del mod">
-          <ac:chgData name="Di Mattia Alessandro Edoardo Giorgio David" userId="f8954a66-e5ad-4a1c-9536-1d2117047f5f" providerId="ADAL" clId="{CFBF690A-D719-48D2-92B8-B5819DB24AC8}" dt="2021-08-08T16:53:55.966" v="191"/>
-          <ac:spMkLst>
-            <pc:docMk/>
-            <pc:sldMk cId="879024289" sldId="323"/>
-            <ac:spMk id="3" creationId="{CFE02BB8-A9F5-4503-B2C7-E81886585D65}"/>
-          </ac:spMkLst>
-        </pc:spChg>
-        <pc:spChg chg="add del mod">
-          <ac:chgData name="Di Mattia Alessandro Edoardo Giorgio David" userId="f8954a66-e5ad-4a1c-9536-1d2117047f5f" providerId="ADAL" clId="{CFBF690A-D719-48D2-92B8-B5819DB24AC8}" dt="2021-08-08T17:18:05.013" v="214"/>
-          <ac:spMkLst>
-            <pc:docMk/>
-            <pc:sldMk cId="879024289" sldId="323"/>
-            <ac:spMk id="4" creationId="{6FBAF4B8-08A7-44E4-A1D1-0D38537B45E9}"/>
-          </ac:spMkLst>
-        </pc:spChg>
-        <pc:spChg chg="add mod">
-          <ac:chgData name="Di Mattia Alessandro Edoardo Giorgio David" userId="f8954a66-e5ad-4a1c-9536-1d2117047f5f" providerId="ADAL" clId="{CFBF690A-D719-48D2-92B8-B5819DB24AC8}" dt="2021-08-09T10:29:26.169" v="1114" actId="20577"/>
-          <ac:spMkLst>
-            <pc:docMk/>
-            <pc:sldMk cId="879024289" sldId="323"/>
-            <ac:spMk id="5" creationId="{9B3D4137-6E15-473C-A64B-27FDB1D899A6}"/>
-          </ac:spMkLst>
-        </pc:spChg>
-        <pc:spChg chg="add del mod">
-          <ac:chgData name="Di Mattia Alessandro Edoardo Giorgio David" userId="f8954a66-e5ad-4a1c-9536-1d2117047f5f" providerId="ADAL" clId="{CFBF690A-D719-48D2-92B8-B5819DB24AC8}" dt="2021-08-08T17:23:17.474" v="312" actId="11529"/>
-          <ac:spMkLst>
-            <pc:docMk/>
-            <pc:sldMk cId="879024289" sldId="323"/>
-            <ac:spMk id="6" creationId="{BE394CD1-FBD5-4225-8C16-03EF7BFFE769}"/>
-          </ac:spMkLst>
-        </pc:spChg>
-        <pc:spChg chg="add mod">
-          <ac:chgData name="Di Mattia Alessandro Edoardo Giorgio David" userId="f8954a66-e5ad-4a1c-9536-1d2117047f5f" providerId="ADAL" clId="{CFBF690A-D719-48D2-92B8-B5819DB24AC8}" dt="2021-08-08T17:28:17.626" v="365" actId="1076"/>
-          <ac:spMkLst>
-            <pc:docMk/>
-            <pc:sldMk cId="879024289" sldId="323"/>
-            <ac:spMk id="7" creationId="{1D0C6519-F93A-4E09-9423-7B2AF81BE097}"/>
-          </ac:spMkLst>
-        </pc:spChg>
-        <pc:spChg chg="add mod">
-          <ac:chgData name="Di Mattia Alessandro Edoardo Giorgio David" userId="f8954a66-e5ad-4a1c-9536-1d2117047f5f" providerId="ADAL" clId="{CFBF690A-D719-48D2-92B8-B5819DB24AC8}" dt="2021-08-08T17:24:44.386" v="320" actId="17032"/>
-          <ac:spMkLst>
-            <pc:docMk/>
-            <pc:sldMk cId="879024289" sldId="323"/>
-            <ac:spMk id="8" creationId="{D772A39C-F542-4550-A73B-9B799493DF91}"/>
-          </ac:spMkLst>
-        </pc:spChg>
-        <pc:spChg chg="add mod">
-          <ac:chgData name="Di Mattia Alessandro Edoardo Giorgio David" userId="f8954a66-e5ad-4a1c-9536-1d2117047f5f" providerId="ADAL" clId="{CFBF690A-D719-48D2-92B8-B5819DB24AC8}" dt="2021-08-08T17:40:33.964" v="759" actId="108"/>
-          <ac:spMkLst>
-            <pc:docMk/>
-            <pc:sldMk cId="879024289" sldId="323"/>
-            <ac:spMk id="10" creationId="{5D8FFE11-A3B1-42AB-AA3E-5E40F7E2496E}"/>
-          </ac:spMkLst>
-        </pc:spChg>
-        <pc:spChg chg="add mod">
-          <ac:chgData name="Di Mattia Alessandro Edoardo Giorgio David" userId="f8954a66-e5ad-4a1c-9536-1d2117047f5f" providerId="ADAL" clId="{CFBF690A-D719-48D2-92B8-B5819DB24AC8}" dt="2021-08-08T17:40:37.387" v="760" actId="108"/>
-          <ac:spMkLst>
-            <pc:docMk/>
-            <pc:sldMk cId="879024289" sldId="323"/>
-            <ac:spMk id="12" creationId="{817DCC48-4C4D-4A07-B87F-570545352CEB}"/>
-          </ac:spMkLst>
-        </pc:spChg>
-        <pc:picChg chg="add mod">
-          <ac:chgData name="Di Mattia Alessandro Edoardo Giorgio David" userId="f8954a66-e5ad-4a1c-9536-1d2117047f5f" providerId="ADAL" clId="{CFBF690A-D719-48D2-92B8-B5819DB24AC8}" dt="2021-08-08T17:28:09.934" v="364" actId="1076"/>
-          <ac:picMkLst>
-            <pc:docMk/>
-            <pc:sldMk cId="879024289" sldId="323"/>
-            <ac:picMk id="2" creationId="{A0A31DEA-54EF-463F-98B0-86CBB8B1CBED}"/>
-          </ac:picMkLst>
-        </pc:picChg>
-      </pc:sldChg>
-      <pc:sldChg chg="modSp add mod setBg">
-        <pc:chgData name="Di Mattia Alessandro Edoardo Giorgio David" userId="f8954a66-e5ad-4a1c-9536-1d2117047f5f" providerId="ADAL" clId="{CFBF690A-D719-48D2-92B8-B5819DB24AC8}" dt="2021-08-08T17:41:53.973" v="775" actId="1076"/>
-        <pc:sldMkLst>
-          <pc:docMk/>
-          <pc:sldMk cId="2507292240" sldId="324"/>
-        </pc:sldMkLst>
-        <pc:spChg chg="mod">
-          <ac:chgData name="Di Mattia Alessandro Edoardo Giorgio David" userId="f8954a66-e5ad-4a1c-9536-1d2117047f5f" providerId="ADAL" clId="{CFBF690A-D719-48D2-92B8-B5819DB24AC8}" dt="2021-08-08T17:41:53.973" v="775" actId="1076"/>
-          <ac:spMkLst>
-            <pc:docMk/>
-            <pc:sldMk cId="2507292240" sldId="324"/>
-            <ac:spMk id="5" creationId="{9B3D4137-6E15-473C-A64B-27FDB1D899A6}"/>
-          </ac:spMkLst>
-        </pc:spChg>
-        <pc:spChg chg="mod">
-          <ac:chgData name="Di Mattia Alessandro Edoardo Giorgio David" userId="f8954a66-e5ad-4a1c-9536-1d2117047f5f" providerId="ADAL" clId="{CFBF690A-D719-48D2-92B8-B5819DB24AC8}" dt="2021-08-08T17:28:32.286" v="366" actId="14100"/>
-          <ac:spMkLst>
-            <pc:docMk/>
-            <pc:sldMk cId="2507292240" sldId="324"/>
-            <ac:spMk id="7" creationId="{1D0C6519-F93A-4E09-9423-7B2AF81BE097}"/>
-          </ac:spMkLst>
-        </pc:spChg>
-        <pc:spChg chg="mod">
-          <ac:chgData name="Di Mattia Alessandro Edoardo Giorgio David" userId="f8954a66-e5ad-4a1c-9536-1d2117047f5f" providerId="ADAL" clId="{CFBF690A-D719-48D2-92B8-B5819DB24AC8}" dt="2021-08-08T17:26:55.175" v="333" actId="1076"/>
-          <ac:spMkLst>
-            <pc:docMk/>
-            <pc:sldMk cId="2507292240" sldId="324"/>
-            <ac:spMk id="8" creationId="{D772A39C-F542-4550-A73B-9B799493DF91}"/>
-          </ac:spMkLst>
-        </pc:spChg>
-        <pc:spChg chg="mod">
-          <ac:chgData name="Di Mattia Alessandro Edoardo Giorgio David" userId="f8954a66-e5ad-4a1c-9536-1d2117047f5f" providerId="ADAL" clId="{CFBF690A-D719-48D2-92B8-B5819DB24AC8}" dt="2021-08-08T17:40:58.531" v="764" actId="108"/>
-          <ac:spMkLst>
-            <pc:docMk/>
-            <pc:sldMk cId="2507292240" sldId="324"/>
-            <ac:spMk id="10" creationId="{5D8FFE11-A3B1-42AB-AA3E-5E40F7E2496E}"/>
-          </ac:spMkLst>
-        </pc:spChg>
-        <pc:spChg chg="mod">
-          <ac:chgData name="Di Mattia Alessandro Edoardo Giorgio David" userId="f8954a66-e5ad-4a1c-9536-1d2117047f5f" providerId="ADAL" clId="{CFBF690A-D719-48D2-92B8-B5819DB24AC8}" dt="2021-08-08T17:41:02.102" v="765" actId="108"/>
-          <ac:spMkLst>
-            <pc:docMk/>
-            <pc:sldMk cId="2507292240" sldId="324"/>
-            <ac:spMk id="12" creationId="{817DCC48-4C4D-4A07-B87F-570545352CEB}"/>
-          </ac:spMkLst>
-        </pc:spChg>
-        <pc:picChg chg="mod">
-          <ac:chgData name="Di Mattia Alessandro Edoardo Giorgio David" userId="f8954a66-e5ad-4a1c-9536-1d2117047f5f" providerId="ADAL" clId="{CFBF690A-D719-48D2-92B8-B5819DB24AC8}" dt="2021-08-08T17:27:34.254" v="359" actId="1076"/>
-          <ac:picMkLst>
-            <pc:docMk/>
-            <pc:sldMk cId="2507292240" sldId="324"/>
-            <ac:picMk id="2" creationId="{A0A31DEA-54EF-463F-98B0-86CBB8B1CBED}"/>
-          </ac:picMkLst>
-        </pc:picChg>
-      </pc:sldChg>
-      <pc:sldChg chg="addSp delSp modSp new mod">
-        <pc:chgData name="Di Mattia Alessandro Edoardo Giorgio David" userId="f8954a66-e5ad-4a1c-9536-1d2117047f5f" providerId="ADAL" clId="{CFBF690A-D719-48D2-92B8-B5819DB24AC8}" dt="2021-08-09T10:38:12.375" v="1134" actId="20577"/>
-        <pc:sldMkLst>
-          <pc:docMk/>
-          <pc:sldMk cId="2212003161" sldId="325"/>
-        </pc:sldMkLst>
-        <pc:spChg chg="add del mod">
-          <ac:chgData name="Di Mattia Alessandro Edoardo Giorgio David" userId="f8954a66-e5ad-4a1c-9536-1d2117047f5f" providerId="ADAL" clId="{CFBF690A-D719-48D2-92B8-B5819DB24AC8}" dt="2021-08-08T17:32:17.251" v="515"/>
-          <ac:spMkLst>
-            <pc:docMk/>
-            <pc:sldMk cId="2212003161" sldId="325"/>
-            <ac:spMk id="2" creationId="{053F468A-6B00-4E50-B268-FA6901E2578D}"/>
-          </ac:spMkLst>
-        </pc:spChg>
-        <pc:spChg chg="add mod">
-          <ac:chgData name="Di Mattia Alessandro Edoardo Giorgio David" userId="f8954a66-e5ad-4a1c-9536-1d2117047f5f" providerId="ADAL" clId="{CFBF690A-D719-48D2-92B8-B5819DB24AC8}" dt="2021-08-09T10:29:43.988" v="1122" actId="20577"/>
-          <ac:spMkLst>
-            <pc:docMk/>
-            <pc:sldMk cId="2212003161" sldId="325"/>
-            <ac:spMk id="4" creationId="{4E105DD7-ED18-4D77-BE30-789352B7F98F}"/>
-          </ac:spMkLst>
-        </pc:spChg>
-        <pc:spChg chg="add mod">
-          <ac:chgData name="Di Mattia Alessandro Edoardo Giorgio David" userId="f8954a66-e5ad-4a1c-9536-1d2117047f5f" providerId="ADAL" clId="{CFBF690A-D719-48D2-92B8-B5819DB24AC8}" dt="2021-08-08T17:42:35.960" v="784" actId="108"/>
-          <ac:spMkLst>
-            <pc:docMk/>
-            <pc:sldMk cId="2212003161" sldId="325"/>
-            <ac:spMk id="5" creationId="{6A4E8D29-91B3-43E5-BA8D-84E17885461E}"/>
-          </ac:spMkLst>
-        </pc:spChg>
-        <pc:spChg chg="add mod">
-          <ac:chgData name="Di Mattia Alessandro Edoardo Giorgio David" userId="f8954a66-e5ad-4a1c-9536-1d2117047f5f" providerId="ADAL" clId="{CFBF690A-D719-48D2-92B8-B5819DB24AC8}" dt="2021-08-09T10:38:12.375" v="1134" actId="20577"/>
-          <ac:spMkLst>
-            <pc:docMk/>
-            <pc:sldMk cId="2212003161" sldId="325"/>
-            <ac:spMk id="6" creationId="{F804A9CF-DC2A-444F-A1A9-0BEEB91832B5}"/>
-          </ac:spMkLst>
-        </pc:spChg>
-      </pc:sldChg>
-      <pc:sldChg chg="addSp modSp new mod modAnim">
-        <pc:chgData name="Di Mattia Alessandro Edoardo Giorgio David" userId="f8954a66-e5ad-4a1c-9536-1d2117047f5f" providerId="ADAL" clId="{CFBF690A-D719-48D2-92B8-B5819DB24AC8}" dt="2021-08-08T17:46:20.840" v="903" actId="1076"/>
-        <pc:sldMkLst>
-          <pc:docMk/>
-          <pc:sldMk cId="1071665624" sldId="326"/>
-        </pc:sldMkLst>
-        <pc:spChg chg="add mod">
-          <ac:chgData name="Di Mattia Alessandro Edoardo Giorgio David" userId="f8954a66-e5ad-4a1c-9536-1d2117047f5f" providerId="ADAL" clId="{CFBF690A-D719-48D2-92B8-B5819DB24AC8}" dt="2021-08-08T17:46:20.840" v="903" actId="1076"/>
-          <ac:spMkLst>
-            <pc:docMk/>
-            <pc:sldMk cId="1071665624" sldId="326"/>
-            <ac:spMk id="4" creationId="{0F4B1099-4E99-4BF5-AD16-C39C5D90A943}"/>
-          </ac:spMkLst>
-        </pc:spChg>
-        <pc:graphicFrameChg chg="add mod modGraphic">
-          <ac:chgData name="Di Mattia Alessandro Edoardo Giorgio David" userId="f8954a66-e5ad-4a1c-9536-1d2117047f5f" providerId="ADAL" clId="{CFBF690A-D719-48D2-92B8-B5819DB24AC8}" dt="2021-08-08T17:44:20.679" v="791" actId="14100"/>
-          <ac:graphicFrameMkLst>
-            <pc:docMk/>
-            <pc:sldMk cId="1071665624" sldId="326"/>
-            <ac:graphicFrameMk id="2" creationId="{6EEB5749-7593-43BA-B938-76D1F2534684}"/>
-          </ac:graphicFrameMkLst>
-        </pc:graphicFrameChg>
-      </pc:sldChg>
-      <pc:sldChg chg="addSp delSp modSp new mod delAnim modAnim">
-        <pc:chgData name="Di Mattia Alessandro Edoardo Giorgio David" userId="f8954a66-e5ad-4a1c-9536-1d2117047f5f" providerId="ADAL" clId="{CFBF690A-D719-48D2-92B8-B5819DB24AC8}" dt="2021-08-08T17:53:56.667" v="1052" actId="21"/>
-        <pc:sldMkLst>
-          <pc:docMk/>
-          <pc:sldMk cId="2140800234" sldId="327"/>
-        </pc:sldMkLst>
-        <pc:spChg chg="add mod">
-          <ac:chgData name="Di Mattia Alessandro Edoardo Giorgio David" userId="f8954a66-e5ad-4a1c-9536-1d2117047f5f" providerId="ADAL" clId="{CFBF690A-D719-48D2-92B8-B5819DB24AC8}" dt="2021-08-08T17:50:29.420" v="1006" actId="122"/>
-          <ac:spMkLst>
-            <pc:docMk/>
-            <pc:sldMk cId="2140800234" sldId="327"/>
-            <ac:spMk id="3" creationId="{C22EA0BD-83CD-47CE-879C-B8E676000576}"/>
-          </ac:spMkLst>
-        </pc:spChg>
-        <pc:spChg chg="add del mod">
-          <ac:chgData name="Di Mattia Alessandro Edoardo Giorgio David" userId="f8954a66-e5ad-4a1c-9536-1d2117047f5f" providerId="ADAL" clId="{CFBF690A-D719-48D2-92B8-B5819DB24AC8}" dt="2021-08-08T17:53:53.511" v="1051" actId="478"/>
-          <ac:spMkLst>
-            <pc:docMk/>
-            <pc:sldMk cId="2140800234" sldId="327"/>
-            <ac:spMk id="5" creationId="{C88AE3D3-E6E7-41FE-B1A4-5DEF776F9451}"/>
-          </ac:spMkLst>
-        </pc:spChg>
-        <pc:spChg chg="add del mod">
-          <ac:chgData name="Di Mattia Alessandro Edoardo Giorgio David" userId="f8954a66-e5ad-4a1c-9536-1d2117047f5f" providerId="ADAL" clId="{CFBF690A-D719-48D2-92B8-B5819DB24AC8}" dt="2021-08-08T17:53:56.667" v="1052" actId="21"/>
-          <ac:spMkLst>
-            <pc:docMk/>
-            <pc:sldMk cId="2140800234" sldId="327"/>
-            <ac:spMk id="7" creationId="{9AE07881-68E1-48B5-A96C-E07F0AA11531}"/>
-          </ac:spMkLst>
-        </pc:spChg>
-        <pc:graphicFrameChg chg="add mod">
-          <ac:chgData name="Di Mattia Alessandro Edoardo Giorgio David" userId="f8954a66-e5ad-4a1c-9536-1d2117047f5f" providerId="ADAL" clId="{CFBF690A-D719-48D2-92B8-B5819DB24AC8}" dt="2021-08-08T17:47:05.493" v="905"/>
-          <ac:graphicFrameMkLst>
-            <pc:docMk/>
-            <pc:sldMk cId="2140800234" sldId="327"/>
-            <ac:graphicFrameMk id="2" creationId="{876DC8AA-98E3-43C1-ACE4-6D79802114D8}"/>
-          </ac:graphicFrameMkLst>
-        </pc:graphicFrameChg>
-        <pc:picChg chg="add mod">
-          <ac:chgData name="Di Mattia Alessandro Edoardo Giorgio David" userId="f8954a66-e5ad-4a1c-9536-1d2117047f5f" providerId="ADAL" clId="{CFBF690A-D719-48D2-92B8-B5819DB24AC8}" dt="2021-08-08T17:51:25.496" v="1008" actId="1076"/>
-          <ac:picMkLst>
-            <pc:docMk/>
-            <pc:sldMk cId="2140800234" sldId="327"/>
-            <ac:picMk id="4" creationId="{11755E01-2AF0-4A03-8D26-D68F2F0651E1}"/>
-          </ac:picMkLst>
-        </pc:picChg>
-        <pc:picChg chg="add del">
-          <ac:chgData name="Di Mattia Alessandro Edoardo Giorgio David" userId="f8954a66-e5ad-4a1c-9536-1d2117047f5f" providerId="ADAL" clId="{CFBF690A-D719-48D2-92B8-B5819DB24AC8}" dt="2021-08-08T17:52:57.698" v="1044"/>
-          <ac:picMkLst>
-            <pc:docMk/>
-            <pc:sldMk cId="2140800234" sldId="327"/>
-            <ac:picMk id="6" creationId="{35FF09AC-8AE0-4139-BFE7-03A3FF6204A2}"/>
-          </ac:picMkLst>
-        </pc:picChg>
-      </pc:sldChg>
-      <pc:sldChg chg="addSp delSp modSp new mod delAnim modAnim">
-        <pc:chgData name="Di Mattia Alessandro Edoardo Giorgio David" userId="f8954a66-e5ad-4a1c-9536-1d2117047f5f" providerId="ADAL" clId="{CFBF690A-D719-48D2-92B8-B5819DB24AC8}" dt="2021-08-09T10:35:30.787" v="1123" actId="20577"/>
-        <pc:sldMkLst>
-          <pc:docMk/>
-          <pc:sldMk cId="2741554749" sldId="328"/>
-        </pc:sldMkLst>
-        <pc:spChg chg="add mod">
-          <ac:chgData name="Di Mattia Alessandro Edoardo Giorgio David" userId="f8954a66-e5ad-4a1c-9536-1d2117047f5f" providerId="ADAL" clId="{CFBF690A-D719-48D2-92B8-B5819DB24AC8}" dt="2021-08-09T10:35:30.787" v="1123" actId="20577"/>
-          <ac:spMkLst>
-            <pc:docMk/>
-            <pc:sldMk cId="2741554749" sldId="328"/>
-            <ac:spMk id="2" creationId="{56E0AF04-5706-48DE-B45A-8BDA35675443}"/>
-          </ac:spMkLst>
-        </pc:spChg>
-        <pc:spChg chg="add mod">
-          <ac:chgData name="Di Mattia Alessandro Edoardo Giorgio David" userId="f8954a66-e5ad-4a1c-9536-1d2117047f5f" providerId="ADAL" clId="{CFBF690A-D719-48D2-92B8-B5819DB24AC8}" dt="2021-08-08T17:56:47.837" v="1065"/>
-          <ac:spMkLst>
-            <pc:docMk/>
-            <pc:sldMk cId="2741554749" sldId="328"/>
-            <ac:spMk id="3" creationId="{A3C36983-ECB3-4E34-B9A7-5FA335222AAD}"/>
-          </ac:spMkLst>
-        </pc:spChg>
-        <pc:graphicFrameChg chg="add del mod modGraphic">
-          <ac:chgData name="Di Mattia Alessandro Edoardo Giorgio David" userId="f8954a66-e5ad-4a1c-9536-1d2117047f5f" providerId="ADAL" clId="{CFBF690A-D719-48D2-92B8-B5819DB24AC8}" dt="2021-08-09T10:28:18.733" v="1086" actId="478"/>
-          <ac:graphicFrameMkLst>
-            <pc:docMk/>
-            <pc:sldMk cId="2741554749" sldId="328"/>
-            <ac:graphicFrameMk id="4" creationId="{79FDAE47-7486-4180-94CF-31DE77B6955E}"/>
-          </ac:graphicFrameMkLst>
-        </pc:graphicFrameChg>
-        <pc:graphicFrameChg chg="add del mod modGraphic">
-          <ac:chgData name="Di Mattia Alessandro Edoardo Giorgio David" userId="f8954a66-e5ad-4a1c-9536-1d2117047f5f" providerId="ADAL" clId="{CFBF690A-D719-48D2-92B8-B5819DB24AC8}" dt="2021-08-09T10:28:24.956" v="1090" actId="478"/>
-          <ac:graphicFrameMkLst>
-            <pc:docMk/>
-            <pc:sldMk cId="2741554749" sldId="328"/>
-            <ac:graphicFrameMk id="6" creationId="{70435F5D-8374-40BE-BB6F-AA2FEE96AD3B}"/>
-          </ac:graphicFrameMkLst>
-        </pc:graphicFrameChg>
-        <pc:graphicFrameChg chg="add mod modGraphic">
-          <ac:chgData name="Di Mattia Alessandro Edoardo Giorgio David" userId="f8954a66-e5ad-4a1c-9536-1d2117047f5f" providerId="ADAL" clId="{CFBF690A-D719-48D2-92B8-B5819DB24AC8}" dt="2021-08-09T10:28:51.990" v="1095" actId="1076"/>
-          <ac:graphicFrameMkLst>
-            <pc:docMk/>
-            <pc:sldMk cId="2741554749" sldId="328"/>
-            <ac:graphicFrameMk id="7" creationId="{3960835B-A40E-4F95-A75D-58967E7A1CC5}"/>
-          </ac:graphicFrameMkLst>
-        </pc:graphicFrameChg>
-        <pc:picChg chg="add del mod">
-          <ac:chgData name="Di Mattia Alessandro Edoardo Giorgio David" userId="f8954a66-e5ad-4a1c-9536-1d2117047f5f" providerId="ADAL" clId="{CFBF690A-D719-48D2-92B8-B5819DB24AC8}" dt="2021-08-09T10:28:20.010" v="1087" actId="478"/>
-          <ac:picMkLst>
-            <pc:docMk/>
-            <pc:sldMk cId="2741554749" sldId="328"/>
-            <ac:picMk id="5" creationId="{B3E64F8E-DA85-430C-B345-FA8C8ED7D2E6}"/>
-          </ac:picMkLst>
-        </pc:picChg>
-      </pc:sldChg>
-      <pc:sldChg chg="addSp delSp modSp new mod modAnim">
-        <pc:chgData name="Di Mattia Alessandro Edoardo Giorgio David" userId="f8954a66-e5ad-4a1c-9536-1d2117047f5f" providerId="ADAL" clId="{CFBF690A-D719-48D2-92B8-B5819DB24AC8}" dt="2021-08-09T15:12:35.814" v="1839" actId="20577"/>
-        <pc:sldMkLst>
-          <pc:docMk/>
-          <pc:sldMk cId="1026349041" sldId="329"/>
-        </pc:sldMkLst>
-        <pc:spChg chg="add mod">
-          <ac:chgData name="Di Mattia Alessandro Edoardo Giorgio David" userId="f8954a66-e5ad-4a1c-9536-1d2117047f5f" providerId="ADAL" clId="{CFBF690A-D719-48D2-92B8-B5819DB24AC8}" dt="2021-08-09T15:12:35.814" v="1839" actId="20577"/>
-          <ac:spMkLst>
-            <pc:docMk/>
-            <pc:sldMk cId="1026349041" sldId="329"/>
-            <ac:spMk id="4" creationId="{987EDC07-C130-431E-8952-20B6CF56FEC3}"/>
-          </ac:spMkLst>
-        </pc:spChg>
-        <pc:spChg chg="add mod">
-          <ac:chgData name="Di Mattia Alessandro Edoardo Giorgio David" userId="f8954a66-e5ad-4a1c-9536-1d2117047f5f" providerId="ADAL" clId="{CFBF690A-D719-48D2-92B8-B5819DB24AC8}" dt="2021-08-09T14:15:52.987" v="1303" actId="113"/>
-          <ac:spMkLst>
-            <pc:docMk/>
-            <pc:sldMk cId="1026349041" sldId="329"/>
-            <ac:spMk id="5" creationId="{4BA48415-D8CB-43C1-B67C-49183FBD0368}"/>
-          </ac:spMkLst>
-        </pc:spChg>
-        <pc:spChg chg="add mod">
-          <ac:chgData name="Di Mattia Alessandro Edoardo Giorgio David" userId="f8954a66-e5ad-4a1c-9536-1d2117047f5f" providerId="ADAL" clId="{CFBF690A-D719-48D2-92B8-B5819DB24AC8}" dt="2021-08-09T14:16:07.942" v="1316" actId="20577"/>
-          <ac:spMkLst>
-            <pc:docMk/>
-            <pc:sldMk cId="1026349041" sldId="329"/>
-            <ac:spMk id="6" creationId="{7633950F-2995-4718-9772-8F6F21C33A2B}"/>
-          </ac:spMkLst>
-        </pc:spChg>
-        <pc:spChg chg="add mod">
-          <ac:chgData name="Di Mattia Alessandro Edoardo Giorgio David" userId="f8954a66-e5ad-4a1c-9536-1d2117047f5f" providerId="ADAL" clId="{CFBF690A-D719-48D2-92B8-B5819DB24AC8}" dt="2021-08-09T10:51:06.588" v="1183" actId="1076"/>
-          <ac:spMkLst>
-            <pc:docMk/>
-            <pc:sldMk cId="1026349041" sldId="329"/>
-            <ac:spMk id="7" creationId="{651C318D-C586-4D9D-9D0E-5C0AC43A050B}"/>
-          </ac:spMkLst>
-        </pc:spChg>
-        <pc:picChg chg="add del mod">
-          <ac:chgData name="Di Mattia Alessandro Edoardo Giorgio David" userId="f8954a66-e5ad-4a1c-9536-1d2117047f5f" providerId="ADAL" clId="{CFBF690A-D719-48D2-92B8-B5819DB24AC8}" dt="2021-08-09T10:44:42.610" v="1137" actId="478"/>
-          <ac:picMkLst>
-            <pc:docMk/>
-            <pc:sldMk cId="1026349041" sldId="329"/>
-            <ac:picMk id="2" creationId="{D0354408-0743-4BA8-B210-509B7E792CAA}"/>
-          </ac:picMkLst>
-        </pc:picChg>
-        <pc:picChg chg="add mod">
-          <ac:chgData name="Di Mattia Alessandro Edoardo Giorgio David" userId="f8954a66-e5ad-4a1c-9536-1d2117047f5f" providerId="ADAL" clId="{CFBF690A-D719-48D2-92B8-B5819DB24AC8}" dt="2021-08-09T10:44:49.207" v="1139" actId="1076"/>
-          <ac:picMkLst>
-            <pc:docMk/>
-            <pc:sldMk cId="1026349041" sldId="329"/>
-            <ac:picMk id="3" creationId="{4A0BF7A2-344A-4B0D-BEB9-49E1BBA1FD3F}"/>
-          </ac:picMkLst>
-        </pc:picChg>
-      </pc:sldChg>
-      <pc:sldChg chg="addSp delSp modSp new mod modClrScheme modAnim chgLayout">
-        <pc:chgData name="Di Mattia Alessandro Edoardo Giorgio David" userId="f8954a66-e5ad-4a1c-9536-1d2117047f5f" providerId="ADAL" clId="{CFBF690A-D719-48D2-92B8-B5819DB24AC8}" dt="2021-08-09T14:26:57.215" v="1340" actId="20577"/>
-        <pc:sldMkLst>
-          <pc:docMk/>
-          <pc:sldMk cId="2892898324" sldId="330"/>
-        </pc:sldMkLst>
-        <pc:spChg chg="add mod">
-          <ac:chgData name="Di Mattia Alessandro Edoardo Giorgio David" userId="f8954a66-e5ad-4a1c-9536-1d2117047f5f" providerId="ADAL" clId="{CFBF690A-D719-48D2-92B8-B5819DB24AC8}" dt="2021-08-09T14:26:57.215" v="1340" actId="20577"/>
-          <ac:spMkLst>
-            <pc:docMk/>
-            <pc:sldMk cId="2892898324" sldId="330"/>
-            <ac:spMk id="2" creationId="{376A20E8-0080-4E6F-885C-CB0C938C88E4}"/>
-          </ac:spMkLst>
-        </pc:spChg>
-        <pc:spChg chg="add del mod">
-          <ac:chgData name="Di Mattia Alessandro Edoardo Giorgio David" userId="f8954a66-e5ad-4a1c-9536-1d2117047f5f" providerId="ADAL" clId="{CFBF690A-D719-48D2-92B8-B5819DB24AC8}" dt="2021-08-09T11:04:20.188" v="1192"/>
-          <ac:spMkLst>
-            <pc:docMk/>
-            <pc:sldMk cId="2892898324" sldId="330"/>
-            <ac:spMk id="8" creationId="{A5416496-9236-4DBD-82D1-6A95A319B1CA}"/>
-          </ac:spMkLst>
-        </pc:spChg>
-        <pc:spChg chg="add del mod">
-          <ac:chgData name="Di Mattia Alessandro Edoardo Giorgio David" userId="f8954a66-e5ad-4a1c-9536-1d2117047f5f" providerId="ADAL" clId="{CFBF690A-D719-48D2-92B8-B5819DB24AC8}" dt="2021-08-09T11:04:20.188" v="1192"/>
-          <ac:spMkLst>
-            <pc:docMk/>
-            <pc:sldMk cId="2892898324" sldId="330"/>
-            <ac:spMk id="9" creationId="{A3AA9FF8-637A-444F-BC41-94A30890340B}"/>
-          </ac:spMkLst>
-        </pc:spChg>
-        <pc:spChg chg="add del mod">
-          <ac:chgData name="Di Mattia Alessandro Edoardo Giorgio David" userId="f8954a66-e5ad-4a1c-9536-1d2117047f5f" providerId="ADAL" clId="{CFBF690A-D719-48D2-92B8-B5819DB24AC8}" dt="2021-08-09T11:04:20.188" v="1192"/>
-          <ac:spMkLst>
-            <pc:docMk/>
-            <pc:sldMk cId="2892898324" sldId="330"/>
-            <ac:spMk id="10" creationId="{59886D3F-95C7-4956-AD17-B6F928922752}"/>
-          </ac:spMkLst>
-        </pc:spChg>
-        <pc:spChg chg="add del mod">
-          <ac:chgData name="Di Mattia Alessandro Edoardo Giorgio David" userId="f8954a66-e5ad-4a1c-9536-1d2117047f5f" providerId="ADAL" clId="{CFBF690A-D719-48D2-92B8-B5819DB24AC8}" dt="2021-08-09T11:04:20.188" v="1192"/>
-          <ac:spMkLst>
-            <pc:docMk/>
-            <pc:sldMk cId="2892898324" sldId="330"/>
-            <ac:spMk id="11" creationId="{7534BEBF-DD5F-4FFD-A264-16D5029F761B}"/>
-          </ac:spMkLst>
-        </pc:spChg>
-        <pc:spChg chg="add del mod">
-          <ac:chgData name="Di Mattia Alessandro Edoardo Giorgio David" userId="f8954a66-e5ad-4a1c-9536-1d2117047f5f" providerId="ADAL" clId="{CFBF690A-D719-48D2-92B8-B5819DB24AC8}" dt="2021-08-09T11:04:20.188" v="1192"/>
-          <ac:spMkLst>
-            <pc:docMk/>
-            <pc:sldMk cId="2892898324" sldId="330"/>
-            <ac:spMk id="12" creationId="{7D2F5234-C9C6-4013-98C5-159E60B99B34}"/>
-          </ac:spMkLst>
-        </pc:spChg>
-        <pc:spChg chg="add del mod">
-          <ac:chgData name="Di Mattia Alessandro Edoardo Giorgio David" userId="f8954a66-e5ad-4a1c-9536-1d2117047f5f" providerId="ADAL" clId="{CFBF690A-D719-48D2-92B8-B5819DB24AC8}" dt="2021-08-09T11:04:20.188" v="1192"/>
-          <ac:spMkLst>
-            <pc:docMk/>
-            <pc:sldMk cId="2892898324" sldId="330"/>
-            <ac:spMk id="13" creationId="{8A22D28E-AC6C-41B1-857D-B61324DAB068}"/>
-          </ac:spMkLst>
-        </pc:spChg>
-        <pc:spChg chg="add del mod">
-          <ac:chgData name="Di Mattia Alessandro Edoardo Giorgio David" userId="f8954a66-e5ad-4a1c-9536-1d2117047f5f" providerId="ADAL" clId="{CFBF690A-D719-48D2-92B8-B5819DB24AC8}" dt="2021-08-09T11:04:20.188" v="1192"/>
-          <ac:spMkLst>
-            <pc:docMk/>
-            <pc:sldMk cId="2892898324" sldId="330"/>
-            <ac:spMk id="14" creationId="{E93EB8F5-768E-46A0-AAC4-9B9F3C1EFC04}"/>
-          </ac:spMkLst>
-        </pc:spChg>
-        <pc:spChg chg="add del mod">
-          <ac:chgData name="Di Mattia Alessandro Edoardo Giorgio David" userId="f8954a66-e5ad-4a1c-9536-1d2117047f5f" providerId="ADAL" clId="{CFBF690A-D719-48D2-92B8-B5819DB24AC8}" dt="2021-08-09T11:04:20.188" v="1192"/>
-          <ac:spMkLst>
-            <pc:docMk/>
-            <pc:sldMk cId="2892898324" sldId="330"/>
-            <ac:spMk id="15" creationId="{6473ABBE-5B9B-420D-A6A8-78F735B028FF}"/>
-          </ac:spMkLst>
-        </pc:spChg>
-        <pc:spChg chg="add del mod">
-          <ac:chgData name="Di Mattia Alessandro Edoardo Giorgio David" userId="f8954a66-e5ad-4a1c-9536-1d2117047f5f" providerId="ADAL" clId="{CFBF690A-D719-48D2-92B8-B5819DB24AC8}" dt="2021-08-09T11:04:20.188" v="1192"/>
-          <ac:spMkLst>
-            <pc:docMk/>
-            <pc:sldMk cId="2892898324" sldId="330"/>
-            <ac:spMk id="18" creationId="{DE035E5B-E49A-4E7D-8B8A-21909F524B70}"/>
-          </ac:spMkLst>
-        </pc:spChg>
-        <pc:spChg chg="add del mod">
-          <ac:chgData name="Di Mattia Alessandro Edoardo Giorgio David" userId="f8954a66-e5ad-4a1c-9536-1d2117047f5f" providerId="ADAL" clId="{CFBF690A-D719-48D2-92B8-B5819DB24AC8}" dt="2021-08-09T11:04:20.188" v="1192"/>
-          <ac:spMkLst>
-            <pc:docMk/>
-            <pc:sldMk cId="2892898324" sldId="330"/>
-            <ac:spMk id="19" creationId="{6B394C40-0C91-4B6C-AB58-7E09A78A3A31}"/>
-          </ac:spMkLst>
-        </pc:spChg>
-        <pc:spChg chg="add del mod">
-          <ac:chgData name="Di Mattia Alessandro Edoardo Giorgio David" userId="f8954a66-e5ad-4a1c-9536-1d2117047f5f" providerId="ADAL" clId="{CFBF690A-D719-48D2-92B8-B5819DB24AC8}" dt="2021-08-09T11:04:20.188" v="1192"/>
-          <ac:spMkLst>
-            <pc:docMk/>
-            <pc:sldMk cId="2892898324" sldId="330"/>
-            <ac:spMk id="20" creationId="{3B580C25-4815-413D-968D-71996D758362}"/>
-          </ac:spMkLst>
-        </pc:spChg>
-        <pc:spChg chg="add del mod">
-          <ac:chgData name="Di Mattia Alessandro Edoardo Giorgio David" userId="f8954a66-e5ad-4a1c-9536-1d2117047f5f" providerId="ADAL" clId="{CFBF690A-D719-48D2-92B8-B5819DB24AC8}" dt="2021-08-09T11:04:20.188" v="1192"/>
-          <ac:spMkLst>
-            <pc:docMk/>
-            <pc:sldMk cId="2892898324" sldId="330"/>
-            <ac:spMk id="21" creationId="{9F18590E-ED48-4206-B829-46FB6CB98B8E}"/>
-          </ac:spMkLst>
-        </pc:spChg>
-        <pc:spChg chg="add del mod">
-          <ac:chgData name="Di Mattia Alessandro Edoardo Giorgio David" userId="f8954a66-e5ad-4a1c-9536-1d2117047f5f" providerId="ADAL" clId="{CFBF690A-D719-48D2-92B8-B5819DB24AC8}" dt="2021-08-09T11:04:20.188" v="1192"/>
-          <ac:spMkLst>
-            <pc:docMk/>
-            <pc:sldMk cId="2892898324" sldId="330"/>
-            <ac:spMk id="24" creationId="{0DB23D63-DD70-44FF-A790-2BE198204E3F}"/>
-          </ac:spMkLst>
-        </pc:spChg>
-        <pc:spChg chg="add del mod">
-          <ac:chgData name="Di Mattia Alessandro Edoardo Giorgio David" userId="f8954a66-e5ad-4a1c-9536-1d2117047f5f" providerId="ADAL" clId="{CFBF690A-D719-48D2-92B8-B5819DB24AC8}" dt="2021-08-09T11:04:20.188" v="1192"/>
-          <ac:spMkLst>
-            <pc:docMk/>
-            <pc:sldMk cId="2892898324" sldId="330"/>
-            <ac:spMk id="25" creationId="{5F015413-6766-4E57-9ADB-27DFAC10D061}"/>
-          </ac:spMkLst>
-        </pc:spChg>
-        <pc:spChg chg="add del mod">
-          <ac:chgData name="Di Mattia Alessandro Edoardo Giorgio David" userId="f8954a66-e5ad-4a1c-9536-1d2117047f5f" providerId="ADAL" clId="{CFBF690A-D719-48D2-92B8-B5819DB24AC8}" dt="2021-08-09T11:04:20.188" v="1192"/>
-          <ac:spMkLst>
-            <pc:docMk/>
-            <pc:sldMk cId="2892898324" sldId="330"/>
-            <ac:spMk id="27" creationId="{19CC77A6-6E1C-4F8B-89F6-C2F548D3396F}"/>
-          </ac:spMkLst>
-        </pc:spChg>
-        <pc:spChg chg="add mod">
-          <ac:chgData name="Di Mattia Alessandro Edoardo Giorgio David" userId="f8954a66-e5ad-4a1c-9536-1d2117047f5f" providerId="ADAL" clId="{CFBF690A-D719-48D2-92B8-B5819DB24AC8}" dt="2021-08-09T11:14:29.066" v="1302" actId="20577"/>
-          <ac:spMkLst>
-            <pc:docMk/>
-            <pc:sldMk cId="2892898324" sldId="330"/>
-            <ac:spMk id="29" creationId="{F03B629E-348D-4450-8ED8-F595BA048C88}"/>
-          </ac:spMkLst>
-        </pc:spChg>
-        <pc:spChg chg="add del mod ord">
-          <ac:chgData name="Di Mattia Alessandro Edoardo Giorgio David" userId="f8954a66-e5ad-4a1c-9536-1d2117047f5f" providerId="ADAL" clId="{CFBF690A-D719-48D2-92B8-B5819DB24AC8}" dt="2021-08-09T14:26:22.912" v="1331" actId="700"/>
-          <ac:spMkLst>
-            <pc:docMk/>
-            <pc:sldMk cId="2892898324" sldId="330"/>
-            <ac:spMk id="30" creationId="{C05059BB-A12A-483C-B528-649D3F49A36C}"/>
-          </ac:spMkLst>
-        </pc:spChg>
-        <pc:spChg chg="add del mod ord">
-          <ac:chgData name="Di Mattia Alessandro Edoardo Giorgio David" userId="f8954a66-e5ad-4a1c-9536-1d2117047f5f" providerId="ADAL" clId="{CFBF690A-D719-48D2-92B8-B5819DB24AC8}" dt="2021-08-09T14:26:22.912" v="1331" actId="700"/>
-          <ac:spMkLst>
-            <pc:docMk/>
-            <pc:sldMk cId="2892898324" sldId="330"/>
-            <ac:spMk id="31" creationId="{4DEF32E2-291C-4D35-97F0-AF3334E27C08}"/>
-          </ac:spMkLst>
-        </pc:spChg>
-        <pc:picChg chg="add del">
-          <ac:chgData name="Di Mattia Alessandro Edoardo Giorgio David" userId="f8954a66-e5ad-4a1c-9536-1d2117047f5f" providerId="ADAL" clId="{CFBF690A-D719-48D2-92B8-B5819DB24AC8}" dt="2021-08-09T11:04:02.376" v="1188"/>
-          <ac:picMkLst>
-            <pc:docMk/>
-            <pc:sldMk cId="2892898324" sldId="330"/>
-            <ac:picMk id="3" creationId="{31BDA1D8-0112-41CA-B0A3-E60A72E41ED3}"/>
-          </ac:picMkLst>
-        </pc:picChg>
-        <pc:picChg chg="add mod">
-          <ac:chgData name="Di Mattia Alessandro Edoardo Giorgio David" userId="f8954a66-e5ad-4a1c-9536-1d2117047f5f" providerId="ADAL" clId="{CFBF690A-D719-48D2-92B8-B5819DB24AC8}" dt="2021-08-09T11:04:30.310" v="1194" actId="1076"/>
-          <ac:picMkLst>
-            <pc:docMk/>
-            <pc:sldMk cId="2892898324" sldId="330"/>
-            <ac:picMk id="28" creationId="{72E4D6E6-D737-4175-BAEA-F6B55F2062DE}"/>
-          </ac:picMkLst>
-        </pc:picChg>
-        <pc:cxnChg chg="add del mod">
-          <ac:chgData name="Di Mattia Alessandro Edoardo Giorgio David" userId="f8954a66-e5ad-4a1c-9536-1d2117047f5f" providerId="ADAL" clId="{CFBF690A-D719-48D2-92B8-B5819DB24AC8}" dt="2021-08-09T11:04:20.188" v="1192"/>
-          <ac:cxnSpMkLst>
-            <pc:docMk/>
-            <pc:sldMk cId="2892898324" sldId="330"/>
-            <ac:cxnSpMk id="4" creationId="{03A9EC22-0B42-4BBA-AE61-2871EFD887DE}"/>
-          </ac:cxnSpMkLst>
-        </pc:cxnChg>
-        <pc:cxnChg chg="add del mod">
-          <ac:chgData name="Di Mattia Alessandro Edoardo Giorgio David" userId="f8954a66-e5ad-4a1c-9536-1d2117047f5f" providerId="ADAL" clId="{CFBF690A-D719-48D2-92B8-B5819DB24AC8}" dt="2021-08-09T11:04:20.188" v="1192"/>
-          <ac:cxnSpMkLst>
-            <pc:docMk/>
-            <pc:sldMk cId="2892898324" sldId="330"/>
-            <ac:cxnSpMk id="5" creationId="{9B49AB2B-1C8D-4B58-9499-C51E454B10C4}"/>
-          </ac:cxnSpMkLst>
-        </pc:cxnChg>
-        <pc:cxnChg chg="add del mod">
-          <ac:chgData name="Di Mattia Alessandro Edoardo Giorgio David" userId="f8954a66-e5ad-4a1c-9536-1d2117047f5f" providerId="ADAL" clId="{CFBF690A-D719-48D2-92B8-B5819DB24AC8}" dt="2021-08-09T11:04:20.188" v="1192"/>
-          <ac:cxnSpMkLst>
-            <pc:docMk/>
-            <pc:sldMk cId="2892898324" sldId="330"/>
-            <ac:cxnSpMk id="6" creationId="{EB1973C9-5192-4E82-8DD9-3C75FB77D5D5}"/>
-          </ac:cxnSpMkLst>
-        </pc:cxnChg>
-        <pc:cxnChg chg="add del mod">
-          <ac:chgData name="Di Mattia Alessandro Edoardo Giorgio David" userId="f8954a66-e5ad-4a1c-9536-1d2117047f5f" providerId="ADAL" clId="{CFBF690A-D719-48D2-92B8-B5819DB24AC8}" dt="2021-08-09T11:04:20.188" v="1192"/>
-          <ac:cxnSpMkLst>
-            <pc:docMk/>
-            <pc:sldMk cId="2892898324" sldId="330"/>
-            <ac:cxnSpMk id="7" creationId="{74987818-4BCD-4BF9-9E63-89AC25200BC9}"/>
-          </ac:cxnSpMkLst>
-        </pc:cxnChg>
-        <pc:cxnChg chg="add del mod">
-          <ac:chgData name="Di Mattia Alessandro Edoardo Giorgio David" userId="f8954a66-e5ad-4a1c-9536-1d2117047f5f" providerId="ADAL" clId="{CFBF690A-D719-48D2-92B8-B5819DB24AC8}" dt="2021-08-09T11:04:20.188" v="1192"/>
-          <ac:cxnSpMkLst>
-            <pc:docMk/>
-            <pc:sldMk cId="2892898324" sldId="330"/>
-            <ac:cxnSpMk id="16" creationId="{D653E655-D1FE-4DA9-A1D1-0D3935939F4E}"/>
-          </ac:cxnSpMkLst>
-        </pc:cxnChg>
-        <pc:cxnChg chg="add del mod">
-          <ac:chgData name="Di Mattia Alessandro Edoardo Giorgio David" userId="f8954a66-e5ad-4a1c-9536-1d2117047f5f" providerId="ADAL" clId="{CFBF690A-D719-48D2-92B8-B5819DB24AC8}" dt="2021-08-09T11:04:20.188" v="1192"/>
-          <ac:cxnSpMkLst>
-            <pc:docMk/>
-            <pc:sldMk cId="2892898324" sldId="330"/>
-            <ac:cxnSpMk id="17" creationId="{DF630E6E-1E01-49D6-820D-9AD55D37F952}"/>
-          </ac:cxnSpMkLst>
-        </pc:cxnChg>
-        <pc:cxnChg chg="add del mod">
-          <ac:chgData name="Di Mattia Alessandro Edoardo Giorgio David" userId="f8954a66-e5ad-4a1c-9536-1d2117047f5f" providerId="ADAL" clId="{CFBF690A-D719-48D2-92B8-B5819DB24AC8}" dt="2021-08-09T11:04:20.188" v="1192"/>
-          <ac:cxnSpMkLst>
-            <pc:docMk/>
-            <pc:sldMk cId="2892898324" sldId="330"/>
-            <ac:cxnSpMk id="22" creationId="{DAA2EDCB-CAEB-4470-92E9-44CF17DB2AB1}"/>
-          </ac:cxnSpMkLst>
-        </pc:cxnChg>
-        <pc:cxnChg chg="add del mod">
-          <ac:chgData name="Di Mattia Alessandro Edoardo Giorgio David" userId="f8954a66-e5ad-4a1c-9536-1d2117047f5f" providerId="ADAL" clId="{CFBF690A-D719-48D2-92B8-B5819DB24AC8}" dt="2021-08-09T11:04:20.188" v="1192"/>
-          <ac:cxnSpMkLst>
-            <pc:docMk/>
-            <pc:sldMk cId="2892898324" sldId="330"/>
-            <ac:cxnSpMk id="23" creationId="{26248D7F-5C05-4014-B09B-60D7F69EA140}"/>
-          </ac:cxnSpMkLst>
-        </pc:cxnChg>
-        <pc:cxnChg chg="add del mod">
-          <ac:chgData name="Di Mattia Alessandro Edoardo Giorgio David" userId="f8954a66-e5ad-4a1c-9536-1d2117047f5f" providerId="ADAL" clId="{CFBF690A-D719-48D2-92B8-B5819DB24AC8}" dt="2021-08-09T11:04:20.188" v="1192"/>
-          <ac:cxnSpMkLst>
-            <pc:docMk/>
-            <pc:sldMk cId="2892898324" sldId="330"/>
-            <ac:cxnSpMk id="26" creationId="{3746B332-18D5-4F4E-A0A8-5FD1058D89C2}"/>
-          </ac:cxnSpMkLst>
-        </pc:cxnChg>
-      </pc:sldChg>
-      <pc:sldChg chg="addSp delSp modSp new mod modClrScheme modAnim chgLayout">
-        <pc:chgData name="Di Mattia Alessandro Edoardo Giorgio David" userId="f8954a66-e5ad-4a1c-9536-1d2117047f5f" providerId="ADAL" clId="{CFBF690A-D719-48D2-92B8-B5819DB24AC8}" dt="2021-08-09T15:08:40.114" v="1827" actId="20577"/>
-        <pc:sldMkLst>
-          <pc:docMk/>
-          <pc:sldMk cId="3188304425" sldId="331"/>
-        </pc:sldMkLst>
-        <pc:spChg chg="add del mod">
-          <ac:chgData name="Di Mattia Alessandro Edoardo Giorgio David" userId="f8954a66-e5ad-4a1c-9536-1d2117047f5f" providerId="ADAL" clId="{CFBF690A-D719-48D2-92B8-B5819DB24AC8}" dt="2021-08-09T14:30:43.977" v="1397" actId="478"/>
-          <ac:spMkLst>
-            <pc:docMk/>
-            <pc:sldMk cId="3188304425" sldId="331"/>
-            <ac:spMk id="2" creationId="{CDEFFC8B-D382-4556-8CC2-B7D53C9AA4E1}"/>
-          </ac:spMkLst>
-        </pc:spChg>
-        <pc:spChg chg="add del mod">
-          <ac:chgData name="Di Mattia Alessandro Edoardo Giorgio David" userId="f8954a66-e5ad-4a1c-9536-1d2117047f5f" providerId="ADAL" clId="{CFBF690A-D719-48D2-92B8-B5819DB24AC8}" dt="2021-08-09T14:27:39.535" v="1343"/>
-          <ac:spMkLst>
-            <pc:docMk/>
-            <pc:sldMk cId="3188304425" sldId="331"/>
-            <ac:spMk id="3" creationId="{92112D97-C846-4A99-8D71-F81FAE59572B}"/>
-          </ac:spMkLst>
-        </pc:spChg>
-        <pc:spChg chg="add mod ord">
-          <ac:chgData name="Di Mattia Alessandro Edoardo Giorgio David" userId="f8954a66-e5ad-4a1c-9536-1d2117047f5f" providerId="ADAL" clId="{CFBF690A-D719-48D2-92B8-B5819DB24AC8}" dt="2021-08-09T14:31:01.756" v="1399" actId="1076"/>
-          <ac:spMkLst>
-            <pc:docMk/>
-            <pc:sldMk cId="3188304425" sldId="331"/>
-            <ac:spMk id="4" creationId="{F2303436-C45C-4B2E-B14E-30FF81694386}"/>
-          </ac:spMkLst>
-        </pc:spChg>
-        <pc:spChg chg="add mod">
-          <ac:chgData name="Di Mattia Alessandro Edoardo Giorgio David" userId="f8954a66-e5ad-4a1c-9536-1d2117047f5f" providerId="ADAL" clId="{CFBF690A-D719-48D2-92B8-B5819DB24AC8}" dt="2021-08-09T15:08:40.114" v="1827" actId="20577"/>
-          <ac:spMkLst>
-            <pc:docMk/>
-            <pc:sldMk cId="3188304425" sldId="331"/>
-            <ac:spMk id="5" creationId="{03C674BE-6751-4189-8E9B-74929348ABB7}"/>
-          </ac:spMkLst>
-        </pc:spChg>
-        <pc:spChg chg="add del mod">
-          <ac:chgData name="Di Mattia Alessandro Edoardo Giorgio David" userId="f8954a66-e5ad-4a1c-9536-1d2117047f5f" providerId="ADAL" clId="{CFBF690A-D719-48D2-92B8-B5819DB24AC8}" dt="2021-08-09T14:30:57.701" v="1398" actId="700"/>
-          <ac:spMkLst>
-            <pc:docMk/>
-            <pc:sldMk cId="3188304425" sldId="331"/>
-            <ac:spMk id="8" creationId="{18D2EAB0-1281-4C92-8167-0873964CB047}"/>
-          </ac:spMkLst>
-        </pc:spChg>
-        <pc:picChg chg="add mod">
-          <ac:chgData name="Di Mattia Alessandro Edoardo Giorgio David" userId="f8954a66-e5ad-4a1c-9536-1d2117047f5f" providerId="ADAL" clId="{CFBF690A-D719-48D2-92B8-B5819DB24AC8}" dt="2021-08-09T14:31:05.582" v="1401" actId="14100"/>
-          <ac:picMkLst>
-            <pc:docMk/>
-            <pc:sldMk cId="3188304425" sldId="331"/>
-            <ac:picMk id="6" creationId="{B8065D7D-9B8F-4D8E-ACE2-63DB2C740530}"/>
-          </ac:picMkLst>
-        </pc:picChg>
-      </pc:sldChg>
-      <pc:sldChg chg="addSp delSp modSp new mod">
-        <pc:chgData name="Di Mattia Alessandro Edoardo Giorgio David" userId="f8954a66-e5ad-4a1c-9536-1d2117047f5f" providerId="ADAL" clId="{CFBF690A-D719-48D2-92B8-B5819DB24AC8}" dt="2021-08-09T14:42:50.648" v="1490" actId="1076"/>
-        <pc:sldMkLst>
-          <pc:docMk/>
-          <pc:sldMk cId="3922909339" sldId="332"/>
-        </pc:sldMkLst>
-        <pc:spChg chg="mod">
-          <ac:chgData name="Di Mattia Alessandro Edoardo Giorgio David" userId="f8954a66-e5ad-4a1c-9536-1d2117047f5f" providerId="ADAL" clId="{CFBF690A-D719-48D2-92B8-B5819DB24AC8}" dt="2021-08-09T14:31:17.227" v="1404" actId="20577"/>
-          <ac:spMkLst>
-            <pc:docMk/>
-            <pc:sldMk cId="3922909339" sldId="332"/>
-            <ac:spMk id="2" creationId="{C88B502F-7BAF-4520-B5DE-BA944E962A37}"/>
-          </ac:spMkLst>
-        </pc:spChg>
-        <pc:spChg chg="del">
-          <ac:chgData name="Di Mattia Alessandro Edoardo Giorgio David" userId="f8954a66-e5ad-4a1c-9536-1d2117047f5f" providerId="ADAL" clId="{CFBF690A-D719-48D2-92B8-B5819DB24AC8}" dt="2021-08-09T14:38:02.899" v="1431"/>
-          <ac:spMkLst>
-            <pc:docMk/>
-            <pc:sldMk cId="3922909339" sldId="332"/>
-            <ac:spMk id="3" creationId="{AF2E8C1F-EE6E-4D85-9549-AD3488D74A8E}"/>
-          </ac:spMkLst>
-        </pc:spChg>
-        <pc:spChg chg="add mod">
-          <ac:chgData name="Di Mattia Alessandro Edoardo Giorgio David" userId="f8954a66-e5ad-4a1c-9536-1d2117047f5f" providerId="ADAL" clId="{CFBF690A-D719-48D2-92B8-B5819DB24AC8}" dt="2021-08-09T14:39:19.405" v="1476" actId="20577"/>
-          <ac:spMkLst>
-            <pc:docMk/>
-            <pc:sldMk cId="3922909339" sldId="332"/>
-            <ac:spMk id="4" creationId="{06517CCA-98F8-454B-B0DE-A108925C30A1}"/>
-          </ac:spMkLst>
-        </pc:spChg>
-        <pc:picChg chg="add del mod">
-          <ac:chgData name="Di Mattia Alessandro Edoardo Giorgio David" userId="f8954a66-e5ad-4a1c-9536-1d2117047f5f" providerId="ADAL" clId="{CFBF690A-D719-48D2-92B8-B5819DB24AC8}" dt="2021-08-09T14:41:36.558" v="1482" actId="21"/>
-          <ac:picMkLst>
-            <pc:docMk/>
-            <pc:sldMk cId="3922909339" sldId="332"/>
-            <ac:picMk id="5" creationId="{72C56154-7785-4249-A305-FB450B6A6A22}"/>
-          </ac:picMkLst>
-        </pc:picChg>
-        <pc:picChg chg="add mod">
-          <ac:chgData name="Di Mattia Alessandro Edoardo Giorgio David" userId="f8954a66-e5ad-4a1c-9536-1d2117047f5f" providerId="ADAL" clId="{CFBF690A-D719-48D2-92B8-B5819DB24AC8}" dt="2021-08-09T14:42:50.648" v="1490" actId="1076"/>
-          <ac:picMkLst>
-            <pc:docMk/>
-            <pc:sldMk cId="3922909339" sldId="332"/>
-            <ac:picMk id="6" creationId="{DBA80245-BC9D-4BD0-B7C2-DBC234FA13C4}"/>
-          </ac:picMkLst>
-        </pc:picChg>
-      </pc:sldChg>
-      <pc:sldChg chg="addSp modSp new mod modClrScheme chgLayout">
-        <pc:chgData name="Di Mattia Alessandro Edoardo Giorgio David" userId="f8954a66-e5ad-4a1c-9536-1d2117047f5f" providerId="ADAL" clId="{CFBF690A-D719-48D2-92B8-B5819DB24AC8}" dt="2021-08-09T15:06:58.774" v="1826" actId="20577"/>
-        <pc:sldMkLst>
-          <pc:docMk/>
-          <pc:sldMk cId="1049072842" sldId="333"/>
-        </pc:sldMkLst>
-        <pc:spChg chg="add mod">
-          <ac:chgData name="Di Mattia Alessandro Edoardo Giorgio David" userId="f8954a66-e5ad-4a1c-9536-1d2117047f5f" providerId="ADAL" clId="{CFBF690A-D719-48D2-92B8-B5819DB24AC8}" dt="2021-08-09T14:32:36.658" v="1428" actId="122"/>
-          <ac:spMkLst>
-            <pc:docMk/>
-            <pc:sldMk cId="1049072842" sldId="333"/>
-            <ac:spMk id="2" creationId="{61FC6002-6461-40FF-B287-11F3E4FEAADD}"/>
-          </ac:spMkLst>
-        </pc:spChg>
-        <pc:spChg chg="add mod">
-          <ac:chgData name="Di Mattia Alessandro Edoardo Giorgio David" userId="f8954a66-e5ad-4a1c-9536-1d2117047f5f" providerId="ADAL" clId="{CFBF690A-D719-48D2-92B8-B5819DB24AC8}" dt="2021-08-09T15:06:58.774" v="1826" actId="20577"/>
-          <ac:spMkLst>
-            <pc:docMk/>
-            <pc:sldMk cId="1049072842" sldId="333"/>
-            <ac:spMk id="3" creationId="{D17F2EA0-EA8D-4305-8C87-36045BBC7A40}"/>
-          </ac:spMkLst>
-        </pc:spChg>
-      </pc:sldChg>
-      <pc:sldChg chg="addSp delSp modSp new mod modClrScheme modAnim chgLayout">
-        <pc:chgData name="Di Mattia Alessandro Edoardo Giorgio David" userId="f8954a66-e5ad-4a1c-9536-1d2117047f5f" providerId="ADAL" clId="{CFBF690A-D719-48D2-92B8-B5819DB24AC8}" dt="2021-08-09T15:21:10.123" v="1841" actId="20577"/>
-        <pc:sldMkLst>
-          <pc:docMk/>
-          <pc:sldMk cId="2210811804" sldId="334"/>
-        </pc:sldMkLst>
-        <pc:spChg chg="del">
-          <ac:chgData name="Di Mattia Alessandro Edoardo Giorgio David" userId="f8954a66-e5ad-4a1c-9536-1d2117047f5f" providerId="ADAL" clId="{CFBF690A-D719-48D2-92B8-B5819DB24AC8}" dt="2021-08-09T14:41:42.530" v="1483" actId="700"/>
-          <ac:spMkLst>
-            <pc:docMk/>
-            <pc:sldMk cId="2210811804" sldId="334"/>
-            <ac:spMk id="2" creationId="{6FEE1349-2CA4-4854-82C1-44EF09D1E21D}"/>
-          </ac:spMkLst>
-        </pc:spChg>
-        <pc:spChg chg="del">
-          <ac:chgData name="Di Mattia Alessandro Edoardo Giorgio David" userId="f8954a66-e5ad-4a1c-9536-1d2117047f5f" providerId="ADAL" clId="{CFBF690A-D719-48D2-92B8-B5819DB24AC8}" dt="2021-08-09T14:41:42.530" v="1483" actId="700"/>
-          <ac:spMkLst>
-            <pc:docMk/>
-            <pc:sldMk cId="2210811804" sldId="334"/>
-            <ac:spMk id="3" creationId="{B7DADE0C-CD18-409F-9D36-5DF9FE8C3AFE}"/>
-          </ac:spMkLst>
-        </pc:spChg>
-        <pc:spChg chg="add mod">
-          <ac:chgData name="Di Mattia Alessandro Edoardo Giorgio David" userId="f8954a66-e5ad-4a1c-9536-1d2117047f5f" providerId="ADAL" clId="{CFBF690A-D719-48D2-92B8-B5819DB24AC8}" dt="2021-08-09T15:21:10.123" v="1841" actId="20577"/>
-          <ac:spMkLst>
-            <pc:docMk/>
-            <pc:sldMk cId="2210811804" sldId="334"/>
-            <ac:spMk id="6" creationId="{41EA1939-30E4-4F33-BE35-58FD4DBC9375}"/>
-          </ac:spMkLst>
-        </pc:spChg>
-        <pc:picChg chg="add del mod">
-          <ac:chgData name="Di Mattia Alessandro Edoardo Giorgio David" userId="f8954a66-e5ad-4a1c-9536-1d2117047f5f" providerId="ADAL" clId="{CFBF690A-D719-48D2-92B8-B5819DB24AC8}" dt="2021-08-09T14:42:23.100" v="1486" actId="478"/>
-          <ac:picMkLst>
-            <pc:docMk/>
-            <pc:sldMk cId="2210811804" sldId="334"/>
-            <ac:picMk id="4" creationId="{24605447-37D4-404E-99ED-902EE2D8B922}"/>
-          </ac:picMkLst>
-        </pc:picChg>
-        <pc:picChg chg="add mod">
-          <ac:chgData name="Di Mattia Alessandro Edoardo Giorgio David" userId="f8954a66-e5ad-4a1c-9536-1d2117047f5f" providerId="ADAL" clId="{CFBF690A-D719-48D2-92B8-B5819DB24AC8}" dt="2021-08-09T14:42:37.777" v="1488" actId="14100"/>
-          <ac:picMkLst>
-            <pc:docMk/>
-            <pc:sldMk cId="2210811804" sldId="334"/>
-            <ac:picMk id="5" creationId="{C8173CEE-5733-4F06-8846-1F044EF62DF3}"/>
-          </ac:picMkLst>
-        </pc:picChg>
-      </pc:sldChg>
-      <pc:sldChg chg="addSp delSp modSp new mod modClrScheme chgLayout">
-        <pc:chgData name="Di Mattia Alessandro Edoardo Giorgio David" userId="f8954a66-e5ad-4a1c-9536-1d2117047f5f" providerId="ADAL" clId="{CFBF690A-D719-48D2-92B8-B5819DB24AC8}" dt="2021-08-09T14:50:54.091" v="1624" actId="1076"/>
-        <pc:sldMkLst>
-          <pc:docMk/>
-          <pc:sldMk cId="2200792181" sldId="335"/>
-        </pc:sldMkLst>
-        <pc:spChg chg="add mod">
-          <ac:chgData name="Di Mattia Alessandro Edoardo Giorgio David" userId="f8954a66-e5ad-4a1c-9536-1d2117047f5f" providerId="ADAL" clId="{CFBF690A-D719-48D2-92B8-B5819DB24AC8}" dt="2021-08-09T14:45:44.476" v="1512" actId="122"/>
-          <ac:spMkLst>
-            <pc:docMk/>
-            <pc:sldMk cId="2200792181" sldId="335"/>
-            <ac:spMk id="2" creationId="{FCF4069D-6886-4790-A116-B041AE894394}"/>
-          </ac:spMkLst>
-        </pc:spChg>
-        <pc:spChg chg="add mod">
-          <ac:chgData name="Di Mattia Alessandro Edoardo Giorgio David" userId="f8954a66-e5ad-4a1c-9536-1d2117047f5f" providerId="ADAL" clId="{CFBF690A-D719-48D2-92B8-B5819DB24AC8}" dt="2021-08-09T14:46:39.728" v="1591" actId="122"/>
-          <ac:spMkLst>
-            <pc:docMk/>
-            <pc:sldMk cId="2200792181" sldId="335"/>
-            <ac:spMk id="3" creationId="{8E0B66F6-F8B9-4217-BA84-5C4E0E4FE3BC}"/>
-          </ac:spMkLst>
-        </pc:spChg>
-        <pc:graphicFrameChg chg="add del mod">
-          <ac:chgData name="Di Mattia Alessandro Edoardo Giorgio David" userId="f8954a66-e5ad-4a1c-9536-1d2117047f5f" providerId="ADAL" clId="{CFBF690A-D719-48D2-92B8-B5819DB24AC8}" dt="2021-08-09T14:50:48.455" v="1622" actId="478"/>
-          <ac:graphicFrameMkLst>
-            <pc:docMk/>
-            <pc:sldMk cId="2200792181" sldId="335"/>
-            <ac:graphicFrameMk id="6" creationId="{0AE95D00-6FA0-4537-B372-65E8ED0A9AC1}"/>
-          </ac:graphicFrameMkLst>
-        </pc:graphicFrameChg>
-        <pc:picChg chg="add del mod">
-          <ac:chgData name="Di Mattia Alessandro Edoardo Giorgio David" userId="f8954a66-e5ad-4a1c-9536-1d2117047f5f" providerId="ADAL" clId="{CFBF690A-D719-48D2-92B8-B5819DB24AC8}" dt="2021-08-09T14:47:32.848" v="1594" actId="478"/>
-          <ac:picMkLst>
-            <pc:docMk/>
-            <pc:sldMk cId="2200792181" sldId="335"/>
-            <ac:picMk id="4" creationId="{53E05C4C-75C2-4F37-AE43-AB70D00D60B9}"/>
-          </ac:picMkLst>
-        </pc:picChg>
-        <pc:picChg chg="add del mod">
-          <ac:chgData name="Di Mattia Alessandro Edoardo Giorgio David" userId="f8954a66-e5ad-4a1c-9536-1d2117047f5f" providerId="ADAL" clId="{CFBF690A-D719-48D2-92B8-B5819DB24AC8}" dt="2021-08-09T14:48:12.834" v="1605" actId="478"/>
-          <ac:picMkLst>
-            <pc:docMk/>
-            <pc:sldMk cId="2200792181" sldId="335"/>
-            <ac:picMk id="5" creationId="{AAD7F8D2-7C98-4B9F-82C9-F335F2AD6D53}"/>
-          </ac:picMkLst>
-        </pc:picChg>
-        <pc:picChg chg="add mod">
-          <ac:chgData name="Di Mattia Alessandro Edoardo Giorgio David" userId="f8954a66-e5ad-4a1c-9536-1d2117047f5f" providerId="ADAL" clId="{CFBF690A-D719-48D2-92B8-B5819DB24AC8}" dt="2021-08-09T14:50:54.091" v="1624" actId="1076"/>
-          <ac:picMkLst>
-            <pc:docMk/>
-            <pc:sldMk cId="2200792181" sldId="335"/>
-            <ac:picMk id="7" creationId="{3189569D-242A-473A-9A94-6E5144F443C6}"/>
-          </ac:picMkLst>
-        </pc:picChg>
-      </pc:sldChg>
-      <pc:sldChg chg="addSp delSp modSp new mod modClrScheme modAnim chgLayout">
-        <pc:chgData name="Di Mattia Alessandro Edoardo Giorgio David" userId="f8954a66-e5ad-4a1c-9536-1d2117047f5f" providerId="ADAL" clId="{CFBF690A-D719-48D2-92B8-B5819DB24AC8}" dt="2021-08-09T15:14:08.515" v="1840" actId="20577"/>
-        <pc:sldMkLst>
-          <pc:docMk/>
-          <pc:sldMk cId="2223886345" sldId="336"/>
-        </pc:sldMkLst>
-        <pc:spChg chg="del">
-          <ac:chgData name="Di Mattia Alessandro Edoardo Giorgio David" userId="f8954a66-e5ad-4a1c-9536-1d2117047f5f" providerId="ADAL" clId="{CFBF690A-D719-48D2-92B8-B5819DB24AC8}" dt="2021-08-09T14:48:03.037" v="1600" actId="700"/>
-          <ac:spMkLst>
-            <pc:docMk/>
-            <pc:sldMk cId="2223886345" sldId="336"/>
-            <ac:spMk id="2" creationId="{8CDA5BD7-348D-4E9A-A336-7B5060530500}"/>
-          </ac:spMkLst>
-        </pc:spChg>
-        <pc:spChg chg="del">
-          <ac:chgData name="Di Mattia Alessandro Edoardo Giorgio David" userId="f8954a66-e5ad-4a1c-9536-1d2117047f5f" providerId="ADAL" clId="{CFBF690A-D719-48D2-92B8-B5819DB24AC8}" dt="2021-08-09T14:48:03.037" v="1600" actId="700"/>
-          <ac:spMkLst>
-            <pc:docMk/>
-            <pc:sldMk cId="2223886345" sldId="336"/>
-            <ac:spMk id="3" creationId="{94508F87-AA89-40C9-8509-F268A3C82A2C}"/>
-          </ac:spMkLst>
-        </pc:spChg>
-        <pc:spChg chg="add del mod">
-          <ac:chgData name="Di Mattia Alessandro Edoardo Giorgio David" userId="f8954a66-e5ad-4a1c-9536-1d2117047f5f" providerId="ADAL" clId="{CFBF690A-D719-48D2-92B8-B5819DB24AC8}" dt="2021-08-09T14:48:00.719" v="1599"/>
-          <ac:spMkLst>
-            <pc:docMk/>
-            <pc:sldMk cId="2223886345" sldId="336"/>
-            <ac:spMk id="8" creationId="{5FF703F0-EB1C-4FFD-8951-0113FC7F1B06}"/>
-          </ac:spMkLst>
-        </pc:spChg>
-        <pc:spChg chg="add del mod">
-          <ac:chgData name="Di Mattia Alessandro Edoardo Giorgio David" userId="f8954a66-e5ad-4a1c-9536-1d2117047f5f" providerId="ADAL" clId="{CFBF690A-D719-48D2-92B8-B5819DB24AC8}" dt="2021-08-09T14:48:00.719" v="1599"/>
-          <ac:spMkLst>
-            <pc:docMk/>
-            <pc:sldMk cId="2223886345" sldId="336"/>
-            <ac:spMk id="9" creationId="{225F9005-786E-4857-9FE1-1FEC06D2D6A2}"/>
-          </ac:spMkLst>
-        </pc:spChg>
-        <pc:spChg chg="add del mod">
-          <ac:chgData name="Di Mattia Alessandro Edoardo Giorgio David" userId="f8954a66-e5ad-4a1c-9536-1d2117047f5f" providerId="ADAL" clId="{CFBF690A-D719-48D2-92B8-B5819DB24AC8}" dt="2021-08-09T14:48:00.719" v="1599"/>
-          <ac:spMkLst>
-            <pc:docMk/>
-            <pc:sldMk cId="2223886345" sldId="336"/>
-            <ac:spMk id="10" creationId="{4B61D133-C592-4931-AC7C-9F2AA3382881}"/>
-          </ac:spMkLst>
-        </pc:spChg>
-        <pc:spChg chg="add del mod">
-          <ac:chgData name="Di Mattia Alessandro Edoardo Giorgio David" userId="f8954a66-e5ad-4a1c-9536-1d2117047f5f" providerId="ADAL" clId="{CFBF690A-D719-48D2-92B8-B5819DB24AC8}" dt="2021-08-09T14:48:00.719" v="1599"/>
-          <ac:spMkLst>
-            <pc:docMk/>
-            <pc:sldMk cId="2223886345" sldId="336"/>
-            <ac:spMk id="11" creationId="{03F80E16-953A-4201-ACAD-C8C26051041F}"/>
-          </ac:spMkLst>
-        </pc:spChg>
-        <pc:spChg chg="add del mod">
-          <ac:chgData name="Di Mattia Alessandro Edoardo Giorgio David" userId="f8954a66-e5ad-4a1c-9536-1d2117047f5f" providerId="ADAL" clId="{CFBF690A-D719-48D2-92B8-B5819DB24AC8}" dt="2021-08-09T14:48:00.719" v="1599"/>
-          <ac:spMkLst>
-            <pc:docMk/>
-            <pc:sldMk cId="2223886345" sldId="336"/>
-            <ac:spMk id="12" creationId="{FE947521-229B-40D8-9B89-45E443265317}"/>
-          </ac:spMkLst>
-        </pc:spChg>
-        <pc:spChg chg="add del mod">
-          <ac:chgData name="Di Mattia Alessandro Edoardo Giorgio David" userId="f8954a66-e5ad-4a1c-9536-1d2117047f5f" providerId="ADAL" clId="{CFBF690A-D719-48D2-92B8-B5819DB24AC8}" dt="2021-08-09T14:48:00.719" v="1599"/>
-          <ac:spMkLst>
-            <pc:docMk/>
-            <pc:sldMk cId="2223886345" sldId="336"/>
-            <ac:spMk id="13" creationId="{076256BD-0358-43A2-901D-B155235DCAEB}"/>
-          </ac:spMkLst>
-        </pc:spChg>
-        <pc:spChg chg="add del mod">
-          <ac:chgData name="Di Mattia Alessandro Edoardo Giorgio David" userId="f8954a66-e5ad-4a1c-9536-1d2117047f5f" providerId="ADAL" clId="{CFBF690A-D719-48D2-92B8-B5819DB24AC8}" dt="2021-08-09T14:48:00.719" v="1599"/>
-          <ac:spMkLst>
-            <pc:docMk/>
-            <pc:sldMk cId="2223886345" sldId="336"/>
-            <ac:spMk id="14" creationId="{ACB2BECF-A34B-4987-B049-C2C37FE64F5E}"/>
-          </ac:spMkLst>
-        </pc:spChg>
-        <pc:spChg chg="add del mod">
-          <ac:chgData name="Di Mattia Alessandro Edoardo Giorgio David" userId="f8954a66-e5ad-4a1c-9536-1d2117047f5f" providerId="ADAL" clId="{CFBF690A-D719-48D2-92B8-B5819DB24AC8}" dt="2021-08-09T14:48:00.719" v="1599"/>
-          <ac:spMkLst>
-            <pc:docMk/>
-            <pc:sldMk cId="2223886345" sldId="336"/>
-            <ac:spMk id="15" creationId="{2A1DC70E-79A8-45E9-B2BA-149F605A6007}"/>
-          </ac:spMkLst>
-        </pc:spChg>
-        <pc:spChg chg="add del mod">
-          <ac:chgData name="Di Mattia Alessandro Edoardo Giorgio David" userId="f8954a66-e5ad-4a1c-9536-1d2117047f5f" providerId="ADAL" clId="{CFBF690A-D719-48D2-92B8-B5819DB24AC8}" dt="2021-08-09T14:48:00.719" v="1599"/>
-          <ac:spMkLst>
-            <pc:docMk/>
-            <pc:sldMk cId="2223886345" sldId="336"/>
-            <ac:spMk id="18" creationId="{15FC0AD6-12AC-4970-9712-4EB6ACFDBFBA}"/>
-          </ac:spMkLst>
-        </pc:spChg>
-        <pc:spChg chg="add del mod">
-          <ac:chgData name="Di Mattia Alessandro Edoardo Giorgio David" userId="f8954a66-e5ad-4a1c-9536-1d2117047f5f" providerId="ADAL" clId="{CFBF690A-D719-48D2-92B8-B5819DB24AC8}" dt="2021-08-09T14:48:00.719" v="1599"/>
-          <ac:spMkLst>
-            <pc:docMk/>
-            <pc:sldMk cId="2223886345" sldId="336"/>
-            <ac:spMk id="19" creationId="{CDC0AC11-B839-410A-8D79-9F035CA1D234}"/>
-          </ac:spMkLst>
-        </pc:spChg>
-        <pc:spChg chg="add del mod">
-          <ac:chgData name="Di Mattia Alessandro Edoardo Giorgio David" userId="f8954a66-e5ad-4a1c-9536-1d2117047f5f" providerId="ADAL" clId="{CFBF690A-D719-48D2-92B8-B5819DB24AC8}" dt="2021-08-09T14:48:00.719" v="1599"/>
-          <ac:spMkLst>
-            <pc:docMk/>
-            <pc:sldMk cId="2223886345" sldId="336"/>
-            <ac:spMk id="20" creationId="{196B9437-658A-4659-BBB6-B4A497AA06D5}"/>
-          </ac:spMkLst>
-        </pc:spChg>
-        <pc:spChg chg="add del mod">
-          <ac:chgData name="Di Mattia Alessandro Edoardo Giorgio David" userId="f8954a66-e5ad-4a1c-9536-1d2117047f5f" providerId="ADAL" clId="{CFBF690A-D719-48D2-92B8-B5819DB24AC8}" dt="2021-08-09T14:48:00.719" v="1599"/>
-          <ac:spMkLst>
-            <pc:docMk/>
-            <pc:sldMk cId="2223886345" sldId="336"/>
-            <ac:spMk id="23" creationId="{A2644825-FA9E-453B-BF19-4B8D07E45341}"/>
-          </ac:spMkLst>
-        </pc:spChg>
-        <pc:spChg chg="add del mod">
-          <ac:chgData name="Di Mattia Alessandro Edoardo Giorgio David" userId="f8954a66-e5ad-4a1c-9536-1d2117047f5f" providerId="ADAL" clId="{CFBF690A-D719-48D2-92B8-B5819DB24AC8}" dt="2021-08-09T14:48:00.719" v="1599"/>
-          <ac:spMkLst>
-            <pc:docMk/>
-            <pc:sldMk cId="2223886345" sldId="336"/>
-            <ac:spMk id="24" creationId="{6E1FFEE6-0187-41FF-AE34-CEAE210D7F8E}"/>
-          </ac:spMkLst>
-        </pc:spChg>
-        <pc:spChg chg="add del mod">
-          <ac:chgData name="Di Mattia Alessandro Edoardo Giorgio David" userId="f8954a66-e5ad-4a1c-9536-1d2117047f5f" providerId="ADAL" clId="{CFBF690A-D719-48D2-92B8-B5819DB24AC8}" dt="2021-08-09T14:48:00.719" v="1599"/>
-          <ac:spMkLst>
-            <pc:docMk/>
-            <pc:sldMk cId="2223886345" sldId="336"/>
-            <ac:spMk id="25" creationId="{920D2067-A783-4E4E-9FF7-FB271043AC85}"/>
-          </ac:spMkLst>
-        </pc:spChg>
-        <pc:spChg chg="add del mod">
-          <ac:chgData name="Di Mattia Alessandro Edoardo Giorgio David" userId="f8954a66-e5ad-4a1c-9536-1d2117047f5f" providerId="ADAL" clId="{CFBF690A-D719-48D2-92B8-B5819DB24AC8}" dt="2021-08-09T14:48:00.719" v="1599"/>
-          <ac:spMkLst>
-            <pc:docMk/>
-            <pc:sldMk cId="2223886345" sldId="336"/>
-            <ac:spMk id="27" creationId="{777EF625-B53E-429A-BDA0-7F41661D232F}"/>
-          </ac:spMkLst>
-        </pc:spChg>
-        <pc:spChg chg="add del mod">
-          <ac:chgData name="Di Mattia Alessandro Edoardo Giorgio David" userId="f8954a66-e5ad-4a1c-9536-1d2117047f5f" providerId="ADAL" clId="{CFBF690A-D719-48D2-92B8-B5819DB24AC8}" dt="2021-08-09T14:48:00.719" v="1599"/>
-          <ac:spMkLst>
-            <pc:docMk/>
-            <pc:sldMk cId="2223886345" sldId="336"/>
-            <ac:spMk id="29" creationId="{6D906C3B-A46F-4500-910A-CD28C96FDC72}"/>
-          </ac:spMkLst>
-        </pc:spChg>
-        <pc:spChg chg="add del mod">
-          <ac:chgData name="Di Mattia Alessandro Edoardo Giorgio David" userId="f8954a66-e5ad-4a1c-9536-1d2117047f5f" providerId="ADAL" clId="{CFBF690A-D719-48D2-92B8-B5819DB24AC8}" dt="2021-08-09T14:48:00.719" v="1599"/>
-          <ac:spMkLst>
-            <pc:docMk/>
-            <pc:sldMk cId="2223886345" sldId="336"/>
-            <ac:spMk id="31" creationId="{B7CA1F7E-FC41-44A5-90E9-F09EAA9E5A1B}"/>
-          </ac:spMkLst>
-        </pc:spChg>
-        <pc:spChg chg="add del mod">
-          <ac:chgData name="Di Mattia Alessandro Edoardo Giorgio David" userId="f8954a66-e5ad-4a1c-9536-1d2117047f5f" providerId="ADAL" clId="{CFBF690A-D719-48D2-92B8-B5819DB24AC8}" dt="2021-08-09T14:48:06.334" v="1602"/>
-          <ac:spMkLst>
-            <pc:docMk/>
-            <pc:sldMk cId="2223886345" sldId="336"/>
-            <ac:spMk id="36" creationId="{604EFD12-9F33-4BC0-9572-4D50FE266E88}"/>
-          </ac:spMkLst>
-        </pc:spChg>
-        <pc:spChg chg="add del mod">
-          <ac:chgData name="Di Mattia Alessandro Edoardo Giorgio David" userId="f8954a66-e5ad-4a1c-9536-1d2117047f5f" providerId="ADAL" clId="{CFBF690A-D719-48D2-92B8-B5819DB24AC8}" dt="2021-08-09T14:48:06.334" v="1602"/>
-          <ac:spMkLst>
-            <pc:docMk/>
-            <pc:sldMk cId="2223886345" sldId="336"/>
-            <ac:spMk id="37" creationId="{43CEEA71-91D6-4A9F-96B8-C53D69404D02}"/>
-          </ac:spMkLst>
-        </pc:spChg>
-        <pc:spChg chg="add del mod">
-          <ac:chgData name="Di Mattia Alessandro Edoardo Giorgio David" userId="f8954a66-e5ad-4a1c-9536-1d2117047f5f" providerId="ADAL" clId="{CFBF690A-D719-48D2-92B8-B5819DB24AC8}" dt="2021-08-09T14:48:06.334" v="1602"/>
-          <ac:spMkLst>
-            <pc:docMk/>
-            <pc:sldMk cId="2223886345" sldId="336"/>
-            <ac:spMk id="38" creationId="{E5B9B17A-167C-4C0B-B85D-4C2BC6408AC8}"/>
-          </ac:spMkLst>
-        </pc:spChg>
-        <pc:spChg chg="add del mod">
-          <ac:chgData name="Di Mattia Alessandro Edoardo Giorgio David" userId="f8954a66-e5ad-4a1c-9536-1d2117047f5f" providerId="ADAL" clId="{CFBF690A-D719-48D2-92B8-B5819DB24AC8}" dt="2021-08-09T14:48:06.334" v="1602"/>
-          <ac:spMkLst>
-            <pc:docMk/>
-            <pc:sldMk cId="2223886345" sldId="336"/>
-            <ac:spMk id="39" creationId="{49C71CEF-75F6-402F-9D15-671908371808}"/>
-          </ac:spMkLst>
-        </pc:spChg>
-        <pc:spChg chg="add del mod">
-          <ac:chgData name="Di Mattia Alessandro Edoardo Giorgio David" userId="f8954a66-e5ad-4a1c-9536-1d2117047f5f" providerId="ADAL" clId="{CFBF690A-D719-48D2-92B8-B5819DB24AC8}" dt="2021-08-09T14:48:06.334" v="1602"/>
-          <ac:spMkLst>
-            <pc:docMk/>
-            <pc:sldMk cId="2223886345" sldId="336"/>
-            <ac:spMk id="40" creationId="{9CDC1496-E3A8-43C4-8272-CD52FB4A5FEB}"/>
-          </ac:spMkLst>
-        </pc:spChg>
-        <pc:spChg chg="add del mod">
-          <ac:chgData name="Di Mattia Alessandro Edoardo Giorgio David" userId="f8954a66-e5ad-4a1c-9536-1d2117047f5f" providerId="ADAL" clId="{CFBF690A-D719-48D2-92B8-B5819DB24AC8}" dt="2021-08-09T14:48:06.334" v="1602"/>
-          <ac:spMkLst>
-            <pc:docMk/>
-            <pc:sldMk cId="2223886345" sldId="336"/>
-            <ac:spMk id="41" creationId="{C98B0ABB-4032-4AB0-984A-B125EDE819D2}"/>
-          </ac:spMkLst>
-        </pc:spChg>
-        <pc:spChg chg="add del mod">
-          <ac:chgData name="Di Mattia Alessandro Edoardo Giorgio David" userId="f8954a66-e5ad-4a1c-9536-1d2117047f5f" providerId="ADAL" clId="{CFBF690A-D719-48D2-92B8-B5819DB24AC8}" dt="2021-08-09T14:48:06.334" v="1602"/>
-          <ac:spMkLst>
-            <pc:docMk/>
-            <pc:sldMk cId="2223886345" sldId="336"/>
-            <ac:spMk id="42" creationId="{32C41F58-2E2B-469F-8638-CAAC876B58ED}"/>
-          </ac:spMkLst>
-        </pc:spChg>
-        <pc:spChg chg="add del mod">
-          <ac:chgData name="Di Mattia Alessandro Edoardo Giorgio David" userId="f8954a66-e5ad-4a1c-9536-1d2117047f5f" providerId="ADAL" clId="{CFBF690A-D719-48D2-92B8-B5819DB24AC8}" dt="2021-08-09T14:48:06.334" v="1602"/>
-          <ac:spMkLst>
-            <pc:docMk/>
-            <pc:sldMk cId="2223886345" sldId="336"/>
-            <ac:spMk id="43" creationId="{291D4AC3-9E9D-4F16-867F-64184D4DE8DA}"/>
-          </ac:spMkLst>
-        </pc:spChg>
-        <pc:spChg chg="add del mod">
-          <ac:chgData name="Di Mattia Alessandro Edoardo Giorgio David" userId="f8954a66-e5ad-4a1c-9536-1d2117047f5f" providerId="ADAL" clId="{CFBF690A-D719-48D2-92B8-B5819DB24AC8}" dt="2021-08-09T14:48:06.334" v="1602"/>
-          <ac:spMkLst>
-            <pc:docMk/>
-            <pc:sldMk cId="2223886345" sldId="336"/>
-            <ac:spMk id="46" creationId="{453C5643-A61B-4E89-8EF0-BDAF28856B2E}"/>
-          </ac:spMkLst>
-        </pc:spChg>
-        <pc:spChg chg="add del mod">
-          <ac:chgData name="Di Mattia Alessandro Edoardo Giorgio David" userId="f8954a66-e5ad-4a1c-9536-1d2117047f5f" providerId="ADAL" clId="{CFBF690A-D719-48D2-92B8-B5819DB24AC8}" dt="2021-08-09T14:48:06.334" v="1602"/>
-          <ac:spMkLst>
-            <pc:docMk/>
-            <pc:sldMk cId="2223886345" sldId="336"/>
-            <ac:spMk id="47" creationId="{0C7F490F-88DC-44D1-8035-EBD5C2A1E36E}"/>
-          </ac:spMkLst>
-        </pc:spChg>
-        <pc:spChg chg="add del mod">
-          <ac:chgData name="Di Mattia Alessandro Edoardo Giorgio David" userId="f8954a66-e5ad-4a1c-9536-1d2117047f5f" providerId="ADAL" clId="{CFBF690A-D719-48D2-92B8-B5819DB24AC8}" dt="2021-08-09T14:48:06.334" v="1602"/>
-          <ac:spMkLst>
-            <pc:docMk/>
-            <pc:sldMk cId="2223886345" sldId="336"/>
-            <ac:spMk id="48" creationId="{2172E6FD-ADCE-4FF9-AADA-1D1297BCAC7C}"/>
-          </ac:spMkLst>
-        </pc:spChg>
-        <pc:spChg chg="add del mod">
-          <ac:chgData name="Di Mattia Alessandro Edoardo Giorgio David" userId="f8954a66-e5ad-4a1c-9536-1d2117047f5f" providerId="ADAL" clId="{CFBF690A-D719-48D2-92B8-B5819DB24AC8}" dt="2021-08-09T14:48:06.334" v="1602"/>
-          <ac:spMkLst>
-            <pc:docMk/>
-            <pc:sldMk cId="2223886345" sldId="336"/>
-            <ac:spMk id="51" creationId="{3F18B746-E115-40AA-BA2E-0DDAA61C239C}"/>
-          </ac:spMkLst>
-        </pc:spChg>
-        <pc:spChg chg="add del mod">
-          <ac:chgData name="Di Mattia Alessandro Edoardo Giorgio David" userId="f8954a66-e5ad-4a1c-9536-1d2117047f5f" providerId="ADAL" clId="{CFBF690A-D719-48D2-92B8-B5819DB24AC8}" dt="2021-08-09T14:48:06.334" v="1602"/>
-          <ac:spMkLst>
-            <pc:docMk/>
-            <pc:sldMk cId="2223886345" sldId="336"/>
-            <ac:spMk id="52" creationId="{FDA1651F-C7C9-40FB-BBE9-98C7D4B605E4}"/>
-          </ac:spMkLst>
-        </pc:spChg>
-        <pc:spChg chg="add del mod">
-          <ac:chgData name="Di Mattia Alessandro Edoardo Giorgio David" userId="f8954a66-e5ad-4a1c-9536-1d2117047f5f" providerId="ADAL" clId="{CFBF690A-D719-48D2-92B8-B5819DB24AC8}" dt="2021-08-09T14:48:06.334" v="1602"/>
-          <ac:spMkLst>
-            <pc:docMk/>
-            <pc:sldMk cId="2223886345" sldId="336"/>
-            <ac:spMk id="53" creationId="{73CB2228-6D00-4D03-9B29-6DC6B7F96F4E}"/>
-          </ac:spMkLst>
-        </pc:spChg>
-        <pc:spChg chg="add del mod">
-          <ac:chgData name="Di Mattia Alessandro Edoardo Giorgio David" userId="f8954a66-e5ad-4a1c-9536-1d2117047f5f" providerId="ADAL" clId="{CFBF690A-D719-48D2-92B8-B5819DB24AC8}" dt="2021-08-09T14:48:06.334" v="1602"/>
-          <ac:spMkLst>
-            <pc:docMk/>
-            <pc:sldMk cId="2223886345" sldId="336"/>
-            <ac:spMk id="55" creationId="{BE1EB5B1-738F-4239-8A84-B9B04394BD8C}"/>
-          </ac:spMkLst>
-        </pc:spChg>
-        <pc:spChg chg="add del mod">
-          <ac:chgData name="Di Mattia Alessandro Edoardo Giorgio David" userId="f8954a66-e5ad-4a1c-9536-1d2117047f5f" providerId="ADAL" clId="{CFBF690A-D719-48D2-92B8-B5819DB24AC8}" dt="2021-08-09T14:48:06.334" v="1602"/>
-          <ac:spMkLst>
-            <pc:docMk/>
-            <pc:sldMk cId="2223886345" sldId="336"/>
-            <ac:spMk id="57" creationId="{7AED626B-97F1-43E5-A445-59B175E15225}"/>
-          </ac:spMkLst>
-        </pc:spChg>
-        <pc:spChg chg="add del mod">
-          <ac:chgData name="Di Mattia Alessandro Edoardo Giorgio David" userId="f8954a66-e5ad-4a1c-9536-1d2117047f5f" providerId="ADAL" clId="{CFBF690A-D719-48D2-92B8-B5819DB24AC8}" dt="2021-08-09T14:48:06.334" v="1602"/>
-          <ac:spMkLst>
-            <pc:docMk/>
-            <pc:sldMk cId="2223886345" sldId="336"/>
-            <ac:spMk id="59" creationId="{437CF595-ACF0-4BD2-80B1-8B5855F4A5C7}"/>
-          </ac:spMkLst>
-        </pc:spChg>
-        <pc:spChg chg="add mod">
-          <ac:chgData name="Di Mattia Alessandro Edoardo Giorgio David" userId="f8954a66-e5ad-4a1c-9536-1d2117047f5f" providerId="ADAL" clId="{CFBF690A-D719-48D2-92B8-B5819DB24AC8}" dt="2021-08-09T15:14:08.515" v="1840" actId="20577"/>
-          <ac:spMkLst>
-            <pc:docMk/>
-            <pc:sldMk cId="2223886345" sldId="336"/>
-            <ac:spMk id="61" creationId="{58A6B7EB-1412-40A2-821F-8F47923E2B39}"/>
-          </ac:spMkLst>
-        </pc:spChg>
-        <pc:picChg chg="add mod">
-          <ac:chgData name="Di Mattia Alessandro Edoardo Giorgio David" userId="f8954a66-e5ad-4a1c-9536-1d2117047f5f" providerId="ADAL" clId="{CFBF690A-D719-48D2-92B8-B5819DB24AC8}" dt="2021-08-09T14:48:10.430" v="1604" actId="1076"/>
-          <ac:picMkLst>
-            <pc:docMk/>
-            <pc:sldMk cId="2223886345" sldId="336"/>
-            <ac:picMk id="60" creationId="{2590DDC6-8B95-4B75-8711-8A2E65160AA8}"/>
-          </ac:picMkLst>
-        </pc:picChg>
-        <pc:cxnChg chg="add del mod">
-          <ac:chgData name="Di Mattia Alessandro Edoardo Giorgio David" userId="f8954a66-e5ad-4a1c-9536-1d2117047f5f" providerId="ADAL" clId="{CFBF690A-D719-48D2-92B8-B5819DB24AC8}" dt="2021-08-09T14:48:00.719" v="1599"/>
-          <ac:cxnSpMkLst>
-            <pc:docMk/>
-            <pc:sldMk cId="2223886345" sldId="336"/>
-            <ac:cxnSpMk id="4" creationId="{BC484C7D-75A2-4ABE-A739-0C23D4AE0491}"/>
-          </ac:cxnSpMkLst>
-        </pc:cxnChg>
-        <pc:cxnChg chg="add del mod">
-          <ac:chgData name="Di Mattia Alessandro Edoardo Giorgio David" userId="f8954a66-e5ad-4a1c-9536-1d2117047f5f" providerId="ADAL" clId="{CFBF690A-D719-48D2-92B8-B5819DB24AC8}" dt="2021-08-09T14:48:00.719" v="1599"/>
-          <ac:cxnSpMkLst>
-            <pc:docMk/>
-            <pc:sldMk cId="2223886345" sldId="336"/>
-            <ac:cxnSpMk id="5" creationId="{6B2E5369-D18A-4DF8-BC51-68923888350B}"/>
-          </ac:cxnSpMkLst>
-        </pc:cxnChg>
-        <pc:cxnChg chg="add del mod">
-          <ac:chgData name="Di Mattia Alessandro Edoardo Giorgio David" userId="f8954a66-e5ad-4a1c-9536-1d2117047f5f" providerId="ADAL" clId="{CFBF690A-D719-48D2-92B8-B5819DB24AC8}" dt="2021-08-09T14:48:00.719" v="1599"/>
-          <ac:cxnSpMkLst>
-            <pc:docMk/>
-            <pc:sldMk cId="2223886345" sldId="336"/>
-            <ac:cxnSpMk id="6" creationId="{05FEBAFD-17DF-4BF3-BD5F-0D83A2A336E6}"/>
-          </ac:cxnSpMkLst>
-        </pc:cxnChg>
-        <pc:cxnChg chg="add del mod">
-          <ac:chgData name="Di Mattia Alessandro Edoardo Giorgio David" userId="f8954a66-e5ad-4a1c-9536-1d2117047f5f" providerId="ADAL" clId="{CFBF690A-D719-48D2-92B8-B5819DB24AC8}" dt="2021-08-09T14:48:00.719" v="1599"/>
-          <ac:cxnSpMkLst>
-            <pc:docMk/>
-            <pc:sldMk cId="2223886345" sldId="336"/>
-            <ac:cxnSpMk id="7" creationId="{376F227D-A81C-4408-BF91-603AD8D90AED}"/>
-          </ac:cxnSpMkLst>
-        </pc:cxnChg>
-        <pc:cxnChg chg="add del mod">
-          <ac:chgData name="Di Mattia Alessandro Edoardo Giorgio David" userId="f8954a66-e5ad-4a1c-9536-1d2117047f5f" providerId="ADAL" clId="{CFBF690A-D719-48D2-92B8-B5819DB24AC8}" dt="2021-08-09T14:48:00.719" v="1599"/>
-          <ac:cxnSpMkLst>
-            <pc:docMk/>
-            <pc:sldMk cId="2223886345" sldId="336"/>
-            <ac:cxnSpMk id="16" creationId="{706D481C-C88C-451F-9603-C6844D644468}"/>
-          </ac:cxnSpMkLst>
-        </pc:cxnChg>
-        <pc:cxnChg chg="add del mod">
-          <ac:chgData name="Di Mattia Alessandro Edoardo Giorgio David" userId="f8954a66-e5ad-4a1c-9536-1d2117047f5f" providerId="ADAL" clId="{CFBF690A-D719-48D2-92B8-B5819DB24AC8}" dt="2021-08-09T14:48:00.719" v="1599"/>
-          <ac:cxnSpMkLst>
-            <pc:docMk/>
-            <pc:sldMk cId="2223886345" sldId="336"/>
-            <ac:cxnSpMk id="17" creationId="{7F085B11-4192-4971-9B4A-1DE921B3EE23}"/>
-          </ac:cxnSpMkLst>
-        </pc:cxnChg>
-        <pc:cxnChg chg="add del mod">
-          <ac:chgData name="Di Mattia Alessandro Edoardo Giorgio David" userId="f8954a66-e5ad-4a1c-9536-1d2117047f5f" providerId="ADAL" clId="{CFBF690A-D719-48D2-92B8-B5819DB24AC8}" dt="2021-08-09T14:48:00.719" v="1599"/>
-          <ac:cxnSpMkLst>
-            <pc:docMk/>
-            <pc:sldMk cId="2223886345" sldId="336"/>
-            <ac:cxnSpMk id="21" creationId="{3C19582E-008F-4868-935A-BA97171821CD}"/>
-          </ac:cxnSpMkLst>
-        </pc:cxnChg>
-        <pc:cxnChg chg="add del mod">
-          <ac:chgData name="Di Mattia Alessandro Edoardo Giorgio David" userId="f8954a66-e5ad-4a1c-9536-1d2117047f5f" providerId="ADAL" clId="{CFBF690A-D719-48D2-92B8-B5819DB24AC8}" dt="2021-08-09T14:48:00.719" v="1599"/>
-          <ac:cxnSpMkLst>
-            <pc:docMk/>
-            <pc:sldMk cId="2223886345" sldId="336"/>
-            <ac:cxnSpMk id="22" creationId="{2433AA6C-8B96-4A69-A243-5D4A48BD138A}"/>
-          </ac:cxnSpMkLst>
-        </pc:cxnChg>
-        <pc:cxnChg chg="add del mod">
-          <ac:chgData name="Di Mattia Alessandro Edoardo Giorgio David" userId="f8954a66-e5ad-4a1c-9536-1d2117047f5f" providerId="ADAL" clId="{CFBF690A-D719-48D2-92B8-B5819DB24AC8}" dt="2021-08-09T14:48:00.719" v="1599"/>
-          <ac:cxnSpMkLst>
-            <pc:docMk/>
-            <pc:sldMk cId="2223886345" sldId="336"/>
-            <ac:cxnSpMk id="26" creationId="{CAEC6E02-BB37-47FE-9A68-08BD2FD0C4D6}"/>
-          </ac:cxnSpMkLst>
-        </pc:cxnChg>
-        <pc:cxnChg chg="add del mod">
-          <ac:chgData name="Di Mattia Alessandro Edoardo Giorgio David" userId="f8954a66-e5ad-4a1c-9536-1d2117047f5f" providerId="ADAL" clId="{CFBF690A-D719-48D2-92B8-B5819DB24AC8}" dt="2021-08-09T14:48:00.719" v="1599"/>
-          <ac:cxnSpMkLst>
-            <pc:docMk/>
-            <pc:sldMk cId="2223886345" sldId="336"/>
-            <ac:cxnSpMk id="28" creationId="{8463F2B2-6C9B-4F68-B982-05D65A088563}"/>
-          </ac:cxnSpMkLst>
-        </pc:cxnChg>
-        <pc:cxnChg chg="add del mod">
-          <ac:chgData name="Di Mattia Alessandro Edoardo Giorgio David" userId="f8954a66-e5ad-4a1c-9536-1d2117047f5f" providerId="ADAL" clId="{CFBF690A-D719-48D2-92B8-B5819DB24AC8}" dt="2021-08-09T14:48:00.719" v="1599"/>
-          <ac:cxnSpMkLst>
-            <pc:docMk/>
-            <pc:sldMk cId="2223886345" sldId="336"/>
-            <ac:cxnSpMk id="30" creationId="{C8154AE7-1365-4E27-94C0-2EC5322E841A}"/>
-          </ac:cxnSpMkLst>
-        </pc:cxnChg>
-        <pc:cxnChg chg="add del mod">
-          <ac:chgData name="Di Mattia Alessandro Edoardo Giorgio David" userId="f8954a66-e5ad-4a1c-9536-1d2117047f5f" providerId="ADAL" clId="{CFBF690A-D719-48D2-92B8-B5819DB24AC8}" dt="2021-08-09T14:48:06.334" v="1602"/>
-          <ac:cxnSpMkLst>
-            <pc:docMk/>
-            <pc:sldMk cId="2223886345" sldId="336"/>
-            <ac:cxnSpMk id="32" creationId="{CA0DAAD7-573C-4B03-BB18-6053A94887EE}"/>
-          </ac:cxnSpMkLst>
-        </pc:cxnChg>
-        <pc:cxnChg chg="add del mod">
-          <ac:chgData name="Di Mattia Alessandro Edoardo Giorgio David" userId="f8954a66-e5ad-4a1c-9536-1d2117047f5f" providerId="ADAL" clId="{CFBF690A-D719-48D2-92B8-B5819DB24AC8}" dt="2021-08-09T14:48:06.334" v="1602"/>
-          <ac:cxnSpMkLst>
-            <pc:docMk/>
-            <pc:sldMk cId="2223886345" sldId="336"/>
-            <ac:cxnSpMk id="33" creationId="{DA32C806-A58C-49A2-971F-32C07B3CA4CF}"/>
-          </ac:cxnSpMkLst>
-        </pc:cxnChg>
-        <pc:cxnChg chg="add del mod">
-          <ac:chgData name="Di Mattia Alessandro Edoardo Giorgio David" userId="f8954a66-e5ad-4a1c-9536-1d2117047f5f" providerId="ADAL" clId="{CFBF690A-D719-48D2-92B8-B5819DB24AC8}" dt="2021-08-09T14:48:06.334" v="1602"/>
-          <ac:cxnSpMkLst>
-            <pc:docMk/>
-            <pc:sldMk cId="2223886345" sldId="336"/>
-            <ac:cxnSpMk id="34" creationId="{C0063E2F-35BA-4031-893B-972A4D555725}"/>
-          </ac:cxnSpMkLst>
-        </pc:cxnChg>
-        <pc:cxnChg chg="add del mod">
-          <ac:chgData name="Di Mattia Alessandro Edoardo Giorgio David" userId="f8954a66-e5ad-4a1c-9536-1d2117047f5f" providerId="ADAL" clId="{CFBF690A-D719-48D2-92B8-B5819DB24AC8}" dt="2021-08-09T14:48:06.334" v="1602"/>
-          <ac:cxnSpMkLst>
-            <pc:docMk/>
-            <pc:sldMk cId="2223886345" sldId="336"/>
-            <ac:cxnSpMk id="35" creationId="{871AD2F4-EA57-4B83-B727-A2D41B5D1728}"/>
-          </ac:cxnSpMkLst>
-        </pc:cxnChg>
-        <pc:cxnChg chg="add del mod">
-          <ac:chgData name="Di Mattia Alessandro Edoardo Giorgio David" userId="f8954a66-e5ad-4a1c-9536-1d2117047f5f" providerId="ADAL" clId="{CFBF690A-D719-48D2-92B8-B5819DB24AC8}" dt="2021-08-09T14:48:06.334" v="1602"/>
-          <ac:cxnSpMkLst>
-            <pc:docMk/>
-            <pc:sldMk cId="2223886345" sldId="336"/>
-            <ac:cxnSpMk id="44" creationId="{31C1F4D0-7EDD-4865-86C7-CA727B567D5F}"/>
-          </ac:cxnSpMkLst>
-        </pc:cxnChg>
-        <pc:cxnChg chg="add del mod">
-          <ac:chgData name="Di Mattia Alessandro Edoardo Giorgio David" userId="f8954a66-e5ad-4a1c-9536-1d2117047f5f" providerId="ADAL" clId="{CFBF690A-D719-48D2-92B8-B5819DB24AC8}" dt="2021-08-09T14:48:06.334" v="1602"/>
-          <ac:cxnSpMkLst>
-            <pc:docMk/>
-            <pc:sldMk cId="2223886345" sldId="336"/>
-            <ac:cxnSpMk id="45" creationId="{C7EBAB87-F838-4CEE-80D1-C10A63F33CB5}"/>
-          </ac:cxnSpMkLst>
-        </pc:cxnChg>
-        <pc:cxnChg chg="add del mod">
-          <ac:chgData name="Di Mattia Alessandro Edoardo Giorgio David" userId="f8954a66-e5ad-4a1c-9536-1d2117047f5f" providerId="ADAL" clId="{CFBF690A-D719-48D2-92B8-B5819DB24AC8}" dt="2021-08-09T14:48:06.334" v="1602"/>
-          <ac:cxnSpMkLst>
-            <pc:docMk/>
-            <pc:sldMk cId="2223886345" sldId="336"/>
-            <ac:cxnSpMk id="49" creationId="{635E5550-4519-4203-AA35-0A850BD524C9}"/>
-          </ac:cxnSpMkLst>
-        </pc:cxnChg>
-        <pc:cxnChg chg="add del mod">
-          <ac:chgData name="Di Mattia Alessandro Edoardo Giorgio David" userId="f8954a66-e5ad-4a1c-9536-1d2117047f5f" providerId="ADAL" clId="{CFBF690A-D719-48D2-92B8-B5819DB24AC8}" dt="2021-08-09T14:48:06.334" v="1602"/>
-          <ac:cxnSpMkLst>
-            <pc:docMk/>
-            <pc:sldMk cId="2223886345" sldId="336"/>
-            <ac:cxnSpMk id="50" creationId="{A095B073-9050-4EB3-A76C-A5F0D6A6CB9B}"/>
-          </ac:cxnSpMkLst>
-        </pc:cxnChg>
-        <pc:cxnChg chg="add del mod">
-          <ac:chgData name="Di Mattia Alessandro Edoardo Giorgio David" userId="f8954a66-e5ad-4a1c-9536-1d2117047f5f" providerId="ADAL" clId="{CFBF690A-D719-48D2-92B8-B5819DB24AC8}" dt="2021-08-09T14:48:06.334" v="1602"/>
-          <ac:cxnSpMkLst>
-            <pc:docMk/>
-            <pc:sldMk cId="2223886345" sldId="336"/>
-            <ac:cxnSpMk id="54" creationId="{BC9A19AE-D379-4AB1-88EF-7CB8197322DC}"/>
-          </ac:cxnSpMkLst>
-        </pc:cxnChg>
-        <pc:cxnChg chg="add del mod">
-          <ac:chgData name="Di Mattia Alessandro Edoardo Giorgio David" userId="f8954a66-e5ad-4a1c-9536-1d2117047f5f" providerId="ADAL" clId="{CFBF690A-D719-48D2-92B8-B5819DB24AC8}" dt="2021-08-09T14:48:06.334" v="1602"/>
-          <ac:cxnSpMkLst>
-            <pc:docMk/>
-            <pc:sldMk cId="2223886345" sldId="336"/>
-            <ac:cxnSpMk id="56" creationId="{817E96AF-6E57-450F-91FD-05ACEEAE37A1}"/>
-          </ac:cxnSpMkLst>
-        </pc:cxnChg>
-        <pc:cxnChg chg="add del mod">
-          <ac:chgData name="Di Mattia Alessandro Edoardo Giorgio David" userId="f8954a66-e5ad-4a1c-9536-1d2117047f5f" providerId="ADAL" clId="{CFBF690A-D719-48D2-92B8-B5819DB24AC8}" dt="2021-08-09T14:48:06.334" v="1602"/>
-          <ac:cxnSpMkLst>
-            <pc:docMk/>
-            <pc:sldMk cId="2223886345" sldId="336"/>
-            <ac:cxnSpMk id="58" creationId="{9796C8FA-4681-4C87-A057-F2A1B61B3DAB}"/>
-          </ac:cxnSpMkLst>
-        </pc:cxnChg>
-      </pc:sldChg>
-      <pc:sldChg chg="addSp delSp modSp new mod modClrScheme chgLayout">
-        <pc:chgData name="Di Mattia Alessandro Edoardo Giorgio David" userId="f8954a66-e5ad-4a1c-9536-1d2117047f5f" providerId="ADAL" clId="{CFBF690A-D719-48D2-92B8-B5819DB24AC8}" dt="2021-08-09T15:32:30.204" v="1895" actId="20577"/>
-        <pc:sldMkLst>
-          <pc:docMk/>
-          <pc:sldMk cId="2386622032" sldId="337"/>
-        </pc:sldMkLst>
-        <pc:spChg chg="add mod">
-          <ac:chgData name="Di Mattia Alessandro Edoardo Giorgio David" userId="f8954a66-e5ad-4a1c-9536-1d2117047f5f" providerId="ADAL" clId="{CFBF690A-D719-48D2-92B8-B5819DB24AC8}" dt="2021-08-09T15:32:30.204" v="1895" actId="20577"/>
-          <ac:spMkLst>
-            <pc:docMk/>
-            <pc:sldMk cId="2386622032" sldId="337"/>
-            <ac:spMk id="2" creationId="{4955EB03-85E3-48BD-8D11-98871C2CDE2B}"/>
-          </ac:spMkLst>
-        </pc:spChg>
-        <pc:spChg chg="add del mod">
-          <ac:chgData name="Di Mattia Alessandro Edoardo Giorgio David" userId="f8954a66-e5ad-4a1c-9536-1d2117047f5f" providerId="ADAL" clId="{CFBF690A-D719-48D2-92B8-B5819DB24AC8}" dt="2021-08-09T15:27:22.293" v="1853"/>
-          <ac:spMkLst>
-            <pc:docMk/>
-            <pc:sldMk cId="2386622032" sldId="337"/>
-            <ac:spMk id="3" creationId="{FE07B3C5-277D-4534-989E-90ED4C47E697}"/>
-          </ac:spMkLst>
-        </pc:spChg>
-        <pc:spChg chg="add mod">
-          <ac:chgData name="Di Mattia Alessandro Edoardo Giorgio David" userId="f8954a66-e5ad-4a1c-9536-1d2117047f5f" providerId="ADAL" clId="{CFBF690A-D719-48D2-92B8-B5819DB24AC8}" dt="2021-08-09T15:32:20.672" v="1882" actId="20577"/>
-          <ac:spMkLst>
-            <pc:docMk/>
-            <pc:sldMk cId="2386622032" sldId="337"/>
-            <ac:spMk id="4" creationId="{5C20FEFB-367B-47CF-9F2F-2780ADC071FE}"/>
-          </ac:spMkLst>
-        </pc:spChg>
-        <pc:spChg chg="add del mod">
-          <ac:chgData name="Di Mattia Alessandro Edoardo Giorgio David" userId="f8954a66-e5ad-4a1c-9536-1d2117047f5f" providerId="ADAL" clId="{CFBF690A-D719-48D2-92B8-B5819DB24AC8}" dt="2021-08-09T15:27:37.834" v="1857"/>
-          <ac:spMkLst>
-            <pc:docMk/>
-            <pc:sldMk cId="2386622032" sldId="337"/>
-            <ac:spMk id="5" creationId="{B684725E-159F-4B29-A899-2F15DEBA6CC5}"/>
-          </ac:spMkLst>
-        </pc:spChg>
-        <pc:picChg chg="add del mod">
-          <ac:chgData name="Di Mattia Alessandro Edoardo Giorgio David" userId="f8954a66-e5ad-4a1c-9536-1d2117047f5f" providerId="ADAL" clId="{CFBF690A-D719-48D2-92B8-B5819DB24AC8}" dt="2021-08-09T15:32:02.161" v="1860" actId="478"/>
-          <ac:picMkLst>
-            <pc:docMk/>
-            <pc:sldMk cId="2386622032" sldId="337"/>
-            <ac:picMk id="7" creationId="{DD149F64-9B26-400A-8535-BFB846A828F6}"/>
-          </ac:picMkLst>
-        </pc:picChg>
-      </pc:sldChg>
-      <pc:sldChg chg="modSp new mod modNotesTx">
-        <pc:chgData name="Di Mattia Alessandro Edoardo Giorgio David" userId="f8954a66-e5ad-4a1c-9536-1d2117047f5f" providerId="ADAL" clId="{CFBF690A-D719-48D2-92B8-B5819DB24AC8}" dt="2021-08-09T15:35:06.200" v="1903"/>
-        <pc:sldMkLst>
-          <pc:docMk/>
-          <pc:sldMk cId="863600783" sldId="338"/>
-        </pc:sldMkLst>
-        <pc:spChg chg="mod">
-          <ac:chgData name="Di Mattia Alessandro Edoardo Giorgio David" userId="f8954a66-e5ad-4a1c-9536-1d2117047f5f" providerId="ADAL" clId="{CFBF690A-D719-48D2-92B8-B5819DB24AC8}" dt="2021-08-09T15:34:20.370" v="1901" actId="20577"/>
-          <ac:spMkLst>
-            <pc:docMk/>
-            <pc:sldMk cId="863600783" sldId="338"/>
-            <ac:spMk id="2" creationId="{9A7E9ECD-A824-405F-93D7-214E7E8CED7B}"/>
-          </ac:spMkLst>
-        </pc:spChg>
-        <pc:spChg chg="mod">
-          <ac:chgData name="Di Mattia Alessandro Edoardo Giorgio David" userId="f8954a66-e5ad-4a1c-9536-1d2117047f5f" providerId="ADAL" clId="{CFBF690A-D719-48D2-92B8-B5819DB24AC8}" dt="2021-08-09T15:34:39.134" v="1902"/>
-          <ac:spMkLst>
-            <pc:docMk/>
-            <pc:sldMk cId="863600783" sldId="338"/>
-            <ac:spMk id="3" creationId="{7EEDFC4A-3855-4AB5-8115-C4399C82CF5B}"/>
-          </ac:spMkLst>
-        </pc:spChg>
-      </pc:sldChg>
-      <pc:sldChg chg="modSp new mod">
-        <pc:chgData name="Di Mattia Alessandro Edoardo Giorgio David" userId="f8954a66-e5ad-4a1c-9536-1d2117047f5f" providerId="ADAL" clId="{CFBF690A-D719-48D2-92B8-B5819DB24AC8}" dt="2021-08-09T15:53:44.291" v="1952" actId="20577"/>
-        <pc:sldMkLst>
-          <pc:docMk/>
-          <pc:sldMk cId="3760396929" sldId="339"/>
-        </pc:sldMkLst>
-        <pc:spChg chg="mod">
-          <ac:chgData name="Di Mattia Alessandro Edoardo Giorgio David" userId="f8954a66-e5ad-4a1c-9536-1d2117047f5f" providerId="ADAL" clId="{CFBF690A-D719-48D2-92B8-B5819DB24AC8}" dt="2021-08-09T15:53:44.291" v="1952" actId="20577"/>
-          <ac:spMkLst>
-            <pc:docMk/>
-            <pc:sldMk cId="3760396929" sldId="339"/>
-            <ac:spMk id="2" creationId="{49AEAE09-0BED-4CAC-8212-5B93D7A70FDE}"/>
-          </ac:spMkLst>
-        </pc:spChg>
-        <pc:spChg chg="mod">
-          <ac:chgData name="Di Mattia Alessandro Edoardo Giorgio David" userId="f8954a66-e5ad-4a1c-9536-1d2117047f5f" providerId="ADAL" clId="{CFBF690A-D719-48D2-92B8-B5819DB24AC8}" dt="2021-08-09T15:50:25.508" v="1918"/>
-          <ac:spMkLst>
-            <pc:docMk/>
-            <pc:sldMk cId="3760396929" sldId="339"/>
-            <ac:spMk id="3" creationId="{1D30359C-CBBF-48E2-90A8-845B2C301D3C}"/>
-          </ac:spMkLst>
-        </pc:spChg>
-      </pc:sldChg>
-      <pc:sldChg chg="modSp new mod">
-        <pc:chgData name="Di Mattia Alessandro Edoardo Giorgio David" userId="f8954a66-e5ad-4a1c-9536-1d2117047f5f" providerId="ADAL" clId="{CFBF690A-D719-48D2-92B8-B5819DB24AC8}" dt="2021-08-09T15:53:36.979" v="1949" actId="20577"/>
-        <pc:sldMkLst>
-          <pc:docMk/>
-          <pc:sldMk cId="4043709138" sldId="340"/>
-        </pc:sldMkLst>
-        <pc:spChg chg="mod">
-          <ac:chgData name="Di Mattia Alessandro Edoardo Giorgio David" userId="f8954a66-e5ad-4a1c-9536-1d2117047f5f" providerId="ADAL" clId="{CFBF690A-D719-48D2-92B8-B5819DB24AC8}" dt="2021-08-09T15:53:36.979" v="1949" actId="20577"/>
-          <ac:spMkLst>
-            <pc:docMk/>
-            <pc:sldMk cId="4043709138" sldId="340"/>
-            <ac:spMk id="2" creationId="{88FDEB9A-7D04-42C6-8A80-9906B92F3B49}"/>
-          </ac:spMkLst>
-        </pc:spChg>
-        <pc:spChg chg="mod">
-          <ac:chgData name="Di Mattia Alessandro Edoardo Giorgio David" userId="f8954a66-e5ad-4a1c-9536-1d2117047f5f" providerId="ADAL" clId="{CFBF690A-D719-48D2-92B8-B5819DB24AC8}" dt="2021-08-09T15:53:27.145" v="1938" actId="5793"/>
-          <ac:spMkLst>
-            <pc:docMk/>
-            <pc:sldMk cId="4043709138" sldId="340"/>
-            <ac:spMk id="3" creationId="{8DC0EF51-28F2-45F6-BD96-33F38C1708AE}"/>
-          </ac:spMkLst>
-        </pc:spChg>
-      </pc:sldChg>
-    </pc:docChg>
-  </pc:docChgLst>
-  <pc:docChgLst>
     <pc:chgData name="Di Mattia Alessandro Edoardo Giorgio David" userId="f8954a66-e5ad-4a1c-9536-1d2117047f5f" providerId="ADAL" clId="{CDD3A680-70A0-4B3B-95E5-5D6AACE401AF}"/>
     <pc:docChg chg="undo custSel addSld delSld modSld modMainMaster">
       <pc:chgData name="Di Mattia Alessandro Edoardo Giorgio David" userId="f8954a66-e5ad-4a1c-9536-1d2117047f5f" providerId="ADAL" clId="{CDD3A680-70A0-4B3B-95E5-5D6AACE401AF}" dt="2021-09-20T07:53:19.585" v="11546" actId="20577"/>
@@ -3318,6 +1748,1620 @@
     </pc:docChg>
   </pc:docChgLst>
   <pc:docChgLst>
+    <pc:chgData name="Di Mattia Alessandro Edoardo Giorgio David" userId="f8954a66-e5ad-4a1c-9536-1d2117047f5f" providerId="ADAL" clId="{AC787D5D-10B8-4750-885F-805D7C9E9737}"/>
+    <pc:docChg chg="undo custSel addSld modSld">
+      <pc:chgData name="Di Mattia Alessandro Edoardo Giorgio David" userId="f8954a66-e5ad-4a1c-9536-1d2117047f5f" providerId="ADAL" clId="{AC787D5D-10B8-4750-885F-805D7C9E9737}" dt="2021-08-20T15:21:02.985" v="455" actId="20577"/>
+      <pc:docMkLst>
+        <pc:docMk/>
+      </pc:docMkLst>
+      <pc:sldChg chg="modSp new mod">
+        <pc:chgData name="Di Mattia Alessandro Edoardo Giorgio David" userId="f8954a66-e5ad-4a1c-9536-1d2117047f5f" providerId="ADAL" clId="{AC787D5D-10B8-4750-885F-805D7C9E9737}" dt="2021-08-20T14:45:37.819" v="298" actId="20577"/>
+        <pc:sldMkLst>
+          <pc:docMk/>
+          <pc:sldMk cId="3870998453" sldId="298"/>
+        </pc:sldMkLst>
+        <pc:spChg chg="mod">
+          <ac:chgData name="Di Mattia Alessandro Edoardo Giorgio David" userId="f8954a66-e5ad-4a1c-9536-1d2117047f5f" providerId="ADAL" clId="{AC787D5D-10B8-4750-885F-805D7C9E9737}" dt="2021-08-20T14:38:55.348" v="14" actId="122"/>
+          <ac:spMkLst>
+            <pc:docMk/>
+            <pc:sldMk cId="3870998453" sldId="298"/>
+            <ac:spMk id="2" creationId="{CC70B360-B3ED-43E5-A748-F5B5C403C878}"/>
+          </ac:spMkLst>
+        </pc:spChg>
+        <pc:spChg chg="mod">
+          <ac:chgData name="Di Mattia Alessandro Edoardo Giorgio David" userId="f8954a66-e5ad-4a1c-9536-1d2117047f5f" providerId="ADAL" clId="{AC787D5D-10B8-4750-885F-805D7C9E9737}" dt="2021-08-20T14:45:37.819" v="298" actId="20577"/>
+          <ac:spMkLst>
+            <pc:docMk/>
+            <pc:sldMk cId="3870998453" sldId="298"/>
+            <ac:spMk id="3" creationId="{7AB3AA8F-0BE3-46AB-A9D7-309F7F97E4C0}"/>
+          </ac:spMkLst>
+        </pc:spChg>
+      </pc:sldChg>
+      <pc:sldChg chg="addSp delSp modSp new mod modClrScheme chgLayout">
+        <pc:chgData name="Di Mattia Alessandro Edoardo Giorgio David" userId="f8954a66-e5ad-4a1c-9536-1d2117047f5f" providerId="ADAL" clId="{AC787D5D-10B8-4750-885F-805D7C9E9737}" dt="2021-08-20T14:46:06.034" v="304"/>
+        <pc:sldMkLst>
+          <pc:docMk/>
+          <pc:sldMk cId="316752284" sldId="299"/>
+        </pc:sldMkLst>
+        <pc:spChg chg="del">
+          <ac:chgData name="Di Mattia Alessandro Edoardo Giorgio David" userId="f8954a66-e5ad-4a1c-9536-1d2117047f5f" providerId="ADAL" clId="{AC787D5D-10B8-4750-885F-805D7C9E9737}" dt="2021-08-20T14:46:03.679" v="303" actId="700"/>
+          <ac:spMkLst>
+            <pc:docMk/>
+            <pc:sldMk cId="316752284" sldId="299"/>
+            <ac:spMk id="2" creationId="{D510B283-081F-43CE-96F6-08C288F3DFFB}"/>
+          </ac:spMkLst>
+        </pc:spChg>
+        <pc:spChg chg="del mod">
+          <ac:chgData name="Di Mattia Alessandro Edoardo Giorgio David" userId="f8954a66-e5ad-4a1c-9536-1d2117047f5f" providerId="ADAL" clId="{AC787D5D-10B8-4750-885F-805D7C9E9737}" dt="2021-08-20T14:46:03.679" v="303" actId="700"/>
+          <ac:spMkLst>
+            <pc:docMk/>
+            <pc:sldMk cId="316752284" sldId="299"/>
+            <ac:spMk id="3" creationId="{61373EFE-DB58-42AD-8DA9-E7D7FBC43DC0}"/>
+          </ac:spMkLst>
+        </pc:spChg>
+        <pc:picChg chg="add">
+          <ac:chgData name="Di Mattia Alessandro Edoardo Giorgio David" userId="f8954a66-e5ad-4a1c-9536-1d2117047f5f" providerId="ADAL" clId="{AC787D5D-10B8-4750-885F-805D7C9E9737}" dt="2021-08-20T14:46:06.034" v="304"/>
+          <ac:picMkLst>
+            <pc:docMk/>
+            <pc:sldMk cId="316752284" sldId="299"/>
+            <ac:picMk id="4" creationId="{34E6A750-E0B8-41C0-A1C7-288A84AD5D95}"/>
+          </ac:picMkLst>
+        </pc:picChg>
+      </pc:sldChg>
+      <pc:sldChg chg="addSp modSp new mod">
+        <pc:chgData name="Di Mattia Alessandro Edoardo Giorgio David" userId="f8954a66-e5ad-4a1c-9536-1d2117047f5f" providerId="ADAL" clId="{AC787D5D-10B8-4750-885F-805D7C9E9737}" dt="2021-08-20T14:51:41.672" v="307" actId="1076"/>
+        <pc:sldMkLst>
+          <pc:docMk/>
+          <pc:sldMk cId="3144966826" sldId="300"/>
+        </pc:sldMkLst>
+        <pc:picChg chg="add mod">
+          <ac:chgData name="Di Mattia Alessandro Edoardo Giorgio David" userId="f8954a66-e5ad-4a1c-9536-1d2117047f5f" providerId="ADAL" clId="{AC787D5D-10B8-4750-885F-805D7C9E9737}" dt="2021-08-20T14:51:41.672" v="307" actId="1076"/>
+          <ac:picMkLst>
+            <pc:docMk/>
+            <pc:sldMk cId="3144966826" sldId="300"/>
+            <ac:picMk id="2" creationId="{E613DE37-F2C5-40EB-9E94-3226883C95DB}"/>
+          </ac:picMkLst>
+        </pc:picChg>
+      </pc:sldChg>
+      <pc:sldChg chg="addSp modSp new mod modClrScheme chgLayout">
+        <pc:chgData name="Di Mattia Alessandro Edoardo Giorgio David" userId="f8954a66-e5ad-4a1c-9536-1d2117047f5f" providerId="ADAL" clId="{AC787D5D-10B8-4750-885F-805D7C9E9737}" dt="2021-08-20T15:09:51.424" v="406" actId="20577"/>
+        <pc:sldMkLst>
+          <pc:docMk/>
+          <pc:sldMk cId="941163814" sldId="301"/>
+        </pc:sldMkLst>
+        <pc:spChg chg="add mod">
+          <ac:chgData name="Di Mattia Alessandro Edoardo Giorgio David" userId="f8954a66-e5ad-4a1c-9536-1d2117047f5f" providerId="ADAL" clId="{AC787D5D-10B8-4750-885F-805D7C9E9737}" dt="2021-08-20T14:59:05.983" v="313" actId="122"/>
+          <ac:spMkLst>
+            <pc:docMk/>
+            <pc:sldMk cId="941163814" sldId="301"/>
+            <ac:spMk id="2" creationId="{03192228-75B4-4CBA-B91B-AFD69837867A}"/>
+          </ac:spMkLst>
+        </pc:spChg>
+        <pc:spChg chg="add mod">
+          <ac:chgData name="Di Mattia Alessandro Edoardo Giorgio David" userId="f8954a66-e5ad-4a1c-9536-1d2117047f5f" providerId="ADAL" clId="{AC787D5D-10B8-4750-885F-805D7C9E9737}" dt="2021-08-20T15:09:51.424" v="406" actId="20577"/>
+          <ac:spMkLst>
+            <pc:docMk/>
+            <pc:sldMk cId="941163814" sldId="301"/>
+            <ac:spMk id="3" creationId="{A954FACC-FED0-4D82-87FB-6B26DCE06EC6}"/>
+          </ac:spMkLst>
+        </pc:spChg>
+      </pc:sldChg>
+      <pc:sldChg chg="addSp delSp modSp new mod">
+        <pc:chgData name="Di Mattia Alessandro Edoardo Giorgio David" userId="f8954a66-e5ad-4a1c-9536-1d2117047f5f" providerId="ADAL" clId="{AC787D5D-10B8-4750-885F-805D7C9E9737}" dt="2021-08-20T15:00:15.602" v="322" actId="14100"/>
+        <pc:sldMkLst>
+          <pc:docMk/>
+          <pc:sldMk cId="1062955294" sldId="302"/>
+        </pc:sldMkLst>
+        <pc:spChg chg="mod">
+          <ac:chgData name="Di Mattia Alessandro Edoardo Giorgio David" userId="f8954a66-e5ad-4a1c-9536-1d2117047f5f" providerId="ADAL" clId="{AC787D5D-10B8-4750-885F-805D7C9E9737}" dt="2021-08-20T15:00:08.576" v="321" actId="122"/>
+          <ac:spMkLst>
+            <pc:docMk/>
+            <pc:sldMk cId="1062955294" sldId="302"/>
+            <ac:spMk id="2" creationId="{25EF509A-071D-411C-A0B0-D4208223146E}"/>
+          </ac:spMkLst>
+        </pc:spChg>
+        <pc:spChg chg="del">
+          <ac:chgData name="Di Mattia Alessandro Edoardo Giorgio David" userId="f8954a66-e5ad-4a1c-9536-1d2117047f5f" providerId="ADAL" clId="{AC787D5D-10B8-4750-885F-805D7C9E9737}" dt="2021-08-20T14:59:42.063" v="318"/>
+          <ac:spMkLst>
+            <pc:docMk/>
+            <pc:sldMk cId="1062955294" sldId="302"/>
+            <ac:spMk id="3" creationId="{BE19CB99-A33A-4A01-9905-9D0C3914D9D2}"/>
+          </ac:spMkLst>
+        </pc:spChg>
+        <pc:picChg chg="add mod">
+          <ac:chgData name="Di Mattia Alessandro Edoardo Giorgio David" userId="f8954a66-e5ad-4a1c-9536-1d2117047f5f" providerId="ADAL" clId="{AC787D5D-10B8-4750-885F-805D7C9E9737}" dt="2021-08-20T15:00:15.602" v="322" actId="14100"/>
+          <ac:picMkLst>
+            <pc:docMk/>
+            <pc:sldMk cId="1062955294" sldId="302"/>
+            <ac:picMk id="4" creationId="{5ED3C2D6-63C5-460B-A836-842FEB2B0177}"/>
+          </ac:picMkLst>
+        </pc:picChg>
+      </pc:sldChg>
+      <pc:sldChg chg="modSp new mod">
+        <pc:chgData name="Di Mattia Alessandro Edoardo Giorgio David" userId="f8954a66-e5ad-4a1c-9536-1d2117047f5f" providerId="ADAL" clId="{AC787D5D-10B8-4750-885F-805D7C9E9737}" dt="2021-08-20T15:09:36.335" v="398" actId="14"/>
+        <pc:sldMkLst>
+          <pc:docMk/>
+          <pc:sldMk cId="2044962240" sldId="303"/>
+        </pc:sldMkLst>
+        <pc:spChg chg="mod">
+          <ac:chgData name="Di Mattia Alessandro Edoardo Giorgio David" userId="f8954a66-e5ad-4a1c-9536-1d2117047f5f" providerId="ADAL" clId="{AC787D5D-10B8-4750-885F-805D7C9E9737}" dt="2021-08-20T15:00:32.711" v="325" actId="122"/>
+          <ac:spMkLst>
+            <pc:docMk/>
+            <pc:sldMk cId="2044962240" sldId="303"/>
+            <ac:spMk id="2" creationId="{29243411-1081-421F-B743-6D9D5E11545B}"/>
+          </ac:spMkLst>
+        </pc:spChg>
+        <pc:spChg chg="mod">
+          <ac:chgData name="Di Mattia Alessandro Edoardo Giorgio David" userId="f8954a66-e5ad-4a1c-9536-1d2117047f5f" providerId="ADAL" clId="{AC787D5D-10B8-4750-885F-805D7C9E9737}" dt="2021-08-20T15:09:36.335" v="398" actId="14"/>
+          <ac:spMkLst>
+            <pc:docMk/>
+            <pc:sldMk cId="2044962240" sldId="303"/>
+            <ac:spMk id="3" creationId="{2A3AA81C-414F-4D7B-9C0E-C805FF24F569}"/>
+          </ac:spMkLst>
+        </pc:spChg>
+      </pc:sldChg>
+      <pc:sldChg chg="addSp delSp modSp new mod">
+        <pc:chgData name="Di Mattia Alessandro Edoardo Giorgio David" userId="f8954a66-e5ad-4a1c-9536-1d2117047f5f" providerId="ADAL" clId="{AC787D5D-10B8-4750-885F-805D7C9E9737}" dt="2021-08-20T15:12:13.433" v="412"/>
+        <pc:sldMkLst>
+          <pc:docMk/>
+          <pc:sldMk cId="3567292898" sldId="304"/>
+        </pc:sldMkLst>
+        <pc:spChg chg="mod">
+          <ac:chgData name="Di Mattia Alessandro Edoardo Giorgio David" userId="f8954a66-e5ad-4a1c-9536-1d2117047f5f" providerId="ADAL" clId="{AC787D5D-10B8-4750-885F-805D7C9E9737}" dt="2021-08-20T15:10:13.213" v="409" actId="122"/>
+          <ac:spMkLst>
+            <pc:docMk/>
+            <pc:sldMk cId="3567292898" sldId="304"/>
+            <ac:spMk id="2" creationId="{B9A891B8-FCF3-4D10-8095-90B579A3DB40}"/>
+          </ac:spMkLst>
+        </pc:spChg>
+        <pc:spChg chg="add del">
+          <ac:chgData name="Di Mattia Alessandro Edoardo Giorgio David" userId="f8954a66-e5ad-4a1c-9536-1d2117047f5f" providerId="ADAL" clId="{AC787D5D-10B8-4750-885F-805D7C9E9737}" dt="2021-08-20T15:12:13.433" v="412"/>
+          <ac:spMkLst>
+            <pc:docMk/>
+            <pc:sldMk cId="3567292898" sldId="304"/>
+            <ac:spMk id="3" creationId="{DB645B7F-AD3D-4CAA-AD5D-BE21722A27B2}"/>
+          </ac:spMkLst>
+        </pc:spChg>
+        <pc:picChg chg="add del mod">
+          <ac:chgData name="Di Mattia Alessandro Edoardo Giorgio David" userId="f8954a66-e5ad-4a1c-9536-1d2117047f5f" providerId="ADAL" clId="{AC787D5D-10B8-4750-885F-805D7C9E9737}" dt="2021-08-20T15:11:48.619" v="411"/>
+          <ac:picMkLst>
+            <pc:docMk/>
+            <pc:sldMk cId="3567292898" sldId="304"/>
+            <ac:picMk id="4" creationId="{A0D49A57-9517-4AB9-A940-65FDCC83E125}"/>
+          </ac:picMkLst>
+        </pc:picChg>
+        <pc:picChg chg="add mod">
+          <ac:chgData name="Di Mattia Alessandro Edoardo Giorgio David" userId="f8954a66-e5ad-4a1c-9536-1d2117047f5f" providerId="ADAL" clId="{AC787D5D-10B8-4750-885F-805D7C9E9737}" dt="2021-08-20T15:12:13.433" v="412"/>
+          <ac:picMkLst>
+            <pc:docMk/>
+            <pc:sldMk cId="3567292898" sldId="304"/>
+            <ac:picMk id="5" creationId="{4596526A-0688-4381-B13F-22A6737478DA}"/>
+          </ac:picMkLst>
+        </pc:picChg>
+      </pc:sldChg>
+      <pc:sldChg chg="modSp new mod">
+        <pc:chgData name="Di Mattia Alessandro Edoardo Giorgio David" userId="f8954a66-e5ad-4a1c-9536-1d2117047f5f" providerId="ADAL" clId="{AC787D5D-10B8-4750-885F-805D7C9E9737}" dt="2021-08-20T15:21:02.985" v="455" actId="20577"/>
+        <pc:sldMkLst>
+          <pc:docMk/>
+          <pc:sldMk cId="2754829911" sldId="305"/>
+        </pc:sldMkLst>
+        <pc:spChg chg="mod">
+          <ac:chgData name="Di Mattia Alessandro Edoardo Giorgio David" userId="f8954a66-e5ad-4a1c-9536-1d2117047f5f" providerId="ADAL" clId="{AC787D5D-10B8-4750-885F-805D7C9E9737}" dt="2021-08-20T15:16:02.926" v="427" actId="122"/>
+          <ac:spMkLst>
+            <pc:docMk/>
+            <pc:sldMk cId="2754829911" sldId="305"/>
+            <ac:spMk id="2" creationId="{11C634F8-0591-458A-96D5-622BD02845C3}"/>
+          </ac:spMkLst>
+        </pc:spChg>
+        <pc:spChg chg="mod">
+          <ac:chgData name="Di Mattia Alessandro Edoardo Giorgio David" userId="f8954a66-e5ad-4a1c-9536-1d2117047f5f" providerId="ADAL" clId="{AC787D5D-10B8-4750-885F-805D7C9E9737}" dt="2021-08-20T15:21:02.985" v="455" actId="20577"/>
+          <ac:spMkLst>
+            <pc:docMk/>
+            <pc:sldMk cId="2754829911" sldId="305"/>
+            <ac:spMk id="3" creationId="{D47B4779-A817-46F6-AAA3-146DBB18D8B5}"/>
+          </ac:spMkLst>
+        </pc:spChg>
+      </pc:sldChg>
+    </pc:docChg>
+  </pc:docChgLst>
+  <pc:docChgLst>
+    <pc:chgData name="Di Mattia Alessandro Edoardo Giorgio David" userId="f8954a66-e5ad-4a1c-9536-1d2117047f5f" providerId="ADAL" clId="{44D5592E-0B8C-4B71-8BBC-22FE2CB53AF8}"/>
+    <pc:docChg chg="undo custSel addSld delSld modSld sldOrd modMainMaster">
+      <pc:chgData name="Di Mattia Alessandro Edoardo Giorgio David" userId="f8954a66-e5ad-4a1c-9536-1d2117047f5f" providerId="ADAL" clId="{44D5592E-0B8C-4B71-8BBC-22FE2CB53AF8}" dt="2021-11-15T10:33:17.228" v="4636" actId="207"/>
+      <pc:docMkLst>
+        <pc:docMk/>
+      </pc:docMkLst>
+      <pc:sldChg chg="addSp modSp mod modClrScheme chgLayout">
+        <pc:chgData name="Di Mattia Alessandro Edoardo Giorgio David" userId="f8954a66-e5ad-4a1c-9536-1d2117047f5f" providerId="ADAL" clId="{44D5592E-0B8C-4B71-8BBC-22FE2CB53AF8}" dt="2021-11-15T10:06:59.600" v="4313" actId="20577"/>
+        <pc:sldMkLst>
+          <pc:docMk/>
+          <pc:sldMk cId="355505243" sldId="281"/>
+        </pc:sldMkLst>
+        <pc:spChg chg="mod ord">
+          <ac:chgData name="Di Mattia Alessandro Edoardo Giorgio David" userId="f8954a66-e5ad-4a1c-9536-1d2117047f5f" providerId="ADAL" clId="{44D5592E-0B8C-4B71-8BBC-22FE2CB53AF8}" dt="2021-11-08T10:06:01.534" v="17" actId="700"/>
+          <ac:spMkLst>
+            <pc:docMk/>
+            <pc:sldMk cId="355505243" sldId="281"/>
+            <ac:spMk id="2" creationId="{94D62104-75FA-4CA6-90BD-2DC738BC3A46}"/>
+          </ac:spMkLst>
+        </pc:spChg>
+        <pc:spChg chg="mod ord">
+          <ac:chgData name="Di Mattia Alessandro Edoardo Giorgio David" userId="f8954a66-e5ad-4a1c-9536-1d2117047f5f" providerId="ADAL" clId="{44D5592E-0B8C-4B71-8BBC-22FE2CB53AF8}" dt="2021-11-15T10:06:59.600" v="4313" actId="20577"/>
+          <ac:spMkLst>
+            <pc:docMk/>
+            <pc:sldMk cId="355505243" sldId="281"/>
+            <ac:spMk id="3" creationId="{861A6D1C-7FFE-4596-8F8F-BB8902D42B11}"/>
+          </ac:spMkLst>
+        </pc:spChg>
+        <pc:spChg chg="add mod ord">
+          <ac:chgData name="Di Mattia Alessandro Edoardo Giorgio David" userId="f8954a66-e5ad-4a1c-9536-1d2117047f5f" providerId="ADAL" clId="{44D5592E-0B8C-4B71-8BBC-22FE2CB53AF8}" dt="2021-11-08T10:11:25.483" v="78" actId="790"/>
+          <ac:spMkLst>
+            <pc:docMk/>
+            <pc:sldMk cId="355505243" sldId="281"/>
+            <ac:spMk id="6" creationId="{D1A1F7DA-CB6E-425A-9BFA-C7955230F08F}"/>
+          </ac:spMkLst>
+        </pc:spChg>
+        <pc:graphicFrameChg chg="add mod modGraphic">
+          <ac:chgData name="Di Mattia Alessandro Edoardo Giorgio David" userId="f8954a66-e5ad-4a1c-9536-1d2117047f5f" providerId="ADAL" clId="{44D5592E-0B8C-4B71-8BBC-22FE2CB53AF8}" dt="2021-11-15T10:05:25.975" v="4222" actId="27180"/>
+          <ac:graphicFrameMkLst>
+            <pc:docMk/>
+            <pc:sldMk cId="355505243" sldId="281"/>
+            <ac:graphicFrameMk id="5" creationId="{5E973843-8AFD-4F82-A57D-C6AAB8CC9B63}"/>
+          </ac:graphicFrameMkLst>
+        </pc:graphicFrameChg>
+        <pc:graphicFrameChg chg="add mod modGraphic">
+          <ac:chgData name="Di Mattia Alessandro Edoardo Giorgio David" userId="f8954a66-e5ad-4a1c-9536-1d2117047f5f" providerId="ADAL" clId="{44D5592E-0B8C-4B71-8BBC-22FE2CB53AF8}" dt="2021-11-15T10:05:35.958" v="4223" actId="27180"/>
+          <ac:graphicFrameMkLst>
+            <pc:docMk/>
+            <pc:sldMk cId="355505243" sldId="281"/>
+            <ac:graphicFrameMk id="8" creationId="{A3312C27-74D9-4C69-8446-34FFD478E96E}"/>
+          </ac:graphicFrameMkLst>
+        </pc:graphicFrameChg>
+      </pc:sldChg>
+      <pc:sldChg chg="addSp delSp modSp new mod modClrScheme chgLayout">
+        <pc:chgData name="Di Mattia Alessandro Edoardo Giorgio David" userId="f8954a66-e5ad-4a1c-9536-1d2117047f5f" providerId="ADAL" clId="{44D5592E-0B8C-4B71-8BBC-22FE2CB53AF8}" dt="2021-11-15T10:07:17.674" v="4314" actId="14826"/>
+        <pc:sldMkLst>
+          <pc:docMk/>
+          <pc:sldMk cId="444844879" sldId="282"/>
+        </pc:sldMkLst>
+        <pc:spChg chg="del mod">
+          <ac:chgData name="Di Mattia Alessandro Edoardo Giorgio David" userId="f8954a66-e5ad-4a1c-9536-1d2117047f5f" providerId="ADAL" clId="{44D5592E-0B8C-4B71-8BBC-22FE2CB53AF8}" dt="2021-11-08T10:04:34.881" v="9" actId="700"/>
+          <ac:spMkLst>
+            <pc:docMk/>
+            <pc:sldMk cId="444844879" sldId="282"/>
+            <ac:spMk id="2" creationId="{DC6B7206-9E43-4DA6-AA4C-2C7067140996}"/>
+          </ac:spMkLst>
+        </pc:spChg>
+        <pc:spChg chg="del">
+          <ac:chgData name="Di Mattia Alessandro Edoardo Giorgio David" userId="f8954a66-e5ad-4a1c-9536-1d2117047f5f" providerId="ADAL" clId="{44D5592E-0B8C-4B71-8BBC-22FE2CB53AF8}" dt="2021-11-08T10:04:20.016" v="1" actId="931"/>
+          <ac:spMkLst>
+            <pc:docMk/>
+            <pc:sldMk cId="444844879" sldId="282"/>
+            <ac:spMk id="3" creationId="{2C2B7FA5-517C-4F02-B713-654205497CAB}"/>
+          </ac:spMkLst>
+        </pc:spChg>
+        <pc:picChg chg="add mod ord">
+          <ac:chgData name="Di Mattia Alessandro Edoardo Giorgio David" userId="f8954a66-e5ad-4a1c-9536-1d2117047f5f" providerId="ADAL" clId="{44D5592E-0B8C-4B71-8BBC-22FE2CB53AF8}" dt="2021-11-15T10:07:17.674" v="4314" actId="14826"/>
+          <ac:picMkLst>
+            <pc:docMk/>
+            <pc:sldMk cId="444844879" sldId="282"/>
+            <ac:picMk id="5" creationId="{8856FC2A-23A8-42CA-AD83-E2BAA2A8306D}"/>
+          </ac:picMkLst>
+        </pc:picChg>
+      </pc:sldChg>
+      <pc:sldChg chg="addSp delSp modSp new mod">
+        <pc:chgData name="Di Mattia Alessandro Edoardo Giorgio David" userId="f8954a66-e5ad-4a1c-9536-1d2117047f5f" providerId="ADAL" clId="{44D5592E-0B8C-4B71-8BBC-22FE2CB53AF8}" dt="2021-11-08T10:10:34.608" v="66" actId="12788"/>
+        <pc:sldMkLst>
+          <pc:docMk/>
+          <pc:sldMk cId="1235559135" sldId="283"/>
+        </pc:sldMkLst>
+        <pc:picChg chg="add del mod">
+          <ac:chgData name="Di Mattia Alessandro Edoardo Giorgio David" userId="f8954a66-e5ad-4a1c-9536-1d2117047f5f" providerId="ADAL" clId="{44D5592E-0B8C-4B71-8BBC-22FE2CB53AF8}" dt="2021-11-08T10:10:04.844" v="57" actId="478"/>
+          <ac:picMkLst>
+            <pc:docMk/>
+            <pc:sldMk cId="1235559135" sldId="283"/>
+            <ac:picMk id="3" creationId="{1B77EFA9-BA9B-4B27-B225-FCC603383C0F}"/>
+          </ac:picMkLst>
+        </pc:picChg>
+        <pc:picChg chg="add mod">
+          <ac:chgData name="Di Mattia Alessandro Edoardo Giorgio David" userId="f8954a66-e5ad-4a1c-9536-1d2117047f5f" providerId="ADAL" clId="{44D5592E-0B8C-4B71-8BBC-22FE2CB53AF8}" dt="2021-11-08T10:10:34.608" v="66" actId="12788"/>
+          <ac:picMkLst>
+            <pc:docMk/>
+            <pc:sldMk cId="1235559135" sldId="283"/>
+            <ac:picMk id="5" creationId="{AB5F727D-7343-42E4-9F15-15C0F0C1868F}"/>
+          </ac:picMkLst>
+        </pc:picChg>
+      </pc:sldChg>
+      <pc:sldChg chg="new del">
+        <pc:chgData name="Di Mattia Alessandro Edoardo Giorgio David" userId="f8954a66-e5ad-4a1c-9536-1d2117047f5f" providerId="ADAL" clId="{44D5592E-0B8C-4B71-8BBC-22FE2CB53AF8}" dt="2021-11-08T10:33:32.629" v="745" actId="2696"/>
+        <pc:sldMkLst>
+          <pc:docMk/>
+          <pc:sldMk cId="1068755811" sldId="284"/>
+        </pc:sldMkLst>
+      </pc:sldChg>
+      <pc:sldChg chg="addSp modSp new mod">
+        <pc:chgData name="Di Mattia Alessandro Edoardo Giorgio David" userId="f8954a66-e5ad-4a1c-9536-1d2117047f5f" providerId="ADAL" clId="{44D5592E-0B8C-4B71-8BBC-22FE2CB53AF8}" dt="2021-11-15T10:08:02.583" v="4316" actId="20577"/>
+        <pc:sldMkLst>
+          <pc:docMk/>
+          <pc:sldMk cId="920270259" sldId="285"/>
+        </pc:sldMkLst>
+        <pc:spChg chg="mod">
+          <ac:chgData name="Di Mattia Alessandro Edoardo Giorgio David" userId="f8954a66-e5ad-4a1c-9536-1d2117047f5f" providerId="ADAL" clId="{44D5592E-0B8C-4B71-8BBC-22FE2CB53AF8}" dt="2021-11-08T10:11:59.676" v="99" actId="122"/>
+          <ac:spMkLst>
+            <pc:docMk/>
+            <pc:sldMk cId="920270259" sldId="285"/>
+            <ac:spMk id="2" creationId="{47607DCF-5ECF-4798-8053-1C214A9F0386}"/>
+          </ac:spMkLst>
+        </pc:spChg>
+        <pc:spChg chg="mod">
+          <ac:chgData name="Di Mattia Alessandro Edoardo Giorgio David" userId="f8954a66-e5ad-4a1c-9536-1d2117047f5f" providerId="ADAL" clId="{44D5592E-0B8C-4B71-8BBC-22FE2CB53AF8}" dt="2021-11-15T10:08:02.583" v="4316" actId="20577"/>
+          <ac:spMkLst>
+            <pc:docMk/>
+            <pc:sldMk cId="920270259" sldId="285"/>
+            <ac:spMk id="3" creationId="{D661E272-C04A-4331-8457-C539650E8C13}"/>
+          </ac:spMkLst>
+        </pc:spChg>
+        <pc:graphicFrameChg chg="add mod modGraphic">
+          <ac:chgData name="Di Mattia Alessandro Edoardo Giorgio David" userId="f8954a66-e5ad-4a1c-9536-1d2117047f5f" providerId="ADAL" clId="{44D5592E-0B8C-4B71-8BBC-22FE2CB53AF8}" dt="2021-11-08T10:22:35.789" v="488" actId="1076"/>
+          <ac:graphicFrameMkLst>
+            <pc:docMk/>
+            <pc:sldMk cId="920270259" sldId="285"/>
+            <ac:graphicFrameMk id="5" creationId="{69313AC3-D865-418B-8B14-1EEED4B321E8}"/>
+          </ac:graphicFrameMkLst>
+        </pc:graphicFrameChg>
+        <pc:graphicFrameChg chg="add mod modGraphic">
+          <ac:chgData name="Di Mattia Alessandro Edoardo Giorgio David" userId="f8954a66-e5ad-4a1c-9536-1d2117047f5f" providerId="ADAL" clId="{44D5592E-0B8C-4B71-8BBC-22FE2CB53AF8}" dt="2021-11-08T10:47:47.707" v="1236" actId="1076"/>
+          <ac:graphicFrameMkLst>
+            <pc:docMk/>
+            <pc:sldMk cId="920270259" sldId="285"/>
+            <ac:graphicFrameMk id="7" creationId="{0EC01E11-498F-4387-AEEC-5BE2564DE53E}"/>
+          </ac:graphicFrameMkLst>
+        </pc:graphicFrameChg>
+      </pc:sldChg>
+      <pc:sldChg chg="addSp delSp modSp new mod modClrScheme chgLayout">
+        <pc:chgData name="Di Mattia Alessandro Edoardo Giorgio David" userId="f8954a66-e5ad-4a1c-9536-1d2117047f5f" providerId="ADAL" clId="{44D5592E-0B8C-4B71-8BBC-22FE2CB53AF8}" dt="2021-11-08T10:28:53.188" v="744" actId="1076"/>
+        <pc:sldMkLst>
+          <pc:docMk/>
+          <pc:sldMk cId="4039083811" sldId="286"/>
+        </pc:sldMkLst>
+        <pc:spChg chg="del">
+          <ac:chgData name="Di Mattia Alessandro Edoardo Giorgio David" userId="f8954a66-e5ad-4a1c-9536-1d2117047f5f" providerId="ADAL" clId="{44D5592E-0B8C-4B71-8BBC-22FE2CB53AF8}" dt="2021-11-08T10:20:41.553" v="431" actId="700"/>
+          <ac:spMkLst>
+            <pc:docMk/>
+            <pc:sldMk cId="4039083811" sldId="286"/>
+            <ac:spMk id="2" creationId="{235EC626-57A4-4822-B622-88932DEE48D0}"/>
+          </ac:spMkLst>
+        </pc:spChg>
+        <pc:spChg chg="del">
+          <ac:chgData name="Di Mattia Alessandro Edoardo Giorgio David" userId="f8954a66-e5ad-4a1c-9536-1d2117047f5f" providerId="ADAL" clId="{44D5592E-0B8C-4B71-8BBC-22FE2CB53AF8}" dt="2021-11-08T10:20:41.553" v="431" actId="700"/>
+          <ac:spMkLst>
+            <pc:docMk/>
+            <pc:sldMk cId="4039083811" sldId="286"/>
+            <ac:spMk id="3" creationId="{D6E7B874-D7CD-4ED9-8A60-25240D0DDF5A}"/>
+          </ac:spMkLst>
+        </pc:spChg>
+        <pc:spChg chg="add del mod ord">
+          <ac:chgData name="Di Mattia Alessandro Edoardo Giorgio David" userId="f8954a66-e5ad-4a1c-9536-1d2117047f5f" providerId="ADAL" clId="{44D5592E-0B8C-4B71-8BBC-22FE2CB53AF8}" dt="2021-11-08T10:21:02.792" v="438" actId="700"/>
+          <ac:spMkLst>
+            <pc:docMk/>
+            <pc:sldMk cId="4039083811" sldId="286"/>
+            <ac:spMk id="6" creationId="{2D005282-208E-49FE-8A19-141A62389F1E}"/>
+          </ac:spMkLst>
+        </pc:spChg>
+        <pc:spChg chg="add del mod ord">
+          <ac:chgData name="Di Mattia Alessandro Edoardo Giorgio David" userId="f8954a66-e5ad-4a1c-9536-1d2117047f5f" providerId="ADAL" clId="{44D5592E-0B8C-4B71-8BBC-22FE2CB53AF8}" dt="2021-11-08T10:21:02.792" v="438" actId="700"/>
+          <ac:spMkLst>
+            <pc:docMk/>
+            <pc:sldMk cId="4039083811" sldId="286"/>
+            <ac:spMk id="7" creationId="{7A9BAC65-A10A-4495-95F3-B7EBBAF58C77}"/>
+          </ac:spMkLst>
+        </pc:spChg>
+        <pc:spChg chg="add mod">
+          <ac:chgData name="Di Mattia Alessandro Edoardo Giorgio David" userId="f8954a66-e5ad-4a1c-9536-1d2117047f5f" providerId="ADAL" clId="{44D5592E-0B8C-4B71-8BBC-22FE2CB53AF8}" dt="2021-11-08T10:22:08.424" v="481" actId="122"/>
+          <ac:spMkLst>
+            <pc:docMk/>
+            <pc:sldMk cId="4039083811" sldId="286"/>
+            <ac:spMk id="8" creationId="{30F08E57-6C8A-447B-8848-92A02C2B7BD8}"/>
+          </ac:spMkLst>
+        </pc:spChg>
+        <pc:spChg chg="add del mod">
+          <ac:chgData name="Di Mattia Alessandro Edoardo Giorgio David" userId="f8954a66-e5ad-4a1c-9536-1d2117047f5f" providerId="ADAL" clId="{44D5592E-0B8C-4B71-8BBC-22FE2CB53AF8}" dt="2021-11-08T10:21:09.770" v="442" actId="931"/>
+          <ac:spMkLst>
+            <pc:docMk/>
+            <pc:sldMk cId="4039083811" sldId="286"/>
+            <ac:spMk id="9" creationId="{D64A2C7E-3FFE-4028-8EA5-F81889BB3301}"/>
+          </ac:spMkLst>
+        </pc:spChg>
+        <pc:graphicFrameChg chg="add mod modGraphic">
+          <ac:chgData name="Di Mattia Alessandro Edoardo Giorgio David" userId="f8954a66-e5ad-4a1c-9536-1d2117047f5f" providerId="ADAL" clId="{44D5592E-0B8C-4B71-8BBC-22FE2CB53AF8}" dt="2021-11-08T10:28:53.188" v="744" actId="1076"/>
+          <ac:graphicFrameMkLst>
+            <pc:docMk/>
+            <pc:sldMk cId="4039083811" sldId="286"/>
+            <ac:graphicFrameMk id="13" creationId="{3C17D049-B080-4F91-9948-94F272E7B424}"/>
+          </ac:graphicFrameMkLst>
+        </pc:graphicFrameChg>
+        <pc:picChg chg="add del mod">
+          <ac:chgData name="Di Mattia Alessandro Edoardo Giorgio David" userId="f8954a66-e5ad-4a1c-9536-1d2117047f5f" providerId="ADAL" clId="{44D5592E-0B8C-4B71-8BBC-22FE2CB53AF8}" dt="2021-11-08T10:21:03.190" v="440" actId="931"/>
+          <ac:picMkLst>
+            <pc:docMk/>
+            <pc:sldMk cId="4039083811" sldId="286"/>
+            <ac:picMk id="5" creationId="{FDF9F9AB-4CE8-4603-A2F9-62FAB52A0AE6}"/>
+          </ac:picMkLst>
+        </pc:picChg>
+        <pc:picChg chg="add mod">
+          <ac:chgData name="Di Mattia Alessandro Edoardo Giorgio David" userId="f8954a66-e5ad-4a1c-9536-1d2117047f5f" providerId="ADAL" clId="{44D5592E-0B8C-4B71-8BBC-22FE2CB53AF8}" dt="2021-11-08T10:21:09.770" v="442" actId="931"/>
+          <ac:picMkLst>
+            <pc:docMk/>
+            <pc:sldMk cId="4039083811" sldId="286"/>
+            <ac:picMk id="11" creationId="{F44B281E-64C7-4CFA-887B-3AAA42E9F66B}"/>
+          </ac:picMkLst>
+        </pc:picChg>
+      </pc:sldChg>
+      <pc:sldChg chg="modSp new mod modClrScheme chgLayout">
+        <pc:chgData name="Di Mattia Alessandro Edoardo Giorgio David" userId="f8954a66-e5ad-4a1c-9536-1d2117047f5f" providerId="ADAL" clId="{44D5592E-0B8C-4B71-8BBC-22FE2CB53AF8}" dt="2021-11-08T10:35:53.679" v="923" actId="20577"/>
+        <pc:sldMkLst>
+          <pc:docMk/>
+          <pc:sldMk cId="2310254051" sldId="287"/>
+        </pc:sldMkLst>
+        <pc:spChg chg="mod ord">
+          <ac:chgData name="Di Mattia Alessandro Edoardo Giorgio David" userId="f8954a66-e5ad-4a1c-9536-1d2117047f5f" providerId="ADAL" clId="{44D5592E-0B8C-4B71-8BBC-22FE2CB53AF8}" dt="2021-11-08T10:28:38.727" v="743" actId="700"/>
+          <ac:spMkLst>
+            <pc:docMk/>
+            <pc:sldMk cId="2310254051" sldId="287"/>
+            <ac:spMk id="2" creationId="{B21B660B-1E0B-4D01-87CB-4B7D98486F54}"/>
+          </ac:spMkLst>
+        </pc:spChg>
+        <pc:spChg chg="mod ord">
+          <ac:chgData name="Di Mattia Alessandro Edoardo Giorgio David" userId="f8954a66-e5ad-4a1c-9536-1d2117047f5f" providerId="ADAL" clId="{44D5592E-0B8C-4B71-8BBC-22FE2CB53AF8}" dt="2021-11-08T10:35:53.679" v="923" actId="20577"/>
+          <ac:spMkLst>
+            <pc:docMk/>
+            <pc:sldMk cId="2310254051" sldId="287"/>
+            <ac:spMk id="3" creationId="{6285D6BC-086B-479F-9F72-15CA362D665B}"/>
+          </ac:spMkLst>
+        </pc:spChg>
+      </pc:sldChg>
+      <pc:sldChg chg="addSp delSp modSp new mod modClrScheme chgLayout">
+        <pc:chgData name="Di Mattia Alessandro Edoardo Giorgio David" userId="f8954a66-e5ad-4a1c-9536-1d2117047f5f" providerId="ADAL" clId="{44D5592E-0B8C-4B71-8BBC-22FE2CB53AF8}" dt="2021-11-15T10:11:54.545" v="4440" actId="20577"/>
+        <pc:sldMkLst>
+          <pc:docMk/>
+          <pc:sldMk cId="2985729184" sldId="288"/>
+        </pc:sldMkLst>
+        <pc:spChg chg="del mod ord">
+          <ac:chgData name="Di Mattia Alessandro Edoardo Giorgio David" userId="f8954a66-e5ad-4a1c-9536-1d2117047f5f" providerId="ADAL" clId="{44D5592E-0B8C-4B71-8BBC-22FE2CB53AF8}" dt="2021-11-08T10:40:34.747" v="952" actId="700"/>
+          <ac:spMkLst>
+            <pc:docMk/>
+            <pc:sldMk cId="2985729184" sldId="288"/>
+            <ac:spMk id="2" creationId="{2A593378-7812-4D2E-BDD1-A12CA0E73855}"/>
+          </ac:spMkLst>
+        </pc:spChg>
+        <pc:spChg chg="del">
+          <ac:chgData name="Di Mattia Alessandro Edoardo Giorgio David" userId="f8954a66-e5ad-4a1c-9536-1d2117047f5f" providerId="ADAL" clId="{44D5592E-0B8C-4B71-8BBC-22FE2CB53AF8}" dt="2021-11-08T10:40:14.256" v="951"/>
+          <ac:spMkLst>
+            <pc:docMk/>
+            <pc:sldMk cId="2985729184" sldId="288"/>
+            <ac:spMk id="3" creationId="{F8751E3E-50A6-41D9-8D83-48CF073C37ED}"/>
+          </ac:spMkLst>
+        </pc:spChg>
+        <pc:spChg chg="add del mod ord">
+          <ac:chgData name="Di Mattia Alessandro Edoardo Giorgio David" userId="f8954a66-e5ad-4a1c-9536-1d2117047f5f" providerId="ADAL" clId="{44D5592E-0B8C-4B71-8BBC-22FE2CB53AF8}" dt="2021-11-08T10:40:41.255" v="953" actId="700"/>
+          <ac:spMkLst>
+            <pc:docMk/>
+            <pc:sldMk cId="2985729184" sldId="288"/>
+            <ac:spMk id="5" creationId="{6DC2EECD-197A-4C1B-9151-A2E242250B59}"/>
+          </ac:spMkLst>
+        </pc:spChg>
+        <pc:spChg chg="add del mod ord">
+          <ac:chgData name="Di Mattia Alessandro Edoardo Giorgio David" userId="f8954a66-e5ad-4a1c-9536-1d2117047f5f" providerId="ADAL" clId="{44D5592E-0B8C-4B71-8BBC-22FE2CB53AF8}" dt="2021-11-08T10:40:41.255" v="953" actId="700"/>
+          <ac:spMkLst>
+            <pc:docMk/>
+            <pc:sldMk cId="2985729184" sldId="288"/>
+            <ac:spMk id="6" creationId="{78C5B188-3B37-4812-B91B-D038AD09AE7C}"/>
+          </ac:spMkLst>
+        </pc:spChg>
+        <pc:spChg chg="add mod ord">
+          <ac:chgData name="Di Mattia Alessandro Edoardo Giorgio David" userId="f8954a66-e5ad-4a1c-9536-1d2117047f5f" providerId="ADAL" clId="{44D5592E-0B8C-4B71-8BBC-22FE2CB53AF8}" dt="2021-11-08T10:40:57.995" v="978" actId="790"/>
+          <ac:spMkLst>
+            <pc:docMk/>
+            <pc:sldMk cId="2985729184" sldId="288"/>
+            <ac:spMk id="7" creationId="{9C9DAA16-8412-4B11-9A6E-756F522F23AF}"/>
+          </ac:spMkLst>
+        </pc:spChg>
+        <pc:spChg chg="add mod ord">
+          <ac:chgData name="Di Mattia Alessandro Edoardo Giorgio David" userId="f8954a66-e5ad-4a1c-9536-1d2117047f5f" providerId="ADAL" clId="{44D5592E-0B8C-4B71-8BBC-22FE2CB53AF8}" dt="2021-11-15T10:11:54.545" v="4440" actId="20577"/>
+          <ac:spMkLst>
+            <pc:docMk/>
+            <pc:sldMk cId="2985729184" sldId="288"/>
+            <ac:spMk id="8" creationId="{83793555-E5F1-4C21-8F5F-E5CBB0F327A5}"/>
+          </ac:spMkLst>
+        </pc:spChg>
+        <pc:picChg chg="add mod ord">
+          <ac:chgData name="Di Mattia Alessandro Edoardo Giorgio David" userId="f8954a66-e5ad-4a1c-9536-1d2117047f5f" providerId="ADAL" clId="{44D5592E-0B8C-4B71-8BBC-22FE2CB53AF8}" dt="2021-11-08T10:41:04.186" v="979" actId="1076"/>
+          <ac:picMkLst>
+            <pc:docMk/>
+            <pc:sldMk cId="2985729184" sldId="288"/>
+            <ac:picMk id="4" creationId="{F5A99F33-5B05-4B85-BCEA-2D9504B4A961}"/>
+          </ac:picMkLst>
+        </pc:picChg>
+      </pc:sldChg>
+      <pc:sldChg chg="addSp delSp modSp new mod modClrScheme chgLayout">
+        <pc:chgData name="Di Mattia Alessandro Edoardo Giorgio David" userId="f8954a66-e5ad-4a1c-9536-1d2117047f5f" providerId="ADAL" clId="{44D5592E-0B8C-4B71-8BBC-22FE2CB53AF8}" dt="2021-11-15T10:12:26.913" v="4446" actId="20577"/>
+        <pc:sldMkLst>
+          <pc:docMk/>
+          <pc:sldMk cId="2513854311" sldId="289"/>
+        </pc:sldMkLst>
+        <pc:spChg chg="del mod ord">
+          <ac:chgData name="Di Mattia Alessandro Edoardo Giorgio David" userId="f8954a66-e5ad-4a1c-9536-1d2117047f5f" providerId="ADAL" clId="{44D5592E-0B8C-4B71-8BBC-22FE2CB53AF8}" dt="2021-11-08T10:54:44.973" v="1625" actId="700"/>
+          <ac:spMkLst>
+            <pc:docMk/>
+            <pc:sldMk cId="2513854311" sldId="289"/>
+            <ac:spMk id="2" creationId="{501E4F37-6592-4D6B-9B5A-25A81F6928FC}"/>
+          </ac:spMkLst>
+        </pc:spChg>
+        <pc:spChg chg="del mod ord">
+          <ac:chgData name="Di Mattia Alessandro Edoardo Giorgio David" userId="f8954a66-e5ad-4a1c-9536-1d2117047f5f" providerId="ADAL" clId="{44D5592E-0B8C-4B71-8BBC-22FE2CB53AF8}" dt="2021-11-08T10:54:44.973" v="1625" actId="700"/>
+          <ac:spMkLst>
+            <pc:docMk/>
+            <pc:sldMk cId="2513854311" sldId="289"/>
+            <ac:spMk id="3" creationId="{42927192-2C47-4664-8EF5-86A0F81543C6}"/>
+          </ac:spMkLst>
+        </pc:spChg>
+        <pc:spChg chg="del">
+          <ac:chgData name="Di Mattia Alessandro Edoardo Giorgio David" userId="f8954a66-e5ad-4a1c-9536-1d2117047f5f" providerId="ADAL" clId="{44D5592E-0B8C-4B71-8BBC-22FE2CB53AF8}" dt="2021-11-08T10:54:44.973" v="1625" actId="700"/>
+          <ac:spMkLst>
+            <pc:docMk/>
+            <pc:sldMk cId="2513854311" sldId="289"/>
+            <ac:spMk id="4" creationId="{0EBEA154-A114-4F9D-896D-FD26644BB26F}"/>
+          </ac:spMkLst>
+        </pc:spChg>
+        <pc:spChg chg="add mod ord">
+          <ac:chgData name="Di Mattia Alessandro Edoardo Giorgio David" userId="f8954a66-e5ad-4a1c-9536-1d2117047f5f" providerId="ADAL" clId="{44D5592E-0B8C-4B71-8BBC-22FE2CB53AF8}" dt="2021-11-08T10:57:04.470" v="1749" actId="20577"/>
+          <ac:spMkLst>
+            <pc:docMk/>
+            <pc:sldMk cId="2513854311" sldId="289"/>
+            <ac:spMk id="5" creationId="{846176CF-B5A6-4CAE-8CA9-A1AD6D78A99F}"/>
+          </ac:spMkLst>
+        </pc:spChg>
+        <pc:spChg chg="add mod ord">
+          <ac:chgData name="Di Mattia Alessandro Edoardo Giorgio David" userId="f8954a66-e5ad-4a1c-9536-1d2117047f5f" providerId="ADAL" clId="{44D5592E-0B8C-4B71-8BBC-22FE2CB53AF8}" dt="2021-11-15T10:12:26.913" v="4446" actId="20577"/>
+          <ac:spMkLst>
+            <pc:docMk/>
+            <pc:sldMk cId="2513854311" sldId="289"/>
+            <ac:spMk id="6" creationId="{EF84CF5D-A2C2-4BFE-8484-66DBEBBD2B3A}"/>
+          </ac:spMkLst>
+        </pc:spChg>
+      </pc:sldChg>
+      <pc:sldChg chg="modSp new mod">
+        <pc:chgData name="Di Mattia Alessandro Edoardo Giorgio David" userId="f8954a66-e5ad-4a1c-9536-1d2117047f5f" providerId="ADAL" clId="{44D5592E-0B8C-4B71-8BBC-22FE2CB53AF8}" dt="2021-11-15T10:33:17.228" v="4636" actId="207"/>
+        <pc:sldMkLst>
+          <pc:docMk/>
+          <pc:sldMk cId="443818849" sldId="290"/>
+        </pc:sldMkLst>
+        <pc:spChg chg="mod">
+          <ac:chgData name="Di Mattia Alessandro Edoardo Giorgio David" userId="f8954a66-e5ad-4a1c-9536-1d2117047f5f" providerId="ADAL" clId="{44D5592E-0B8C-4B71-8BBC-22FE2CB53AF8}" dt="2021-11-08T10:55:07.671" v="1670" actId="122"/>
+          <ac:spMkLst>
+            <pc:docMk/>
+            <pc:sldMk cId="443818849" sldId="290"/>
+            <ac:spMk id="2" creationId="{E2AE4C11-9E77-4E42-B948-994E09BDC9C6}"/>
+          </ac:spMkLst>
+        </pc:spChg>
+        <pc:spChg chg="mod">
+          <ac:chgData name="Di Mattia Alessandro Edoardo Giorgio David" userId="f8954a66-e5ad-4a1c-9536-1d2117047f5f" providerId="ADAL" clId="{44D5592E-0B8C-4B71-8BBC-22FE2CB53AF8}" dt="2021-11-15T10:33:17.228" v="4636" actId="207"/>
+          <ac:spMkLst>
+            <pc:docMk/>
+            <pc:sldMk cId="443818849" sldId="290"/>
+            <ac:spMk id="3" creationId="{4D078D51-D572-4CA1-96D6-5B20ECD70331}"/>
+          </ac:spMkLst>
+        </pc:spChg>
+      </pc:sldChg>
+      <pc:sldChg chg="addSp modSp new mod modClrScheme chgLayout">
+        <pc:chgData name="Di Mattia Alessandro Edoardo Giorgio David" userId="f8954a66-e5ad-4a1c-9536-1d2117047f5f" providerId="ADAL" clId="{44D5592E-0B8C-4B71-8BBC-22FE2CB53AF8}" dt="2021-11-15T10:27:11.838" v="4625" actId="20577"/>
+        <pc:sldMkLst>
+          <pc:docMk/>
+          <pc:sldMk cId="1543532996" sldId="291"/>
+        </pc:sldMkLst>
+        <pc:spChg chg="add mod">
+          <ac:chgData name="Di Mattia Alessandro Edoardo Giorgio David" userId="f8954a66-e5ad-4a1c-9536-1d2117047f5f" providerId="ADAL" clId="{44D5592E-0B8C-4B71-8BBC-22FE2CB53AF8}" dt="2021-11-08T13:24:37.719" v="2039" actId="122"/>
+          <ac:spMkLst>
+            <pc:docMk/>
+            <pc:sldMk cId="1543532996" sldId="291"/>
+            <ac:spMk id="2" creationId="{CC21FEAC-8D56-4DC7-8493-6BB253A7FD19}"/>
+          </ac:spMkLst>
+        </pc:spChg>
+        <pc:spChg chg="add mod">
+          <ac:chgData name="Di Mattia Alessandro Edoardo Giorgio David" userId="f8954a66-e5ad-4a1c-9536-1d2117047f5f" providerId="ADAL" clId="{44D5592E-0B8C-4B71-8BBC-22FE2CB53AF8}" dt="2021-11-15T10:27:11.838" v="4625" actId="20577"/>
+          <ac:spMkLst>
+            <pc:docMk/>
+            <pc:sldMk cId="1543532996" sldId="291"/>
+            <ac:spMk id="3" creationId="{7480CFB9-0C18-4717-BD62-42DFEF2F14F9}"/>
+          </ac:spMkLst>
+        </pc:spChg>
+        <pc:graphicFrameChg chg="add mod modGraphic">
+          <ac:chgData name="Di Mattia Alessandro Edoardo Giorgio David" userId="f8954a66-e5ad-4a1c-9536-1d2117047f5f" providerId="ADAL" clId="{44D5592E-0B8C-4B71-8BBC-22FE2CB53AF8}" dt="2021-11-15T10:26:46.933" v="4623" actId="1076"/>
+          <ac:graphicFrameMkLst>
+            <pc:docMk/>
+            <pc:sldMk cId="1543532996" sldId="291"/>
+            <ac:graphicFrameMk id="5" creationId="{7A106121-6E48-4CDF-A06D-0BB49F2BA4EC}"/>
+          </ac:graphicFrameMkLst>
+        </pc:graphicFrameChg>
+      </pc:sldChg>
+      <pc:sldChg chg="addSp delSp modSp new mod modClrScheme chgLayout">
+        <pc:chgData name="Di Mattia Alessandro Edoardo Giorgio David" userId="f8954a66-e5ad-4a1c-9536-1d2117047f5f" providerId="ADAL" clId="{44D5592E-0B8C-4B71-8BBC-22FE2CB53AF8}" dt="2021-11-08T15:04:38.285" v="4207" actId="1076"/>
+        <pc:sldMkLst>
+          <pc:docMk/>
+          <pc:sldMk cId="1825306434" sldId="292"/>
+        </pc:sldMkLst>
+        <pc:spChg chg="mod ord">
+          <ac:chgData name="Di Mattia Alessandro Edoardo Giorgio David" userId="f8954a66-e5ad-4a1c-9536-1d2117047f5f" providerId="ADAL" clId="{44D5592E-0B8C-4B71-8BBC-22FE2CB53AF8}" dt="2021-11-08T15:04:04.614" v="4201" actId="700"/>
+          <ac:spMkLst>
+            <pc:docMk/>
+            <pc:sldMk cId="1825306434" sldId="292"/>
+            <ac:spMk id="2" creationId="{19B8F9D7-1BD1-4AAB-82A3-7592C0F53AFD}"/>
+          </ac:spMkLst>
+        </pc:spChg>
+        <pc:spChg chg="del mod ord">
+          <ac:chgData name="Di Mattia Alessandro Edoardo Giorgio David" userId="f8954a66-e5ad-4a1c-9536-1d2117047f5f" providerId="ADAL" clId="{44D5592E-0B8C-4B71-8BBC-22FE2CB53AF8}" dt="2021-11-08T15:03:58.969" v="4200" actId="700"/>
+          <ac:spMkLst>
+            <pc:docMk/>
+            <pc:sldMk cId="1825306434" sldId="292"/>
+            <ac:spMk id="3" creationId="{2F4D8887-9EBA-4ADD-9376-C03A54183CE1}"/>
+          </ac:spMkLst>
+        </pc:spChg>
+        <pc:spChg chg="add del mod ord">
+          <ac:chgData name="Di Mattia Alessandro Edoardo Giorgio David" userId="f8954a66-e5ad-4a1c-9536-1d2117047f5f" providerId="ADAL" clId="{44D5592E-0B8C-4B71-8BBC-22FE2CB53AF8}" dt="2021-11-08T15:03:33.910" v="4189" actId="700"/>
+          <ac:spMkLst>
+            <pc:docMk/>
+            <pc:sldMk cId="1825306434" sldId="292"/>
+            <ac:spMk id="6" creationId="{573E944F-669E-4A60-8A53-C0146ABD43B9}"/>
+          </ac:spMkLst>
+        </pc:spChg>
+        <pc:spChg chg="add del mod ord">
+          <ac:chgData name="Di Mattia Alessandro Edoardo Giorgio David" userId="f8954a66-e5ad-4a1c-9536-1d2117047f5f" providerId="ADAL" clId="{44D5592E-0B8C-4B71-8BBC-22FE2CB53AF8}" dt="2021-11-08T15:04:04.614" v="4201" actId="700"/>
+          <ac:spMkLst>
+            <pc:docMk/>
+            <pc:sldMk cId="1825306434" sldId="292"/>
+            <ac:spMk id="7" creationId="{CB6E3C0E-EAFB-4B11-BA99-978313648174}"/>
+          </ac:spMkLst>
+        </pc:spChg>
+        <pc:spChg chg="add del mod ord">
+          <ac:chgData name="Di Mattia Alessandro Edoardo Giorgio David" userId="f8954a66-e5ad-4a1c-9536-1d2117047f5f" providerId="ADAL" clId="{44D5592E-0B8C-4B71-8BBC-22FE2CB53AF8}" dt="2021-11-08T15:04:04.614" v="4201" actId="700"/>
+          <ac:spMkLst>
+            <pc:docMk/>
+            <pc:sldMk cId="1825306434" sldId="292"/>
+            <ac:spMk id="8" creationId="{BB38EA53-A027-42B0-9FCD-1C5063A2F71E}"/>
+          </ac:spMkLst>
+        </pc:spChg>
+        <pc:spChg chg="add mod ord">
+          <ac:chgData name="Di Mattia Alessandro Edoardo Giorgio David" userId="f8954a66-e5ad-4a1c-9536-1d2117047f5f" providerId="ADAL" clId="{44D5592E-0B8C-4B71-8BBC-22FE2CB53AF8}" dt="2021-11-08T15:04:04.614" v="4201" actId="700"/>
+          <ac:spMkLst>
+            <pc:docMk/>
+            <pc:sldMk cId="1825306434" sldId="292"/>
+            <ac:spMk id="9" creationId="{FE8EA41F-A8A2-4341-AE88-84965D7739FE}"/>
+          </ac:spMkLst>
+        </pc:spChg>
+        <pc:graphicFrameChg chg="add mod modGraphic">
+          <ac:chgData name="Di Mattia Alessandro Edoardo Giorgio David" userId="f8954a66-e5ad-4a1c-9536-1d2117047f5f" providerId="ADAL" clId="{44D5592E-0B8C-4B71-8BBC-22FE2CB53AF8}" dt="2021-11-08T15:04:38.285" v="4207" actId="1076"/>
+          <ac:graphicFrameMkLst>
+            <pc:docMk/>
+            <pc:sldMk cId="1825306434" sldId="292"/>
+            <ac:graphicFrameMk id="5" creationId="{FDF0CF8C-C505-4EDA-A1DD-0C08B3CA620E}"/>
+          </ac:graphicFrameMkLst>
+        </pc:graphicFrameChg>
+      </pc:sldChg>
+      <pc:sldChg chg="modSp add del mod ord">
+        <pc:chgData name="Di Mattia Alessandro Edoardo Giorgio David" userId="f8954a66-e5ad-4a1c-9536-1d2117047f5f" providerId="ADAL" clId="{44D5592E-0B8C-4B71-8BBC-22FE2CB53AF8}" dt="2021-11-08T14:31:52.701" v="3320" actId="2696"/>
+        <pc:sldMkLst>
+          <pc:docMk/>
+          <pc:sldMk cId="2453736661" sldId="292"/>
+        </pc:sldMkLst>
+        <pc:spChg chg="mod">
+          <ac:chgData name="Di Mattia Alessandro Edoardo Giorgio David" userId="f8954a66-e5ad-4a1c-9536-1d2117047f5f" providerId="ADAL" clId="{44D5592E-0B8C-4B71-8BBC-22FE2CB53AF8}" dt="2021-11-08T14:31:14.802" v="3301" actId="20577"/>
+          <ac:spMkLst>
+            <pc:docMk/>
+            <pc:sldMk cId="2453736661" sldId="292"/>
+            <ac:spMk id="2" creationId="{E2AE4C11-9E77-4E42-B948-994E09BDC9C6}"/>
+          </ac:spMkLst>
+        </pc:spChg>
+        <pc:spChg chg="mod">
+          <ac:chgData name="Di Mattia Alessandro Edoardo Giorgio David" userId="f8954a66-e5ad-4a1c-9536-1d2117047f5f" providerId="ADAL" clId="{44D5592E-0B8C-4B71-8BBC-22FE2CB53AF8}" dt="2021-11-08T14:31:32.596" v="3319" actId="20577"/>
+          <ac:spMkLst>
+            <pc:docMk/>
+            <pc:sldMk cId="2453736661" sldId="292"/>
+            <ac:spMk id="3" creationId="{4D078D51-D572-4CA1-96D6-5B20ECD70331}"/>
+          </ac:spMkLst>
+        </pc:spChg>
+      </pc:sldChg>
+      <pc:sldChg chg="addSp modSp new mod">
+        <pc:chgData name="Di Mattia Alessandro Edoardo Giorgio David" userId="f8954a66-e5ad-4a1c-9536-1d2117047f5f" providerId="ADAL" clId="{44D5592E-0B8C-4B71-8BBC-22FE2CB53AF8}" dt="2021-11-15T10:32:15.924" v="4634" actId="207"/>
+        <pc:sldMkLst>
+          <pc:docMk/>
+          <pc:sldMk cId="883794286" sldId="293"/>
+        </pc:sldMkLst>
+        <pc:spChg chg="mod">
+          <ac:chgData name="Di Mattia Alessandro Edoardo Giorgio David" userId="f8954a66-e5ad-4a1c-9536-1d2117047f5f" providerId="ADAL" clId="{44D5592E-0B8C-4B71-8BBC-22FE2CB53AF8}" dt="2021-11-08T14:49:41.104" v="3798" actId="20577"/>
+          <ac:spMkLst>
+            <pc:docMk/>
+            <pc:sldMk cId="883794286" sldId="293"/>
+            <ac:spMk id="2" creationId="{88531A44-87A1-4DF4-993F-E7C266C40349}"/>
+          </ac:spMkLst>
+        </pc:spChg>
+        <pc:spChg chg="mod">
+          <ac:chgData name="Di Mattia Alessandro Edoardo Giorgio David" userId="f8954a66-e5ad-4a1c-9536-1d2117047f5f" providerId="ADAL" clId="{44D5592E-0B8C-4B71-8BBC-22FE2CB53AF8}" dt="2021-11-15T10:32:15.924" v="4634" actId="207"/>
+          <ac:spMkLst>
+            <pc:docMk/>
+            <pc:sldMk cId="883794286" sldId="293"/>
+            <ac:spMk id="3" creationId="{901BFA49-436A-4F8B-BF7B-4323A039D922}"/>
+          </ac:spMkLst>
+        </pc:spChg>
+        <pc:graphicFrameChg chg="add mod modGraphic">
+          <ac:chgData name="Di Mattia Alessandro Edoardo Giorgio David" userId="f8954a66-e5ad-4a1c-9536-1d2117047f5f" providerId="ADAL" clId="{44D5592E-0B8C-4B71-8BBC-22FE2CB53AF8}" dt="2021-11-08T14:59:59.509" v="4123" actId="1076"/>
+          <ac:graphicFrameMkLst>
+            <pc:docMk/>
+            <pc:sldMk cId="883794286" sldId="293"/>
+            <ac:graphicFrameMk id="5" creationId="{BE968108-985A-45F3-AE05-61BE6C503DE5}"/>
+          </ac:graphicFrameMkLst>
+        </pc:graphicFrameChg>
+      </pc:sldChg>
+      <pc:sldChg chg="addSp delSp modSp new mod modClrScheme chgLayout">
+        <pc:chgData name="Di Mattia Alessandro Edoardo Giorgio David" userId="f8954a66-e5ad-4a1c-9536-1d2117047f5f" providerId="ADAL" clId="{44D5592E-0B8C-4B71-8BBC-22FE2CB53AF8}" dt="2021-11-08T14:48:39.997" v="3792" actId="12789"/>
+        <pc:sldMkLst>
+          <pc:docMk/>
+          <pc:sldMk cId="872569027" sldId="294"/>
+        </pc:sldMkLst>
+        <pc:spChg chg="del">
+          <ac:chgData name="Di Mattia Alessandro Edoardo Giorgio David" userId="f8954a66-e5ad-4a1c-9536-1d2117047f5f" providerId="ADAL" clId="{44D5592E-0B8C-4B71-8BBC-22FE2CB53AF8}" dt="2021-11-08T14:48:08.522" v="3788" actId="700"/>
+          <ac:spMkLst>
+            <pc:docMk/>
+            <pc:sldMk cId="872569027" sldId="294"/>
+            <ac:spMk id="2" creationId="{D206A12E-73BF-467A-91DE-F444446E8477}"/>
+          </ac:spMkLst>
+        </pc:spChg>
+        <pc:spChg chg="del">
+          <ac:chgData name="Di Mattia Alessandro Edoardo Giorgio David" userId="f8954a66-e5ad-4a1c-9536-1d2117047f5f" providerId="ADAL" clId="{44D5592E-0B8C-4B71-8BBC-22FE2CB53AF8}" dt="2021-11-08T14:48:08.522" v="3788" actId="700"/>
+          <ac:spMkLst>
+            <pc:docMk/>
+            <pc:sldMk cId="872569027" sldId="294"/>
+            <ac:spMk id="3" creationId="{C06C9E30-E2B5-4ED6-9EE0-5CC1BEEA2D35}"/>
+          </ac:spMkLst>
+        </pc:spChg>
+        <pc:picChg chg="add mod">
+          <ac:chgData name="Di Mattia Alessandro Edoardo Giorgio David" userId="f8954a66-e5ad-4a1c-9536-1d2117047f5f" providerId="ADAL" clId="{44D5592E-0B8C-4B71-8BBC-22FE2CB53AF8}" dt="2021-11-08T14:48:39.997" v="3792" actId="12789"/>
+          <ac:picMkLst>
+            <pc:docMk/>
+            <pc:sldMk cId="872569027" sldId="294"/>
+            <ac:picMk id="5" creationId="{24D07324-61C3-4501-9D4F-E95A71F02A61}"/>
+          </ac:picMkLst>
+        </pc:picChg>
+      </pc:sldChg>
+      <pc:sldChg chg="addSp modSp new mod">
+        <pc:chgData name="Di Mattia Alessandro Edoardo Giorgio David" userId="f8954a66-e5ad-4a1c-9536-1d2117047f5f" providerId="ADAL" clId="{44D5592E-0B8C-4B71-8BBC-22FE2CB53AF8}" dt="2021-11-08T15:10:33.880" v="4211"/>
+        <pc:sldMkLst>
+          <pc:docMk/>
+          <pc:sldMk cId="2402026329" sldId="295"/>
+        </pc:sldMkLst>
+        <pc:picChg chg="add mod">
+          <ac:chgData name="Di Mattia Alessandro Edoardo Giorgio David" userId="f8954a66-e5ad-4a1c-9536-1d2117047f5f" providerId="ADAL" clId="{44D5592E-0B8C-4B71-8BBC-22FE2CB53AF8}" dt="2021-11-08T15:10:33.880" v="4211"/>
+          <ac:picMkLst>
+            <pc:docMk/>
+            <pc:sldMk cId="2402026329" sldId="295"/>
+            <ac:picMk id="3" creationId="{C6FDEF4D-DD92-4DE7-9A93-D7A3F0785557}"/>
+          </ac:picMkLst>
+        </pc:picChg>
+      </pc:sldChg>
+      <pc:sldMasterChg chg="modSp mod">
+        <pc:chgData name="Di Mattia Alessandro Edoardo Giorgio David" userId="f8954a66-e5ad-4a1c-9536-1d2117047f5f" providerId="ADAL" clId="{44D5592E-0B8C-4B71-8BBC-22FE2CB53AF8}" dt="2021-11-09T12:21:09.192" v="4221" actId="1076"/>
+        <pc:sldMasterMkLst>
+          <pc:docMk/>
+          <pc:sldMasterMk cId="626235760" sldId="2147483684"/>
+        </pc:sldMasterMkLst>
+        <pc:spChg chg="mod">
+          <ac:chgData name="Di Mattia Alessandro Edoardo Giorgio David" userId="f8954a66-e5ad-4a1c-9536-1d2117047f5f" providerId="ADAL" clId="{44D5592E-0B8C-4B71-8BBC-22FE2CB53AF8}" dt="2021-11-09T12:21:09.192" v="4221" actId="1076"/>
+          <ac:spMkLst>
+            <pc:docMk/>
+            <pc:sldMasterMk cId="626235760" sldId="2147483684"/>
+            <ac:spMk id="2" creationId="{694CB108-4A1C-4218-9FA9-7C3065D8017E}"/>
+          </ac:spMkLst>
+        </pc:spChg>
+      </pc:sldMasterChg>
+      <pc:sldMasterChg chg="addSp modSp mod">
+        <pc:chgData name="Di Mattia Alessandro Edoardo Giorgio David" userId="f8954a66-e5ad-4a1c-9536-1d2117047f5f" providerId="ADAL" clId="{44D5592E-0B8C-4B71-8BBC-22FE2CB53AF8}" dt="2021-11-09T12:20:59.139" v="4220" actId="1076"/>
+        <pc:sldMasterMkLst>
+          <pc:docMk/>
+          <pc:sldMasterMk cId="2778224394" sldId="2147483694"/>
+        </pc:sldMasterMkLst>
+        <pc:spChg chg="mod">
+          <ac:chgData name="Di Mattia Alessandro Edoardo Giorgio David" userId="f8954a66-e5ad-4a1c-9536-1d2117047f5f" providerId="ADAL" clId="{44D5592E-0B8C-4B71-8BBC-22FE2CB53AF8}" dt="2021-11-09T12:19:27.813" v="4215" actId="1076"/>
+          <ac:spMkLst>
+            <pc:docMk/>
+            <pc:sldMasterMk cId="2778224394" sldId="2147483694"/>
+            <ac:spMk id="7" creationId="{859F6C5B-4AF5-454D-AF1A-B8C3480E7A71}"/>
+          </ac:spMkLst>
+        </pc:spChg>
+        <pc:spChg chg="add mod">
+          <ac:chgData name="Di Mattia Alessandro Edoardo Giorgio David" userId="f8954a66-e5ad-4a1c-9536-1d2117047f5f" providerId="ADAL" clId="{44D5592E-0B8C-4B71-8BBC-22FE2CB53AF8}" dt="2021-11-09T12:20:59.139" v="4220" actId="1076"/>
+          <ac:spMkLst>
+            <pc:docMk/>
+            <pc:sldMasterMk cId="2778224394" sldId="2147483694"/>
+            <ac:spMk id="9" creationId="{0AF44514-FDE4-4AF7-AEDD-4F0C1FF0E3A8}"/>
+          </ac:spMkLst>
+        </pc:spChg>
+      </pc:sldMasterChg>
+    </pc:docChg>
+  </pc:docChgLst>
+  <pc:docChgLst>
+    <pc:chgData name="Alessandro Edoardo Giorgio David" userId="f8954a66-e5ad-4a1c-9536-1d2117047f5f" providerId="ADAL" clId="{D93D8B19-FA20-47A5-B3D7-0A6BF3F53C46}"/>
+    <pc:docChg chg="undo custSel addSld delSld modSld sldOrd">
+      <pc:chgData name="Alessandro Edoardo Giorgio David" userId="f8954a66-e5ad-4a1c-9536-1d2117047f5f" providerId="ADAL" clId="{D93D8B19-FA20-47A5-B3D7-0A6BF3F53C46}" dt="2021-08-10T13:18:36.419" v="625"/>
+      <pc:docMkLst>
+        <pc:docMk/>
+      </pc:docMkLst>
+      <pc:sldChg chg="modSp mod">
+        <pc:chgData name="Alessandro Edoardo Giorgio David" userId="f8954a66-e5ad-4a1c-9536-1d2117047f5f" providerId="ADAL" clId="{D93D8B19-FA20-47A5-B3D7-0A6BF3F53C46}" dt="2021-08-10T10:46:13.837" v="233" actId="790"/>
+        <pc:sldMkLst>
+          <pc:docMk/>
+          <pc:sldMk cId="3153607966" sldId="280"/>
+        </pc:sldMkLst>
+        <pc:spChg chg="mod">
+          <ac:chgData name="Alessandro Edoardo Giorgio David" userId="f8954a66-e5ad-4a1c-9536-1d2117047f5f" providerId="ADAL" clId="{D93D8B19-FA20-47A5-B3D7-0A6BF3F53C46}" dt="2021-08-10T10:46:13.837" v="233" actId="790"/>
+          <ac:spMkLst>
+            <pc:docMk/>
+            <pc:sldMk cId="3153607966" sldId="280"/>
+            <ac:spMk id="2" creationId="{683FD103-5EF1-48AB-8EC6-4C1921FB118B}"/>
+          </ac:spMkLst>
+        </pc:spChg>
+      </pc:sldChg>
+      <pc:sldChg chg="modSp new mod">
+        <pc:chgData name="Alessandro Edoardo Giorgio David" userId="f8954a66-e5ad-4a1c-9536-1d2117047f5f" providerId="ADAL" clId="{D93D8B19-FA20-47A5-B3D7-0A6BF3F53C46}" dt="2021-08-10T10:28:51.472" v="62" actId="207"/>
+        <pc:sldMkLst>
+          <pc:docMk/>
+          <pc:sldMk cId="82894947" sldId="281"/>
+        </pc:sldMkLst>
+        <pc:spChg chg="mod">
+          <ac:chgData name="Alessandro Edoardo Giorgio David" userId="f8954a66-e5ad-4a1c-9536-1d2117047f5f" providerId="ADAL" clId="{D93D8B19-FA20-47A5-B3D7-0A6BF3F53C46}" dt="2021-08-10T10:14:51.966" v="22" actId="20577"/>
+          <ac:spMkLst>
+            <pc:docMk/>
+            <pc:sldMk cId="82894947" sldId="281"/>
+            <ac:spMk id="2" creationId="{BE245DFD-974C-438A-8A62-383465C76576}"/>
+          </ac:spMkLst>
+        </pc:spChg>
+        <pc:spChg chg="mod">
+          <ac:chgData name="Alessandro Edoardo Giorgio David" userId="f8954a66-e5ad-4a1c-9536-1d2117047f5f" providerId="ADAL" clId="{D93D8B19-FA20-47A5-B3D7-0A6BF3F53C46}" dt="2021-08-10T10:28:51.472" v="62" actId="207"/>
+          <ac:spMkLst>
+            <pc:docMk/>
+            <pc:sldMk cId="82894947" sldId="281"/>
+            <ac:spMk id="3" creationId="{3E1E0E27-35DF-4C52-9582-63B1D4BF7111}"/>
+          </ac:spMkLst>
+        </pc:spChg>
+      </pc:sldChg>
+      <pc:sldChg chg="del">
+        <pc:chgData name="Alessandro Edoardo Giorgio David" userId="f8954a66-e5ad-4a1c-9536-1d2117047f5f" providerId="ADAL" clId="{D93D8B19-FA20-47A5-B3D7-0A6BF3F53C46}" dt="2021-08-10T10:13:12.792" v="0" actId="2696"/>
+        <pc:sldMkLst>
+          <pc:docMk/>
+          <pc:sldMk cId="153053765" sldId="281"/>
+        </pc:sldMkLst>
+      </pc:sldChg>
+      <pc:sldChg chg="del">
+        <pc:chgData name="Alessandro Edoardo Giorgio David" userId="f8954a66-e5ad-4a1c-9536-1d2117047f5f" providerId="ADAL" clId="{D93D8B19-FA20-47A5-B3D7-0A6BF3F53C46}" dt="2021-08-10T10:13:12.792" v="0" actId="2696"/>
+        <pc:sldMkLst>
+          <pc:docMk/>
+          <pc:sldMk cId="1400904179" sldId="282"/>
+        </pc:sldMkLst>
+      </pc:sldChg>
+      <pc:sldChg chg="addSp delSp modSp new mod">
+        <pc:chgData name="Alessandro Edoardo Giorgio David" userId="f8954a66-e5ad-4a1c-9536-1d2117047f5f" providerId="ADAL" clId="{D93D8B19-FA20-47A5-B3D7-0A6BF3F53C46}" dt="2021-08-10T10:38:07.634" v="232" actId="1076"/>
+        <pc:sldMkLst>
+          <pc:docMk/>
+          <pc:sldMk cId="1895599324" sldId="282"/>
+        </pc:sldMkLst>
+        <pc:spChg chg="mod">
+          <ac:chgData name="Alessandro Edoardo Giorgio David" userId="f8954a66-e5ad-4a1c-9536-1d2117047f5f" providerId="ADAL" clId="{D93D8B19-FA20-47A5-B3D7-0A6BF3F53C46}" dt="2021-08-10T10:16:08.123" v="32" actId="122"/>
+          <ac:spMkLst>
+            <pc:docMk/>
+            <pc:sldMk cId="1895599324" sldId="282"/>
+            <ac:spMk id="2" creationId="{87D71CA4-FA28-4119-9FA4-29A4F73E7090}"/>
+          </ac:spMkLst>
+        </pc:spChg>
+        <pc:spChg chg="del">
+          <ac:chgData name="Alessandro Edoardo Giorgio David" userId="f8954a66-e5ad-4a1c-9536-1d2117047f5f" providerId="ADAL" clId="{D93D8B19-FA20-47A5-B3D7-0A6BF3F53C46}" dt="2021-08-10T10:17:09.636" v="33"/>
+          <ac:spMkLst>
+            <pc:docMk/>
+            <pc:sldMk cId="1895599324" sldId="282"/>
+            <ac:spMk id="3" creationId="{3964FC0C-D925-4B0E-8291-EAA55CC211B1}"/>
+          </ac:spMkLst>
+        </pc:spChg>
+        <pc:spChg chg="add del mod">
+          <ac:chgData name="Alessandro Edoardo Giorgio David" userId="f8954a66-e5ad-4a1c-9536-1d2117047f5f" providerId="ADAL" clId="{D93D8B19-FA20-47A5-B3D7-0A6BF3F53C46}" dt="2021-08-10T10:37:58.383" v="230"/>
+          <ac:spMkLst>
+            <pc:docMk/>
+            <pc:sldMk cId="1895599324" sldId="282"/>
+            <ac:spMk id="6" creationId="{885E4550-8130-4F7F-9D52-4F66C2144B16}"/>
+          </ac:spMkLst>
+        </pc:spChg>
+        <pc:spChg chg="add del mod">
+          <ac:chgData name="Alessandro Edoardo Giorgio David" userId="f8954a66-e5ad-4a1c-9536-1d2117047f5f" providerId="ADAL" clId="{D93D8B19-FA20-47A5-B3D7-0A6BF3F53C46}" dt="2021-08-10T10:37:56.537" v="229"/>
+          <ac:spMkLst>
+            <pc:docMk/>
+            <pc:sldMk cId="1895599324" sldId="282"/>
+            <ac:spMk id="7" creationId="{2A424E35-37C5-4BB7-AEFD-7946AA8222DA}"/>
+          </ac:spMkLst>
+        </pc:spChg>
+        <pc:spChg chg="add del mod">
+          <ac:chgData name="Alessandro Edoardo Giorgio David" userId="f8954a66-e5ad-4a1c-9536-1d2117047f5f" providerId="ADAL" clId="{D93D8B19-FA20-47A5-B3D7-0A6BF3F53C46}" dt="2021-08-10T10:37:56.537" v="229"/>
+          <ac:spMkLst>
+            <pc:docMk/>
+            <pc:sldMk cId="1895599324" sldId="282"/>
+            <ac:spMk id="8" creationId="{44C2E0E1-D8A5-4A24-BE0B-79EC78EBE026}"/>
+          </ac:spMkLst>
+        </pc:spChg>
+        <pc:spChg chg="add del mod">
+          <ac:chgData name="Alessandro Edoardo Giorgio David" userId="f8954a66-e5ad-4a1c-9536-1d2117047f5f" providerId="ADAL" clId="{D93D8B19-FA20-47A5-B3D7-0A6BF3F53C46}" dt="2021-08-10T10:37:56.537" v="229"/>
+          <ac:spMkLst>
+            <pc:docMk/>
+            <pc:sldMk cId="1895599324" sldId="282"/>
+            <ac:spMk id="9" creationId="{8198573A-8C28-4217-A85B-862A88DCED6E}"/>
+          </ac:spMkLst>
+        </pc:spChg>
+        <pc:spChg chg="add del mod">
+          <ac:chgData name="Alessandro Edoardo Giorgio David" userId="f8954a66-e5ad-4a1c-9536-1d2117047f5f" providerId="ADAL" clId="{D93D8B19-FA20-47A5-B3D7-0A6BF3F53C46}" dt="2021-08-10T10:37:56.537" v="229"/>
+          <ac:spMkLst>
+            <pc:docMk/>
+            <pc:sldMk cId="1895599324" sldId="282"/>
+            <ac:spMk id="10" creationId="{1E390A35-27E2-40B5-8E8D-7FEEBE6CE226}"/>
+          </ac:spMkLst>
+        </pc:spChg>
+        <pc:spChg chg="add del mod">
+          <ac:chgData name="Alessandro Edoardo Giorgio David" userId="f8954a66-e5ad-4a1c-9536-1d2117047f5f" providerId="ADAL" clId="{D93D8B19-FA20-47A5-B3D7-0A6BF3F53C46}" dt="2021-08-10T10:37:56.537" v="229"/>
+          <ac:spMkLst>
+            <pc:docMk/>
+            <pc:sldMk cId="1895599324" sldId="282"/>
+            <ac:spMk id="11" creationId="{EC0EAA35-06DF-4699-993E-23771BD22099}"/>
+          </ac:spMkLst>
+        </pc:spChg>
+        <pc:spChg chg="add del mod">
+          <ac:chgData name="Alessandro Edoardo Giorgio David" userId="f8954a66-e5ad-4a1c-9536-1d2117047f5f" providerId="ADAL" clId="{D93D8B19-FA20-47A5-B3D7-0A6BF3F53C46}" dt="2021-08-10T10:37:56.537" v="229"/>
+          <ac:spMkLst>
+            <pc:docMk/>
+            <pc:sldMk cId="1895599324" sldId="282"/>
+            <ac:spMk id="12" creationId="{CA606416-93E9-42D9-AA61-D6EE5458D484}"/>
+          </ac:spMkLst>
+        </pc:spChg>
+        <pc:spChg chg="add del mod">
+          <ac:chgData name="Alessandro Edoardo Giorgio David" userId="f8954a66-e5ad-4a1c-9536-1d2117047f5f" providerId="ADAL" clId="{D93D8B19-FA20-47A5-B3D7-0A6BF3F53C46}" dt="2021-08-10T10:37:56.537" v="229"/>
+          <ac:spMkLst>
+            <pc:docMk/>
+            <pc:sldMk cId="1895599324" sldId="282"/>
+            <ac:spMk id="13" creationId="{C0340826-EC2D-45DE-B93E-F35862B6763F}"/>
+          </ac:spMkLst>
+        </pc:spChg>
+        <pc:spChg chg="add del mod">
+          <ac:chgData name="Alessandro Edoardo Giorgio David" userId="f8954a66-e5ad-4a1c-9536-1d2117047f5f" providerId="ADAL" clId="{D93D8B19-FA20-47A5-B3D7-0A6BF3F53C46}" dt="2021-08-10T10:37:56.537" v="229"/>
+          <ac:spMkLst>
+            <pc:docMk/>
+            <pc:sldMk cId="1895599324" sldId="282"/>
+            <ac:spMk id="14" creationId="{627EC2C5-ACD9-4F36-ACCB-A890F2B84790}"/>
+          </ac:spMkLst>
+        </pc:spChg>
+        <pc:spChg chg="add del mod">
+          <ac:chgData name="Alessandro Edoardo Giorgio David" userId="f8954a66-e5ad-4a1c-9536-1d2117047f5f" providerId="ADAL" clId="{D93D8B19-FA20-47A5-B3D7-0A6BF3F53C46}" dt="2021-08-10T10:37:56.537" v="229"/>
+          <ac:spMkLst>
+            <pc:docMk/>
+            <pc:sldMk cId="1895599324" sldId="282"/>
+            <ac:spMk id="15" creationId="{EB70D244-E4BC-4AFA-95F6-DAF3B8332756}"/>
+          </ac:spMkLst>
+        </pc:spChg>
+        <pc:spChg chg="add del mod">
+          <ac:chgData name="Alessandro Edoardo Giorgio David" userId="f8954a66-e5ad-4a1c-9536-1d2117047f5f" providerId="ADAL" clId="{D93D8B19-FA20-47A5-B3D7-0A6BF3F53C46}" dt="2021-08-10T10:37:56.537" v="229"/>
+          <ac:spMkLst>
+            <pc:docMk/>
+            <pc:sldMk cId="1895599324" sldId="282"/>
+            <ac:spMk id="16" creationId="{BC7EAA22-D807-4009-B776-7B37E3281949}"/>
+          </ac:spMkLst>
+        </pc:spChg>
+        <pc:spChg chg="add del mod">
+          <ac:chgData name="Alessandro Edoardo Giorgio David" userId="f8954a66-e5ad-4a1c-9536-1d2117047f5f" providerId="ADAL" clId="{D93D8B19-FA20-47A5-B3D7-0A6BF3F53C46}" dt="2021-08-10T10:37:56.537" v="229"/>
+          <ac:spMkLst>
+            <pc:docMk/>
+            <pc:sldMk cId="1895599324" sldId="282"/>
+            <ac:spMk id="17" creationId="{E6876750-ED10-4516-B12A-766615DA7F5F}"/>
+          </ac:spMkLst>
+        </pc:spChg>
+        <pc:spChg chg="add del mod">
+          <ac:chgData name="Alessandro Edoardo Giorgio David" userId="f8954a66-e5ad-4a1c-9536-1d2117047f5f" providerId="ADAL" clId="{D93D8B19-FA20-47A5-B3D7-0A6BF3F53C46}" dt="2021-08-10T10:37:56.537" v="229"/>
+          <ac:spMkLst>
+            <pc:docMk/>
+            <pc:sldMk cId="1895599324" sldId="282"/>
+            <ac:spMk id="18" creationId="{BBA170D5-161D-4106-9F6D-28DF6D145718}"/>
+          </ac:spMkLst>
+        </pc:spChg>
+        <pc:spChg chg="add del mod">
+          <ac:chgData name="Alessandro Edoardo Giorgio David" userId="f8954a66-e5ad-4a1c-9536-1d2117047f5f" providerId="ADAL" clId="{D93D8B19-FA20-47A5-B3D7-0A6BF3F53C46}" dt="2021-08-10T10:37:56.537" v="229"/>
+          <ac:spMkLst>
+            <pc:docMk/>
+            <pc:sldMk cId="1895599324" sldId="282"/>
+            <ac:spMk id="19" creationId="{42D6E6A3-2E91-458F-A94D-9CF6BCD3D80F}"/>
+          </ac:spMkLst>
+        </pc:spChg>
+        <pc:spChg chg="add del mod">
+          <ac:chgData name="Alessandro Edoardo Giorgio David" userId="f8954a66-e5ad-4a1c-9536-1d2117047f5f" providerId="ADAL" clId="{D93D8B19-FA20-47A5-B3D7-0A6BF3F53C46}" dt="2021-08-10T10:37:56.537" v="229"/>
+          <ac:spMkLst>
+            <pc:docMk/>
+            <pc:sldMk cId="1895599324" sldId="282"/>
+            <ac:spMk id="20" creationId="{CB2ED075-60A6-4645-BDDD-643E5A2D19A4}"/>
+          </ac:spMkLst>
+        </pc:spChg>
+        <pc:spChg chg="add del mod">
+          <ac:chgData name="Alessandro Edoardo Giorgio David" userId="f8954a66-e5ad-4a1c-9536-1d2117047f5f" providerId="ADAL" clId="{D93D8B19-FA20-47A5-B3D7-0A6BF3F53C46}" dt="2021-08-10T10:37:56.537" v="229"/>
+          <ac:spMkLst>
+            <pc:docMk/>
+            <pc:sldMk cId="1895599324" sldId="282"/>
+            <ac:spMk id="21" creationId="{7DCCC8F3-7542-4668-93BD-298426BC6ECA}"/>
+          </ac:spMkLst>
+        </pc:spChg>
+        <pc:spChg chg="add del mod">
+          <ac:chgData name="Alessandro Edoardo Giorgio David" userId="f8954a66-e5ad-4a1c-9536-1d2117047f5f" providerId="ADAL" clId="{D93D8B19-FA20-47A5-B3D7-0A6BF3F53C46}" dt="2021-08-10T10:37:56.537" v="229"/>
+          <ac:spMkLst>
+            <pc:docMk/>
+            <pc:sldMk cId="1895599324" sldId="282"/>
+            <ac:spMk id="22" creationId="{52C17F89-292C-43F7-92D4-F63885EC0909}"/>
+          </ac:spMkLst>
+        </pc:spChg>
+        <pc:spChg chg="add del mod">
+          <ac:chgData name="Alessandro Edoardo Giorgio David" userId="f8954a66-e5ad-4a1c-9536-1d2117047f5f" providerId="ADAL" clId="{D93D8B19-FA20-47A5-B3D7-0A6BF3F53C46}" dt="2021-08-10T10:37:56.537" v="229"/>
+          <ac:spMkLst>
+            <pc:docMk/>
+            <pc:sldMk cId="1895599324" sldId="282"/>
+            <ac:spMk id="23" creationId="{CFC0F26A-396A-423F-9A68-4FF321EC5CF6}"/>
+          </ac:spMkLst>
+        </pc:spChg>
+        <pc:picChg chg="add del mod">
+          <ac:chgData name="Alessandro Edoardo Giorgio David" userId="f8954a66-e5ad-4a1c-9536-1d2117047f5f" providerId="ADAL" clId="{D93D8B19-FA20-47A5-B3D7-0A6BF3F53C46}" dt="2021-08-10T10:37:53.344" v="227" actId="478"/>
+          <ac:picMkLst>
+            <pc:docMk/>
+            <pc:sldMk cId="1895599324" sldId="282"/>
+            <ac:picMk id="4" creationId="{C57ECC0F-431A-420F-AA1D-6673B1FA11EF}"/>
+          </ac:picMkLst>
+        </pc:picChg>
+        <pc:picChg chg="add mod">
+          <ac:chgData name="Alessandro Edoardo Giorgio David" userId="f8954a66-e5ad-4a1c-9536-1d2117047f5f" providerId="ADAL" clId="{D93D8B19-FA20-47A5-B3D7-0A6BF3F53C46}" dt="2021-08-10T10:38:07.634" v="232" actId="1076"/>
+          <ac:picMkLst>
+            <pc:docMk/>
+            <pc:sldMk cId="1895599324" sldId="282"/>
+            <ac:picMk id="24" creationId="{999DE7FE-82DE-48AD-BB23-F15CA56C5C1A}"/>
+          </ac:picMkLst>
+        </pc:picChg>
+      </pc:sldChg>
+      <pc:sldChg chg="del">
+        <pc:chgData name="Alessandro Edoardo Giorgio David" userId="f8954a66-e5ad-4a1c-9536-1d2117047f5f" providerId="ADAL" clId="{D93D8B19-FA20-47A5-B3D7-0A6BF3F53C46}" dt="2021-08-10T10:13:12.792" v="0" actId="2696"/>
+        <pc:sldMkLst>
+          <pc:docMk/>
+          <pc:sldMk cId="194577708" sldId="283"/>
+        </pc:sldMkLst>
+      </pc:sldChg>
+      <pc:sldChg chg="modSp new mod ord">
+        <pc:chgData name="Alessandro Edoardo Giorgio David" userId="f8954a66-e5ad-4a1c-9536-1d2117047f5f" providerId="ADAL" clId="{D93D8B19-FA20-47A5-B3D7-0A6BF3F53C46}" dt="2021-08-10T13:18:36.419" v="625"/>
+        <pc:sldMkLst>
+          <pc:docMk/>
+          <pc:sldMk cId="4096371522" sldId="283"/>
+        </pc:sldMkLst>
+        <pc:spChg chg="mod">
+          <ac:chgData name="Alessandro Edoardo Giorgio David" userId="f8954a66-e5ad-4a1c-9536-1d2117047f5f" providerId="ADAL" clId="{D93D8B19-FA20-47A5-B3D7-0A6BF3F53C46}" dt="2021-08-10T10:17:45.238" v="42" actId="122"/>
+          <ac:spMkLst>
+            <pc:docMk/>
+            <pc:sldMk cId="4096371522" sldId="283"/>
+            <ac:spMk id="2" creationId="{408B4B91-F23E-4673-8DB8-6A5A02D61CB6}"/>
+          </ac:spMkLst>
+        </pc:spChg>
+        <pc:spChg chg="mod">
+          <ac:chgData name="Alessandro Edoardo Giorgio David" userId="f8954a66-e5ad-4a1c-9536-1d2117047f5f" providerId="ADAL" clId="{D93D8B19-FA20-47A5-B3D7-0A6BF3F53C46}" dt="2021-08-10T13:14:41.330" v="611" actId="5793"/>
+          <ac:spMkLst>
+            <pc:docMk/>
+            <pc:sldMk cId="4096371522" sldId="283"/>
+            <ac:spMk id="3" creationId="{83BD5FD3-58A3-4593-BA71-B00F2D7F8C6A}"/>
+          </ac:spMkLst>
+        </pc:spChg>
+      </pc:sldChg>
+      <pc:sldChg chg="modSp new mod">
+        <pc:chgData name="Alessandro Edoardo Giorgio David" userId="f8954a66-e5ad-4a1c-9536-1d2117047f5f" providerId="ADAL" clId="{D93D8B19-FA20-47A5-B3D7-0A6BF3F53C46}" dt="2021-08-10T10:52:43.487" v="551" actId="20577"/>
+        <pc:sldMkLst>
+          <pc:docMk/>
+          <pc:sldMk cId="2952385952" sldId="284"/>
+        </pc:sldMkLst>
+        <pc:spChg chg="mod">
+          <ac:chgData name="Alessandro Edoardo Giorgio David" userId="f8954a66-e5ad-4a1c-9536-1d2117047f5f" providerId="ADAL" clId="{D93D8B19-FA20-47A5-B3D7-0A6BF3F53C46}" dt="2021-08-10T10:47:33.137" v="259" actId="790"/>
+          <ac:spMkLst>
+            <pc:docMk/>
+            <pc:sldMk cId="2952385952" sldId="284"/>
+            <ac:spMk id="2" creationId="{A77BED49-8D96-4399-83D4-396828225BE7}"/>
+          </ac:spMkLst>
+        </pc:spChg>
+        <pc:spChg chg="mod">
+          <ac:chgData name="Alessandro Edoardo Giorgio David" userId="f8954a66-e5ad-4a1c-9536-1d2117047f5f" providerId="ADAL" clId="{D93D8B19-FA20-47A5-B3D7-0A6BF3F53C46}" dt="2021-08-10T10:52:43.487" v="551" actId="20577"/>
+          <ac:spMkLst>
+            <pc:docMk/>
+            <pc:sldMk cId="2952385952" sldId="284"/>
+            <ac:spMk id="3" creationId="{23098DAD-D0EB-4E6F-83C4-BF0416B344FF}"/>
+          </ac:spMkLst>
+        </pc:spChg>
+      </pc:sldChg>
+      <pc:sldChg chg="del">
+        <pc:chgData name="Alessandro Edoardo Giorgio David" userId="f8954a66-e5ad-4a1c-9536-1d2117047f5f" providerId="ADAL" clId="{D93D8B19-FA20-47A5-B3D7-0A6BF3F53C46}" dt="2021-08-10T10:13:12.792" v="0" actId="2696"/>
+        <pc:sldMkLst>
+          <pc:docMk/>
+          <pc:sldMk cId="3040764519" sldId="284"/>
+        </pc:sldMkLst>
+      </pc:sldChg>
+      <pc:sldChg chg="del">
+        <pc:chgData name="Alessandro Edoardo Giorgio David" userId="f8954a66-e5ad-4a1c-9536-1d2117047f5f" providerId="ADAL" clId="{D93D8B19-FA20-47A5-B3D7-0A6BF3F53C46}" dt="2021-08-10T10:13:12.792" v="0" actId="2696"/>
+        <pc:sldMkLst>
+          <pc:docMk/>
+          <pc:sldMk cId="1677543011" sldId="285"/>
+        </pc:sldMkLst>
+      </pc:sldChg>
+      <pc:sldChg chg="addSp delSp modSp new mod">
+        <pc:chgData name="Alessandro Edoardo Giorgio David" userId="f8954a66-e5ad-4a1c-9536-1d2117047f5f" providerId="ADAL" clId="{D93D8B19-FA20-47A5-B3D7-0A6BF3F53C46}" dt="2021-08-10T13:12:18.984" v="608" actId="1076"/>
+        <pc:sldMkLst>
+          <pc:docMk/>
+          <pc:sldMk cId="2360709121" sldId="285"/>
+        </pc:sldMkLst>
+        <pc:spChg chg="add del mod">
+          <ac:chgData name="Alessandro Edoardo Giorgio David" userId="f8954a66-e5ad-4a1c-9536-1d2117047f5f" providerId="ADAL" clId="{D93D8B19-FA20-47A5-B3D7-0A6BF3F53C46}" dt="2021-08-10T13:10:40.139" v="601" actId="122"/>
+          <ac:spMkLst>
+            <pc:docMk/>
+            <pc:sldMk cId="2360709121" sldId="285"/>
+            <ac:spMk id="2" creationId="{850F8AE4-D095-492B-B6BD-51B7ED3135F8}"/>
+          </ac:spMkLst>
+        </pc:spChg>
+        <pc:spChg chg="add del">
+          <ac:chgData name="Alessandro Edoardo Giorgio David" userId="f8954a66-e5ad-4a1c-9536-1d2117047f5f" providerId="ADAL" clId="{D93D8B19-FA20-47A5-B3D7-0A6BF3F53C46}" dt="2021-08-10T13:12:03.331" v="606"/>
+          <ac:spMkLst>
+            <pc:docMk/>
+            <pc:sldMk cId="2360709121" sldId="285"/>
+            <ac:spMk id="3" creationId="{929EB4A7-08BB-45A8-B065-13489C10CDB2}"/>
+          </ac:spMkLst>
+        </pc:spChg>
+        <pc:spChg chg="add del mod">
+          <ac:chgData name="Alessandro Edoardo Giorgio David" userId="f8954a66-e5ad-4a1c-9536-1d2117047f5f" providerId="ADAL" clId="{D93D8B19-FA20-47A5-B3D7-0A6BF3F53C46}" dt="2021-08-10T13:10:19.179" v="554"/>
+          <ac:spMkLst>
+            <pc:docMk/>
+            <pc:sldMk cId="2360709121" sldId="285"/>
+            <ac:spMk id="4" creationId="{0CA50546-66E0-4814-8773-47BC0BE9B3C9}"/>
+          </ac:spMkLst>
+        </pc:spChg>
+        <pc:picChg chg="add del mod">
+          <ac:chgData name="Alessandro Edoardo Giorgio David" userId="f8954a66-e5ad-4a1c-9536-1d2117047f5f" providerId="ADAL" clId="{D93D8B19-FA20-47A5-B3D7-0A6BF3F53C46}" dt="2021-08-10T13:10:59.357" v="605"/>
+          <ac:picMkLst>
+            <pc:docMk/>
+            <pc:sldMk cId="2360709121" sldId="285"/>
+            <ac:picMk id="5" creationId="{6EDF5A3D-5180-4B47-A43F-F58ACF23AF90}"/>
+          </ac:picMkLst>
+        </pc:picChg>
+        <pc:picChg chg="add mod">
+          <ac:chgData name="Alessandro Edoardo Giorgio David" userId="f8954a66-e5ad-4a1c-9536-1d2117047f5f" providerId="ADAL" clId="{D93D8B19-FA20-47A5-B3D7-0A6BF3F53C46}" dt="2021-08-10T13:12:18.984" v="608" actId="1076"/>
+          <ac:picMkLst>
+            <pc:docMk/>
+            <pc:sldMk cId="2360709121" sldId="285"/>
+            <ac:picMk id="6" creationId="{FB3986C0-44F4-4DC9-9E52-F7C4AC423527}"/>
+          </ac:picMkLst>
+        </pc:picChg>
+      </pc:sldChg>
+      <pc:sldChg chg="addSp delSp modSp new mod">
+        <pc:chgData name="Alessandro Edoardo Giorgio David" userId="f8954a66-e5ad-4a1c-9536-1d2117047f5f" providerId="ADAL" clId="{D93D8B19-FA20-47A5-B3D7-0A6BF3F53C46}" dt="2021-08-10T13:16:24.708" v="623" actId="122"/>
+        <pc:sldMkLst>
+          <pc:docMk/>
+          <pc:sldMk cId="2169398848" sldId="286"/>
+        </pc:sldMkLst>
+        <pc:spChg chg="mod">
+          <ac:chgData name="Alessandro Edoardo Giorgio David" userId="f8954a66-e5ad-4a1c-9536-1d2117047f5f" providerId="ADAL" clId="{D93D8B19-FA20-47A5-B3D7-0A6BF3F53C46}" dt="2021-08-10T13:16:24.708" v="623" actId="122"/>
+          <ac:spMkLst>
+            <pc:docMk/>
+            <pc:sldMk cId="2169398848" sldId="286"/>
+            <ac:spMk id="2" creationId="{E0281D5F-2FF9-472A-9E43-1E0BA5F276EA}"/>
+          </ac:spMkLst>
+        </pc:spChg>
+        <pc:spChg chg="del">
+          <ac:chgData name="Alessandro Edoardo Giorgio David" userId="f8954a66-e5ad-4a1c-9536-1d2117047f5f" providerId="ADAL" clId="{D93D8B19-FA20-47A5-B3D7-0A6BF3F53C46}" dt="2021-08-10T13:16:09.427" v="615"/>
+          <ac:spMkLst>
+            <pc:docMk/>
+            <pc:sldMk cId="2169398848" sldId="286"/>
+            <ac:spMk id="3" creationId="{3AEEC441-A224-4D27-A026-424493F51DF7}"/>
+          </ac:spMkLst>
+        </pc:spChg>
+        <pc:picChg chg="add mod">
+          <ac:chgData name="Alessandro Edoardo Giorgio David" userId="f8954a66-e5ad-4a1c-9536-1d2117047f5f" providerId="ADAL" clId="{D93D8B19-FA20-47A5-B3D7-0A6BF3F53C46}" dt="2021-08-10T13:16:17.535" v="617" actId="14100"/>
+          <ac:picMkLst>
+            <pc:docMk/>
+            <pc:sldMk cId="2169398848" sldId="286"/>
+            <ac:picMk id="4" creationId="{01EEE091-4AAC-4560-B6DB-CFE94541A2DF}"/>
+          </ac:picMkLst>
+        </pc:picChg>
+      </pc:sldChg>
+      <pc:sldChg chg="del">
+        <pc:chgData name="Alessandro Edoardo Giorgio David" userId="f8954a66-e5ad-4a1c-9536-1d2117047f5f" providerId="ADAL" clId="{D93D8B19-FA20-47A5-B3D7-0A6BF3F53C46}" dt="2021-08-10T10:13:12.792" v="0" actId="2696"/>
+        <pc:sldMkLst>
+          <pc:docMk/>
+          <pc:sldMk cId="2456525904" sldId="286"/>
+        </pc:sldMkLst>
+      </pc:sldChg>
+      <pc:sldChg chg="del">
+        <pc:chgData name="Alessandro Edoardo Giorgio David" userId="f8954a66-e5ad-4a1c-9536-1d2117047f5f" providerId="ADAL" clId="{D93D8B19-FA20-47A5-B3D7-0A6BF3F53C46}" dt="2021-08-10T10:13:12.792" v="0" actId="2696"/>
+        <pc:sldMkLst>
+          <pc:docMk/>
+          <pc:sldMk cId="2542539799" sldId="287"/>
+        </pc:sldMkLst>
+      </pc:sldChg>
+      <pc:sldChg chg="del">
+        <pc:chgData name="Alessandro Edoardo Giorgio David" userId="f8954a66-e5ad-4a1c-9536-1d2117047f5f" providerId="ADAL" clId="{D93D8B19-FA20-47A5-B3D7-0A6BF3F53C46}" dt="2021-08-10T10:13:12.792" v="0" actId="2696"/>
+        <pc:sldMkLst>
+          <pc:docMk/>
+          <pc:sldMk cId="776110747" sldId="288"/>
+        </pc:sldMkLst>
+      </pc:sldChg>
+      <pc:sldChg chg="del">
+        <pc:chgData name="Alessandro Edoardo Giorgio David" userId="f8954a66-e5ad-4a1c-9536-1d2117047f5f" providerId="ADAL" clId="{D93D8B19-FA20-47A5-B3D7-0A6BF3F53C46}" dt="2021-08-10T10:13:12.792" v="0" actId="2696"/>
+        <pc:sldMkLst>
+          <pc:docMk/>
+          <pc:sldMk cId="3865763563" sldId="289"/>
+        </pc:sldMkLst>
+      </pc:sldChg>
+      <pc:sldChg chg="del">
+        <pc:chgData name="Alessandro Edoardo Giorgio David" userId="f8954a66-e5ad-4a1c-9536-1d2117047f5f" providerId="ADAL" clId="{D93D8B19-FA20-47A5-B3D7-0A6BF3F53C46}" dt="2021-08-10T10:13:12.792" v="0" actId="2696"/>
+        <pc:sldMkLst>
+          <pc:docMk/>
+          <pc:sldMk cId="3364959005" sldId="290"/>
+        </pc:sldMkLst>
+      </pc:sldChg>
+      <pc:sldChg chg="del">
+        <pc:chgData name="Alessandro Edoardo Giorgio David" userId="f8954a66-e5ad-4a1c-9536-1d2117047f5f" providerId="ADAL" clId="{D93D8B19-FA20-47A5-B3D7-0A6BF3F53C46}" dt="2021-08-10T10:13:12.792" v="0" actId="2696"/>
+        <pc:sldMkLst>
+          <pc:docMk/>
+          <pc:sldMk cId="1841476595" sldId="291"/>
+        </pc:sldMkLst>
+      </pc:sldChg>
+      <pc:sldChg chg="del">
+        <pc:chgData name="Alessandro Edoardo Giorgio David" userId="f8954a66-e5ad-4a1c-9536-1d2117047f5f" providerId="ADAL" clId="{D93D8B19-FA20-47A5-B3D7-0A6BF3F53C46}" dt="2021-08-10T10:13:12.792" v="0" actId="2696"/>
+        <pc:sldMkLst>
+          <pc:docMk/>
+          <pc:sldMk cId="182014483" sldId="292"/>
+        </pc:sldMkLst>
+      </pc:sldChg>
+      <pc:sldChg chg="del">
+        <pc:chgData name="Alessandro Edoardo Giorgio David" userId="f8954a66-e5ad-4a1c-9536-1d2117047f5f" providerId="ADAL" clId="{D93D8B19-FA20-47A5-B3D7-0A6BF3F53C46}" dt="2021-08-10T10:13:12.792" v="0" actId="2696"/>
+        <pc:sldMkLst>
+          <pc:docMk/>
+          <pc:sldMk cId="2079178667" sldId="293"/>
+        </pc:sldMkLst>
+      </pc:sldChg>
+      <pc:sldChg chg="del">
+        <pc:chgData name="Alessandro Edoardo Giorgio David" userId="f8954a66-e5ad-4a1c-9536-1d2117047f5f" providerId="ADAL" clId="{D93D8B19-FA20-47A5-B3D7-0A6BF3F53C46}" dt="2021-08-10T10:13:12.792" v="0" actId="2696"/>
+        <pc:sldMkLst>
+          <pc:docMk/>
+          <pc:sldMk cId="2484884542" sldId="294"/>
+        </pc:sldMkLst>
+      </pc:sldChg>
+      <pc:sldChg chg="del">
+        <pc:chgData name="Alessandro Edoardo Giorgio David" userId="f8954a66-e5ad-4a1c-9536-1d2117047f5f" providerId="ADAL" clId="{D93D8B19-FA20-47A5-B3D7-0A6BF3F53C46}" dt="2021-08-10T10:13:12.792" v="0" actId="2696"/>
+        <pc:sldMkLst>
+          <pc:docMk/>
+          <pc:sldMk cId="2761851639" sldId="295"/>
+        </pc:sldMkLst>
+      </pc:sldChg>
+      <pc:sldChg chg="del">
+        <pc:chgData name="Alessandro Edoardo Giorgio David" userId="f8954a66-e5ad-4a1c-9536-1d2117047f5f" providerId="ADAL" clId="{D93D8B19-FA20-47A5-B3D7-0A6BF3F53C46}" dt="2021-08-10T10:13:12.792" v="0" actId="2696"/>
+        <pc:sldMkLst>
+          <pc:docMk/>
+          <pc:sldMk cId="3877361358" sldId="296"/>
+        </pc:sldMkLst>
+      </pc:sldChg>
+      <pc:sldChg chg="del">
+        <pc:chgData name="Alessandro Edoardo Giorgio David" userId="f8954a66-e5ad-4a1c-9536-1d2117047f5f" providerId="ADAL" clId="{D93D8B19-FA20-47A5-B3D7-0A6BF3F53C46}" dt="2021-08-10T10:13:12.792" v="0" actId="2696"/>
+        <pc:sldMkLst>
+          <pc:docMk/>
+          <pc:sldMk cId="3622387223" sldId="297"/>
+        </pc:sldMkLst>
+      </pc:sldChg>
+      <pc:sldChg chg="del">
+        <pc:chgData name="Alessandro Edoardo Giorgio David" userId="f8954a66-e5ad-4a1c-9536-1d2117047f5f" providerId="ADAL" clId="{D93D8B19-FA20-47A5-B3D7-0A6BF3F53C46}" dt="2021-08-10T10:13:12.792" v="0" actId="2696"/>
+        <pc:sldMkLst>
+          <pc:docMk/>
+          <pc:sldMk cId="1407459007" sldId="298"/>
+        </pc:sldMkLst>
+      </pc:sldChg>
+      <pc:sldChg chg="del">
+        <pc:chgData name="Alessandro Edoardo Giorgio David" userId="f8954a66-e5ad-4a1c-9536-1d2117047f5f" providerId="ADAL" clId="{D93D8B19-FA20-47A5-B3D7-0A6BF3F53C46}" dt="2021-08-10T10:13:12.792" v="0" actId="2696"/>
+        <pc:sldMkLst>
+          <pc:docMk/>
+          <pc:sldMk cId="2518038807" sldId="299"/>
+        </pc:sldMkLst>
+      </pc:sldChg>
+      <pc:sldChg chg="del">
+        <pc:chgData name="Alessandro Edoardo Giorgio David" userId="f8954a66-e5ad-4a1c-9536-1d2117047f5f" providerId="ADAL" clId="{D93D8B19-FA20-47A5-B3D7-0A6BF3F53C46}" dt="2021-08-10T10:13:12.792" v="0" actId="2696"/>
+        <pc:sldMkLst>
+          <pc:docMk/>
+          <pc:sldMk cId="3979447115" sldId="300"/>
+        </pc:sldMkLst>
+      </pc:sldChg>
+      <pc:sldChg chg="del">
+        <pc:chgData name="Alessandro Edoardo Giorgio David" userId="f8954a66-e5ad-4a1c-9536-1d2117047f5f" providerId="ADAL" clId="{D93D8B19-FA20-47A5-B3D7-0A6BF3F53C46}" dt="2021-08-10T10:13:12.792" v="0" actId="2696"/>
+        <pc:sldMkLst>
+          <pc:docMk/>
+          <pc:sldMk cId="1821133994" sldId="301"/>
+        </pc:sldMkLst>
+      </pc:sldChg>
+      <pc:sldChg chg="del">
+        <pc:chgData name="Alessandro Edoardo Giorgio David" userId="f8954a66-e5ad-4a1c-9536-1d2117047f5f" providerId="ADAL" clId="{D93D8B19-FA20-47A5-B3D7-0A6BF3F53C46}" dt="2021-08-10T10:13:12.792" v="0" actId="2696"/>
+        <pc:sldMkLst>
+          <pc:docMk/>
+          <pc:sldMk cId="2063098522" sldId="302"/>
+        </pc:sldMkLst>
+      </pc:sldChg>
+      <pc:sldChg chg="del">
+        <pc:chgData name="Alessandro Edoardo Giorgio David" userId="f8954a66-e5ad-4a1c-9536-1d2117047f5f" providerId="ADAL" clId="{D93D8B19-FA20-47A5-B3D7-0A6BF3F53C46}" dt="2021-08-10T10:13:12.792" v="0" actId="2696"/>
+        <pc:sldMkLst>
+          <pc:docMk/>
+          <pc:sldMk cId="1179535889" sldId="303"/>
+        </pc:sldMkLst>
+      </pc:sldChg>
+      <pc:sldChg chg="del">
+        <pc:chgData name="Alessandro Edoardo Giorgio David" userId="f8954a66-e5ad-4a1c-9536-1d2117047f5f" providerId="ADAL" clId="{D93D8B19-FA20-47A5-B3D7-0A6BF3F53C46}" dt="2021-08-10T10:13:12.792" v="0" actId="2696"/>
+        <pc:sldMkLst>
+          <pc:docMk/>
+          <pc:sldMk cId="2732596017" sldId="304"/>
+        </pc:sldMkLst>
+      </pc:sldChg>
+      <pc:sldChg chg="del">
+        <pc:chgData name="Alessandro Edoardo Giorgio David" userId="f8954a66-e5ad-4a1c-9536-1d2117047f5f" providerId="ADAL" clId="{D93D8B19-FA20-47A5-B3D7-0A6BF3F53C46}" dt="2021-08-10T10:13:12.792" v="0" actId="2696"/>
+        <pc:sldMkLst>
+          <pc:docMk/>
+          <pc:sldMk cId="4087049437" sldId="305"/>
+        </pc:sldMkLst>
+      </pc:sldChg>
+      <pc:sldChg chg="del">
+        <pc:chgData name="Alessandro Edoardo Giorgio David" userId="f8954a66-e5ad-4a1c-9536-1d2117047f5f" providerId="ADAL" clId="{D93D8B19-FA20-47A5-B3D7-0A6BF3F53C46}" dt="2021-08-10T10:13:12.792" v="0" actId="2696"/>
+        <pc:sldMkLst>
+          <pc:docMk/>
+          <pc:sldMk cId="3965762000" sldId="306"/>
+        </pc:sldMkLst>
+      </pc:sldChg>
+      <pc:sldChg chg="del">
+        <pc:chgData name="Alessandro Edoardo Giorgio David" userId="f8954a66-e5ad-4a1c-9536-1d2117047f5f" providerId="ADAL" clId="{D93D8B19-FA20-47A5-B3D7-0A6BF3F53C46}" dt="2021-08-10T10:13:12.792" v="0" actId="2696"/>
+        <pc:sldMkLst>
+          <pc:docMk/>
+          <pc:sldMk cId="990846201" sldId="307"/>
+        </pc:sldMkLst>
+      </pc:sldChg>
+      <pc:sldChg chg="del">
+        <pc:chgData name="Alessandro Edoardo Giorgio David" userId="f8954a66-e5ad-4a1c-9536-1d2117047f5f" providerId="ADAL" clId="{D93D8B19-FA20-47A5-B3D7-0A6BF3F53C46}" dt="2021-08-10T10:13:12.792" v="0" actId="2696"/>
+        <pc:sldMkLst>
+          <pc:docMk/>
+          <pc:sldMk cId="1459165216" sldId="308"/>
+        </pc:sldMkLst>
+      </pc:sldChg>
+      <pc:sldChg chg="del">
+        <pc:chgData name="Alessandro Edoardo Giorgio David" userId="f8954a66-e5ad-4a1c-9536-1d2117047f5f" providerId="ADAL" clId="{D93D8B19-FA20-47A5-B3D7-0A6BF3F53C46}" dt="2021-08-10T10:13:12.792" v="0" actId="2696"/>
+        <pc:sldMkLst>
+          <pc:docMk/>
+          <pc:sldMk cId="3495603576" sldId="309"/>
+        </pc:sldMkLst>
+      </pc:sldChg>
+      <pc:sldChg chg="del">
+        <pc:chgData name="Alessandro Edoardo Giorgio David" userId="f8954a66-e5ad-4a1c-9536-1d2117047f5f" providerId="ADAL" clId="{D93D8B19-FA20-47A5-B3D7-0A6BF3F53C46}" dt="2021-08-10T10:13:12.792" v="0" actId="2696"/>
+        <pc:sldMkLst>
+          <pc:docMk/>
+          <pc:sldMk cId="293460714" sldId="310"/>
+        </pc:sldMkLst>
+      </pc:sldChg>
+      <pc:sldChg chg="del">
+        <pc:chgData name="Alessandro Edoardo Giorgio David" userId="f8954a66-e5ad-4a1c-9536-1d2117047f5f" providerId="ADAL" clId="{D93D8B19-FA20-47A5-B3D7-0A6BF3F53C46}" dt="2021-08-10T10:13:12.792" v="0" actId="2696"/>
+        <pc:sldMkLst>
+          <pc:docMk/>
+          <pc:sldMk cId="3345643182" sldId="311"/>
+        </pc:sldMkLst>
+      </pc:sldChg>
+      <pc:sldChg chg="del">
+        <pc:chgData name="Alessandro Edoardo Giorgio David" userId="f8954a66-e5ad-4a1c-9536-1d2117047f5f" providerId="ADAL" clId="{D93D8B19-FA20-47A5-B3D7-0A6BF3F53C46}" dt="2021-08-10T10:13:12.792" v="0" actId="2696"/>
+        <pc:sldMkLst>
+          <pc:docMk/>
+          <pc:sldMk cId="20833125" sldId="312"/>
+        </pc:sldMkLst>
+      </pc:sldChg>
+      <pc:sldChg chg="del">
+        <pc:chgData name="Alessandro Edoardo Giorgio David" userId="f8954a66-e5ad-4a1c-9536-1d2117047f5f" providerId="ADAL" clId="{D93D8B19-FA20-47A5-B3D7-0A6BF3F53C46}" dt="2021-08-10T10:13:12.792" v="0" actId="2696"/>
+        <pc:sldMkLst>
+          <pc:docMk/>
+          <pc:sldMk cId="240118312" sldId="313"/>
+        </pc:sldMkLst>
+      </pc:sldChg>
+      <pc:sldChg chg="del">
+        <pc:chgData name="Alessandro Edoardo Giorgio David" userId="f8954a66-e5ad-4a1c-9536-1d2117047f5f" providerId="ADAL" clId="{D93D8B19-FA20-47A5-B3D7-0A6BF3F53C46}" dt="2021-08-10T10:13:12.792" v="0" actId="2696"/>
+        <pc:sldMkLst>
+          <pc:docMk/>
+          <pc:sldMk cId="2026102579" sldId="314"/>
+        </pc:sldMkLst>
+      </pc:sldChg>
+      <pc:sldChg chg="del">
+        <pc:chgData name="Alessandro Edoardo Giorgio David" userId="f8954a66-e5ad-4a1c-9536-1d2117047f5f" providerId="ADAL" clId="{D93D8B19-FA20-47A5-B3D7-0A6BF3F53C46}" dt="2021-08-10T10:13:12.792" v="0" actId="2696"/>
+        <pc:sldMkLst>
+          <pc:docMk/>
+          <pc:sldMk cId="1521168260" sldId="315"/>
+        </pc:sldMkLst>
+      </pc:sldChg>
+      <pc:sldChg chg="del">
+        <pc:chgData name="Alessandro Edoardo Giorgio David" userId="f8954a66-e5ad-4a1c-9536-1d2117047f5f" providerId="ADAL" clId="{D93D8B19-FA20-47A5-B3D7-0A6BF3F53C46}" dt="2021-08-10T10:13:12.792" v="0" actId="2696"/>
+        <pc:sldMkLst>
+          <pc:docMk/>
+          <pc:sldMk cId="3372665201" sldId="316"/>
+        </pc:sldMkLst>
+      </pc:sldChg>
+      <pc:sldChg chg="del">
+        <pc:chgData name="Alessandro Edoardo Giorgio David" userId="f8954a66-e5ad-4a1c-9536-1d2117047f5f" providerId="ADAL" clId="{D93D8B19-FA20-47A5-B3D7-0A6BF3F53C46}" dt="2021-08-10T10:13:12.792" v="0" actId="2696"/>
+        <pc:sldMkLst>
+          <pc:docMk/>
+          <pc:sldMk cId="2461815205" sldId="317"/>
+        </pc:sldMkLst>
+      </pc:sldChg>
+      <pc:sldChg chg="del">
+        <pc:chgData name="Alessandro Edoardo Giorgio David" userId="f8954a66-e5ad-4a1c-9536-1d2117047f5f" providerId="ADAL" clId="{D93D8B19-FA20-47A5-B3D7-0A6BF3F53C46}" dt="2021-08-10T10:13:12.792" v="0" actId="2696"/>
+        <pc:sldMkLst>
+          <pc:docMk/>
+          <pc:sldMk cId="1478560338" sldId="318"/>
+        </pc:sldMkLst>
+      </pc:sldChg>
+      <pc:sldChg chg="del">
+        <pc:chgData name="Alessandro Edoardo Giorgio David" userId="f8954a66-e5ad-4a1c-9536-1d2117047f5f" providerId="ADAL" clId="{D93D8B19-FA20-47A5-B3D7-0A6BF3F53C46}" dt="2021-08-10T10:13:12.792" v="0" actId="2696"/>
+        <pc:sldMkLst>
+          <pc:docMk/>
+          <pc:sldMk cId="618932863" sldId="319"/>
+        </pc:sldMkLst>
+      </pc:sldChg>
+      <pc:sldChg chg="del">
+        <pc:chgData name="Alessandro Edoardo Giorgio David" userId="f8954a66-e5ad-4a1c-9536-1d2117047f5f" providerId="ADAL" clId="{D93D8B19-FA20-47A5-B3D7-0A6BF3F53C46}" dt="2021-08-10T10:13:12.792" v="0" actId="2696"/>
+        <pc:sldMkLst>
+          <pc:docMk/>
+          <pc:sldMk cId="3339501348" sldId="320"/>
+        </pc:sldMkLst>
+      </pc:sldChg>
+      <pc:sldChg chg="del">
+        <pc:chgData name="Alessandro Edoardo Giorgio David" userId="f8954a66-e5ad-4a1c-9536-1d2117047f5f" providerId="ADAL" clId="{D93D8B19-FA20-47A5-B3D7-0A6BF3F53C46}" dt="2021-08-10T10:13:12.792" v="0" actId="2696"/>
+        <pc:sldMkLst>
+          <pc:docMk/>
+          <pc:sldMk cId="1078668927" sldId="321"/>
+        </pc:sldMkLst>
+      </pc:sldChg>
+      <pc:sldChg chg="del">
+        <pc:chgData name="Alessandro Edoardo Giorgio David" userId="f8954a66-e5ad-4a1c-9536-1d2117047f5f" providerId="ADAL" clId="{D93D8B19-FA20-47A5-B3D7-0A6BF3F53C46}" dt="2021-08-10T10:13:12.792" v="0" actId="2696"/>
+        <pc:sldMkLst>
+          <pc:docMk/>
+          <pc:sldMk cId="3535521216" sldId="322"/>
+        </pc:sldMkLst>
+      </pc:sldChg>
+      <pc:sldChg chg="del">
+        <pc:chgData name="Alessandro Edoardo Giorgio David" userId="f8954a66-e5ad-4a1c-9536-1d2117047f5f" providerId="ADAL" clId="{D93D8B19-FA20-47A5-B3D7-0A6BF3F53C46}" dt="2021-08-10T10:13:12.792" v="0" actId="2696"/>
+        <pc:sldMkLst>
+          <pc:docMk/>
+          <pc:sldMk cId="879024289" sldId="323"/>
+        </pc:sldMkLst>
+      </pc:sldChg>
+      <pc:sldChg chg="del">
+        <pc:chgData name="Alessandro Edoardo Giorgio David" userId="f8954a66-e5ad-4a1c-9536-1d2117047f5f" providerId="ADAL" clId="{D93D8B19-FA20-47A5-B3D7-0A6BF3F53C46}" dt="2021-08-10T10:13:12.792" v="0" actId="2696"/>
+        <pc:sldMkLst>
+          <pc:docMk/>
+          <pc:sldMk cId="2507292240" sldId="324"/>
+        </pc:sldMkLst>
+      </pc:sldChg>
+      <pc:sldChg chg="del">
+        <pc:chgData name="Alessandro Edoardo Giorgio David" userId="f8954a66-e5ad-4a1c-9536-1d2117047f5f" providerId="ADAL" clId="{D93D8B19-FA20-47A5-B3D7-0A6BF3F53C46}" dt="2021-08-10T10:13:12.792" v="0" actId="2696"/>
+        <pc:sldMkLst>
+          <pc:docMk/>
+          <pc:sldMk cId="2212003161" sldId="325"/>
+        </pc:sldMkLst>
+      </pc:sldChg>
+      <pc:sldChg chg="del">
+        <pc:chgData name="Alessandro Edoardo Giorgio David" userId="f8954a66-e5ad-4a1c-9536-1d2117047f5f" providerId="ADAL" clId="{D93D8B19-FA20-47A5-B3D7-0A6BF3F53C46}" dt="2021-08-10T10:13:12.792" v="0" actId="2696"/>
+        <pc:sldMkLst>
+          <pc:docMk/>
+          <pc:sldMk cId="1071665624" sldId="326"/>
+        </pc:sldMkLst>
+      </pc:sldChg>
+      <pc:sldChg chg="del">
+        <pc:chgData name="Alessandro Edoardo Giorgio David" userId="f8954a66-e5ad-4a1c-9536-1d2117047f5f" providerId="ADAL" clId="{D93D8B19-FA20-47A5-B3D7-0A6BF3F53C46}" dt="2021-08-10T10:13:12.792" v="0" actId="2696"/>
+        <pc:sldMkLst>
+          <pc:docMk/>
+          <pc:sldMk cId="2140800234" sldId="327"/>
+        </pc:sldMkLst>
+      </pc:sldChg>
+      <pc:sldChg chg="del">
+        <pc:chgData name="Alessandro Edoardo Giorgio David" userId="f8954a66-e5ad-4a1c-9536-1d2117047f5f" providerId="ADAL" clId="{D93D8B19-FA20-47A5-B3D7-0A6BF3F53C46}" dt="2021-08-10T10:13:12.792" v="0" actId="2696"/>
+        <pc:sldMkLst>
+          <pc:docMk/>
+          <pc:sldMk cId="2741554749" sldId="328"/>
+        </pc:sldMkLst>
+      </pc:sldChg>
+      <pc:sldChg chg="del">
+        <pc:chgData name="Alessandro Edoardo Giorgio David" userId="f8954a66-e5ad-4a1c-9536-1d2117047f5f" providerId="ADAL" clId="{D93D8B19-FA20-47A5-B3D7-0A6BF3F53C46}" dt="2021-08-10T10:13:12.792" v="0" actId="2696"/>
+        <pc:sldMkLst>
+          <pc:docMk/>
+          <pc:sldMk cId="1026349041" sldId="329"/>
+        </pc:sldMkLst>
+      </pc:sldChg>
+      <pc:sldChg chg="del">
+        <pc:chgData name="Alessandro Edoardo Giorgio David" userId="f8954a66-e5ad-4a1c-9536-1d2117047f5f" providerId="ADAL" clId="{D93D8B19-FA20-47A5-B3D7-0A6BF3F53C46}" dt="2021-08-10T10:13:12.792" v="0" actId="2696"/>
+        <pc:sldMkLst>
+          <pc:docMk/>
+          <pc:sldMk cId="2892898324" sldId="330"/>
+        </pc:sldMkLst>
+      </pc:sldChg>
+      <pc:sldChg chg="del">
+        <pc:chgData name="Alessandro Edoardo Giorgio David" userId="f8954a66-e5ad-4a1c-9536-1d2117047f5f" providerId="ADAL" clId="{D93D8B19-FA20-47A5-B3D7-0A6BF3F53C46}" dt="2021-08-10T10:13:12.792" v="0" actId="2696"/>
+        <pc:sldMkLst>
+          <pc:docMk/>
+          <pc:sldMk cId="3188304425" sldId="331"/>
+        </pc:sldMkLst>
+      </pc:sldChg>
+      <pc:sldChg chg="del">
+        <pc:chgData name="Alessandro Edoardo Giorgio David" userId="f8954a66-e5ad-4a1c-9536-1d2117047f5f" providerId="ADAL" clId="{D93D8B19-FA20-47A5-B3D7-0A6BF3F53C46}" dt="2021-08-10T10:13:12.792" v="0" actId="2696"/>
+        <pc:sldMkLst>
+          <pc:docMk/>
+          <pc:sldMk cId="3922909339" sldId="332"/>
+        </pc:sldMkLst>
+      </pc:sldChg>
+      <pc:sldChg chg="del">
+        <pc:chgData name="Alessandro Edoardo Giorgio David" userId="f8954a66-e5ad-4a1c-9536-1d2117047f5f" providerId="ADAL" clId="{D93D8B19-FA20-47A5-B3D7-0A6BF3F53C46}" dt="2021-08-10T10:13:12.792" v="0" actId="2696"/>
+        <pc:sldMkLst>
+          <pc:docMk/>
+          <pc:sldMk cId="1049072842" sldId="333"/>
+        </pc:sldMkLst>
+      </pc:sldChg>
+      <pc:sldChg chg="del">
+        <pc:chgData name="Alessandro Edoardo Giorgio David" userId="f8954a66-e5ad-4a1c-9536-1d2117047f5f" providerId="ADAL" clId="{D93D8B19-FA20-47A5-B3D7-0A6BF3F53C46}" dt="2021-08-10T10:13:12.792" v="0" actId="2696"/>
+        <pc:sldMkLst>
+          <pc:docMk/>
+          <pc:sldMk cId="2210811804" sldId="334"/>
+        </pc:sldMkLst>
+      </pc:sldChg>
+      <pc:sldChg chg="del">
+        <pc:chgData name="Alessandro Edoardo Giorgio David" userId="f8954a66-e5ad-4a1c-9536-1d2117047f5f" providerId="ADAL" clId="{D93D8B19-FA20-47A5-B3D7-0A6BF3F53C46}" dt="2021-08-10T10:13:12.792" v="0" actId="2696"/>
+        <pc:sldMkLst>
+          <pc:docMk/>
+          <pc:sldMk cId="2200792181" sldId="335"/>
+        </pc:sldMkLst>
+      </pc:sldChg>
+      <pc:sldChg chg="del">
+        <pc:chgData name="Alessandro Edoardo Giorgio David" userId="f8954a66-e5ad-4a1c-9536-1d2117047f5f" providerId="ADAL" clId="{D93D8B19-FA20-47A5-B3D7-0A6BF3F53C46}" dt="2021-08-10T10:13:12.792" v="0" actId="2696"/>
+        <pc:sldMkLst>
+          <pc:docMk/>
+          <pc:sldMk cId="2223886345" sldId="336"/>
+        </pc:sldMkLst>
+      </pc:sldChg>
+      <pc:sldChg chg="del">
+        <pc:chgData name="Alessandro Edoardo Giorgio David" userId="f8954a66-e5ad-4a1c-9536-1d2117047f5f" providerId="ADAL" clId="{D93D8B19-FA20-47A5-B3D7-0A6BF3F53C46}" dt="2021-08-10T10:13:12.792" v="0" actId="2696"/>
+        <pc:sldMkLst>
+          <pc:docMk/>
+          <pc:sldMk cId="2386622032" sldId="337"/>
+        </pc:sldMkLst>
+      </pc:sldChg>
+      <pc:sldChg chg="del">
+        <pc:chgData name="Alessandro Edoardo Giorgio David" userId="f8954a66-e5ad-4a1c-9536-1d2117047f5f" providerId="ADAL" clId="{D93D8B19-FA20-47A5-B3D7-0A6BF3F53C46}" dt="2021-08-10T10:13:12.792" v="0" actId="2696"/>
+        <pc:sldMkLst>
+          <pc:docMk/>
+          <pc:sldMk cId="863600783" sldId="338"/>
+        </pc:sldMkLst>
+      </pc:sldChg>
+      <pc:sldChg chg="del">
+        <pc:chgData name="Alessandro Edoardo Giorgio David" userId="f8954a66-e5ad-4a1c-9536-1d2117047f5f" providerId="ADAL" clId="{D93D8B19-FA20-47A5-B3D7-0A6BF3F53C46}" dt="2021-08-10T10:13:12.792" v="0" actId="2696"/>
+        <pc:sldMkLst>
+          <pc:docMk/>
+          <pc:sldMk cId="3760396929" sldId="339"/>
+        </pc:sldMkLst>
+      </pc:sldChg>
+      <pc:sldChg chg="del">
+        <pc:chgData name="Alessandro Edoardo Giorgio David" userId="f8954a66-e5ad-4a1c-9536-1d2117047f5f" providerId="ADAL" clId="{D93D8B19-FA20-47A5-B3D7-0A6BF3F53C46}" dt="2021-08-10T10:13:12.792" v="0" actId="2696"/>
+        <pc:sldMkLst>
+          <pc:docMk/>
+          <pc:sldMk cId="4043709138" sldId="340"/>
+        </pc:sldMkLst>
+      </pc:sldChg>
+    </pc:docChg>
+  </pc:docChgLst>
+  <pc:docChgLst>
     <pc:chgData name="Di Mattia Alessandro Edoardo Giorgio David" userId="f8954a66-e5ad-4a1c-9536-1d2117047f5f" providerId="ADAL" clId="{D8B22C94-5161-4D79-9F18-B740023E9373}"/>
     <pc:docChg chg="modSld">
       <pc:chgData name="Di Mattia Alessandro Edoardo Giorgio David" userId="f8954a66-e5ad-4a1c-9536-1d2117047f5f" providerId="ADAL" clId="{D8B22C94-5161-4D79-9F18-B740023E9373}" dt="2021-09-20T11:57:13.689" v="7" actId="20577"/>
@@ -3336,6 +3380,1708 @@
             <pc:docMk/>
             <pc:sldMk cId="1731353798" sldId="306"/>
             <ac:spMk id="3" creationId="{2D430180-4BB9-4AD7-AA64-E3AA96044BF1}"/>
+          </ac:spMkLst>
+        </pc:spChg>
+      </pc:sldChg>
+    </pc:docChg>
+  </pc:docChgLst>
+  <pc:docChgLst>
+    <pc:chgData name="Alessandro Edoardo Giorgio David" userId="f8954a66-e5ad-4a1c-9536-1d2117047f5f" providerId="ADAL" clId="{329F747F-ECE3-457D-9702-1118B74C0B14}"/>
+    <pc:docChg chg="addSld delSld modSld">
+      <pc:chgData name="Alessandro Edoardo Giorgio David" userId="f8954a66-e5ad-4a1c-9536-1d2117047f5f" providerId="ADAL" clId="{329F747F-ECE3-457D-9702-1118B74C0B14}" dt="2021-11-14T16:45:31.464" v="110" actId="20577"/>
+      <pc:docMkLst>
+        <pc:docMk/>
+      </pc:docMkLst>
+      <pc:sldChg chg="modSp mod">
+        <pc:chgData name="Alessandro Edoardo Giorgio David" userId="f8954a66-e5ad-4a1c-9536-1d2117047f5f" providerId="ADAL" clId="{329F747F-ECE3-457D-9702-1118B74C0B14}" dt="2021-11-08T07:45:03.214" v="27" actId="790"/>
+        <pc:sldMkLst>
+          <pc:docMk/>
+          <pc:sldMk cId="3153607966" sldId="280"/>
+        </pc:sldMkLst>
+        <pc:spChg chg="mod">
+          <ac:chgData name="Alessandro Edoardo Giorgio David" userId="f8954a66-e5ad-4a1c-9536-1d2117047f5f" providerId="ADAL" clId="{329F747F-ECE3-457D-9702-1118B74C0B14}" dt="2021-11-08T07:45:03.214" v="27" actId="790"/>
+          <ac:spMkLst>
+            <pc:docMk/>
+            <pc:sldMk cId="3153607966" sldId="280"/>
+            <ac:spMk id="2" creationId="{683FD103-5EF1-48AB-8EC6-4C1921FB118B}"/>
+          </ac:spMkLst>
+        </pc:spChg>
+      </pc:sldChg>
+      <pc:sldChg chg="modSp new mod">
+        <pc:chgData name="Alessandro Edoardo Giorgio David" userId="f8954a66-e5ad-4a1c-9536-1d2117047f5f" providerId="ADAL" clId="{329F747F-ECE3-457D-9702-1118B74C0B14}" dt="2021-11-08T07:45:36.836" v="88" actId="20577"/>
+        <pc:sldMkLst>
+          <pc:docMk/>
+          <pc:sldMk cId="355505243" sldId="281"/>
+        </pc:sldMkLst>
+        <pc:spChg chg="mod">
+          <ac:chgData name="Alessandro Edoardo Giorgio David" userId="f8954a66-e5ad-4a1c-9536-1d2117047f5f" providerId="ADAL" clId="{329F747F-ECE3-457D-9702-1118B74C0B14}" dt="2021-11-08T07:45:18.734" v="36" actId="122"/>
+          <ac:spMkLst>
+            <pc:docMk/>
+            <pc:sldMk cId="355505243" sldId="281"/>
+            <ac:spMk id="2" creationId="{94D62104-75FA-4CA6-90BD-2DC738BC3A46}"/>
+          </ac:spMkLst>
+        </pc:spChg>
+        <pc:spChg chg="mod">
+          <ac:chgData name="Alessandro Edoardo Giorgio David" userId="f8954a66-e5ad-4a1c-9536-1d2117047f5f" providerId="ADAL" clId="{329F747F-ECE3-457D-9702-1118B74C0B14}" dt="2021-11-08T07:45:36.836" v="88" actId="20577"/>
+          <ac:spMkLst>
+            <pc:docMk/>
+            <pc:sldMk cId="355505243" sldId="281"/>
+            <ac:spMk id="3" creationId="{861A6D1C-7FFE-4596-8F8F-BB8902D42B11}"/>
+          </ac:spMkLst>
+        </pc:spChg>
+      </pc:sldChg>
+      <pc:sldChg chg="del">
+        <pc:chgData name="Alessandro Edoardo Giorgio David" userId="f8954a66-e5ad-4a1c-9536-1d2117047f5f" providerId="ADAL" clId="{329F747F-ECE3-457D-9702-1118B74C0B14}" dt="2021-11-08T07:45:10.609" v="28" actId="2696"/>
+        <pc:sldMkLst>
+          <pc:docMk/>
+          <pc:sldMk cId="3362865170" sldId="281"/>
+        </pc:sldMkLst>
+      </pc:sldChg>
+      <pc:sldChg chg="del">
+        <pc:chgData name="Alessandro Edoardo Giorgio David" userId="f8954a66-e5ad-4a1c-9536-1d2117047f5f" providerId="ADAL" clId="{329F747F-ECE3-457D-9702-1118B74C0B14}" dt="2021-11-08T07:45:10.609" v="28" actId="2696"/>
+        <pc:sldMkLst>
+          <pc:docMk/>
+          <pc:sldMk cId="1960727984" sldId="282"/>
+        </pc:sldMkLst>
+      </pc:sldChg>
+      <pc:sldChg chg="del">
+        <pc:chgData name="Alessandro Edoardo Giorgio David" userId="f8954a66-e5ad-4a1c-9536-1d2117047f5f" providerId="ADAL" clId="{329F747F-ECE3-457D-9702-1118B74C0B14}" dt="2021-11-08T07:45:10.609" v="28" actId="2696"/>
+        <pc:sldMkLst>
+          <pc:docMk/>
+          <pc:sldMk cId="3708938076" sldId="283"/>
+        </pc:sldMkLst>
+      </pc:sldChg>
+      <pc:sldChg chg="del">
+        <pc:chgData name="Alessandro Edoardo Giorgio David" userId="f8954a66-e5ad-4a1c-9536-1d2117047f5f" providerId="ADAL" clId="{329F747F-ECE3-457D-9702-1118B74C0B14}" dt="2021-11-08T07:45:10.609" v="28" actId="2696"/>
+        <pc:sldMkLst>
+          <pc:docMk/>
+          <pc:sldMk cId="2825981100" sldId="284"/>
+        </pc:sldMkLst>
+      </pc:sldChg>
+      <pc:sldChg chg="del">
+        <pc:chgData name="Alessandro Edoardo Giorgio David" userId="f8954a66-e5ad-4a1c-9536-1d2117047f5f" providerId="ADAL" clId="{329F747F-ECE3-457D-9702-1118B74C0B14}" dt="2021-11-08T07:45:10.609" v="28" actId="2696"/>
+        <pc:sldMkLst>
+          <pc:docMk/>
+          <pc:sldMk cId="3350214057" sldId="285"/>
+        </pc:sldMkLst>
+      </pc:sldChg>
+      <pc:sldChg chg="del">
+        <pc:chgData name="Alessandro Edoardo Giorgio David" userId="f8954a66-e5ad-4a1c-9536-1d2117047f5f" providerId="ADAL" clId="{329F747F-ECE3-457D-9702-1118B74C0B14}" dt="2021-11-08T07:45:10.609" v="28" actId="2696"/>
+        <pc:sldMkLst>
+          <pc:docMk/>
+          <pc:sldMk cId="3486342803" sldId="286"/>
+        </pc:sldMkLst>
+      </pc:sldChg>
+      <pc:sldChg chg="del">
+        <pc:chgData name="Alessandro Edoardo Giorgio David" userId="f8954a66-e5ad-4a1c-9536-1d2117047f5f" providerId="ADAL" clId="{329F747F-ECE3-457D-9702-1118B74C0B14}" dt="2021-11-08T07:45:10.609" v="28" actId="2696"/>
+        <pc:sldMkLst>
+          <pc:docMk/>
+          <pc:sldMk cId="180125166" sldId="287"/>
+        </pc:sldMkLst>
+      </pc:sldChg>
+      <pc:sldChg chg="del">
+        <pc:chgData name="Alessandro Edoardo Giorgio David" userId="f8954a66-e5ad-4a1c-9536-1d2117047f5f" providerId="ADAL" clId="{329F747F-ECE3-457D-9702-1118B74C0B14}" dt="2021-11-08T07:45:10.609" v="28" actId="2696"/>
+        <pc:sldMkLst>
+          <pc:docMk/>
+          <pc:sldMk cId="956825130" sldId="288"/>
+        </pc:sldMkLst>
+      </pc:sldChg>
+      <pc:sldChg chg="del">
+        <pc:chgData name="Alessandro Edoardo Giorgio David" userId="f8954a66-e5ad-4a1c-9536-1d2117047f5f" providerId="ADAL" clId="{329F747F-ECE3-457D-9702-1118B74C0B14}" dt="2021-11-08T07:45:10.609" v="28" actId="2696"/>
+        <pc:sldMkLst>
+          <pc:docMk/>
+          <pc:sldMk cId="3104482230" sldId="289"/>
+        </pc:sldMkLst>
+      </pc:sldChg>
+      <pc:sldChg chg="modSp mod">
+        <pc:chgData name="Alessandro Edoardo Giorgio David" userId="f8954a66-e5ad-4a1c-9536-1d2117047f5f" providerId="ADAL" clId="{329F747F-ECE3-457D-9702-1118B74C0B14}" dt="2021-11-14T16:45:31.464" v="110" actId="20577"/>
+        <pc:sldMkLst>
+          <pc:docMk/>
+          <pc:sldMk cId="443818849" sldId="290"/>
+        </pc:sldMkLst>
+        <pc:spChg chg="mod">
+          <ac:chgData name="Alessandro Edoardo Giorgio David" userId="f8954a66-e5ad-4a1c-9536-1d2117047f5f" providerId="ADAL" clId="{329F747F-ECE3-457D-9702-1118B74C0B14}" dt="2021-11-14T16:45:31.464" v="110" actId="20577"/>
+          <ac:spMkLst>
+            <pc:docMk/>
+            <pc:sldMk cId="443818849" sldId="290"/>
+            <ac:spMk id="3" creationId="{4D078D51-D572-4CA1-96D6-5B20ECD70331}"/>
+          </ac:spMkLst>
+        </pc:spChg>
+      </pc:sldChg>
+      <pc:sldChg chg="del">
+        <pc:chgData name="Alessandro Edoardo Giorgio David" userId="f8954a66-e5ad-4a1c-9536-1d2117047f5f" providerId="ADAL" clId="{329F747F-ECE3-457D-9702-1118B74C0B14}" dt="2021-11-08T07:45:10.609" v="28" actId="2696"/>
+        <pc:sldMkLst>
+          <pc:docMk/>
+          <pc:sldMk cId="2893891212" sldId="290"/>
+        </pc:sldMkLst>
+      </pc:sldChg>
+    </pc:docChg>
+  </pc:docChgLst>
+  <pc:docChgLst>
+    <pc:chgData name="Di Mattia Alessandro Edoardo Giorgio David" userId="f8954a66-e5ad-4a1c-9536-1d2117047f5f" providerId="ADAL" clId="{CFBF690A-D719-48D2-92B8-B5819DB24AC8}"/>
+    <pc:docChg chg="undo custSel addSld modSld">
+      <pc:chgData name="Di Mattia Alessandro Edoardo Giorgio David" userId="f8954a66-e5ad-4a1c-9536-1d2117047f5f" providerId="ADAL" clId="{CFBF690A-D719-48D2-92B8-B5819DB24AC8}" dt="2021-08-09T15:53:44.291" v="1952" actId="20577"/>
+      <pc:docMkLst>
+        <pc:docMk/>
+      </pc:docMkLst>
+      <pc:sldChg chg="modSp mod">
+        <pc:chgData name="Di Mattia Alessandro Edoardo Giorgio David" userId="f8954a66-e5ad-4a1c-9536-1d2117047f5f" providerId="ADAL" clId="{CFBF690A-D719-48D2-92B8-B5819DB24AC8}" dt="2021-08-09T14:22:54.910" v="1329" actId="207"/>
+        <pc:sldMkLst>
+          <pc:docMk/>
+          <pc:sldMk cId="1478560338" sldId="318"/>
+        </pc:sldMkLst>
+        <pc:spChg chg="mod">
+          <ac:chgData name="Di Mattia Alessandro Edoardo Giorgio David" userId="f8954a66-e5ad-4a1c-9536-1d2117047f5f" providerId="ADAL" clId="{CFBF690A-D719-48D2-92B8-B5819DB24AC8}" dt="2021-08-09T14:22:54.910" v="1329" actId="207"/>
+          <ac:spMkLst>
+            <pc:docMk/>
+            <pc:sldMk cId="1478560338" sldId="318"/>
+            <ac:spMk id="3" creationId="{EE5866AE-9B94-40DE-9A9A-06E3998624FB}"/>
+          </ac:spMkLst>
+        </pc:spChg>
+      </pc:sldChg>
+      <pc:sldChg chg="modSp mod">
+        <pc:chgData name="Di Mattia Alessandro Edoardo Giorgio David" userId="f8954a66-e5ad-4a1c-9536-1d2117047f5f" providerId="ADAL" clId="{CFBF690A-D719-48D2-92B8-B5819DB24AC8}" dt="2021-08-08T17:39:08.540" v="749" actId="108"/>
+        <pc:sldMkLst>
+          <pc:docMk/>
+          <pc:sldMk cId="618932863" sldId="319"/>
+        </pc:sldMkLst>
+        <pc:spChg chg="mod">
+          <ac:chgData name="Di Mattia Alessandro Edoardo Giorgio David" userId="f8954a66-e5ad-4a1c-9536-1d2117047f5f" providerId="ADAL" clId="{CFBF690A-D719-48D2-92B8-B5819DB24AC8}" dt="2021-08-08T17:38:48.221" v="748" actId="108"/>
+          <ac:spMkLst>
+            <pc:docMk/>
+            <pc:sldMk cId="618932863" sldId="319"/>
+            <ac:spMk id="12" creationId="{3487BAA1-91F3-4148-939C-9082D3EFBEC0}"/>
+          </ac:spMkLst>
+        </pc:spChg>
+        <pc:spChg chg="mod">
+          <ac:chgData name="Di Mattia Alessandro Edoardo Giorgio David" userId="f8954a66-e5ad-4a1c-9536-1d2117047f5f" providerId="ADAL" clId="{CFBF690A-D719-48D2-92B8-B5819DB24AC8}" dt="2021-08-08T17:39:08.540" v="749" actId="108"/>
+          <ac:spMkLst>
+            <pc:docMk/>
+            <pc:sldMk cId="618932863" sldId="319"/>
+            <ac:spMk id="14" creationId="{D215CADD-3AA8-4C46-9B2F-7B1B1290C11F}"/>
+          </ac:spMkLst>
+        </pc:spChg>
+      </pc:sldChg>
+      <pc:sldChg chg="modSp mod">
+        <pc:chgData name="Di Mattia Alessandro Edoardo Giorgio David" userId="f8954a66-e5ad-4a1c-9536-1d2117047f5f" providerId="ADAL" clId="{CFBF690A-D719-48D2-92B8-B5819DB24AC8}" dt="2021-08-08T17:39:51.365" v="751" actId="108"/>
+        <pc:sldMkLst>
+          <pc:docMk/>
+          <pc:sldMk cId="3339501348" sldId="320"/>
+        </pc:sldMkLst>
+        <pc:spChg chg="mod">
+          <ac:chgData name="Di Mattia Alessandro Edoardo Giorgio David" userId="f8954a66-e5ad-4a1c-9536-1d2117047f5f" providerId="ADAL" clId="{CFBF690A-D719-48D2-92B8-B5819DB24AC8}" dt="2021-08-08T17:39:51.365" v="751" actId="108"/>
+          <ac:spMkLst>
+            <pc:docMk/>
+            <pc:sldMk cId="3339501348" sldId="320"/>
+            <ac:spMk id="4" creationId="{CFED2F6F-3626-4CAA-B18C-531766945314}"/>
+          </ac:spMkLst>
+        </pc:spChg>
+        <pc:spChg chg="mod">
+          <ac:chgData name="Di Mattia Alessandro Edoardo Giorgio David" userId="f8954a66-e5ad-4a1c-9536-1d2117047f5f" providerId="ADAL" clId="{CFBF690A-D719-48D2-92B8-B5819DB24AC8}" dt="2021-08-08T17:39:47.031" v="750" actId="108"/>
+          <ac:spMkLst>
+            <pc:docMk/>
+            <pc:sldMk cId="3339501348" sldId="320"/>
+            <ac:spMk id="14" creationId="{8616B098-DE37-4A20-94C2-E4684B16E6F0}"/>
+          </ac:spMkLst>
+        </pc:spChg>
+      </pc:sldChg>
+      <pc:sldChg chg="modSp mod">
+        <pc:chgData name="Di Mattia Alessandro Edoardo Giorgio David" userId="f8954a66-e5ad-4a1c-9536-1d2117047f5f" providerId="ADAL" clId="{CFBF690A-D719-48D2-92B8-B5819DB24AC8}" dt="2021-08-08T17:40:03.415" v="753" actId="108"/>
+        <pc:sldMkLst>
+          <pc:docMk/>
+          <pc:sldMk cId="1078668927" sldId="321"/>
+        </pc:sldMkLst>
+        <pc:spChg chg="mod">
+          <ac:chgData name="Di Mattia Alessandro Edoardo Giorgio David" userId="f8954a66-e5ad-4a1c-9536-1d2117047f5f" providerId="ADAL" clId="{CFBF690A-D719-48D2-92B8-B5819DB24AC8}" dt="2021-08-08T17:40:03.415" v="753" actId="108"/>
+          <ac:spMkLst>
+            <pc:docMk/>
+            <pc:sldMk cId="1078668927" sldId="321"/>
+            <ac:spMk id="7" creationId="{0FC3C149-325B-4578-9826-6EF66F667717}"/>
+          </ac:spMkLst>
+        </pc:spChg>
+        <pc:spChg chg="mod">
+          <ac:chgData name="Di Mattia Alessandro Edoardo Giorgio David" userId="f8954a66-e5ad-4a1c-9536-1d2117047f5f" providerId="ADAL" clId="{CFBF690A-D719-48D2-92B8-B5819DB24AC8}" dt="2021-08-08T17:39:59.952" v="752" actId="108"/>
+          <ac:spMkLst>
+            <pc:docMk/>
+            <pc:sldMk cId="1078668927" sldId="321"/>
+            <ac:spMk id="12" creationId="{5B0F863B-F364-4F8B-9D2A-934B17016FD5}"/>
+          </ac:spMkLst>
+        </pc:spChg>
+      </pc:sldChg>
+      <pc:sldChg chg="addSp modSp new mod setBg">
+        <pc:chgData name="Di Mattia Alessandro Edoardo Giorgio David" userId="f8954a66-e5ad-4a1c-9536-1d2117047f5f" providerId="ADAL" clId="{CFBF690A-D719-48D2-92B8-B5819DB24AC8}" dt="2021-08-08T17:40:18.417" v="756"/>
+        <pc:sldMkLst>
+          <pc:docMk/>
+          <pc:sldMk cId="3535521216" sldId="322"/>
+        </pc:sldMkLst>
+        <pc:spChg chg="add mod">
+          <ac:chgData name="Di Mattia Alessandro Edoardo Giorgio David" userId="f8954a66-e5ad-4a1c-9536-1d2117047f5f" providerId="ADAL" clId="{CFBF690A-D719-48D2-92B8-B5819DB24AC8}" dt="2021-08-08T16:39:49.210" v="71" actId="20577"/>
+          <ac:spMkLst>
+            <pc:docMk/>
+            <pc:sldMk cId="3535521216" sldId="322"/>
+            <ac:spMk id="2" creationId="{EC727576-E01C-49B2-B415-6050BEB09417}"/>
+          </ac:spMkLst>
+        </pc:spChg>
+        <pc:spChg chg="add mod">
+          <ac:chgData name="Di Mattia Alessandro Edoardo Giorgio David" userId="f8954a66-e5ad-4a1c-9536-1d2117047f5f" providerId="ADAL" clId="{CFBF690A-D719-48D2-92B8-B5819DB24AC8}" dt="2021-08-08T16:40:59.662" v="157" actId="20577"/>
+          <ac:spMkLst>
+            <pc:docMk/>
+            <pc:sldMk cId="3535521216" sldId="322"/>
+            <ac:spMk id="3" creationId="{679C230D-DEB8-4664-B6E1-70585F169F99}"/>
+          </ac:spMkLst>
+        </pc:spChg>
+        <pc:spChg chg="add mod">
+          <ac:chgData name="Di Mattia Alessandro Edoardo Giorgio David" userId="f8954a66-e5ad-4a1c-9536-1d2117047f5f" providerId="ADAL" clId="{CFBF690A-D719-48D2-92B8-B5819DB24AC8}" dt="2021-08-08T17:40:09.364" v="754" actId="108"/>
+          <ac:spMkLst>
+            <pc:docMk/>
+            <pc:sldMk cId="3535521216" sldId="322"/>
+            <ac:spMk id="4" creationId="{84BA9142-2F18-4393-9507-27745B77C153}"/>
+          </ac:spMkLst>
+        </pc:spChg>
+        <pc:spChg chg="add mod">
+          <ac:chgData name="Di Mattia Alessandro Edoardo Giorgio David" userId="f8954a66-e5ad-4a1c-9536-1d2117047f5f" providerId="ADAL" clId="{CFBF690A-D719-48D2-92B8-B5819DB24AC8}" dt="2021-08-08T17:40:12.691" v="755" actId="108"/>
+          <ac:spMkLst>
+            <pc:docMk/>
+            <pc:sldMk cId="3535521216" sldId="322"/>
+            <ac:spMk id="5" creationId="{2E2022A0-A408-46E5-A774-DEC076549ADC}"/>
+          </ac:spMkLst>
+        </pc:spChg>
+      </pc:sldChg>
+      <pc:sldChg chg="addSp delSp modSp new mod">
+        <pc:chgData name="Di Mattia Alessandro Edoardo Giorgio David" userId="f8954a66-e5ad-4a1c-9536-1d2117047f5f" providerId="ADAL" clId="{CFBF690A-D719-48D2-92B8-B5819DB24AC8}" dt="2021-08-09T10:29:26.169" v="1114" actId="20577"/>
+        <pc:sldMkLst>
+          <pc:docMk/>
+          <pc:sldMk cId="879024289" sldId="323"/>
+        </pc:sldMkLst>
+        <pc:spChg chg="add del mod">
+          <ac:chgData name="Di Mattia Alessandro Edoardo Giorgio David" userId="f8954a66-e5ad-4a1c-9536-1d2117047f5f" providerId="ADAL" clId="{CFBF690A-D719-48D2-92B8-B5819DB24AC8}" dt="2021-08-08T16:53:55.966" v="191"/>
+          <ac:spMkLst>
+            <pc:docMk/>
+            <pc:sldMk cId="879024289" sldId="323"/>
+            <ac:spMk id="3" creationId="{CFE02BB8-A9F5-4503-B2C7-E81886585D65}"/>
+          </ac:spMkLst>
+        </pc:spChg>
+        <pc:spChg chg="add del mod">
+          <ac:chgData name="Di Mattia Alessandro Edoardo Giorgio David" userId="f8954a66-e5ad-4a1c-9536-1d2117047f5f" providerId="ADAL" clId="{CFBF690A-D719-48D2-92B8-B5819DB24AC8}" dt="2021-08-08T17:18:05.013" v="214"/>
+          <ac:spMkLst>
+            <pc:docMk/>
+            <pc:sldMk cId="879024289" sldId="323"/>
+            <ac:spMk id="4" creationId="{6FBAF4B8-08A7-44E4-A1D1-0D38537B45E9}"/>
+          </ac:spMkLst>
+        </pc:spChg>
+        <pc:spChg chg="add mod">
+          <ac:chgData name="Di Mattia Alessandro Edoardo Giorgio David" userId="f8954a66-e5ad-4a1c-9536-1d2117047f5f" providerId="ADAL" clId="{CFBF690A-D719-48D2-92B8-B5819DB24AC8}" dt="2021-08-09T10:29:26.169" v="1114" actId="20577"/>
+          <ac:spMkLst>
+            <pc:docMk/>
+            <pc:sldMk cId="879024289" sldId="323"/>
+            <ac:spMk id="5" creationId="{9B3D4137-6E15-473C-A64B-27FDB1D899A6}"/>
+          </ac:spMkLst>
+        </pc:spChg>
+        <pc:spChg chg="add del mod">
+          <ac:chgData name="Di Mattia Alessandro Edoardo Giorgio David" userId="f8954a66-e5ad-4a1c-9536-1d2117047f5f" providerId="ADAL" clId="{CFBF690A-D719-48D2-92B8-B5819DB24AC8}" dt="2021-08-08T17:23:17.474" v="312" actId="11529"/>
+          <ac:spMkLst>
+            <pc:docMk/>
+            <pc:sldMk cId="879024289" sldId="323"/>
+            <ac:spMk id="6" creationId="{BE394CD1-FBD5-4225-8C16-03EF7BFFE769}"/>
+          </ac:spMkLst>
+        </pc:spChg>
+        <pc:spChg chg="add mod">
+          <ac:chgData name="Di Mattia Alessandro Edoardo Giorgio David" userId="f8954a66-e5ad-4a1c-9536-1d2117047f5f" providerId="ADAL" clId="{CFBF690A-D719-48D2-92B8-B5819DB24AC8}" dt="2021-08-08T17:28:17.626" v="365" actId="1076"/>
+          <ac:spMkLst>
+            <pc:docMk/>
+            <pc:sldMk cId="879024289" sldId="323"/>
+            <ac:spMk id="7" creationId="{1D0C6519-F93A-4E09-9423-7B2AF81BE097}"/>
+          </ac:spMkLst>
+        </pc:spChg>
+        <pc:spChg chg="add mod">
+          <ac:chgData name="Di Mattia Alessandro Edoardo Giorgio David" userId="f8954a66-e5ad-4a1c-9536-1d2117047f5f" providerId="ADAL" clId="{CFBF690A-D719-48D2-92B8-B5819DB24AC8}" dt="2021-08-08T17:24:44.386" v="320" actId="17032"/>
+          <ac:spMkLst>
+            <pc:docMk/>
+            <pc:sldMk cId="879024289" sldId="323"/>
+            <ac:spMk id="8" creationId="{D772A39C-F542-4550-A73B-9B799493DF91}"/>
+          </ac:spMkLst>
+        </pc:spChg>
+        <pc:spChg chg="add mod">
+          <ac:chgData name="Di Mattia Alessandro Edoardo Giorgio David" userId="f8954a66-e5ad-4a1c-9536-1d2117047f5f" providerId="ADAL" clId="{CFBF690A-D719-48D2-92B8-B5819DB24AC8}" dt="2021-08-08T17:40:33.964" v="759" actId="108"/>
+          <ac:spMkLst>
+            <pc:docMk/>
+            <pc:sldMk cId="879024289" sldId="323"/>
+            <ac:spMk id="10" creationId="{5D8FFE11-A3B1-42AB-AA3E-5E40F7E2496E}"/>
+          </ac:spMkLst>
+        </pc:spChg>
+        <pc:spChg chg="add mod">
+          <ac:chgData name="Di Mattia Alessandro Edoardo Giorgio David" userId="f8954a66-e5ad-4a1c-9536-1d2117047f5f" providerId="ADAL" clId="{CFBF690A-D719-48D2-92B8-B5819DB24AC8}" dt="2021-08-08T17:40:37.387" v="760" actId="108"/>
+          <ac:spMkLst>
+            <pc:docMk/>
+            <pc:sldMk cId="879024289" sldId="323"/>
+            <ac:spMk id="12" creationId="{817DCC48-4C4D-4A07-B87F-570545352CEB}"/>
+          </ac:spMkLst>
+        </pc:spChg>
+        <pc:picChg chg="add mod">
+          <ac:chgData name="Di Mattia Alessandro Edoardo Giorgio David" userId="f8954a66-e5ad-4a1c-9536-1d2117047f5f" providerId="ADAL" clId="{CFBF690A-D719-48D2-92B8-B5819DB24AC8}" dt="2021-08-08T17:28:09.934" v="364" actId="1076"/>
+          <ac:picMkLst>
+            <pc:docMk/>
+            <pc:sldMk cId="879024289" sldId="323"/>
+            <ac:picMk id="2" creationId="{A0A31DEA-54EF-463F-98B0-86CBB8B1CBED}"/>
+          </ac:picMkLst>
+        </pc:picChg>
+      </pc:sldChg>
+      <pc:sldChg chg="modSp add mod setBg">
+        <pc:chgData name="Di Mattia Alessandro Edoardo Giorgio David" userId="f8954a66-e5ad-4a1c-9536-1d2117047f5f" providerId="ADAL" clId="{CFBF690A-D719-48D2-92B8-B5819DB24AC8}" dt="2021-08-08T17:41:53.973" v="775" actId="1076"/>
+        <pc:sldMkLst>
+          <pc:docMk/>
+          <pc:sldMk cId="2507292240" sldId="324"/>
+        </pc:sldMkLst>
+        <pc:spChg chg="mod">
+          <ac:chgData name="Di Mattia Alessandro Edoardo Giorgio David" userId="f8954a66-e5ad-4a1c-9536-1d2117047f5f" providerId="ADAL" clId="{CFBF690A-D719-48D2-92B8-B5819DB24AC8}" dt="2021-08-08T17:41:53.973" v="775" actId="1076"/>
+          <ac:spMkLst>
+            <pc:docMk/>
+            <pc:sldMk cId="2507292240" sldId="324"/>
+            <ac:spMk id="5" creationId="{9B3D4137-6E15-473C-A64B-27FDB1D899A6}"/>
+          </ac:spMkLst>
+        </pc:spChg>
+        <pc:spChg chg="mod">
+          <ac:chgData name="Di Mattia Alessandro Edoardo Giorgio David" userId="f8954a66-e5ad-4a1c-9536-1d2117047f5f" providerId="ADAL" clId="{CFBF690A-D719-48D2-92B8-B5819DB24AC8}" dt="2021-08-08T17:28:32.286" v="366" actId="14100"/>
+          <ac:spMkLst>
+            <pc:docMk/>
+            <pc:sldMk cId="2507292240" sldId="324"/>
+            <ac:spMk id="7" creationId="{1D0C6519-F93A-4E09-9423-7B2AF81BE097}"/>
+          </ac:spMkLst>
+        </pc:spChg>
+        <pc:spChg chg="mod">
+          <ac:chgData name="Di Mattia Alessandro Edoardo Giorgio David" userId="f8954a66-e5ad-4a1c-9536-1d2117047f5f" providerId="ADAL" clId="{CFBF690A-D719-48D2-92B8-B5819DB24AC8}" dt="2021-08-08T17:26:55.175" v="333" actId="1076"/>
+          <ac:spMkLst>
+            <pc:docMk/>
+            <pc:sldMk cId="2507292240" sldId="324"/>
+            <ac:spMk id="8" creationId="{D772A39C-F542-4550-A73B-9B799493DF91}"/>
+          </ac:spMkLst>
+        </pc:spChg>
+        <pc:spChg chg="mod">
+          <ac:chgData name="Di Mattia Alessandro Edoardo Giorgio David" userId="f8954a66-e5ad-4a1c-9536-1d2117047f5f" providerId="ADAL" clId="{CFBF690A-D719-48D2-92B8-B5819DB24AC8}" dt="2021-08-08T17:40:58.531" v="764" actId="108"/>
+          <ac:spMkLst>
+            <pc:docMk/>
+            <pc:sldMk cId="2507292240" sldId="324"/>
+            <ac:spMk id="10" creationId="{5D8FFE11-A3B1-42AB-AA3E-5E40F7E2496E}"/>
+          </ac:spMkLst>
+        </pc:spChg>
+        <pc:spChg chg="mod">
+          <ac:chgData name="Di Mattia Alessandro Edoardo Giorgio David" userId="f8954a66-e5ad-4a1c-9536-1d2117047f5f" providerId="ADAL" clId="{CFBF690A-D719-48D2-92B8-B5819DB24AC8}" dt="2021-08-08T17:41:02.102" v="765" actId="108"/>
+          <ac:spMkLst>
+            <pc:docMk/>
+            <pc:sldMk cId="2507292240" sldId="324"/>
+            <ac:spMk id="12" creationId="{817DCC48-4C4D-4A07-B87F-570545352CEB}"/>
+          </ac:spMkLst>
+        </pc:spChg>
+        <pc:picChg chg="mod">
+          <ac:chgData name="Di Mattia Alessandro Edoardo Giorgio David" userId="f8954a66-e5ad-4a1c-9536-1d2117047f5f" providerId="ADAL" clId="{CFBF690A-D719-48D2-92B8-B5819DB24AC8}" dt="2021-08-08T17:27:34.254" v="359" actId="1076"/>
+          <ac:picMkLst>
+            <pc:docMk/>
+            <pc:sldMk cId="2507292240" sldId="324"/>
+            <ac:picMk id="2" creationId="{A0A31DEA-54EF-463F-98B0-86CBB8B1CBED}"/>
+          </ac:picMkLst>
+        </pc:picChg>
+      </pc:sldChg>
+      <pc:sldChg chg="addSp delSp modSp new mod">
+        <pc:chgData name="Di Mattia Alessandro Edoardo Giorgio David" userId="f8954a66-e5ad-4a1c-9536-1d2117047f5f" providerId="ADAL" clId="{CFBF690A-D719-48D2-92B8-B5819DB24AC8}" dt="2021-08-09T10:38:12.375" v="1134" actId="20577"/>
+        <pc:sldMkLst>
+          <pc:docMk/>
+          <pc:sldMk cId="2212003161" sldId="325"/>
+        </pc:sldMkLst>
+        <pc:spChg chg="add del mod">
+          <ac:chgData name="Di Mattia Alessandro Edoardo Giorgio David" userId="f8954a66-e5ad-4a1c-9536-1d2117047f5f" providerId="ADAL" clId="{CFBF690A-D719-48D2-92B8-B5819DB24AC8}" dt="2021-08-08T17:32:17.251" v="515"/>
+          <ac:spMkLst>
+            <pc:docMk/>
+            <pc:sldMk cId="2212003161" sldId="325"/>
+            <ac:spMk id="2" creationId="{053F468A-6B00-4E50-B268-FA6901E2578D}"/>
+          </ac:spMkLst>
+        </pc:spChg>
+        <pc:spChg chg="add mod">
+          <ac:chgData name="Di Mattia Alessandro Edoardo Giorgio David" userId="f8954a66-e5ad-4a1c-9536-1d2117047f5f" providerId="ADAL" clId="{CFBF690A-D719-48D2-92B8-B5819DB24AC8}" dt="2021-08-09T10:29:43.988" v="1122" actId="20577"/>
+          <ac:spMkLst>
+            <pc:docMk/>
+            <pc:sldMk cId="2212003161" sldId="325"/>
+            <ac:spMk id="4" creationId="{4E105DD7-ED18-4D77-BE30-789352B7F98F}"/>
+          </ac:spMkLst>
+        </pc:spChg>
+        <pc:spChg chg="add mod">
+          <ac:chgData name="Di Mattia Alessandro Edoardo Giorgio David" userId="f8954a66-e5ad-4a1c-9536-1d2117047f5f" providerId="ADAL" clId="{CFBF690A-D719-48D2-92B8-B5819DB24AC8}" dt="2021-08-08T17:42:35.960" v="784" actId="108"/>
+          <ac:spMkLst>
+            <pc:docMk/>
+            <pc:sldMk cId="2212003161" sldId="325"/>
+            <ac:spMk id="5" creationId="{6A4E8D29-91B3-43E5-BA8D-84E17885461E}"/>
+          </ac:spMkLst>
+        </pc:spChg>
+        <pc:spChg chg="add mod">
+          <ac:chgData name="Di Mattia Alessandro Edoardo Giorgio David" userId="f8954a66-e5ad-4a1c-9536-1d2117047f5f" providerId="ADAL" clId="{CFBF690A-D719-48D2-92B8-B5819DB24AC8}" dt="2021-08-09T10:38:12.375" v="1134" actId="20577"/>
+          <ac:spMkLst>
+            <pc:docMk/>
+            <pc:sldMk cId="2212003161" sldId="325"/>
+            <ac:spMk id="6" creationId="{F804A9CF-DC2A-444F-A1A9-0BEEB91832B5}"/>
+          </ac:spMkLst>
+        </pc:spChg>
+      </pc:sldChg>
+      <pc:sldChg chg="addSp modSp new mod modAnim">
+        <pc:chgData name="Di Mattia Alessandro Edoardo Giorgio David" userId="f8954a66-e5ad-4a1c-9536-1d2117047f5f" providerId="ADAL" clId="{CFBF690A-D719-48D2-92B8-B5819DB24AC8}" dt="2021-08-08T17:46:20.840" v="903" actId="1076"/>
+        <pc:sldMkLst>
+          <pc:docMk/>
+          <pc:sldMk cId="1071665624" sldId="326"/>
+        </pc:sldMkLst>
+        <pc:spChg chg="add mod">
+          <ac:chgData name="Di Mattia Alessandro Edoardo Giorgio David" userId="f8954a66-e5ad-4a1c-9536-1d2117047f5f" providerId="ADAL" clId="{CFBF690A-D719-48D2-92B8-B5819DB24AC8}" dt="2021-08-08T17:46:20.840" v="903" actId="1076"/>
+          <ac:spMkLst>
+            <pc:docMk/>
+            <pc:sldMk cId="1071665624" sldId="326"/>
+            <ac:spMk id="4" creationId="{0F4B1099-4E99-4BF5-AD16-C39C5D90A943}"/>
+          </ac:spMkLst>
+        </pc:spChg>
+        <pc:graphicFrameChg chg="add mod modGraphic">
+          <ac:chgData name="Di Mattia Alessandro Edoardo Giorgio David" userId="f8954a66-e5ad-4a1c-9536-1d2117047f5f" providerId="ADAL" clId="{CFBF690A-D719-48D2-92B8-B5819DB24AC8}" dt="2021-08-08T17:44:20.679" v="791" actId="14100"/>
+          <ac:graphicFrameMkLst>
+            <pc:docMk/>
+            <pc:sldMk cId="1071665624" sldId="326"/>
+            <ac:graphicFrameMk id="2" creationId="{6EEB5749-7593-43BA-B938-76D1F2534684}"/>
+          </ac:graphicFrameMkLst>
+        </pc:graphicFrameChg>
+      </pc:sldChg>
+      <pc:sldChg chg="addSp delSp modSp new mod delAnim modAnim">
+        <pc:chgData name="Di Mattia Alessandro Edoardo Giorgio David" userId="f8954a66-e5ad-4a1c-9536-1d2117047f5f" providerId="ADAL" clId="{CFBF690A-D719-48D2-92B8-B5819DB24AC8}" dt="2021-08-08T17:53:56.667" v="1052" actId="21"/>
+        <pc:sldMkLst>
+          <pc:docMk/>
+          <pc:sldMk cId="2140800234" sldId="327"/>
+        </pc:sldMkLst>
+        <pc:spChg chg="add mod">
+          <ac:chgData name="Di Mattia Alessandro Edoardo Giorgio David" userId="f8954a66-e5ad-4a1c-9536-1d2117047f5f" providerId="ADAL" clId="{CFBF690A-D719-48D2-92B8-B5819DB24AC8}" dt="2021-08-08T17:50:29.420" v="1006" actId="122"/>
+          <ac:spMkLst>
+            <pc:docMk/>
+            <pc:sldMk cId="2140800234" sldId="327"/>
+            <ac:spMk id="3" creationId="{C22EA0BD-83CD-47CE-879C-B8E676000576}"/>
+          </ac:spMkLst>
+        </pc:spChg>
+        <pc:spChg chg="add del mod">
+          <ac:chgData name="Di Mattia Alessandro Edoardo Giorgio David" userId="f8954a66-e5ad-4a1c-9536-1d2117047f5f" providerId="ADAL" clId="{CFBF690A-D719-48D2-92B8-B5819DB24AC8}" dt="2021-08-08T17:53:53.511" v="1051" actId="478"/>
+          <ac:spMkLst>
+            <pc:docMk/>
+            <pc:sldMk cId="2140800234" sldId="327"/>
+            <ac:spMk id="5" creationId="{C88AE3D3-E6E7-41FE-B1A4-5DEF776F9451}"/>
+          </ac:spMkLst>
+        </pc:spChg>
+        <pc:spChg chg="add del mod">
+          <ac:chgData name="Di Mattia Alessandro Edoardo Giorgio David" userId="f8954a66-e5ad-4a1c-9536-1d2117047f5f" providerId="ADAL" clId="{CFBF690A-D719-48D2-92B8-B5819DB24AC8}" dt="2021-08-08T17:53:56.667" v="1052" actId="21"/>
+          <ac:spMkLst>
+            <pc:docMk/>
+            <pc:sldMk cId="2140800234" sldId="327"/>
+            <ac:spMk id="7" creationId="{9AE07881-68E1-48B5-A96C-E07F0AA11531}"/>
+          </ac:spMkLst>
+        </pc:spChg>
+        <pc:graphicFrameChg chg="add mod">
+          <ac:chgData name="Di Mattia Alessandro Edoardo Giorgio David" userId="f8954a66-e5ad-4a1c-9536-1d2117047f5f" providerId="ADAL" clId="{CFBF690A-D719-48D2-92B8-B5819DB24AC8}" dt="2021-08-08T17:47:05.493" v="905"/>
+          <ac:graphicFrameMkLst>
+            <pc:docMk/>
+            <pc:sldMk cId="2140800234" sldId="327"/>
+            <ac:graphicFrameMk id="2" creationId="{876DC8AA-98E3-43C1-ACE4-6D79802114D8}"/>
+          </ac:graphicFrameMkLst>
+        </pc:graphicFrameChg>
+        <pc:picChg chg="add mod">
+          <ac:chgData name="Di Mattia Alessandro Edoardo Giorgio David" userId="f8954a66-e5ad-4a1c-9536-1d2117047f5f" providerId="ADAL" clId="{CFBF690A-D719-48D2-92B8-B5819DB24AC8}" dt="2021-08-08T17:51:25.496" v="1008" actId="1076"/>
+          <ac:picMkLst>
+            <pc:docMk/>
+            <pc:sldMk cId="2140800234" sldId="327"/>
+            <ac:picMk id="4" creationId="{11755E01-2AF0-4A03-8D26-D68F2F0651E1}"/>
+          </ac:picMkLst>
+        </pc:picChg>
+        <pc:picChg chg="add del">
+          <ac:chgData name="Di Mattia Alessandro Edoardo Giorgio David" userId="f8954a66-e5ad-4a1c-9536-1d2117047f5f" providerId="ADAL" clId="{CFBF690A-D719-48D2-92B8-B5819DB24AC8}" dt="2021-08-08T17:52:57.698" v="1044"/>
+          <ac:picMkLst>
+            <pc:docMk/>
+            <pc:sldMk cId="2140800234" sldId="327"/>
+            <ac:picMk id="6" creationId="{35FF09AC-8AE0-4139-BFE7-03A3FF6204A2}"/>
+          </ac:picMkLst>
+        </pc:picChg>
+      </pc:sldChg>
+      <pc:sldChg chg="addSp delSp modSp new mod delAnim modAnim">
+        <pc:chgData name="Di Mattia Alessandro Edoardo Giorgio David" userId="f8954a66-e5ad-4a1c-9536-1d2117047f5f" providerId="ADAL" clId="{CFBF690A-D719-48D2-92B8-B5819DB24AC8}" dt="2021-08-09T10:35:30.787" v="1123" actId="20577"/>
+        <pc:sldMkLst>
+          <pc:docMk/>
+          <pc:sldMk cId="2741554749" sldId="328"/>
+        </pc:sldMkLst>
+        <pc:spChg chg="add mod">
+          <ac:chgData name="Di Mattia Alessandro Edoardo Giorgio David" userId="f8954a66-e5ad-4a1c-9536-1d2117047f5f" providerId="ADAL" clId="{CFBF690A-D719-48D2-92B8-B5819DB24AC8}" dt="2021-08-09T10:35:30.787" v="1123" actId="20577"/>
+          <ac:spMkLst>
+            <pc:docMk/>
+            <pc:sldMk cId="2741554749" sldId="328"/>
+            <ac:spMk id="2" creationId="{56E0AF04-5706-48DE-B45A-8BDA35675443}"/>
+          </ac:spMkLst>
+        </pc:spChg>
+        <pc:spChg chg="add mod">
+          <ac:chgData name="Di Mattia Alessandro Edoardo Giorgio David" userId="f8954a66-e5ad-4a1c-9536-1d2117047f5f" providerId="ADAL" clId="{CFBF690A-D719-48D2-92B8-B5819DB24AC8}" dt="2021-08-08T17:56:47.837" v="1065"/>
+          <ac:spMkLst>
+            <pc:docMk/>
+            <pc:sldMk cId="2741554749" sldId="328"/>
+            <ac:spMk id="3" creationId="{A3C36983-ECB3-4E34-B9A7-5FA335222AAD}"/>
+          </ac:spMkLst>
+        </pc:spChg>
+        <pc:graphicFrameChg chg="add del mod modGraphic">
+          <ac:chgData name="Di Mattia Alessandro Edoardo Giorgio David" userId="f8954a66-e5ad-4a1c-9536-1d2117047f5f" providerId="ADAL" clId="{CFBF690A-D719-48D2-92B8-B5819DB24AC8}" dt="2021-08-09T10:28:18.733" v="1086" actId="478"/>
+          <ac:graphicFrameMkLst>
+            <pc:docMk/>
+            <pc:sldMk cId="2741554749" sldId="328"/>
+            <ac:graphicFrameMk id="4" creationId="{79FDAE47-7486-4180-94CF-31DE77B6955E}"/>
+          </ac:graphicFrameMkLst>
+        </pc:graphicFrameChg>
+        <pc:graphicFrameChg chg="add del mod modGraphic">
+          <ac:chgData name="Di Mattia Alessandro Edoardo Giorgio David" userId="f8954a66-e5ad-4a1c-9536-1d2117047f5f" providerId="ADAL" clId="{CFBF690A-D719-48D2-92B8-B5819DB24AC8}" dt="2021-08-09T10:28:24.956" v="1090" actId="478"/>
+          <ac:graphicFrameMkLst>
+            <pc:docMk/>
+            <pc:sldMk cId="2741554749" sldId="328"/>
+            <ac:graphicFrameMk id="6" creationId="{70435F5D-8374-40BE-BB6F-AA2FEE96AD3B}"/>
+          </ac:graphicFrameMkLst>
+        </pc:graphicFrameChg>
+        <pc:graphicFrameChg chg="add mod modGraphic">
+          <ac:chgData name="Di Mattia Alessandro Edoardo Giorgio David" userId="f8954a66-e5ad-4a1c-9536-1d2117047f5f" providerId="ADAL" clId="{CFBF690A-D719-48D2-92B8-B5819DB24AC8}" dt="2021-08-09T10:28:51.990" v="1095" actId="1076"/>
+          <ac:graphicFrameMkLst>
+            <pc:docMk/>
+            <pc:sldMk cId="2741554749" sldId="328"/>
+            <ac:graphicFrameMk id="7" creationId="{3960835B-A40E-4F95-A75D-58967E7A1CC5}"/>
+          </ac:graphicFrameMkLst>
+        </pc:graphicFrameChg>
+        <pc:picChg chg="add del mod">
+          <ac:chgData name="Di Mattia Alessandro Edoardo Giorgio David" userId="f8954a66-e5ad-4a1c-9536-1d2117047f5f" providerId="ADAL" clId="{CFBF690A-D719-48D2-92B8-B5819DB24AC8}" dt="2021-08-09T10:28:20.010" v="1087" actId="478"/>
+          <ac:picMkLst>
+            <pc:docMk/>
+            <pc:sldMk cId="2741554749" sldId="328"/>
+            <ac:picMk id="5" creationId="{B3E64F8E-DA85-430C-B345-FA8C8ED7D2E6}"/>
+          </ac:picMkLst>
+        </pc:picChg>
+      </pc:sldChg>
+      <pc:sldChg chg="addSp delSp modSp new mod modAnim">
+        <pc:chgData name="Di Mattia Alessandro Edoardo Giorgio David" userId="f8954a66-e5ad-4a1c-9536-1d2117047f5f" providerId="ADAL" clId="{CFBF690A-D719-48D2-92B8-B5819DB24AC8}" dt="2021-08-09T15:12:35.814" v="1839" actId="20577"/>
+        <pc:sldMkLst>
+          <pc:docMk/>
+          <pc:sldMk cId="1026349041" sldId="329"/>
+        </pc:sldMkLst>
+        <pc:spChg chg="add mod">
+          <ac:chgData name="Di Mattia Alessandro Edoardo Giorgio David" userId="f8954a66-e5ad-4a1c-9536-1d2117047f5f" providerId="ADAL" clId="{CFBF690A-D719-48D2-92B8-B5819DB24AC8}" dt="2021-08-09T15:12:35.814" v="1839" actId="20577"/>
+          <ac:spMkLst>
+            <pc:docMk/>
+            <pc:sldMk cId="1026349041" sldId="329"/>
+            <ac:spMk id="4" creationId="{987EDC07-C130-431E-8952-20B6CF56FEC3}"/>
+          </ac:spMkLst>
+        </pc:spChg>
+        <pc:spChg chg="add mod">
+          <ac:chgData name="Di Mattia Alessandro Edoardo Giorgio David" userId="f8954a66-e5ad-4a1c-9536-1d2117047f5f" providerId="ADAL" clId="{CFBF690A-D719-48D2-92B8-B5819DB24AC8}" dt="2021-08-09T14:15:52.987" v="1303" actId="113"/>
+          <ac:spMkLst>
+            <pc:docMk/>
+            <pc:sldMk cId="1026349041" sldId="329"/>
+            <ac:spMk id="5" creationId="{4BA48415-D8CB-43C1-B67C-49183FBD0368}"/>
+          </ac:spMkLst>
+        </pc:spChg>
+        <pc:spChg chg="add mod">
+          <ac:chgData name="Di Mattia Alessandro Edoardo Giorgio David" userId="f8954a66-e5ad-4a1c-9536-1d2117047f5f" providerId="ADAL" clId="{CFBF690A-D719-48D2-92B8-B5819DB24AC8}" dt="2021-08-09T14:16:07.942" v="1316" actId="20577"/>
+          <ac:spMkLst>
+            <pc:docMk/>
+            <pc:sldMk cId="1026349041" sldId="329"/>
+            <ac:spMk id="6" creationId="{7633950F-2995-4718-9772-8F6F21C33A2B}"/>
+          </ac:spMkLst>
+        </pc:spChg>
+        <pc:spChg chg="add mod">
+          <ac:chgData name="Di Mattia Alessandro Edoardo Giorgio David" userId="f8954a66-e5ad-4a1c-9536-1d2117047f5f" providerId="ADAL" clId="{CFBF690A-D719-48D2-92B8-B5819DB24AC8}" dt="2021-08-09T10:51:06.588" v="1183" actId="1076"/>
+          <ac:spMkLst>
+            <pc:docMk/>
+            <pc:sldMk cId="1026349041" sldId="329"/>
+            <ac:spMk id="7" creationId="{651C318D-C586-4D9D-9D0E-5C0AC43A050B}"/>
+          </ac:spMkLst>
+        </pc:spChg>
+        <pc:picChg chg="add del mod">
+          <ac:chgData name="Di Mattia Alessandro Edoardo Giorgio David" userId="f8954a66-e5ad-4a1c-9536-1d2117047f5f" providerId="ADAL" clId="{CFBF690A-D719-48D2-92B8-B5819DB24AC8}" dt="2021-08-09T10:44:42.610" v="1137" actId="478"/>
+          <ac:picMkLst>
+            <pc:docMk/>
+            <pc:sldMk cId="1026349041" sldId="329"/>
+            <ac:picMk id="2" creationId="{D0354408-0743-4BA8-B210-509B7E792CAA}"/>
+          </ac:picMkLst>
+        </pc:picChg>
+        <pc:picChg chg="add mod">
+          <ac:chgData name="Di Mattia Alessandro Edoardo Giorgio David" userId="f8954a66-e5ad-4a1c-9536-1d2117047f5f" providerId="ADAL" clId="{CFBF690A-D719-48D2-92B8-B5819DB24AC8}" dt="2021-08-09T10:44:49.207" v="1139" actId="1076"/>
+          <ac:picMkLst>
+            <pc:docMk/>
+            <pc:sldMk cId="1026349041" sldId="329"/>
+            <ac:picMk id="3" creationId="{4A0BF7A2-344A-4B0D-BEB9-49E1BBA1FD3F}"/>
+          </ac:picMkLst>
+        </pc:picChg>
+      </pc:sldChg>
+      <pc:sldChg chg="addSp delSp modSp new mod modClrScheme modAnim chgLayout">
+        <pc:chgData name="Di Mattia Alessandro Edoardo Giorgio David" userId="f8954a66-e5ad-4a1c-9536-1d2117047f5f" providerId="ADAL" clId="{CFBF690A-D719-48D2-92B8-B5819DB24AC8}" dt="2021-08-09T14:26:57.215" v="1340" actId="20577"/>
+        <pc:sldMkLst>
+          <pc:docMk/>
+          <pc:sldMk cId="2892898324" sldId="330"/>
+        </pc:sldMkLst>
+        <pc:spChg chg="add mod">
+          <ac:chgData name="Di Mattia Alessandro Edoardo Giorgio David" userId="f8954a66-e5ad-4a1c-9536-1d2117047f5f" providerId="ADAL" clId="{CFBF690A-D719-48D2-92B8-B5819DB24AC8}" dt="2021-08-09T14:26:57.215" v="1340" actId="20577"/>
+          <ac:spMkLst>
+            <pc:docMk/>
+            <pc:sldMk cId="2892898324" sldId="330"/>
+            <ac:spMk id="2" creationId="{376A20E8-0080-4E6F-885C-CB0C938C88E4}"/>
+          </ac:spMkLst>
+        </pc:spChg>
+        <pc:spChg chg="add del mod">
+          <ac:chgData name="Di Mattia Alessandro Edoardo Giorgio David" userId="f8954a66-e5ad-4a1c-9536-1d2117047f5f" providerId="ADAL" clId="{CFBF690A-D719-48D2-92B8-B5819DB24AC8}" dt="2021-08-09T11:04:20.188" v="1192"/>
+          <ac:spMkLst>
+            <pc:docMk/>
+            <pc:sldMk cId="2892898324" sldId="330"/>
+            <ac:spMk id="8" creationId="{A5416496-9236-4DBD-82D1-6A95A319B1CA}"/>
+          </ac:spMkLst>
+        </pc:spChg>
+        <pc:spChg chg="add del mod">
+          <ac:chgData name="Di Mattia Alessandro Edoardo Giorgio David" userId="f8954a66-e5ad-4a1c-9536-1d2117047f5f" providerId="ADAL" clId="{CFBF690A-D719-48D2-92B8-B5819DB24AC8}" dt="2021-08-09T11:04:20.188" v="1192"/>
+          <ac:spMkLst>
+            <pc:docMk/>
+            <pc:sldMk cId="2892898324" sldId="330"/>
+            <ac:spMk id="9" creationId="{A3AA9FF8-637A-444F-BC41-94A30890340B}"/>
+          </ac:spMkLst>
+        </pc:spChg>
+        <pc:spChg chg="add del mod">
+          <ac:chgData name="Di Mattia Alessandro Edoardo Giorgio David" userId="f8954a66-e5ad-4a1c-9536-1d2117047f5f" providerId="ADAL" clId="{CFBF690A-D719-48D2-92B8-B5819DB24AC8}" dt="2021-08-09T11:04:20.188" v="1192"/>
+          <ac:spMkLst>
+            <pc:docMk/>
+            <pc:sldMk cId="2892898324" sldId="330"/>
+            <ac:spMk id="10" creationId="{59886D3F-95C7-4956-AD17-B6F928922752}"/>
+          </ac:spMkLst>
+        </pc:spChg>
+        <pc:spChg chg="add del mod">
+          <ac:chgData name="Di Mattia Alessandro Edoardo Giorgio David" userId="f8954a66-e5ad-4a1c-9536-1d2117047f5f" providerId="ADAL" clId="{CFBF690A-D719-48D2-92B8-B5819DB24AC8}" dt="2021-08-09T11:04:20.188" v="1192"/>
+          <ac:spMkLst>
+            <pc:docMk/>
+            <pc:sldMk cId="2892898324" sldId="330"/>
+            <ac:spMk id="11" creationId="{7534BEBF-DD5F-4FFD-A264-16D5029F761B}"/>
+          </ac:spMkLst>
+        </pc:spChg>
+        <pc:spChg chg="add del mod">
+          <ac:chgData name="Di Mattia Alessandro Edoardo Giorgio David" userId="f8954a66-e5ad-4a1c-9536-1d2117047f5f" providerId="ADAL" clId="{CFBF690A-D719-48D2-92B8-B5819DB24AC8}" dt="2021-08-09T11:04:20.188" v="1192"/>
+          <ac:spMkLst>
+            <pc:docMk/>
+            <pc:sldMk cId="2892898324" sldId="330"/>
+            <ac:spMk id="12" creationId="{7D2F5234-C9C6-4013-98C5-159E60B99B34}"/>
+          </ac:spMkLst>
+        </pc:spChg>
+        <pc:spChg chg="add del mod">
+          <ac:chgData name="Di Mattia Alessandro Edoardo Giorgio David" userId="f8954a66-e5ad-4a1c-9536-1d2117047f5f" providerId="ADAL" clId="{CFBF690A-D719-48D2-92B8-B5819DB24AC8}" dt="2021-08-09T11:04:20.188" v="1192"/>
+          <ac:spMkLst>
+            <pc:docMk/>
+            <pc:sldMk cId="2892898324" sldId="330"/>
+            <ac:spMk id="13" creationId="{8A22D28E-AC6C-41B1-857D-B61324DAB068}"/>
+          </ac:spMkLst>
+        </pc:spChg>
+        <pc:spChg chg="add del mod">
+          <ac:chgData name="Di Mattia Alessandro Edoardo Giorgio David" userId="f8954a66-e5ad-4a1c-9536-1d2117047f5f" providerId="ADAL" clId="{CFBF690A-D719-48D2-92B8-B5819DB24AC8}" dt="2021-08-09T11:04:20.188" v="1192"/>
+          <ac:spMkLst>
+            <pc:docMk/>
+            <pc:sldMk cId="2892898324" sldId="330"/>
+            <ac:spMk id="14" creationId="{E93EB8F5-768E-46A0-AAC4-9B9F3C1EFC04}"/>
+          </ac:spMkLst>
+        </pc:spChg>
+        <pc:spChg chg="add del mod">
+          <ac:chgData name="Di Mattia Alessandro Edoardo Giorgio David" userId="f8954a66-e5ad-4a1c-9536-1d2117047f5f" providerId="ADAL" clId="{CFBF690A-D719-48D2-92B8-B5819DB24AC8}" dt="2021-08-09T11:04:20.188" v="1192"/>
+          <ac:spMkLst>
+            <pc:docMk/>
+            <pc:sldMk cId="2892898324" sldId="330"/>
+            <ac:spMk id="15" creationId="{6473ABBE-5B9B-420D-A6A8-78F735B028FF}"/>
+          </ac:spMkLst>
+        </pc:spChg>
+        <pc:spChg chg="add del mod">
+          <ac:chgData name="Di Mattia Alessandro Edoardo Giorgio David" userId="f8954a66-e5ad-4a1c-9536-1d2117047f5f" providerId="ADAL" clId="{CFBF690A-D719-48D2-92B8-B5819DB24AC8}" dt="2021-08-09T11:04:20.188" v="1192"/>
+          <ac:spMkLst>
+            <pc:docMk/>
+            <pc:sldMk cId="2892898324" sldId="330"/>
+            <ac:spMk id="18" creationId="{DE035E5B-E49A-4E7D-8B8A-21909F524B70}"/>
+          </ac:spMkLst>
+        </pc:spChg>
+        <pc:spChg chg="add del mod">
+          <ac:chgData name="Di Mattia Alessandro Edoardo Giorgio David" userId="f8954a66-e5ad-4a1c-9536-1d2117047f5f" providerId="ADAL" clId="{CFBF690A-D719-48D2-92B8-B5819DB24AC8}" dt="2021-08-09T11:04:20.188" v="1192"/>
+          <ac:spMkLst>
+            <pc:docMk/>
+            <pc:sldMk cId="2892898324" sldId="330"/>
+            <ac:spMk id="19" creationId="{6B394C40-0C91-4B6C-AB58-7E09A78A3A31}"/>
+          </ac:spMkLst>
+        </pc:spChg>
+        <pc:spChg chg="add del mod">
+          <ac:chgData name="Di Mattia Alessandro Edoardo Giorgio David" userId="f8954a66-e5ad-4a1c-9536-1d2117047f5f" providerId="ADAL" clId="{CFBF690A-D719-48D2-92B8-B5819DB24AC8}" dt="2021-08-09T11:04:20.188" v="1192"/>
+          <ac:spMkLst>
+            <pc:docMk/>
+            <pc:sldMk cId="2892898324" sldId="330"/>
+            <ac:spMk id="20" creationId="{3B580C25-4815-413D-968D-71996D758362}"/>
+          </ac:spMkLst>
+        </pc:spChg>
+        <pc:spChg chg="add del mod">
+          <ac:chgData name="Di Mattia Alessandro Edoardo Giorgio David" userId="f8954a66-e5ad-4a1c-9536-1d2117047f5f" providerId="ADAL" clId="{CFBF690A-D719-48D2-92B8-B5819DB24AC8}" dt="2021-08-09T11:04:20.188" v="1192"/>
+          <ac:spMkLst>
+            <pc:docMk/>
+            <pc:sldMk cId="2892898324" sldId="330"/>
+            <ac:spMk id="21" creationId="{9F18590E-ED48-4206-B829-46FB6CB98B8E}"/>
+          </ac:spMkLst>
+        </pc:spChg>
+        <pc:spChg chg="add del mod">
+          <ac:chgData name="Di Mattia Alessandro Edoardo Giorgio David" userId="f8954a66-e5ad-4a1c-9536-1d2117047f5f" providerId="ADAL" clId="{CFBF690A-D719-48D2-92B8-B5819DB24AC8}" dt="2021-08-09T11:04:20.188" v="1192"/>
+          <ac:spMkLst>
+            <pc:docMk/>
+            <pc:sldMk cId="2892898324" sldId="330"/>
+            <ac:spMk id="24" creationId="{0DB23D63-DD70-44FF-A790-2BE198204E3F}"/>
+          </ac:spMkLst>
+        </pc:spChg>
+        <pc:spChg chg="add del mod">
+          <ac:chgData name="Di Mattia Alessandro Edoardo Giorgio David" userId="f8954a66-e5ad-4a1c-9536-1d2117047f5f" providerId="ADAL" clId="{CFBF690A-D719-48D2-92B8-B5819DB24AC8}" dt="2021-08-09T11:04:20.188" v="1192"/>
+          <ac:spMkLst>
+            <pc:docMk/>
+            <pc:sldMk cId="2892898324" sldId="330"/>
+            <ac:spMk id="25" creationId="{5F015413-6766-4E57-9ADB-27DFAC10D061}"/>
+          </ac:spMkLst>
+        </pc:spChg>
+        <pc:spChg chg="add del mod">
+          <ac:chgData name="Di Mattia Alessandro Edoardo Giorgio David" userId="f8954a66-e5ad-4a1c-9536-1d2117047f5f" providerId="ADAL" clId="{CFBF690A-D719-48D2-92B8-B5819DB24AC8}" dt="2021-08-09T11:04:20.188" v="1192"/>
+          <ac:spMkLst>
+            <pc:docMk/>
+            <pc:sldMk cId="2892898324" sldId="330"/>
+            <ac:spMk id="27" creationId="{19CC77A6-6E1C-4F8B-89F6-C2F548D3396F}"/>
+          </ac:spMkLst>
+        </pc:spChg>
+        <pc:spChg chg="add mod">
+          <ac:chgData name="Di Mattia Alessandro Edoardo Giorgio David" userId="f8954a66-e5ad-4a1c-9536-1d2117047f5f" providerId="ADAL" clId="{CFBF690A-D719-48D2-92B8-B5819DB24AC8}" dt="2021-08-09T11:14:29.066" v="1302" actId="20577"/>
+          <ac:spMkLst>
+            <pc:docMk/>
+            <pc:sldMk cId="2892898324" sldId="330"/>
+            <ac:spMk id="29" creationId="{F03B629E-348D-4450-8ED8-F595BA048C88}"/>
+          </ac:spMkLst>
+        </pc:spChg>
+        <pc:spChg chg="add del mod ord">
+          <ac:chgData name="Di Mattia Alessandro Edoardo Giorgio David" userId="f8954a66-e5ad-4a1c-9536-1d2117047f5f" providerId="ADAL" clId="{CFBF690A-D719-48D2-92B8-B5819DB24AC8}" dt="2021-08-09T14:26:22.912" v="1331" actId="700"/>
+          <ac:spMkLst>
+            <pc:docMk/>
+            <pc:sldMk cId="2892898324" sldId="330"/>
+            <ac:spMk id="30" creationId="{C05059BB-A12A-483C-B528-649D3F49A36C}"/>
+          </ac:spMkLst>
+        </pc:spChg>
+        <pc:spChg chg="add del mod ord">
+          <ac:chgData name="Di Mattia Alessandro Edoardo Giorgio David" userId="f8954a66-e5ad-4a1c-9536-1d2117047f5f" providerId="ADAL" clId="{CFBF690A-D719-48D2-92B8-B5819DB24AC8}" dt="2021-08-09T14:26:22.912" v="1331" actId="700"/>
+          <ac:spMkLst>
+            <pc:docMk/>
+            <pc:sldMk cId="2892898324" sldId="330"/>
+            <ac:spMk id="31" creationId="{4DEF32E2-291C-4D35-97F0-AF3334E27C08}"/>
+          </ac:spMkLst>
+        </pc:spChg>
+        <pc:picChg chg="add del">
+          <ac:chgData name="Di Mattia Alessandro Edoardo Giorgio David" userId="f8954a66-e5ad-4a1c-9536-1d2117047f5f" providerId="ADAL" clId="{CFBF690A-D719-48D2-92B8-B5819DB24AC8}" dt="2021-08-09T11:04:02.376" v="1188"/>
+          <ac:picMkLst>
+            <pc:docMk/>
+            <pc:sldMk cId="2892898324" sldId="330"/>
+            <ac:picMk id="3" creationId="{31BDA1D8-0112-41CA-B0A3-E60A72E41ED3}"/>
+          </ac:picMkLst>
+        </pc:picChg>
+        <pc:picChg chg="add mod">
+          <ac:chgData name="Di Mattia Alessandro Edoardo Giorgio David" userId="f8954a66-e5ad-4a1c-9536-1d2117047f5f" providerId="ADAL" clId="{CFBF690A-D719-48D2-92B8-B5819DB24AC8}" dt="2021-08-09T11:04:30.310" v="1194" actId="1076"/>
+          <ac:picMkLst>
+            <pc:docMk/>
+            <pc:sldMk cId="2892898324" sldId="330"/>
+            <ac:picMk id="28" creationId="{72E4D6E6-D737-4175-BAEA-F6B55F2062DE}"/>
+          </ac:picMkLst>
+        </pc:picChg>
+        <pc:cxnChg chg="add del mod">
+          <ac:chgData name="Di Mattia Alessandro Edoardo Giorgio David" userId="f8954a66-e5ad-4a1c-9536-1d2117047f5f" providerId="ADAL" clId="{CFBF690A-D719-48D2-92B8-B5819DB24AC8}" dt="2021-08-09T11:04:20.188" v="1192"/>
+          <ac:cxnSpMkLst>
+            <pc:docMk/>
+            <pc:sldMk cId="2892898324" sldId="330"/>
+            <ac:cxnSpMk id="4" creationId="{03A9EC22-0B42-4BBA-AE61-2871EFD887DE}"/>
+          </ac:cxnSpMkLst>
+        </pc:cxnChg>
+        <pc:cxnChg chg="add del mod">
+          <ac:chgData name="Di Mattia Alessandro Edoardo Giorgio David" userId="f8954a66-e5ad-4a1c-9536-1d2117047f5f" providerId="ADAL" clId="{CFBF690A-D719-48D2-92B8-B5819DB24AC8}" dt="2021-08-09T11:04:20.188" v="1192"/>
+          <ac:cxnSpMkLst>
+            <pc:docMk/>
+            <pc:sldMk cId="2892898324" sldId="330"/>
+            <ac:cxnSpMk id="5" creationId="{9B49AB2B-1C8D-4B58-9499-C51E454B10C4}"/>
+          </ac:cxnSpMkLst>
+        </pc:cxnChg>
+        <pc:cxnChg chg="add del mod">
+          <ac:chgData name="Di Mattia Alessandro Edoardo Giorgio David" userId="f8954a66-e5ad-4a1c-9536-1d2117047f5f" providerId="ADAL" clId="{CFBF690A-D719-48D2-92B8-B5819DB24AC8}" dt="2021-08-09T11:04:20.188" v="1192"/>
+          <ac:cxnSpMkLst>
+            <pc:docMk/>
+            <pc:sldMk cId="2892898324" sldId="330"/>
+            <ac:cxnSpMk id="6" creationId="{EB1973C9-5192-4E82-8DD9-3C75FB77D5D5}"/>
+          </ac:cxnSpMkLst>
+        </pc:cxnChg>
+        <pc:cxnChg chg="add del mod">
+          <ac:chgData name="Di Mattia Alessandro Edoardo Giorgio David" userId="f8954a66-e5ad-4a1c-9536-1d2117047f5f" providerId="ADAL" clId="{CFBF690A-D719-48D2-92B8-B5819DB24AC8}" dt="2021-08-09T11:04:20.188" v="1192"/>
+          <ac:cxnSpMkLst>
+            <pc:docMk/>
+            <pc:sldMk cId="2892898324" sldId="330"/>
+            <ac:cxnSpMk id="7" creationId="{74987818-4BCD-4BF9-9E63-89AC25200BC9}"/>
+          </ac:cxnSpMkLst>
+        </pc:cxnChg>
+        <pc:cxnChg chg="add del mod">
+          <ac:chgData name="Di Mattia Alessandro Edoardo Giorgio David" userId="f8954a66-e5ad-4a1c-9536-1d2117047f5f" providerId="ADAL" clId="{CFBF690A-D719-48D2-92B8-B5819DB24AC8}" dt="2021-08-09T11:04:20.188" v="1192"/>
+          <ac:cxnSpMkLst>
+            <pc:docMk/>
+            <pc:sldMk cId="2892898324" sldId="330"/>
+            <ac:cxnSpMk id="16" creationId="{D653E655-D1FE-4DA9-A1D1-0D3935939F4E}"/>
+          </ac:cxnSpMkLst>
+        </pc:cxnChg>
+        <pc:cxnChg chg="add del mod">
+          <ac:chgData name="Di Mattia Alessandro Edoardo Giorgio David" userId="f8954a66-e5ad-4a1c-9536-1d2117047f5f" providerId="ADAL" clId="{CFBF690A-D719-48D2-92B8-B5819DB24AC8}" dt="2021-08-09T11:04:20.188" v="1192"/>
+          <ac:cxnSpMkLst>
+            <pc:docMk/>
+            <pc:sldMk cId="2892898324" sldId="330"/>
+            <ac:cxnSpMk id="17" creationId="{DF630E6E-1E01-49D6-820D-9AD55D37F952}"/>
+          </ac:cxnSpMkLst>
+        </pc:cxnChg>
+        <pc:cxnChg chg="add del mod">
+          <ac:chgData name="Di Mattia Alessandro Edoardo Giorgio David" userId="f8954a66-e5ad-4a1c-9536-1d2117047f5f" providerId="ADAL" clId="{CFBF690A-D719-48D2-92B8-B5819DB24AC8}" dt="2021-08-09T11:04:20.188" v="1192"/>
+          <ac:cxnSpMkLst>
+            <pc:docMk/>
+            <pc:sldMk cId="2892898324" sldId="330"/>
+            <ac:cxnSpMk id="22" creationId="{DAA2EDCB-CAEB-4470-92E9-44CF17DB2AB1}"/>
+          </ac:cxnSpMkLst>
+        </pc:cxnChg>
+        <pc:cxnChg chg="add del mod">
+          <ac:chgData name="Di Mattia Alessandro Edoardo Giorgio David" userId="f8954a66-e5ad-4a1c-9536-1d2117047f5f" providerId="ADAL" clId="{CFBF690A-D719-48D2-92B8-B5819DB24AC8}" dt="2021-08-09T11:04:20.188" v="1192"/>
+          <ac:cxnSpMkLst>
+            <pc:docMk/>
+            <pc:sldMk cId="2892898324" sldId="330"/>
+            <ac:cxnSpMk id="23" creationId="{26248D7F-5C05-4014-B09B-60D7F69EA140}"/>
+          </ac:cxnSpMkLst>
+        </pc:cxnChg>
+        <pc:cxnChg chg="add del mod">
+          <ac:chgData name="Di Mattia Alessandro Edoardo Giorgio David" userId="f8954a66-e5ad-4a1c-9536-1d2117047f5f" providerId="ADAL" clId="{CFBF690A-D719-48D2-92B8-B5819DB24AC8}" dt="2021-08-09T11:04:20.188" v="1192"/>
+          <ac:cxnSpMkLst>
+            <pc:docMk/>
+            <pc:sldMk cId="2892898324" sldId="330"/>
+            <ac:cxnSpMk id="26" creationId="{3746B332-18D5-4F4E-A0A8-5FD1058D89C2}"/>
+          </ac:cxnSpMkLst>
+        </pc:cxnChg>
+      </pc:sldChg>
+      <pc:sldChg chg="addSp delSp modSp new mod modClrScheme modAnim chgLayout">
+        <pc:chgData name="Di Mattia Alessandro Edoardo Giorgio David" userId="f8954a66-e5ad-4a1c-9536-1d2117047f5f" providerId="ADAL" clId="{CFBF690A-D719-48D2-92B8-B5819DB24AC8}" dt="2021-08-09T15:08:40.114" v="1827" actId="20577"/>
+        <pc:sldMkLst>
+          <pc:docMk/>
+          <pc:sldMk cId="3188304425" sldId="331"/>
+        </pc:sldMkLst>
+        <pc:spChg chg="add del mod">
+          <ac:chgData name="Di Mattia Alessandro Edoardo Giorgio David" userId="f8954a66-e5ad-4a1c-9536-1d2117047f5f" providerId="ADAL" clId="{CFBF690A-D719-48D2-92B8-B5819DB24AC8}" dt="2021-08-09T14:30:43.977" v="1397" actId="478"/>
+          <ac:spMkLst>
+            <pc:docMk/>
+            <pc:sldMk cId="3188304425" sldId="331"/>
+            <ac:spMk id="2" creationId="{CDEFFC8B-D382-4556-8CC2-B7D53C9AA4E1}"/>
+          </ac:spMkLst>
+        </pc:spChg>
+        <pc:spChg chg="add del mod">
+          <ac:chgData name="Di Mattia Alessandro Edoardo Giorgio David" userId="f8954a66-e5ad-4a1c-9536-1d2117047f5f" providerId="ADAL" clId="{CFBF690A-D719-48D2-92B8-B5819DB24AC8}" dt="2021-08-09T14:27:39.535" v="1343"/>
+          <ac:spMkLst>
+            <pc:docMk/>
+            <pc:sldMk cId="3188304425" sldId="331"/>
+            <ac:spMk id="3" creationId="{92112D97-C846-4A99-8D71-F81FAE59572B}"/>
+          </ac:spMkLst>
+        </pc:spChg>
+        <pc:spChg chg="add mod ord">
+          <ac:chgData name="Di Mattia Alessandro Edoardo Giorgio David" userId="f8954a66-e5ad-4a1c-9536-1d2117047f5f" providerId="ADAL" clId="{CFBF690A-D719-48D2-92B8-B5819DB24AC8}" dt="2021-08-09T14:31:01.756" v="1399" actId="1076"/>
+          <ac:spMkLst>
+            <pc:docMk/>
+            <pc:sldMk cId="3188304425" sldId="331"/>
+            <ac:spMk id="4" creationId="{F2303436-C45C-4B2E-B14E-30FF81694386}"/>
+          </ac:spMkLst>
+        </pc:spChg>
+        <pc:spChg chg="add mod">
+          <ac:chgData name="Di Mattia Alessandro Edoardo Giorgio David" userId="f8954a66-e5ad-4a1c-9536-1d2117047f5f" providerId="ADAL" clId="{CFBF690A-D719-48D2-92B8-B5819DB24AC8}" dt="2021-08-09T15:08:40.114" v="1827" actId="20577"/>
+          <ac:spMkLst>
+            <pc:docMk/>
+            <pc:sldMk cId="3188304425" sldId="331"/>
+            <ac:spMk id="5" creationId="{03C674BE-6751-4189-8E9B-74929348ABB7}"/>
+          </ac:spMkLst>
+        </pc:spChg>
+        <pc:spChg chg="add del mod">
+          <ac:chgData name="Di Mattia Alessandro Edoardo Giorgio David" userId="f8954a66-e5ad-4a1c-9536-1d2117047f5f" providerId="ADAL" clId="{CFBF690A-D719-48D2-92B8-B5819DB24AC8}" dt="2021-08-09T14:30:57.701" v="1398" actId="700"/>
+          <ac:spMkLst>
+            <pc:docMk/>
+            <pc:sldMk cId="3188304425" sldId="331"/>
+            <ac:spMk id="8" creationId="{18D2EAB0-1281-4C92-8167-0873964CB047}"/>
+          </ac:spMkLst>
+        </pc:spChg>
+        <pc:picChg chg="add mod">
+          <ac:chgData name="Di Mattia Alessandro Edoardo Giorgio David" userId="f8954a66-e5ad-4a1c-9536-1d2117047f5f" providerId="ADAL" clId="{CFBF690A-D719-48D2-92B8-B5819DB24AC8}" dt="2021-08-09T14:31:05.582" v="1401" actId="14100"/>
+          <ac:picMkLst>
+            <pc:docMk/>
+            <pc:sldMk cId="3188304425" sldId="331"/>
+            <ac:picMk id="6" creationId="{B8065D7D-9B8F-4D8E-ACE2-63DB2C740530}"/>
+          </ac:picMkLst>
+        </pc:picChg>
+      </pc:sldChg>
+      <pc:sldChg chg="addSp delSp modSp new mod">
+        <pc:chgData name="Di Mattia Alessandro Edoardo Giorgio David" userId="f8954a66-e5ad-4a1c-9536-1d2117047f5f" providerId="ADAL" clId="{CFBF690A-D719-48D2-92B8-B5819DB24AC8}" dt="2021-08-09T14:42:50.648" v="1490" actId="1076"/>
+        <pc:sldMkLst>
+          <pc:docMk/>
+          <pc:sldMk cId="3922909339" sldId="332"/>
+        </pc:sldMkLst>
+        <pc:spChg chg="mod">
+          <ac:chgData name="Di Mattia Alessandro Edoardo Giorgio David" userId="f8954a66-e5ad-4a1c-9536-1d2117047f5f" providerId="ADAL" clId="{CFBF690A-D719-48D2-92B8-B5819DB24AC8}" dt="2021-08-09T14:31:17.227" v="1404" actId="20577"/>
+          <ac:spMkLst>
+            <pc:docMk/>
+            <pc:sldMk cId="3922909339" sldId="332"/>
+            <ac:spMk id="2" creationId="{C88B502F-7BAF-4520-B5DE-BA944E962A37}"/>
+          </ac:spMkLst>
+        </pc:spChg>
+        <pc:spChg chg="del">
+          <ac:chgData name="Di Mattia Alessandro Edoardo Giorgio David" userId="f8954a66-e5ad-4a1c-9536-1d2117047f5f" providerId="ADAL" clId="{CFBF690A-D719-48D2-92B8-B5819DB24AC8}" dt="2021-08-09T14:38:02.899" v="1431"/>
+          <ac:spMkLst>
+            <pc:docMk/>
+            <pc:sldMk cId="3922909339" sldId="332"/>
+            <ac:spMk id="3" creationId="{AF2E8C1F-EE6E-4D85-9549-AD3488D74A8E}"/>
+          </ac:spMkLst>
+        </pc:spChg>
+        <pc:spChg chg="add mod">
+          <ac:chgData name="Di Mattia Alessandro Edoardo Giorgio David" userId="f8954a66-e5ad-4a1c-9536-1d2117047f5f" providerId="ADAL" clId="{CFBF690A-D719-48D2-92B8-B5819DB24AC8}" dt="2021-08-09T14:39:19.405" v="1476" actId="20577"/>
+          <ac:spMkLst>
+            <pc:docMk/>
+            <pc:sldMk cId="3922909339" sldId="332"/>
+            <ac:spMk id="4" creationId="{06517CCA-98F8-454B-B0DE-A108925C30A1}"/>
+          </ac:spMkLst>
+        </pc:spChg>
+        <pc:picChg chg="add del mod">
+          <ac:chgData name="Di Mattia Alessandro Edoardo Giorgio David" userId="f8954a66-e5ad-4a1c-9536-1d2117047f5f" providerId="ADAL" clId="{CFBF690A-D719-48D2-92B8-B5819DB24AC8}" dt="2021-08-09T14:41:36.558" v="1482" actId="21"/>
+          <ac:picMkLst>
+            <pc:docMk/>
+            <pc:sldMk cId="3922909339" sldId="332"/>
+            <ac:picMk id="5" creationId="{72C56154-7785-4249-A305-FB450B6A6A22}"/>
+          </ac:picMkLst>
+        </pc:picChg>
+        <pc:picChg chg="add mod">
+          <ac:chgData name="Di Mattia Alessandro Edoardo Giorgio David" userId="f8954a66-e5ad-4a1c-9536-1d2117047f5f" providerId="ADAL" clId="{CFBF690A-D719-48D2-92B8-B5819DB24AC8}" dt="2021-08-09T14:42:50.648" v="1490" actId="1076"/>
+          <ac:picMkLst>
+            <pc:docMk/>
+            <pc:sldMk cId="3922909339" sldId="332"/>
+            <ac:picMk id="6" creationId="{DBA80245-BC9D-4BD0-B7C2-DBC234FA13C4}"/>
+          </ac:picMkLst>
+        </pc:picChg>
+      </pc:sldChg>
+      <pc:sldChg chg="addSp modSp new mod modClrScheme chgLayout">
+        <pc:chgData name="Di Mattia Alessandro Edoardo Giorgio David" userId="f8954a66-e5ad-4a1c-9536-1d2117047f5f" providerId="ADAL" clId="{CFBF690A-D719-48D2-92B8-B5819DB24AC8}" dt="2021-08-09T15:06:58.774" v="1826" actId="20577"/>
+        <pc:sldMkLst>
+          <pc:docMk/>
+          <pc:sldMk cId="1049072842" sldId="333"/>
+        </pc:sldMkLst>
+        <pc:spChg chg="add mod">
+          <ac:chgData name="Di Mattia Alessandro Edoardo Giorgio David" userId="f8954a66-e5ad-4a1c-9536-1d2117047f5f" providerId="ADAL" clId="{CFBF690A-D719-48D2-92B8-B5819DB24AC8}" dt="2021-08-09T14:32:36.658" v="1428" actId="122"/>
+          <ac:spMkLst>
+            <pc:docMk/>
+            <pc:sldMk cId="1049072842" sldId="333"/>
+            <ac:spMk id="2" creationId="{61FC6002-6461-40FF-B287-11F3E4FEAADD}"/>
+          </ac:spMkLst>
+        </pc:spChg>
+        <pc:spChg chg="add mod">
+          <ac:chgData name="Di Mattia Alessandro Edoardo Giorgio David" userId="f8954a66-e5ad-4a1c-9536-1d2117047f5f" providerId="ADAL" clId="{CFBF690A-D719-48D2-92B8-B5819DB24AC8}" dt="2021-08-09T15:06:58.774" v="1826" actId="20577"/>
+          <ac:spMkLst>
+            <pc:docMk/>
+            <pc:sldMk cId="1049072842" sldId="333"/>
+            <ac:spMk id="3" creationId="{D17F2EA0-EA8D-4305-8C87-36045BBC7A40}"/>
+          </ac:spMkLst>
+        </pc:spChg>
+      </pc:sldChg>
+      <pc:sldChg chg="addSp delSp modSp new mod modClrScheme modAnim chgLayout">
+        <pc:chgData name="Di Mattia Alessandro Edoardo Giorgio David" userId="f8954a66-e5ad-4a1c-9536-1d2117047f5f" providerId="ADAL" clId="{CFBF690A-D719-48D2-92B8-B5819DB24AC8}" dt="2021-08-09T15:21:10.123" v="1841" actId="20577"/>
+        <pc:sldMkLst>
+          <pc:docMk/>
+          <pc:sldMk cId="2210811804" sldId="334"/>
+        </pc:sldMkLst>
+        <pc:spChg chg="del">
+          <ac:chgData name="Di Mattia Alessandro Edoardo Giorgio David" userId="f8954a66-e5ad-4a1c-9536-1d2117047f5f" providerId="ADAL" clId="{CFBF690A-D719-48D2-92B8-B5819DB24AC8}" dt="2021-08-09T14:41:42.530" v="1483" actId="700"/>
+          <ac:spMkLst>
+            <pc:docMk/>
+            <pc:sldMk cId="2210811804" sldId="334"/>
+            <ac:spMk id="2" creationId="{6FEE1349-2CA4-4854-82C1-44EF09D1E21D}"/>
+          </ac:spMkLst>
+        </pc:spChg>
+        <pc:spChg chg="del">
+          <ac:chgData name="Di Mattia Alessandro Edoardo Giorgio David" userId="f8954a66-e5ad-4a1c-9536-1d2117047f5f" providerId="ADAL" clId="{CFBF690A-D719-48D2-92B8-B5819DB24AC8}" dt="2021-08-09T14:41:42.530" v="1483" actId="700"/>
+          <ac:spMkLst>
+            <pc:docMk/>
+            <pc:sldMk cId="2210811804" sldId="334"/>
+            <ac:spMk id="3" creationId="{B7DADE0C-CD18-409F-9D36-5DF9FE8C3AFE}"/>
+          </ac:spMkLst>
+        </pc:spChg>
+        <pc:spChg chg="add mod">
+          <ac:chgData name="Di Mattia Alessandro Edoardo Giorgio David" userId="f8954a66-e5ad-4a1c-9536-1d2117047f5f" providerId="ADAL" clId="{CFBF690A-D719-48D2-92B8-B5819DB24AC8}" dt="2021-08-09T15:21:10.123" v="1841" actId="20577"/>
+          <ac:spMkLst>
+            <pc:docMk/>
+            <pc:sldMk cId="2210811804" sldId="334"/>
+            <ac:spMk id="6" creationId="{41EA1939-30E4-4F33-BE35-58FD4DBC9375}"/>
+          </ac:spMkLst>
+        </pc:spChg>
+        <pc:picChg chg="add del mod">
+          <ac:chgData name="Di Mattia Alessandro Edoardo Giorgio David" userId="f8954a66-e5ad-4a1c-9536-1d2117047f5f" providerId="ADAL" clId="{CFBF690A-D719-48D2-92B8-B5819DB24AC8}" dt="2021-08-09T14:42:23.100" v="1486" actId="478"/>
+          <ac:picMkLst>
+            <pc:docMk/>
+            <pc:sldMk cId="2210811804" sldId="334"/>
+            <ac:picMk id="4" creationId="{24605447-37D4-404E-99ED-902EE2D8B922}"/>
+          </ac:picMkLst>
+        </pc:picChg>
+        <pc:picChg chg="add mod">
+          <ac:chgData name="Di Mattia Alessandro Edoardo Giorgio David" userId="f8954a66-e5ad-4a1c-9536-1d2117047f5f" providerId="ADAL" clId="{CFBF690A-D719-48D2-92B8-B5819DB24AC8}" dt="2021-08-09T14:42:37.777" v="1488" actId="14100"/>
+          <ac:picMkLst>
+            <pc:docMk/>
+            <pc:sldMk cId="2210811804" sldId="334"/>
+            <ac:picMk id="5" creationId="{C8173CEE-5733-4F06-8846-1F044EF62DF3}"/>
+          </ac:picMkLst>
+        </pc:picChg>
+      </pc:sldChg>
+      <pc:sldChg chg="addSp delSp modSp new mod modClrScheme chgLayout">
+        <pc:chgData name="Di Mattia Alessandro Edoardo Giorgio David" userId="f8954a66-e5ad-4a1c-9536-1d2117047f5f" providerId="ADAL" clId="{CFBF690A-D719-48D2-92B8-B5819DB24AC8}" dt="2021-08-09T14:50:54.091" v="1624" actId="1076"/>
+        <pc:sldMkLst>
+          <pc:docMk/>
+          <pc:sldMk cId="2200792181" sldId="335"/>
+        </pc:sldMkLst>
+        <pc:spChg chg="add mod">
+          <ac:chgData name="Di Mattia Alessandro Edoardo Giorgio David" userId="f8954a66-e5ad-4a1c-9536-1d2117047f5f" providerId="ADAL" clId="{CFBF690A-D719-48D2-92B8-B5819DB24AC8}" dt="2021-08-09T14:45:44.476" v="1512" actId="122"/>
+          <ac:spMkLst>
+            <pc:docMk/>
+            <pc:sldMk cId="2200792181" sldId="335"/>
+            <ac:spMk id="2" creationId="{FCF4069D-6886-4790-A116-B041AE894394}"/>
+          </ac:spMkLst>
+        </pc:spChg>
+        <pc:spChg chg="add mod">
+          <ac:chgData name="Di Mattia Alessandro Edoardo Giorgio David" userId="f8954a66-e5ad-4a1c-9536-1d2117047f5f" providerId="ADAL" clId="{CFBF690A-D719-48D2-92B8-B5819DB24AC8}" dt="2021-08-09T14:46:39.728" v="1591" actId="122"/>
+          <ac:spMkLst>
+            <pc:docMk/>
+            <pc:sldMk cId="2200792181" sldId="335"/>
+            <ac:spMk id="3" creationId="{8E0B66F6-F8B9-4217-BA84-5C4E0E4FE3BC}"/>
+          </ac:spMkLst>
+        </pc:spChg>
+        <pc:graphicFrameChg chg="add del mod">
+          <ac:chgData name="Di Mattia Alessandro Edoardo Giorgio David" userId="f8954a66-e5ad-4a1c-9536-1d2117047f5f" providerId="ADAL" clId="{CFBF690A-D719-48D2-92B8-B5819DB24AC8}" dt="2021-08-09T14:50:48.455" v="1622" actId="478"/>
+          <ac:graphicFrameMkLst>
+            <pc:docMk/>
+            <pc:sldMk cId="2200792181" sldId="335"/>
+            <ac:graphicFrameMk id="6" creationId="{0AE95D00-6FA0-4537-B372-65E8ED0A9AC1}"/>
+          </ac:graphicFrameMkLst>
+        </pc:graphicFrameChg>
+        <pc:picChg chg="add del mod">
+          <ac:chgData name="Di Mattia Alessandro Edoardo Giorgio David" userId="f8954a66-e5ad-4a1c-9536-1d2117047f5f" providerId="ADAL" clId="{CFBF690A-D719-48D2-92B8-B5819DB24AC8}" dt="2021-08-09T14:47:32.848" v="1594" actId="478"/>
+          <ac:picMkLst>
+            <pc:docMk/>
+            <pc:sldMk cId="2200792181" sldId="335"/>
+            <ac:picMk id="4" creationId="{53E05C4C-75C2-4F37-AE43-AB70D00D60B9}"/>
+          </ac:picMkLst>
+        </pc:picChg>
+        <pc:picChg chg="add del mod">
+          <ac:chgData name="Di Mattia Alessandro Edoardo Giorgio David" userId="f8954a66-e5ad-4a1c-9536-1d2117047f5f" providerId="ADAL" clId="{CFBF690A-D719-48D2-92B8-B5819DB24AC8}" dt="2021-08-09T14:48:12.834" v="1605" actId="478"/>
+          <ac:picMkLst>
+            <pc:docMk/>
+            <pc:sldMk cId="2200792181" sldId="335"/>
+            <ac:picMk id="5" creationId="{AAD7F8D2-7C98-4B9F-82C9-F335F2AD6D53}"/>
+          </ac:picMkLst>
+        </pc:picChg>
+        <pc:picChg chg="add mod">
+          <ac:chgData name="Di Mattia Alessandro Edoardo Giorgio David" userId="f8954a66-e5ad-4a1c-9536-1d2117047f5f" providerId="ADAL" clId="{CFBF690A-D719-48D2-92B8-B5819DB24AC8}" dt="2021-08-09T14:50:54.091" v="1624" actId="1076"/>
+          <ac:picMkLst>
+            <pc:docMk/>
+            <pc:sldMk cId="2200792181" sldId="335"/>
+            <ac:picMk id="7" creationId="{3189569D-242A-473A-9A94-6E5144F443C6}"/>
+          </ac:picMkLst>
+        </pc:picChg>
+      </pc:sldChg>
+      <pc:sldChg chg="addSp delSp modSp new mod modClrScheme modAnim chgLayout">
+        <pc:chgData name="Di Mattia Alessandro Edoardo Giorgio David" userId="f8954a66-e5ad-4a1c-9536-1d2117047f5f" providerId="ADAL" clId="{CFBF690A-D719-48D2-92B8-B5819DB24AC8}" dt="2021-08-09T15:14:08.515" v="1840" actId="20577"/>
+        <pc:sldMkLst>
+          <pc:docMk/>
+          <pc:sldMk cId="2223886345" sldId="336"/>
+        </pc:sldMkLst>
+        <pc:spChg chg="del">
+          <ac:chgData name="Di Mattia Alessandro Edoardo Giorgio David" userId="f8954a66-e5ad-4a1c-9536-1d2117047f5f" providerId="ADAL" clId="{CFBF690A-D719-48D2-92B8-B5819DB24AC8}" dt="2021-08-09T14:48:03.037" v="1600" actId="700"/>
+          <ac:spMkLst>
+            <pc:docMk/>
+            <pc:sldMk cId="2223886345" sldId="336"/>
+            <ac:spMk id="2" creationId="{8CDA5BD7-348D-4E9A-A336-7B5060530500}"/>
+          </ac:spMkLst>
+        </pc:spChg>
+        <pc:spChg chg="del">
+          <ac:chgData name="Di Mattia Alessandro Edoardo Giorgio David" userId="f8954a66-e5ad-4a1c-9536-1d2117047f5f" providerId="ADAL" clId="{CFBF690A-D719-48D2-92B8-B5819DB24AC8}" dt="2021-08-09T14:48:03.037" v="1600" actId="700"/>
+          <ac:spMkLst>
+            <pc:docMk/>
+            <pc:sldMk cId="2223886345" sldId="336"/>
+            <ac:spMk id="3" creationId="{94508F87-AA89-40C9-8509-F268A3C82A2C}"/>
+          </ac:spMkLst>
+        </pc:spChg>
+        <pc:spChg chg="add del mod">
+          <ac:chgData name="Di Mattia Alessandro Edoardo Giorgio David" userId="f8954a66-e5ad-4a1c-9536-1d2117047f5f" providerId="ADAL" clId="{CFBF690A-D719-48D2-92B8-B5819DB24AC8}" dt="2021-08-09T14:48:00.719" v="1599"/>
+          <ac:spMkLst>
+            <pc:docMk/>
+            <pc:sldMk cId="2223886345" sldId="336"/>
+            <ac:spMk id="8" creationId="{5FF703F0-EB1C-4FFD-8951-0113FC7F1B06}"/>
+          </ac:spMkLst>
+        </pc:spChg>
+        <pc:spChg chg="add del mod">
+          <ac:chgData name="Di Mattia Alessandro Edoardo Giorgio David" userId="f8954a66-e5ad-4a1c-9536-1d2117047f5f" providerId="ADAL" clId="{CFBF690A-D719-48D2-92B8-B5819DB24AC8}" dt="2021-08-09T14:48:00.719" v="1599"/>
+          <ac:spMkLst>
+            <pc:docMk/>
+            <pc:sldMk cId="2223886345" sldId="336"/>
+            <ac:spMk id="9" creationId="{225F9005-786E-4857-9FE1-1FEC06D2D6A2}"/>
+          </ac:spMkLst>
+        </pc:spChg>
+        <pc:spChg chg="add del mod">
+          <ac:chgData name="Di Mattia Alessandro Edoardo Giorgio David" userId="f8954a66-e5ad-4a1c-9536-1d2117047f5f" providerId="ADAL" clId="{CFBF690A-D719-48D2-92B8-B5819DB24AC8}" dt="2021-08-09T14:48:00.719" v="1599"/>
+          <ac:spMkLst>
+            <pc:docMk/>
+            <pc:sldMk cId="2223886345" sldId="336"/>
+            <ac:spMk id="10" creationId="{4B61D133-C592-4931-AC7C-9F2AA3382881}"/>
+          </ac:spMkLst>
+        </pc:spChg>
+        <pc:spChg chg="add del mod">
+          <ac:chgData name="Di Mattia Alessandro Edoardo Giorgio David" userId="f8954a66-e5ad-4a1c-9536-1d2117047f5f" providerId="ADAL" clId="{CFBF690A-D719-48D2-92B8-B5819DB24AC8}" dt="2021-08-09T14:48:00.719" v="1599"/>
+          <ac:spMkLst>
+            <pc:docMk/>
+            <pc:sldMk cId="2223886345" sldId="336"/>
+            <ac:spMk id="11" creationId="{03F80E16-953A-4201-ACAD-C8C26051041F}"/>
+          </ac:spMkLst>
+        </pc:spChg>
+        <pc:spChg chg="add del mod">
+          <ac:chgData name="Di Mattia Alessandro Edoardo Giorgio David" userId="f8954a66-e5ad-4a1c-9536-1d2117047f5f" providerId="ADAL" clId="{CFBF690A-D719-48D2-92B8-B5819DB24AC8}" dt="2021-08-09T14:48:00.719" v="1599"/>
+          <ac:spMkLst>
+            <pc:docMk/>
+            <pc:sldMk cId="2223886345" sldId="336"/>
+            <ac:spMk id="12" creationId="{FE947521-229B-40D8-9B89-45E443265317}"/>
+          </ac:spMkLst>
+        </pc:spChg>
+        <pc:spChg chg="add del mod">
+          <ac:chgData name="Di Mattia Alessandro Edoardo Giorgio David" userId="f8954a66-e5ad-4a1c-9536-1d2117047f5f" providerId="ADAL" clId="{CFBF690A-D719-48D2-92B8-B5819DB24AC8}" dt="2021-08-09T14:48:00.719" v="1599"/>
+          <ac:spMkLst>
+            <pc:docMk/>
+            <pc:sldMk cId="2223886345" sldId="336"/>
+            <ac:spMk id="13" creationId="{076256BD-0358-43A2-901D-B155235DCAEB}"/>
+          </ac:spMkLst>
+        </pc:spChg>
+        <pc:spChg chg="add del mod">
+          <ac:chgData name="Di Mattia Alessandro Edoardo Giorgio David" userId="f8954a66-e5ad-4a1c-9536-1d2117047f5f" providerId="ADAL" clId="{CFBF690A-D719-48D2-92B8-B5819DB24AC8}" dt="2021-08-09T14:48:00.719" v="1599"/>
+          <ac:spMkLst>
+            <pc:docMk/>
+            <pc:sldMk cId="2223886345" sldId="336"/>
+            <ac:spMk id="14" creationId="{ACB2BECF-A34B-4987-B049-C2C37FE64F5E}"/>
+          </ac:spMkLst>
+        </pc:spChg>
+        <pc:spChg chg="add del mod">
+          <ac:chgData name="Di Mattia Alessandro Edoardo Giorgio David" userId="f8954a66-e5ad-4a1c-9536-1d2117047f5f" providerId="ADAL" clId="{CFBF690A-D719-48D2-92B8-B5819DB24AC8}" dt="2021-08-09T14:48:00.719" v="1599"/>
+          <ac:spMkLst>
+            <pc:docMk/>
+            <pc:sldMk cId="2223886345" sldId="336"/>
+            <ac:spMk id="15" creationId="{2A1DC70E-79A8-45E9-B2BA-149F605A6007}"/>
+          </ac:spMkLst>
+        </pc:spChg>
+        <pc:spChg chg="add del mod">
+          <ac:chgData name="Di Mattia Alessandro Edoardo Giorgio David" userId="f8954a66-e5ad-4a1c-9536-1d2117047f5f" providerId="ADAL" clId="{CFBF690A-D719-48D2-92B8-B5819DB24AC8}" dt="2021-08-09T14:48:00.719" v="1599"/>
+          <ac:spMkLst>
+            <pc:docMk/>
+            <pc:sldMk cId="2223886345" sldId="336"/>
+            <ac:spMk id="18" creationId="{15FC0AD6-12AC-4970-9712-4EB6ACFDBFBA}"/>
+          </ac:spMkLst>
+        </pc:spChg>
+        <pc:spChg chg="add del mod">
+          <ac:chgData name="Di Mattia Alessandro Edoardo Giorgio David" userId="f8954a66-e5ad-4a1c-9536-1d2117047f5f" providerId="ADAL" clId="{CFBF690A-D719-48D2-92B8-B5819DB24AC8}" dt="2021-08-09T14:48:00.719" v="1599"/>
+          <ac:spMkLst>
+            <pc:docMk/>
+            <pc:sldMk cId="2223886345" sldId="336"/>
+            <ac:spMk id="19" creationId="{CDC0AC11-B839-410A-8D79-9F035CA1D234}"/>
+          </ac:spMkLst>
+        </pc:spChg>
+        <pc:spChg chg="add del mod">
+          <ac:chgData name="Di Mattia Alessandro Edoardo Giorgio David" userId="f8954a66-e5ad-4a1c-9536-1d2117047f5f" providerId="ADAL" clId="{CFBF690A-D719-48D2-92B8-B5819DB24AC8}" dt="2021-08-09T14:48:00.719" v="1599"/>
+          <ac:spMkLst>
+            <pc:docMk/>
+            <pc:sldMk cId="2223886345" sldId="336"/>
+            <ac:spMk id="20" creationId="{196B9437-658A-4659-BBB6-B4A497AA06D5}"/>
+          </ac:spMkLst>
+        </pc:spChg>
+        <pc:spChg chg="add del mod">
+          <ac:chgData name="Di Mattia Alessandro Edoardo Giorgio David" userId="f8954a66-e5ad-4a1c-9536-1d2117047f5f" providerId="ADAL" clId="{CFBF690A-D719-48D2-92B8-B5819DB24AC8}" dt="2021-08-09T14:48:00.719" v="1599"/>
+          <ac:spMkLst>
+            <pc:docMk/>
+            <pc:sldMk cId="2223886345" sldId="336"/>
+            <ac:spMk id="23" creationId="{A2644825-FA9E-453B-BF19-4B8D07E45341}"/>
+          </ac:spMkLst>
+        </pc:spChg>
+        <pc:spChg chg="add del mod">
+          <ac:chgData name="Di Mattia Alessandro Edoardo Giorgio David" userId="f8954a66-e5ad-4a1c-9536-1d2117047f5f" providerId="ADAL" clId="{CFBF690A-D719-48D2-92B8-B5819DB24AC8}" dt="2021-08-09T14:48:00.719" v="1599"/>
+          <ac:spMkLst>
+            <pc:docMk/>
+            <pc:sldMk cId="2223886345" sldId="336"/>
+            <ac:spMk id="24" creationId="{6E1FFEE6-0187-41FF-AE34-CEAE210D7F8E}"/>
+          </ac:spMkLst>
+        </pc:spChg>
+        <pc:spChg chg="add del mod">
+          <ac:chgData name="Di Mattia Alessandro Edoardo Giorgio David" userId="f8954a66-e5ad-4a1c-9536-1d2117047f5f" providerId="ADAL" clId="{CFBF690A-D719-48D2-92B8-B5819DB24AC8}" dt="2021-08-09T14:48:00.719" v="1599"/>
+          <ac:spMkLst>
+            <pc:docMk/>
+            <pc:sldMk cId="2223886345" sldId="336"/>
+            <ac:spMk id="25" creationId="{920D2067-A783-4E4E-9FF7-FB271043AC85}"/>
+          </ac:spMkLst>
+        </pc:spChg>
+        <pc:spChg chg="add del mod">
+          <ac:chgData name="Di Mattia Alessandro Edoardo Giorgio David" userId="f8954a66-e5ad-4a1c-9536-1d2117047f5f" providerId="ADAL" clId="{CFBF690A-D719-48D2-92B8-B5819DB24AC8}" dt="2021-08-09T14:48:00.719" v="1599"/>
+          <ac:spMkLst>
+            <pc:docMk/>
+            <pc:sldMk cId="2223886345" sldId="336"/>
+            <ac:spMk id="27" creationId="{777EF625-B53E-429A-BDA0-7F41661D232F}"/>
+          </ac:spMkLst>
+        </pc:spChg>
+        <pc:spChg chg="add del mod">
+          <ac:chgData name="Di Mattia Alessandro Edoardo Giorgio David" userId="f8954a66-e5ad-4a1c-9536-1d2117047f5f" providerId="ADAL" clId="{CFBF690A-D719-48D2-92B8-B5819DB24AC8}" dt="2021-08-09T14:48:00.719" v="1599"/>
+          <ac:spMkLst>
+            <pc:docMk/>
+            <pc:sldMk cId="2223886345" sldId="336"/>
+            <ac:spMk id="29" creationId="{6D906C3B-A46F-4500-910A-CD28C96FDC72}"/>
+          </ac:spMkLst>
+        </pc:spChg>
+        <pc:spChg chg="add del mod">
+          <ac:chgData name="Di Mattia Alessandro Edoardo Giorgio David" userId="f8954a66-e5ad-4a1c-9536-1d2117047f5f" providerId="ADAL" clId="{CFBF690A-D719-48D2-92B8-B5819DB24AC8}" dt="2021-08-09T14:48:00.719" v="1599"/>
+          <ac:spMkLst>
+            <pc:docMk/>
+            <pc:sldMk cId="2223886345" sldId="336"/>
+            <ac:spMk id="31" creationId="{B7CA1F7E-FC41-44A5-90E9-F09EAA9E5A1B}"/>
+          </ac:spMkLst>
+        </pc:spChg>
+        <pc:spChg chg="add del mod">
+          <ac:chgData name="Di Mattia Alessandro Edoardo Giorgio David" userId="f8954a66-e5ad-4a1c-9536-1d2117047f5f" providerId="ADAL" clId="{CFBF690A-D719-48D2-92B8-B5819DB24AC8}" dt="2021-08-09T14:48:06.334" v="1602"/>
+          <ac:spMkLst>
+            <pc:docMk/>
+            <pc:sldMk cId="2223886345" sldId="336"/>
+            <ac:spMk id="36" creationId="{604EFD12-9F33-4BC0-9572-4D50FE266E88}"/>
+          </ac:spMkLst>
+        </pc:spChg>
+        <pc:spChg chg="add del mod">
+          <ac:chgData name="Di Mattia Alessandro Edoardo Giorgio David" userId="f8954a66-e5ad-4a1c-9536-1d2117047f5f" providerId="ADAL" clId="{CFBF690A-D719-48D2-92B8-B5819DB24AC8}" dt="2021-08-09T14:48:06.334" v="1602"/>
+          <ac:spMkLst>
+            <pc:docMk/>
+            <pc:sldMk cId="2223886345" sldId="336"/>
+            <ac:spMk id="37" creationId="{43CEEA71-91D6-4A9F-96B8-C53D69404D02}"/>
+          </ac:spMkLst>
+        </pc:spChg>
+        <pc:spChg chg="add del mod">
+          <ac:chgData name="Di Mattia Alessandro Edoardo Giorgio David" userId="f8954a66-e5ad-4a1c-9536-1d2117047f5f" providerId="ADAL" clId="{CFBF690A-D719-48D2-92B8-B5819DB24AC8}" dt="2021-08-09T14:48:06.334" v="1602"/>
+          <ac:spMkLst>
+            <pc:docMk/>
+            <pc:sldMk cId="2223886345" sldId="336"/>
+            <ac:spMk id="38" creationId="{E5B9B17A-167C-4C0B-B85D-4C2BC6408AC8}"/>
+          </ac:spMkLst>
+        </pc:spChg>
+        <pc:spChg chg="add del mod">
+          <ac:chgData name="Di Mattia Alessandro Edoardo Giorgio David" userId="f8954a66-e5ad-4a1c-9536-1d2117047f5f" providerId="ADAL" clId="{CFBF690A-D719-48D2-92B8-B5819DB24AC8}" dt="2021-08-09T14:48:06.334" v="1602"/>
+          <ac:spMkLst>
+            <pc:docMk/>
+            <pc:sldMk cId="2223886345" sldId="336"/>
+            <ac:spMk id="39" creationId="{49C71CEF-75F6-402F-9D15-671908371808}"/>
+          </ac:spMkLst>
+        </pc:spChg>
+        <pc:spChg chg="add del mod">
+          <ac:chgData name="Di Mattia Alessandro Edoardo Giorgio David" userId="f8954a66-e5ad-4a1c-9536-1d2117047f5f" providerId="ADAL" clId="{CFBF690A-D719-48D2-92B8-B5819DB24AC8}" dt="2021-08-09T14:48:06.334" v="1602"/>
+          <ac:spMkLst>
+            <pc:docMk/>
+            <pc:sldMk cId="2223886345" sldId="336"/>
+            <ac:spMk id="40" creationId="{9CDC1496-E3A8-43C4-8272-CD52FB4A5FEB}"/>
+          </ac:spMkLst>
+        </pc:spChg>
+        <pc:spChg chg="add del mod">
+          <ac:chgData name="Di Mattia Alessandro Edoardo Giorgio David" userId="f8954a66-e5ad-4a1c-9536-1d2117047f5f" providerId="ADAL" clId="{CFBF690A-D719-48D2-92B8-B5819DB24AC8}" dt="2021-08-09T14:48:06.334" v="1602"/>
+          <ac:spMkLst>
+            <pc:docMk/>
+            <pc:sldMk cId="2223886345" sldId="336"/>
+            <ac:spMk id="41" creationId="{C98B0ABB-4032-4AB0-984A-B125EDE819D2}"/>
+          </ac:spMkLst>
+        </pc:spChg>
+        <pc:spChg chg="add del mod">
+          <ac:chgData name="Di Mattia Alessandro Edoardo Giorgio David" userId="f8954a66-e5ad-4a1c-9536-1d2117047f5f" providerId="ADAL" clId="{CFBF690A-D719-48D2-92B8-B5819DB24AC8}" dt="2021-08-09T14:48:06.334" v="1602"/>
+          <ac:spMkLst>
+            <pc:docMk/>
+            <pc:sldMk cId="2223886345" sldId="336"/>
+            <ac:spMk id="42" creationId="{32C41F58-2E2B-469F-8638-CAAC876B58ED}"/>
+          </ac:spMkLst>
+        </pc:spChg>
+        <pc:spChg chg="add del mod">
+          <ac:chgData name="Di Mattia Alessandro Edoardo Giorgio David" userId="f8954a66-e5ad-4a1c-9536-1d2117047f5f" providerId="ADAL" clId="{CFBF690A-D719-48D2-92B8-B5819DB24AC8}" dt="2021-08-09T14:48:06.334" v="1602"/>
+          <ac:spMkLst>
+            <pc:docMk/>
+            <pc:sldMk cId="2223886345" sldId="336"/>
+            <ac:spMk id="43" creationId="{291D4AC3-9E9D-4F16-867F-64184D4DE8DA}"/>
+          </ac:spMkLst>
+        </pc:spChg>
+        <pc:spChg chg="add del mod">
+          <ac:chgData name="Di Mattia Alessandro Edoardo Giorgio David" userId="f8954a66-e5ad-4a1c-9536-1d2117047f5f" providerId="ADAL" clId="{CFBF690A-D719-48D2-92B8-B5819DB24AC8}" dt="2021-08-09T14:48:06.334" v="1602"/>
+          <ac:spMkLst>
+            <pc:docMk/>
+            <pc:sldMk cId="2223886345" sldId="336"/>
+            <ac:spMk id="46" creationId="{453C5643-A61B-4E89-8EF0-BDAF28856B2E}"/>
+          </ac:spMkLst>
+        </pc:spChg>
+        <pc:spChg chg="add del mod">
+          <ac:chgData name="Di Mattia Alessandro Edoardo Giorgio David" userId="f8954a66-e5ad-4a1c-9536-1d2117047f5f" providerId="ADAL" clId="{CFBF690A-D719-48D2-92B8-B5819DB24AC8}" dt="2021-08-09T14:48:06.334" v="1602"/>
+          <ac:spMkLst>
+            <pc:docMk/>
+            <pc:sldMk cId="2223886345" sldId="336"/>
+            <ac:spMk id="47" creationId="{0C7F490F-88DC-44D1-8035-EBD5C2A1E36E}"/>
+          </ac:spMkLst>
+        </pc:spChg>
+        <pc:spChg chg="add del mod">
+          <ac:chgData name="Di Mattia Alessandro Edoardo Giorgio David" userId="f8954a66-e5ad-4a1c-9536-1d2117047f5f" providerId="ADAL" clId="{CFBF690A-D719-48D2-92B8-B5819DB24AC8}" dt="2021-08-09T14:48:06.334" v="1602"/>
+          <ac:spMkLst>
+            <pc:docMk/>
+            <pc:sldMk cId="2223886345" sldId="336"/>
+            <ac:spMk id="48" creationId="{2172E6FD-ADCE-4FF9-AADA-1D1297BCAC7C}"/>
+          </ac:spMkLst>
+        </pc:spChg>
+        <pc:spChg chg="add del mod">
+          <ac:chgData name="Di Mattia Alessandro Edoardo Giorgio David" userId="f8954a66-e5ad-4a1c-9536-1d2117047f5f" providerId="ADAL" clId="{CFBF690A-D719-48D2-92B8-B5819DB24AC8}" dt="2021-08-09T14:48:06.334" v="1602"/>
+          <ac:spMkLst>
+            <pc:docMk/>
+            <pc:sldMk cId="2223886345" sldId="336"/>
+            <ac:spMk id="51" creationId="{3F18B746-E115-40AA-BA2E-0DDAA61C239C}"/>
+          </ac:spMkLst>
+        </pc:spChg>
+        <pc:spChg chg="add del mod">
+          <ac:chgData name="Di Mattia Alessandro Edoardo Giorgio David" userId="f8954a66-e5ad-4a1c-9536-1d2117047f5f" providerId="ADAL" clId="{CFBF690A-D719-48D2-92B8-B5819DB24AC8}" dt="2021-08-09T14:48:06.334" v="1602"/>
+          <ac:spMkLst>
+            <pc:docMk/>
+            <pc:sldMk cId="2223886345" sldId="336"/>
+            <ac:spMk id="52" creationId="{FDA1651F-C7C9-40FB-BBE9-98C7D4B605E4}"/>
+          </ac:spMkLst>
+        </pc:spChg>
+        <pc:spChg chg="add del mod">
+          <ac:chgData name="Di Mattia Alessandro Edoardo Giorgio David" userId="f8954a66-e5ad-4a1c-9536-1d2117047f5f" providerId="ADAL" clId="{CFBF690A-D719-48D2-92B8-B5819DB24AC8}" dt="2021-08-09T14:48:06.334" v="1602"/>
+          <ac:spMkLst>
+            <pc:docMk/>
+            <pc:sldMk cId="2223886345" sldId="336"/>
+            <ac:spMk id="53" creationId="{73CB2228-6D00-4D03-9B29-6DC6B7F96F4E}"/>
+          </ac:spMkLst>
+        </pc:spChg>
+        <pc:spChg chg="add del mod">
+          <ac:chgData name="Di Mattia Alessandro Edoardo Giorgio David" userId="f8954a66-e5ad-4a1c-9536-1d2117047f5f" providerId="ADAL" clId="{CFBF690A-D719-48D2-92B8-B5819DB24AC8}" dt="2021-08-09T14:48:06.334" v="1602"/>
+          <ac:spMkLst>
+            <pc:docMk/>
+            <pc:sldMk cId="2223886345" sldId="336"/>
+            <ac:spMk id="55" creationId="{BE1EB5B1-738F-4239-8A84-B9B04394BD8C}"/>
+          </ac:spMkLst>
+        </pc:spChg>
+        <pc:spChg chg="add del mod">
+          <ac:chgData name="Di Mattia Alessandro Edoardo Giorgio David" userId="f8954a66-e5ad-4a1c-9536-1d2117047f5f" providerId="ADAL" clId="{CFBF690A-D719-48D2-92B8-B5819DB24AC8}" dt="2021-08-09T14:48:06.334" v="1602"/>
+          <ac:spMkLst>
+            <pc:docMk/>
+            <pc:sldMk cId="2223886345" sldId="336"/>
+            <ac:spMk id="57" creationId="{7AED626B-97F1-43E5-A445-59B175E15225}"/>
+          </ac:spMkLst>
+        </pc:spChg>
+        <pc:spChg chg="add del mod">
+          <ac:chgData name="Di Mattia Alessandro Edoardo Giorgio David" userId="f8954a66-e5ad-4a1c-9536-1d2117047f5f" providerId="ADAL" clId="{CFBF690A-D719-48D2-92B8-B5819DB24AC8}" dt="2021-08-09T14:48:06.334" v="1602"/>
+          <ac:spMkLst>
+            <pc:docMk/>
+            <pc:sldMk cId="2223886345" sldId="336"/>
+            <ac:spMk id="59" creationId="{437CF595-ACF0-4BD2-80B1-8B5855F4A5C7}"/>
+          </ac:spMkLst>
+        </pc:spChg>
+        <pc:spChg chg="add mod">
+          <ac:chgData name="Di Mattia Alessandro Edoardo Giorgio David" userId="f8954a66-e5ad-4a1c-9536-1d2117047f5f" providerId="ADAL" clId="{CFBF690A-D719-48D2-92B8-B5819DB24AC8}" dt="2021-08-09T15:14:08.515" v="1840" actId="20577"/>
+          <ac:spMkLst>
+            <pc:docMk/>
+            <pc:sldMk cId="2223886345" sldId="336"/>
+            <ac:spMk id="61" creationId="{58A6B7EB-1412-40A2-821F-8F47923E2B39}"/>
+          </ac:spMkLst>
+        </pc:spChg>
+        <pc:picChg chg="add mod">
+          <ac:chgData name="Di Mattia Alessandro Edoardo Giorgio David" userId="f8954a66-e5ad-4a1c-9536-1d2117047f5f" providerId="ADAL" clId="{CFBF690A-D719-48D2-92B8-B5819DB24AC8}" dt="2021-08-09T14:48:10.430" v="1604" actId="1076"/>
+          <ac:picMkLst>
+            <pc:docMk/>
+            <pc:sldMk cId="2223886345" sldId="336"/>
+            <ac:picMk id="60" creationId="{2590DDC6-8B95-4B75-8711-8A2E65160AA8}"/>
+          </ac:picMkLst>
+        </pc:picChg>
+        <pc:cxnChg chg="add del mod">
+          <ac:chgData name="Di Mattia Alessandro Edoardo Giorgio David" userId="f8954a66-e5ad-4a1c-9536-1d2117047f5f" providerId="ADAL" clId="{CFBF690A-D719-48D2-92B8-B5819DB24AC8}" dt="2021-08-09T14:48:00.719" v="1599"/>
+          <ac:cxnSpMkLst>
+            <pc:docMk/>
+            <pc:sldMk cId="2223886345" sldId="336"/>
+            <ac:cxnSpMk id="4" creationId="{BC484C7D-75A2-4ABE-A739-0C23D4AE0491}"/>
+          </ac:cxnSpMkLst>
+        </pc:cxnChg>
+        <pc:cxnChg chg="add del mod">
+          <ac:chgData name="Di Mattia Alessandro Edoardo Giorgio David" userId="f8954a66-e5ad-4a1c-9536-1d2117047f5f" providerId="ADAL" clId="{CFBF690A-D719-48D2-92B8-B5819DB24AC8}" dt="2021-08-09T14:48:00.719" v="1599"/>
+          <ac:cxnSpMkLst>
+            <pc:docMk/>
+            <pc:sldMk cId="2223886345" sldId="336"/>
+            <ac:cxnSpMk id="5" creationId="{6B2E5369-D18A-4DF8-BC51-68923888350B}"/>
+          </ac:cxnSpMkLst>
+        </pc:cxnChg>
+        <pc:cxnChg chg="add del mod">
+          <ac:chgData name="Di Mattia Alessandro Edoardo Giorgio David" userId="f8954a66-e5ad-4a1c-9536-1d2117047f5f" providerId="ADAL" clId="{CFBF690A-D719-48D2-92B8-B5819DB24AC8}" dt="2021-08-09T14:48:00.719" v="1599"/>
+          <ac:cxnSpMkLst>
+            <pc:docMk/>
+            <pc:sldMk cId="2223886345" sldId="336"/>
+            <ac:cxnSpMk id="6" creationId="{05FEBAFD-17DF-4BF3-BD5F-0D83A2A336E6}"/>
+          </ac:cxnSpMkLst>
+        </pc:cxnChg>
+        <pc:cxnChg chg="add del mod">
+          <ac:chgData name="Di Mattia Alessandro Edoardo Giorgio David" userId="f8954a66-e5ad-4a1c-9536-1d2117047f5f" providerId="ADAL" clId="{CFBF690A-D719-48D2-92B8-B5819DB24AC8}" dt="2021-08-09T14:48:00.719" v="1599"/>
+          <ac:cxnSpMkLst>
+            <pc:docMk/>
+            <pc:sldMk cId="2223886345" sldId="336"/>
+            <ac:cxnSpMk id="7" creationId="{376F227D-A81C-4408-BF91-603AD8D90AED}"/>
+          </ac:cxnSpMkLst>
+        </pc:cxnChg>
+        <pc:cxnChg chg="add del mod">
+          <ac:chgData name="Di Mattia Alessandro Edoardo Giorgio David" userId="f8954a66-e5ad-4a1c-9536-1d2117047f5f" providerId="ADAL" clId="{CFBF690A-D719-48D2-92B8-B5819DB24AC8}" dt="2021-08-09T14:48:00.719" v="1599"/>
+          <ac:cxnSpMkLst>
+            <pc:docMk/>
+            <pc:sldMk cId="2223886345" sldId="336"/>
+            <ac:cxnSpMk id="16" creationId="{706D481C-C88C-451F-9603-C6844D644468}"/>
+          </ac:cxnSpMkLst>
+        </pc:cxnChg>
+        <pc:cxnChg chg="add del mod">
+          <ac:chgData name="Di Mattia Alessandro Edoardo Giorgio David" userId="f8954a66-e5ad-4a1c-9536-1d2117047f5f" providerId="ADAL" clId="{CFBF690A-D719-48D2-92B8-B5819DB24AC8}" dt="2021-08-09T14:48:00.719" v="1599"/>
+          <ac:cxnSpMkLst>
+            <pc:docMk/>
+            <pc:sldMk cId="2223886345" sldId="336"/>
+            <ac:cxnSpMk id="17" creationId="{7F085B11-4192-4971-9B4A-1DE921B3EE23}"/>
+          </ac:cxnSpMkLst>
+        </pc:cxnChg>
+        <pc:cxnChg chg="add del mod">
+          <ac:chgData name="Di Mattia Alessandro Edoardo Giorgio David" userId="f8954a66-e5ad-4a1c-9536-1d2117047f5f" providerId="ADAL" clId="{CFBF690A-D719-48D2-92B8-B5819DB24AC8}" dt="2021-08-09T14:48:00.719" v="1599"/>
+          <ac:cxnSpMkLst>
+            <pc:docMk/>
+            <pc:sldMk cId="2223886345" sldId="336"/>
+            <ac:cxnSpMk id="21" creationId="{3C19582E-008F-4868-935A-BA97171821CD}"/>
+          </ac:cxnSpMkLst>
+        </pc:cxnChg>
+        <pc:cxnChg chg="add del mod">
+          <ac:chgData name="Di Mattia Alessandro Edoardo Giorgio David" userId="f8954a66-e5ad-4a1c-9536-1d2117047f5f" providerId="ADAL" clId="{CFBF690A-D719-48D2-92B8-B5819DB24AC8}" dt="2021-08-09T14:48:00.719" v="1599"/>
+          <ac:cxnSpMkLst>
+            <pc:docMk/>
+            <pc:sldMk cId="2223886345" sldId="336"/>
+            <ac:cxnSpMk id="22" creationId="{2433AA6C-8B96-4A69-A243-5D4A48BD138A}"/>
+          </ac:cxnSpMkLst>
+        </pc:cxnChg>
+        <pc:cxnChg chg="add del mod">
+          <ac:chgData name="Di Mattia Alessandro Edoardo Giorgio David" userId="f8954a66-e5ad-4a1c-9536-1d2117047f5f" providerId="ADAL" clId="{CFBF690A-D719-48D2-92B8-B5819DB24AC8}" dt="2021-08-09T14:48:00.719" v="1599"/>
+          <ac:cxnSpMkLst>
+            <pc:docMk/>
+            <pc:sldMk cId="2223886345" sldId="336"/>
+            <ac:cxnSpMk id="26" creationId="{CAEC6E02-BB37-47FE-9A68-08BD2FD0C4D6}"/>
+          </ac:cxnSpMkLst>
+        </pc:cxnChg>
+        <pc:cxnChg chg="add del mod">
+          <ac:chgData name="Di Mattia Alessandro Edoardo Giorgio David" userId="f8954a66-e5ad-4a1c-9536-1d2117047f5f" providerId="ADAL" clId="{CFBF690A-D719-48D2-92B8-B5819DB24AC8}" dt="2021-08-09T14:48:00.719" v="1599"/>
+          <ac:cxnSpMkLst>
+            <pc:docMk/>
+            <pc:sldMk cId="2223886345" sldId="336"/>
+            <ac:cxnSpMk id="28" creationId="{8463F2B2-6C9B-4F68-B982-05D65A088563}"/>
+          </ac:cxnSpMkLst>
+        </pc:cxnChg>
+        <pc:cxnChg chg="add del mod">
+          <ac:chgData name="Di Mattia Alessandro Edoardo Giorgio David" userId="f8954a66-e5ad-4a1c-9536-1d2117047f5f" providerId="ADAL" clId="{CFBF690A-D719-48D2-92B8-B5819DB24AC8}" dt="2021-08-09T14:48:00.719" v="1599"/>
+          <ac:cxnSpMkLst>
+            <pc:docMk/>
+            <pc:sldMk cId="2223886345" sldId="336"/>
+            <ac:cxnSpMk id="30" creationId="{C8154AE7-1365-4E27-94C0-2EC5322E841A}"/>
+          </ac:cxnSpMkLst>
+        </pc:cxnChg>
+        <pc:cxnChg chg="add del mod">
+          <ac:chgData name="Di Mattia Alessandro Edoardo Giorgio David" userId="f8954a66-e5ad-4a1c-9536-1d2117047f5f" providerId="ADAL" clId="{CFBF690A-D719-48D2-92B8-B5819DB24AC8}" dt="2021-08-09T14:48:06.334" v="1602"/>
+          <ac:cxnSpMkLst>
+            <pc:docMk/>
+            <pc:sldMk cId="2223886345" sldId="336"/>
+            <ac:cxnSpMk id="32" creationId="{CA0DAAD7-573C-4B03-BB18-6053A94887EE}"/>
+          </ac:cxnSpMkLst>
+        </pc:cxnChg>
+        <pc:cxnChg chg="add del mod">
+          <ac:chgData name="Di Mattia Alessandro Edoardo Giorgio David" userId="f8954a66-e5ad-4a1c-9536-1d2117047f5f" providerId="ADAL" clId="{CFBF690A-D719-48D2-92B8-B5819DB24AC8}" dt="2021-08-09T14:48:06.334" v="1602"/>
+          <ac:cxnSpMkLst>
+            <pc:docMk/>
+            <pc:sldMk cId="2223886345" sldId="336"/>
+            <ac:cxnSpMk id="33" creationId="{DA32C806-A58C-49A2-971F-32C07B3CA4CF}"/>
+          </ac:cxnSpMkLst>
+        </pc:cxnChg>
+        <pc:cxnChg chg="add del mod">
+          <ac:chgData name="Di Mattia Alessandro Edoardo Giorgio David" userId="f8954a66-e5ad-4a1c-9536-1d2117047f5f" providerId="ADAL" clId="{CFBF690A-D719-48D2-92B8-B5819DB24AC8}" dt="2021-08-09T14:48:06.334" v="1602"/>
+          <ac:cxnSpMkLst>
+            <pc:docMk/>
+            <pc:sldMk cId="2223886345" sldId="336"/>
+            <ac:cxnSpMk id="34" creationId="{C0063E2F-35BA-4031-893B-972A4D555725}"/>
+          </ac:cxnSpMkLst>
+        </pc:cxnChg>
+        <pc:cxnChg chg="add del mod">
+          <ac:chgData name="Di Mattia Alessandro Edoardo Giorgio David" userId="f8954a66-e5ad-4a1c-9536-1d2117047f5f" providerId="ADAL" clId="{CFBF690A-D719-48D2-92B8-B5819DB24AC8}" dt="2021-08-09T14:48:06.334" v="1602"/>
+          <ac:cxnSpMkLst>
+            <pc:docMk/>
+            <pc:sldMk cId="2223886345" sldId="336"/>
+            <ac:cxnSpMk id="35" creationId="{871AD2F4-EA57-4B83-B727-A2D41B5D1728}"/>
+          </ac:cxnSpMkLst>
+        </pc:cxnChg>
+        <pc:cxnChg chg="add del mod">
+          <ac:chgData name="Di Mattia Alessandro Edoardo Giorgio David" userId="f8954a66-e5ad-4a1c-9536-1d2117047f5f" providerId="ADAL" clId="{CFBF690A-D719-48D2-92B8-B5819DB24AC8}" dt="2021-08-09T14:48:06.334" v="1602"/>
+          <ac:cxnSpMkLst>
+            <pc:docMk/>
+            <pc:sldMk cId="2223886345" sldId="336"/>
+            <ac:cxnSpMk id="44" creationId="{31C1F4D0-7EDD-4865-86C7-CA727B567D5F}"/>
+          </ac:cxnSpMkLst>
+        </pc:cxnChg>
+        <pc:cxnChg chg="add del mod">
+          <ac:chgData name="Di Mattia Alessandro Edoardo Giorgio David" userId="f8954a66-e5ad-4a1c-9536-1d2117047f5f" providerId="ADAL" clId="{CFBF690A-D719-48D2-92B8-B5819DB24AC8}" dt="2021-08-09T14:48:06.334" v="1602"/>
+          <ac:cxnSpMkLst>
+            <pc:docMk/>
+            <pc:sldMk cId="2223886345" sldId="336"/>
+            <ac:cxnSpMk id="45" creationId="{C7EBAB87-F838-4CEE-80D1-C10A63F33CB5}"/>
+          </ac:cxnSpMkLst>
+        </pc:cxnChg>
+        <pc:cxnChg chg="add del mod">
+          <ac:chgData name="Di Mattia Alessandro Edoardo Giorgio David" userId="f8954a66-e5ad-4a1c-9536-1d2117047f5f" providerId="ADAL" clId="{CFBF690A-D719-48D2-92B8-B5819DB24AC8}" dt="2021-08-09T14:48:06.334" v="1602"/>
+          <ac:cxnSpMkLst>
+            <pc:docMk/>
+            <pc:sldMk cId="2223886345" sldId="336"/>
+            <ac:cxnSpMk id="49" creationId="{635E5550-4519-4203-AA35-0A850BD524C9}"/>
+          </ac:cxnSpMkLst>
+        </pc:cxnChg>
+        <pc:cxnChg chg="add del mod">
+          <ac:chgData name="Di Mattia Alessandro Edoardo Giorgio David" userId="f8954a66-e5ad-4a1c-9536-1d2117047f5f" providerId="ADAL" clId="{CFBF690A-D719-48D2-92B8-B5819DB24AC8}" dt="2021-08-09T14:48:06.334" v="1602"/>
+          <ac:cxnSpMkLst>
+            <pc:docMk/>
+            <pc:sldMk cId="2223886345" sldId="336"/>
+            <ac:cxnSpMk id="50" creationId="{A095B073-9050-4EB3-A76C-A5F0D6A6CB9B}"/>
+          </ac:cxnSpMkLst>
+        </pc:cxnChg>
+        <pc:cxnChg chg="add del mod">
+          <ac:chgData name="Di Mattia Alessandro Edoardo Giorgio David" userId="f8954a66-e5ad-4a1c-9536-1d2117047f5f" providerId="ADAL" clId="{CFBF690A-D719-48D2-92B8-B5819DB24AC8}" dt="2021-08-09T14:48:06.334" v="1602"/>
+          <ac:cxnSpMkLst>
+            <pc:docMk/>
+            <pc:sldMk cId="2223886345" sldId="336"/>
+            <ac:cxnSpMk id="54" creationId="{BC9A19AE-D379-4AB1-88EF-7CB8197322DC}"/>
+          </ac:cxnSpMkLst>
+        </pc:cxnChg>
+        <pc:cxnChg chg="add del mod">
+          <ac:chgData name="Di Mattia Alessandro Edoardo Giorgio David" userId="f8954a66-e5ad-4a1c-9536-1d2117047f5f" providerId="ADAL" clId="{CFBF690A-D719-48D2-92B8-B5819DB24AC8}" dt="2021-08-09T14:48:06.334" v="1602"/>
+          <ac:cxnSpMkLst>
+            <pc:docMk/>
+            <pc:sldMk cId="2223886345" sldId="336"/>
+            <ac:cxnSpMk id="56" creationId="{817E96AF-6E57-450F-91FD-05ACEEAE37A1}"/>
+          </ac:cxnSpMkLst>
+        </pc:cxnChg>
+        <pc:cxnChg chg="add del mod">
+          <ac:chgData name="Di Mattia Alessandro Edoardo Giorgio David" userId="f8954a66-e5ad-4a1c-9536-1d2117047f5f" providerId="ADAL" clId="{CFBF690A-D719-48D2-92B8-B5819DB24AC8}" dt="2021-08-09T14:48:06.334" v="1602"/>
+          <ac:cxnSpMkLst>
+            <pc:docMk/>
+            <pc:sldMk cId="2223886345" sldId="336"/>
+            <ac:cxnSpMk id="58" creationId="{9796C8FA-4681-4C87-A057-F2A1B61B3DAB}"/>
+          </ac:cxnSpMkLst>
+        </pc:cxnChg>
+      </pc:sldChg>
+      <pc:sldChg chg="addSp delSp modSp new mod modClrScheme chgLayout">
+        <pc:chgData name="Di Mattia Alessandro Edoardo Giorgio David" userId="f8954a66-e5ad-4a1c-9536-1d2117047f5f" providerId="ADAL" clId="{CFBF690A-D719-48D2-92B8-B5819DB24AC8}" dt="2021-08-09T15:32:30.204" v="1895" actId="20577"/>
+        <pc:sldMkLst>
+          <pc:docMk/>
+          <pc:sldMk cId="2386622032" sldId="337"/>
+        </pc:sldMkLst>
+        <pc:spChg chg="add mod">
+          <ac:chgData name="Di Mattia Alessandro Edoardo Giorgio David" userId="f8954a66-e5ad-4a1c-9536-1d2117047f5f" providerId="ADAL" clId="{CFBF690A-D719-48D2-92B8-B5819DB24AC8}" dt="2021-08-09T15:32:30.204" v="1895" actId="20577"/>
+          <ac:spMkLst>
+            <pc:docMk/>
+            <pc:sldMk cId="2386622032" sldId="337"/>
+            <ac:spMk id="2" creationId="{4955EB03-85E3-48BD-8D11-98871C2CDE2B}"/>
+          </ac:spMkLst>
+        </pc:spChg>
+        <pc:spChg chg="add del mod">
+          <ac:chgData name="Di Mattia Alessandro Edoardo Giorgio David" userId="f8954a66-e5ad-4a1c-9536-1d2117047f5f" providerId="ADAL" clId="{CFBF690A-D719-48D2-92B8-B5819DB24AC8}" dt="2021-08-09T15:27:22.293" v="1853"/>
+          <ac:spMkLst>
+            <pc:docMk/>
+            <pc:sldMk cId="2386622032" sldId="337"/>
+            <ac:spMk id="3" creationId="{FE07B3C5-277D-4534-989E-90ED4C47E697}"/>
+          </ac:spMkLst>
+        </pc:spChg>
+        <pc:spChg chg="add mod">
+          <ac:chgData name="Di Mattia Alessandro Edoardo Giorgio David" userId="f8954a66-e5ad-4a1c-9536-1d2117047f5f" providerId="ADAL" clId="{CFBF690A-D719-48D2-92B8-B5819DB24AC8}" dt="2021-08-09T15:32:20.672" v="1882" actId="20577"/>
+          <ac:spMkLst>
+            <pc:docMk/>
+            <pc:sldMk cId="2386622032" sldId="337"/>
+            <ac:spMk id="4" creationId="{5C20FEFB-367B-47CF-9F2F-2780ADC071FE}"/>
+          </ac:spMkLst>
+        </pc:spChg>
+        <pc:spChg chg="add del mod">
+          <ac:chgData name="Di Mattia Alessandro Edoardo Giorgio David" userId="f8954a66-e5ad-4a1c-9536-1d2117047f5f" providerId="ADAL" clId="{CFBF690A-D719-48D2-92B8-B5819DB24AC8}" dt="2021-08-09T15:27:37.834" v="1857"/>
+          <ac:spMkLst>
+            <pc:docMk/>
+            <pc:sldMk cId="2386622032" sldId="337"/>
+            <ac:spMk id="5" creationId="{B684725E-159F-4B29-A899-2F15DEBA6CC5}"/>
+          </ac:spMkLst>
+        </pc:spChg>
+        <pc:picChg chg="add del mod">
+          <ac:chgData name="Di Mattia Alessandro Edoardo Giorgio David" userId="f8954a66-e5ad-4a1c-9536-1d2117047f5f" providerId="ADAL" clId="{CFBF690A-D719-48D2-92B8-B5819DB24AC8}" dt="2021-08-09T15:32:02.161" v="1860" actId="478"/>
+          <ac:picMkLst>
+            <pc:docMk/>
+            <pc:sldMk cId="2386622032" sldId="337"/>
+            <ac:picMk id="7" creationId="{DD149F64-9B26-400A-8535-BFB846A828F6}"/>
+          </ac:picMkLst>
+        </pc:picChg>
+      </pc:sldChg>
+      <pc:sldChg chg="modSp new mod modNotesTx">
+        <pc:chgData name="Di Mattia Alessandro Edoardo Giorgio David" userId="f8954a66-e5ad-4a1c-9536-1d2117047f5f" providerId="ADAL" clId="{CFBF690A-D719-48D2-92B8-B5819DB24AC8}" dt="2021-08-09T15:35:06.200" v="1903"/>
+        <pc:sldMkLst>
+          <pc:docMk/>
+          <pc:sldMk cId="863600783" sldId="338"/>
+        </pc:sldMkLst>
+        <pc:spChg chg="mod">
+          <ac:chgData name="Di Mattia Alessandro Edoardo Giorgio David" userId="f8954a66-e5ad-4a1c-9536-1d2117047f5f" providerId="ADAL" clId="{CFBF690A-D719-48D2-92B8-B5819DB24AC8}" dt="2021-08-09T15:34:20.370" v="1901" actId="20577"/>
+          <ac:spMkLst>
+            <pc:docMk/>
+            <pc:sldMk cId="863600783" sldId="338"/>
+            <ac:spMk id="2" creationId="{9A7E9ECD-A824-405F-93D7-214E7E8CED7B}"/>
+          </ac:spMkLst>
+        </pc:spChg>
+        <pc:spChg chg="mod">
+          <ac:chgData name="Di Mattia Alessandro Edoardo Giorgio David" userId="f8954a66-e5ad-4a1c-9536-1d2117047f5f" providerId="ADAL" clId="{CFBF690A-D719-48D2-92B8-B5819DB24AC8}" dt="2021-08-09T15:34:39.134" v="1902"/>
+          <ac:spMkLst>
+            <pc:docMk/>
+            <pc:sldMk cId="863600783" sldId="338"/>
+            <ac:spMk id="3" creationId="{7EEDFC4A-3855-4AB5-8115-C4399C82CF5B}"/>
+          </ac:spMkLst>
+        </pc:spChg>
+      </pc:sldChg>
+      <pc:sldChg chg="modSp new mod">
+        <pc:chgData name="Di Mattia Alessandro Edoardo Giorgio David" userId="f8954a66-e5ad-4a1c-9536-1d2117047f5f" providerId="ADAL" clId="{CFBF690A-D719-48D2-92B8-B5819DB24AC8}" dt="2021-08-09T15:53:44.291" v="1952" actId="20577"/>
+        <pc:sldMkLst>
+          <pc:docMk/>
+          <pc:sldMk cId="3760396929" sldId="339"/>
+        </pc:sldMkLst>
+        <pc:spChg chg="mod">
+          <ac:chgData name="Di Mattia Alessandro Edoardo Giorgio David" userId="f8954a66-e5ad-4a1c-9536-1d2117047f5f" providerId="ADAL" clId="{CFBF690A-D719-48D2-92B8-B5819DB24AC8}" dt="2021-08-09T15:53:44.291" v="1952" actId="20577"/>
+          <ac:spMkLst>
+            <pc:docMk/>
+            <pc:sldMk cId="3760396929" sldId="339"/>
+            <ac:spMk id="2" creationId="{49AEAE09-0BED-4CAC-8212-5B93D7A70FDE}"/>
+          </ac:spMkLst>
+        </pc:spChg>
+        <pc:spChg chg="mod">
+          <ac:chgData name="Di Mattia Alessandro Edoardo Giorgio David" userId="f8954a66-e5ad-4a1c-9536-1d2117047f5f" providerId="ADAL" clId="{CFBF690A-D719-48D2-92B8-B5819DB24AC8}" dt="2021-08-09T15:50:25.508" v="1918"/>
+          <ac:spMkLst>
+            <pc:docMk/>
+            <pc:sldMk cId="3760396929" sldId="339"/>
+            <ac:spMk id="3" creationId="{1D30359C-CBBF-48E2-90A8-845B2C301D3C}"/>
+          </ac:spMkLst>
+        </pc:spChg>
+      </pc:sldChg>
+      <pc:sldChg chg="modSp new mod">
+        <pc:chgData name="Di Mattia Alessandro Edoardo Giorgio David" userId="f8954a66-e5ad-4a1c-9536-1d2117047f5f" providerId="ADAL" clId="{CFBF690A-D719-48D2-92B8-B5819DB24AC8}" dt="2021-08-09T15:53:36.979" v="1949" actId="20577"/>
+        <pc:sldMkLst>
+          <pc:docMk/>
+          <pc:sldMk cId="4043709138" sldId="340"/>
+        </pc:sldMkLst>
+        <pc:spChg chg="mod">
+          <ac:chgData name="Di Mattia Alessandro Edoardo Giorgio David" userId="f8954a66-e5ad-4a1c-9536-1d2117047f5f" providerId="ADAL" clId="{CFBF690A-D719-48D2-92B8-B5819DB24AC8}" dt="2021-08-09T15:53:36.979" v="1949" actId="20577"/>
+          <ac:spMkLst>
+            <pc:docMk/>
+            <pc:sldMk cId="4043709138" sldId="340"/>
+            <ac:spMk id="2" creationId="{88FDEB9A-7D04-42C6-8A80-9906B92F3B49}"/>
+          </ac:spMkLst>
+        </pc:spChg>
+        <pc:spChg chg="mod">
+          <ac:chgData name="Di Mattia Alessandro Edoardo Giorgio David" userId="f8954a66-e5ad-4a1c-9536-1d2117047f5f" providerId="ADAL" clId="{CFBF690A-D719-48D2-92B8-B5819DB24AC8}" dt="2021-08-09T15:53:27.145" v="1938" actId="5793"/>
+          <ac:spMkLst>
+            <pc:docMk/>
+            <pc:sldMk cId="4043709138" sldId="340"/>
+            <ac:spMk id="3" creationId="{8DC0EF51-28F2-45F6-BD96-33F38C1708AE}"/>
           </ac:spMkLst>
         </pc:spChg>
       </pc:sldChg>
@@ -3362,1752 +5108,6 @@
             <ac:picMk id="5" creationId="{A194120F-38EF-4FAB-9037-50EAE8E371C5}"/>
           </ac:picMkLst>
         </pc:picChg>
-      </pc:sldChg>
-    </pc:docChg>
-  </pc:docChgLst>
-  <pc:docChgLst>
-    <pc:chgData name="Alessandro Edoardo Giorgio David" userId="f8954a66-e5ad-4a1c-9536-1d2117047f5f" providerId="ADAL" clId="{329F747F-ECE3-457D-9702-1118B74C0B14}"/>
-    <pc:docChg chg="addSld delSld modSld">
-      <pc:chgData name="Alessandro Edoardo Giorgio David" userId="f8954a66-e5ad-4a1c-9536-1d2117047f5f" providerId="ADAL" clId="{329F747F-ECE3-457D-9702-1118B74C0B14}" dt="2021-11-14T16:45:31.464" v="110" actId="20577"/>
-      <pc:docMkLst>
-        <pc:docMk/>
-      </pc:docMkLst>
-      <pc:sldChg chg="modSp mod">
-        <pc:chgData name="Alessandro Edoardo Giorgio David" userId="f8954a66-e5ad-4a1c-9536-1d2117047f5f" providerId="ADAL" clId="{329F747F-ECE3-457D-9702-1118B74C0B14}" dt="2021-11-08T07:45:03.214" v="27" actId="790"/>
-        <pc:sldMkLst>
-          <pc:docMk/>
-          <pc:sldMk cId="3153607966" sldId="280"/>
-        </pc:sldMkLst>
-        <pc:spChg chg="mod">
-          <ac:chgData name="Alessandro Edoardo Giorgio David" userId="f8954a66-e5ad-4a1c-9536-1d2117047f5f" providerId="ADAL" clId="{329F747F-ECE3-457D-9702-1118B74C0B14}" dt="2021-11-08T07:45:03.214" v="27" actId="790"/>
-          <ac:spMkLst>
-            <pc:docMk/>
-            <pc:sldMk cId="3153607966" sldId="280"/>
-            <ac:spMk id="2" creationId="{683FD103-5EF1-48AB-8EC6-4C1921FB118B}"/>
-          </ac:spMkLst>
-        </pc:spChg>
-      </pc:sldChg>
-      <pc:sldChg chg="modSp new mod">
-        <pc:chgData name="Alessandro Edoardo Giorgio David" userId="f8954a66-e5ad-4a1c-9536-1d2117047f5f" providerId="ADAL" clId="{329F747F-ECE3-457D-9702-1118B74C0B14}" dt="2021-11-08T07:45:36.836" v="88" actId="20577"/>
-        <pc:sldMkLst>
-          <pc:docMk/>
-          <pc:sldMk cId="355505243" sldId="281"/>
-        </pc:sldMkLst>
-        <pc:spChg chg="mod">
-          <ac:chgData name="Alessandro Edoardo Giorgio David" userId="f8954a66-e5ad-4a1c-9536-1d2117047f5f" providerId="ADAL" clId="{329F747F-ECE3-457D-9702-1118B74C0B14}" dt="2021-11-08T07:45:18.734" v="36" actId="122"/>
-          <ac:spMkLst>
-            <pc:docMk/>
-            <pc:sldMk cId="355505243" sldId="281"/>
-            <ac:spMk id="2" creationId="{94D62104-75FA-4CA6-90BD-2DC738BC3A46}"/>
-          </ac:spMkLst>
-        </pc:spChg>
-        <pc:spChg chg="mod">
-          <ac:chgData name="Alessandro Edoardo Giorgio David" userId="f8954a66-e5ad-4a1c-9536-1d2117047f5f" providerId="ADAL" clId="{329F747F-ECE3-457D-9702-1118B74C0B14}" dt="2021-11-08T07:45:36.836" v="88" actId="20577"/>
-          <ac:spMkLst>
-            <pc:docMk/>
-            <pc:sldMk cId="355505243" sldId="281"/>
-            <ac:spMk id="3" creationId="{861A6D1C-7FFE-4596-8F8F-BB8902D42B11}"/>
-          </ac:spMkLst>
-        </pc:spChg>
-      </pc:sldChg>
-      <pc:sldChg chg="del">
-        <pc:chgData name="Alessandro Edoardo Giorgio David" userId="f8954a66-e5ad-4a1c-9536-1d2117047f5f" providerId="ADAL" clId="{329F747F-ECE3-457D-9702-1118B74C0B14}" dt="2021-11-08T07:45:10.609" v="28" actId="2696"/>
-        <pc:sldMkLst>
-          <pc:docMk/>
-          <pc:sldMk cId="3362865170" sldId="281"/>
-        </pc:sldMkLst>
-      </pc:sldChg>
-      <pc:sldChg chg="del">
-        <pc:chgData name="Alessandro Edoardo Giorgio David" userId="f8954a66-e5ad-4a1c-9536-1d2117047f5f" providerId="ADAL" clId="{329F747F-ECE3-457D-9702-1118B74C0B14}" dt="2021-11-08T07:45:10.609" v="28" actId="2696"/>
-        <pc:sldMkLst>
-          <pc:docMk/>
-          <pc:sldMk cId="1960727984" sldId="282"/>
-        </pc:sldMkLst>
-      </pc:sldChg>
-      <pc:sldChg chg="del">
-        <pc:chgData name="Alessandro Edoardo Giorgio David" userId="f8954a66-e5ad-4a1c-9536-1d2117047f5f" providerId="ADAL" clId="{329F747F-ECE3-457D-9702-1118B74C0B14}" dt="2021-11-08T07:45:10.609" v="28" actId="2696"/>
-        <pc:sldMkLst>
-          <pc:docMk/>
-          <pc:sldMk cId="3708938076" sldId="283"/>
-        </pc:sldMkLst>
-      </pc:sldChg>
-      <pc:sldChg chg="del">
-        <pc:chgData name="Alessandro Edoardo Giorgio David" userId="f8954a66-e5ad-4a1c-9536-1d2117047f5f" providerId="ADAL" clId="{329F747F-ECE3-457D-9702-1118B74C0B14}" dt="2021-11-08T07:45:10.609" v="28" actId="2696"/>
-        <pc:sldMkLst>
-          <pc:docMk/>
-          <pc:sldMk cId="2825981100" sldId="284"/>
-        </pc:sldMkLst>
-      </pc:sldChg>
-      <pc:sldChg chg="del">
-        <pc:chgData name="Alessandro Edoardo Giorgio David" userId="f8954a66-e5ad-4a1c-9536-1d2117047f5f" providerId="ADAL" clId="{329F747F-ECE3-457D-9702-1118B74C0B14}" dt="2021-11-08T07:45:10.609" v="28" actId="2696"/>
-        <pc:sldMkLst>
-          <pc:docMk/>
-          <pc:sldMk cId="3350214057" sldId="285"/>
-        </pc:sldMkLst>
-      </pc:sldChg>
-      <pc:sldChg chg="del">
-        <pc:chgData name="Alessandro Edoardo Giorgio David" userId="f8954a66-e5ad-4a1c-9536-1d2117047f5f" providerId="ADAL" clId="{329F747F-ECE3-457D-9702-1118B74C0B14}" dt="2021-11-08T07:45:10.609" v="28" actId="2696"/>
-        <pc:sldMkLst>
-          <pc:docMk/>
-          <pc:sldMk cId="3486342803" sldId="286"/>
-        </pc:sldMkLst>
-      </pc:sldChg>
-      <pc:sldChg chg="del">
-        <pc:chgData name="Alessandro Edoardo Giorgio David" userId="f8954a66-e5ad-4a1c-9536-1d2117047f5f" providerId="ADAL" clId="{329F747F-ECE3-457D-9702-1118B74C0B14}" dt="2021-11-08T07:45:10.609" v="28" actId="2696"/>
-        <pc:sldMkLst>
-          <pc:docMk/>
-          <pc:sldMk cId="180125166" sldId="287"/>
-        </pc:sldMkLst>
-      </pc:sldChg>
-      <pc:sldChg chg="del">
-        <pc:chgData name="Alessandro Edoardo Giorgio David" userId="f8954a66-e5ad-4a1c-9536-1d2117047f5f" providerId="ADAL" clId="{329F747F-ECE3-457D-9702-1118B74C0B14}" dt="2021-11-08T07:45:10.609" v="28" actId="2696"/>
-        <pc:sldMkLst>
-          <pc:docMk/>
-          <pc:sldMk cId="956825130" sldId="288"/>
-        </pc:sldMkLst>
-      </pc:sldChg>
-      <pc:sldChg chg="del">
-        <pc:chgData name="Alessandro Edoardo Giorgio David" userId="f8954a66-e5ad-4a1c-9536-1d2117047f5f" providerId="ADAL" clId="{329F747F-ECE3-457D-9702-1118B74C0B14}" dt="2021-11-08T07:45:10.609" v="28" actId="2696"/>
-        <pc:sldMkLst>
-          <pc:docMk/>
-          <pc:sldMk cId="3104482230" sldId="289"/>
-        </pc:sldMkLst>
-      </pc:sldChg>
-      <pc:sldChg chg="modSp mod">
-        <pc:chgData name="Alessandro Edoardo Giorgio David" userId="f8954a66-e5ad-4a1c-9536-1d2117047f5f" providerId="ADAL" clId="{329F747F-ECE3-457D-9702-1118B74C0B14}" dt="2021-11-14T16:45:31.464" v="110" actId="20577"/>
-        <pc:sldMkLst>
-          <pc:docMk/>
-          <pc:sldMk cId="443818849" sldId="290"/>
-        </pc:sldMkLst>
-        <pc:spChg chg="mod">
-          <ac:chgData name="Alessandro Edoardo Giorgio David" userId="f8954a66-e5ad-4a1c-9536-1d2117047f5f" providerId="ADAL" clId="{329F747F-ECE3-457D-9702-1118B74C0B14}" dt="2021-11-14T16:45:31.464" v="110" actId="20577"/>
-          <ac:spMkLst>
-            <pc:docMk/>
-            <pc:sldMk cId="443818849" sldId="290"/>
-            <ac:spMk id="3" creationId="{4D078D51-D572-4CA1-96D6-5B20ECD70331}"/>
-          </ac:spMkLst>
-        </pc:spChg>
-      </pc:sldChg>
-      <pc:sldChg chg="del">
-        <pc:chgData name="Alessandro Edoardo Giorgio David" userId="f8954a66-e5ad-4a1c-9536-1d2117047f5f" providerId="ADAL" clId="{329F747F-ECE3-457D-9702-1118B74C0B14}" dt="2021-11-08T07:45:10.609" v="28" actId="2696"/>
-        <pc:sldMkLst>
-          <pc:docMk/>
-          <pc:sldMk cId="2893891212" sldId="290"/>
-        </pc:sldMkLst>
-      </pc:sldChg>
-    </pc:docChg>
-  </pc:docChgLst>
-  <pc:docChgLst>
-    <pc:chgData name="Di Mattia Alessandro Edoardo Giorgio David" userId="f8954a66-e5ad-4a1c-9536-1d2117047f5f" providerId="ADAL" clId="{AC787D5D-10B8-4750-885F-805D7C9E9737}"/>
-    <pc:docChg chg="undo custSel addSld modSld">
-      <pc:chgData name="Di Mattia Alessandro Edoardo Giorgio David" userId="f8954a66-e5ad-4a1c-9536-1d2117047f5f" providerId="ADAL" clId="{AC787D5D-10B8-4750-885F-805D7C9E9737}" dt="2021-08-20T15:21:02.985" v="455" actId="20577"/>
-      <pc:docMkLst>
-        <pc:docMk/>
-      </pc:docMkLst>
-      <pc:sldChg chg="modSp new mod">
-        <pc:chgData name="Di Mattia Alessandro Edoardo Giorgio David" userId="f8954a66-e5ad-4a1c-9536-1d2117047f5f" providerId="ADAL" clId="{AC787D5D-10B8-4750-885F-805D7C9E9737}" dt="2021-08-20T14:45:37.819" v="298" actId="20577"/>
-        <pc:sldMkLst>
-          <pc:docMk/>
-          <pc:sldMk cId="3870998453" sldId="298"/>
-        </pc:sldMkLst>
-        <pc:spChg chg="mod">
-          <ac:chgData name="Di Mattia Alessandro Edoardo Giorgio David" userId="f8954a66-e5ad-4a1c-9536-1d2117047f5f" providerId="ADAL" clId="{AC787D5D-10B8-4750-885F-805D7C9E9737}" dt="2021-08-20T14:38:55.348" v="14" actId="122"/>
-          <ac:spMkLst>
-            <pc:docMk/>
-            <pc:sldMk cId="3870998453" sldId="298"/>
-            <ac:spMk id="2" creationId="{CC70B360-B3ED-43E5-A748-F5B5C403C878}"/>
-          </ac:spMkLst>
-        </pc:spChg>
-        <pc:spChg chg="mod">
-          <ac:chgData name="Di Mattia Alessandro Edoardo Giorgio David" userId="f8954a66-e5ad-4a1c-9536-1d2117047f5f" providerId="ADAL" clId="{AC787D5D-10B8-4750-885F-805D7C9E9737}" dt="2021-08-20T14:45:37.819" v="298" actId="20577"/>
-          <ac:spMkLst>
-            <pc:docMk/>
-            <pc:sldMk cId="3870998453" sldId="298"/>
-            <ac:spMk id="3" creationId="{7AB3AA8F-0BE3-46AB-A9D7-309F7F97E4C0}"/>
-          </ac:spMkLst>
-        </pc:spChg>
-      </pc:sldChg>
-      <pc:sldChg chg="addSp delSp modSp new mod modClrScheme chgLayout">
-        <pc:chgData name="Di Mattia Alessandro Edoardo Giorgio David" userId="f8954a66-e5ad-4a1c-9536-1d2117047f5f" providerId="ADAL" clId="{AC787D5D-10B8-4750-885F-805D7C9E9737}" dt="2021-08-20T14:46:06.034" v="304"/>
-        <pc:sldMkLst>
-          <pc:docMk/>
-          <pc:sldMk cId="316752284" sldId="299"/>
-        </pc:sldMkLst>
-        <pc:spChg chg="del">
-          <ac:chgData name="Di Mattia Alessandro Edoardo Giorgio David" userId="f8954a66-e5ad-4a1c-9536-1d2117047f5f" providerId="ADAL" clId="{AC787D5D-10B8-4750-885F-805D7C9E9737}" dt="2021-08-20T14:46:03.679" v="303" actId="700"/>
-          <ac:spMkLst>
-            <pc:docMk/>
-            <pc:sldMk cId="316752284" sldId="299"/>
-            <ac:spMk id="2" creationId="{D510B283-081F-43CE-96F6-08C288F3DFFB}"/>
-          </ac:spMkLst>
-        </pc:spChg>
-        <pc:spChg chg="del mod">
-          <ac:chgData name="Di Mattia Alessandro Edoardo Giorgio David" userId="f8954a66-e5ad-4a1c-9536-1d2117047f5f" providerId="ADAL" clId="{AC787D5D-10B8-4750-885F-805D7C9E9737}" dt="2021-08-20T14:46:03.679" v="303" actId="700"/>
-          <ac:spMkLst>
-            <pc:docMk/>
-            <pc:sldMk cId="316752284" sldId="299"/>
-            <ac:spMk id="3" creationId="{61373EFE-DB58-42AD-8DA9-E7D7FBC43DC0}"/>
-          </ac:spMkLst>
-        </pc:spChg>
-        <pc:picChg chg="add">
-          <ac:chgData name="Di Mattia Alessandro Edoardo Giorgio David" userId="f8954a66-e5ad-4a1c-9536-1d2117047f5f" providerId="ADAL" clId="{AC787D5D-10B8-4750-885F-805D7C9E9737}" dt="2021-08-20T14:46:06.034" v="304"/>
-          <ac:picMkLst>
-            <pc:docMk/>
-            <pc:sldMk cId="316752284" sldId="299"/>
-            <ac:picMk id="4" creationId="{34E6A750-E0B8-41C0-A1C7-288A84AD5D95}"/>
-          </ac:picMkLst>
-        </pc:picChg>
-      </pc:sldChg>
-      <pc:sldChg chg="addSp modSp new mod">
-        <pc:chgData name="Di Mattia Alessandro Edoardo Giorgio David" userId="f8954a66-e5ad-4a1c-9536-1d2117047f5f" providerId="ADAL" clId="{AC787D5D-10B8-4750-885F-805D7C9E9737}" dt="2021-08-20T14:51:41.672" v="307" actId="1076"/>
-        <pc:sldMkLst>
-          <pc:docMk/>
-          <pc:sldMk cId="3144966826" sldId="300"/>
-        </pc:sldMkLst>
-        <pc:picChg chg="add mod">
-          <ac:chgData name="Di Mattia Alessandro Edoardo Giorgio David" userId="f8954a66-e5ad-4a1c-9536-1d2117047f5f" providerId="ADAL" clId="{AC787D5D-10B8-4750-885F-805D7C9E9737}" dt="2021-08-20T14:51:41.672" v="307" actId="1076"/>
-          <ac:picMkLst>
-            <pc:docMk/>
-            <pc:sldMk cId="3144966826" sldId="300"/>
-            <ac:picMk id="2" creationId="{E613DE37-F2C5-40EB-9E94-3226883C95DB}"/>
-          </ac:picMkLst>
-        </pc:picChg>
-      </pc:sldChg>
-      <pc:sldChg chg="addSp modSp new mod modClrScheme chgLayout">
-        <pc:chgData name="Di Mattia Alessandro Edoardo Giorgio David" userId="f8954a66-e5ad-4a1c-9536-1d2117047f5f" providerId="ADAL" clId="{AC787D5D-10B8-4750-885F-805D7C9E9737}" dt="2021-08-20T15:09:51.424" v="406" actId="20577"/>
-        <pc:sldMkLst>
-          <pc:docMk/>
-          <pc:sldMk cId="941163814" sldId="301"/>
-        </pc:sldMkLst>
-        <pc:spChg chg="add mod">
-          <ac:chgData name="Di Mattia Alessandro Edoardo Giorgio David" userId="f8954a66-e5ad-4a1c-9536-1d2117047f5f" providerId="ADAL" clId="{AC787D5D-10B8-4750-885F-805D7C9E9737}" dt="2021-08-20T14:59:05.983" v="313" actId="122"/>
-          <ac:spMkLst>
-            <pc:docMk/>
-            <pc:sldMk cId="941163814" sldId="301"/>
-            <ac:spMk id="2" creationId="{03192228-75B4-4CBA-B91B-AFD69837867A}"/>
-          </ac:spMkLst>
-        </pc:spChg>
-        <pc:spChg chg="add mod">
-          <ac:chgData name="Di Mattia Alessandro Edoardo Giorgio David" userId="f8954a66-e5ad-4a1c-9536-1d2117047f5f" providerId="ADAL" clId="{AC787D5D-10B8-4750-885F-805D7C9E9737}" dt="2021-08-20T15:09:51.424" v="406" actId="20577"/>
-          <ac:spMkLst>
-            <pc:docMk/>
-            <pc:sldMk cId="941163814" sldId="301"/>
-            <ac:spMk id="3" creationId="{A954FACC-FED0-4D82-87FB-6B26DCE06EC6}"/>
-          </ac:spMkLst>
-        </pc:spChg>
-      </pc:sldChg>
-      <pc:sldChg chg="addSp delSp modSp new mod">
-        <pc:chgData name="Di Mattia Alessandro Edoardo Giorgio David" userId="f8954a66-e5ad-4a1c-9536-1d2117047f5f" providerId="ADAL" clId="{AC787D5D-10B8-4750-885F-805D7C9E9737}" dt="2021-08-20T15:00:15.602" v="322" actId="14100"/>
-        <pc:sldMkLst>
-          <pc:docMk/>
-          <pc:sldMk cId="1062955294" sldId="302"/>
-        </pc:sldMkLst>
-        <pc:spChg chg="mod">
-          <ac:chgData name="Di Mattia Alessandro Edoardo Giorgio David" userId="f8954a66-e5ad-4a1c-9536-1d2117047f5f" providerId="ADAL" clId="{AC787D5D-10B8-4750-885F-805D7C9E9737}" dt="2021-08-20T15:00:08.576" v="321" actId="122"/>
-          <ac:spMkLst>
-            <pc:docMk/>
-            <pc:sldMk cId="1062955294" sldId="302"/>
-            <ac:spMk id="2" creationId="{25EF509A-071D-411C-A0B0-D4208223146E}"/>
-          </ac:spMkLst>
-        </pc:spChg>
-        <pc:spChg chg="del">
-          <ac:chgData name="Di Mattia Alessandro Edoardo Giorgio David" userId="f8954a66-e5ad-4a1c-9536-1d2117047f5f" providerId="ADAL" clId="{AC787D5D-10B8-4750-885F-805D7C9E9737}" dt="2021-08-20T14:59:42.063" v="318"/>
-          <ac:spMkLst>
-            <pc:docMk/>
-            <pc:sldMk cId="1062955294" sldId="302"/>
-            <ac:spMk id="3" creationId="{BE19CB99-A33A-4A01-9905-9D0C3914D9D2}"/>
-          </ac:spMkLst>
-        </pc:spChg>
-        <pc:picChg chg="add mod">
-          <ac:chgData name="Di Mattia Alessandro Edoardo Giorgio David" userId="f8954a66-e5ad-4a1c-9536-1d2117047f5f" providerId="ADAL" clId="{AC787D5D-10B8-4750-885F-805D7C9E9737}" dt="2021-08-20T15:00:15.602" v="322" actId="14100"/>
-          <ac:picMkLst>
-            <pc:docMk/>
-            <pc:sldMk cId="1062955294" sldId="302"/>
-            <ac:picMk id="4" creationId="{5ED3C2D6-63C5-460B-A836-842FEB2B0177}"/>
-          </ac:picMkLst>
-        </pc:picChg>
-      </pc:sldChg>
-      <pc:sldChg chg="modSp new mod">
-        <pc:chgData name="Di Mattia Alessandro Edoardo Giorgio David" userId="f8954a66-e5ad-4a1c-9536-1d2117047f5f" providerId="ADAL" clId="{AC787D5D-10B8-4750-885F-805D7C9E9737}" dt="2021-08-20T15:09:36.335" v="398" actId="14"/>
-        <pc:sldMkLst>
-          <pc:docMk/>
-          <pc:sldMk cId="2044962240" sldId="303"/>
-        </pc:sldMkLst>
-        <pc:spChg chg="mod">
-          <ac:chgData name="Di Mattia Alessandro Edoardo Giorgio David" userId="f8954a66-e5ad-4a1c-9536-1d2117047f5f" providerId="ADAL" clId="{AC787D5D-10B8-4750-885F-805D7C9E9737}" dt="2021-08-20T15:00:32.711" v="325" actId="122"/>
-          <ac:spMkLst>
-            <pc:docMk/>
-            <pc:sldMk cId="2044962240" sldId="303"/>
-            <ac:spMk id="2" creationId="{29243411-1081-421F-B743-6D9D5E11545B}"/>
-          </ac:spMkLst>
-        </pc:spChg>
-        <pc:spChg chg="mod">
-          <ac:chgData name="Di Mattia Alessandro Edoardo Giorgio David" userId="f8954a66-e5ad-4a1c-9536-1d2117047f5f" providerId="ADAL" clId="{AC787D5D-10B8-4750-885F-805D7C9E9737}" dt="2021-08-20T15:09:36.335" v="398" actId="14"/>
-          <ac:spMkLst>
-            <pc:docMk/>
-            <pc:sldMk cId="2044962240" sldId="303"/>
-            <ac:spMk id="3" creationId="{2A3AA81C-414F-4D7B-9C0E-C805FF24F569}"/>
-          </ac:spMkLst>
-        </pc:spChg>
-      </pc:sldChg>
-      <pc:sldChg chg="addSp delSp modSp new mod">
-        <pc:chgData name="Di Mattia Alessandro Edoardo Giorgio David" userId="f8954a66-e5ad-4a1c-9536-1d2117047f5f" providerId="ADAL" clId="{AC787D5D-10B8-4750-885F-805D7C9E9737}" dt="2021-08-20T15:12:13.433" v="412"/>
-        <pc:sldMkLst>
-          <pc:docMk/>
-          <pc:sldMk cId="3567292898" sldId="304"/>
-        </pc:sldMkLst>
-        <pc:spChg chg="mod">
-          <ac:chgData name="Di Mattia Alessandro Edoardo Giorgio David" userId="f8954a66-e5ad-4a1c-9536-1d2117047f5f" providerId="ADAL" clId="{AC787D5D-10B8-4750-885F-805D7C9E9737}" dt="2021-08-20T15:10:13.213" v="409" actId="122"/>
-          <ac:spMkLst>
-            <pc:docMk/>
-            <pc:sldMk cId="3567292898" sldId="304"/>
-            <ac:spMk id="2" creationId="{B9A891B8-FCF3-4D10-8095-90B579A3DB40}"/>
-          </ac:spMkLst>
-        </pc:spChg>
-        <pc:spChg chg="add del">
-          <ac:chgData name="Di Mattia Alessandro Edoardo Giorgio David" userId="f8954a66-e5ad-4a1c-9536-1d2117047f5f" providerId="ADAL" clId="{AC787D5D-10B8-4750-885F-805D7C9E9737}" dt="2021-08-20T15:12:13.433" v="412"/>
-          <ac:spMkLst>
-            <pc:docMk/>
-            <pc:sldMk cId="3567292898" sldId="304"/>
-            <ac:spMk id="3" creationId="{DB645B7F-AD3D-4CAA-AD5D-BE21722A27B2}"/>
-          </ac:spMkLst>
-        </pc:spChg>
-        <pc:picChg chg="add del mod">
-          <ac:chgData name="Di Mattia Alessandro Edoardo Giorgio David" userId="f8954a66-e5ad-4a1c-9536-1d2117047f5f" providerId="ADAL" clId="{AC787D5D-10B8-4750-885F-805D7C9E9737}" dt="2021-08-20T15:11:48.619" v="411"/>
-          <ac:picMkLst>
-            <pc:docMk/>
-            <pc:sldMk cId="3567292898" sldId="304"/>
-            <ac:picMk id="4" creationId="{A0D49A57-9517-4AB9-A940-65FDCC83E125}"/>
-          </ac:picMkLst>
-        </pc:picChg>
-        <pc:picChg chg="add mod">
-          <ac:chgData name="Di Mattia Alessandro Edoardo Giorgio David" userId="f8954a66-e5ad-4a1c-9536-1d2117047f5f" providerId="ADAL" clId="{AC787D5D-10B8-4750-885F-805D7C9E9737}" dt="2021-08-20T15:12:13.433" v="412"/>
-          <ac:picMkLst>
-            <pc:docMk/>
-            <pc:sldMk cId="3567292898" sldId="304"/>
-            <ac:picMk id="5" creationId="{4596526A-0688-4381-B13F-22A6737478DA}"/>
-          </ac:picMkLst>
-        </pc:picChg>
-      </pc:sldChg>
-      <pc:sldChg chg="modSp new mod">
-        <pc:chgData name="Di Mattia Alessandro Edoardo Giorgio David" userId="f8954a66-e5ad-4a1c-9536-1d2117047f5f" providerId="ADAL" clId="{AC787D5D-10B8-4750-885F-805D7C9E9737}" dt="2021-08-20T15:21:02.985" v="455" actId="20577"/>
-        <pc:sldMkLst>
-          <pc:docMk/>
-          <pc:sldMk cId="2754829911" sldId="305"/>
-        </pc:sldMkLst>
-        <pc:spChg chg="mod">
-          <ac:chgData name="Di Mattia Alessandro Edoardo Giorgio David" userId="f8954a66-e5ad-4a1c-9536-1d2117047f5f" providerId="ADAL" clId="{AC787D5D-10B8-4750-885F-805D7C9E9737}" dt="2021-08-20T15:16:02.926" v="427" actId="122"/>
-          <ac:spMkLst>
-            <pc:docMk/>
-            <pc:sldMk cId="2754829911" sldId="305"/>
-            <ac:spMk id="2" creationId="{11C634F8-0591-458A-96D5-622BD02845C3}"/>
-          </ac:spMkLst>
-        </pc:spChg>
-        <pc:spChg chg="mod">
-          <ac:chgData name="Di Mattia Alessandro Edoardo Giorgio David" userId="f8954a66-e5ad-4a1c-9536-1d2117047f5f" providerId="ADAL" clId="{AC787D5D-10B8-4750-885F-805D7C9E9737}" dt="2021-08-20T15:21:02.985" v="455" actId="20577"/>
-          <ac:spMkLst>
-            <pc:docMk/>
-            <pc:sldMk cId="2754829911" sldId="305"/>
-            <ac:spMk id="3" creationId="{D47B4779-A817-46F6-AAA3-146DBB18D8B5}"/>
-          </ac:spMkLst>
-        </pc:spChg>
-      </pc:sldChg>
-    </pc:docChg>
-  </pc:docChgLst>
-  <pc:docChgLst>
-    <pc:chgData name="Di Mattia Alessandro Edoardo Giorgio David" userId="f8954a66-e5ad-4a1c-9536-1d2117047f5f" providerId="ADAL" clId="{44D5592E-0B8C-4B71-8BBC-22FE2CB53AF8}"/>
-    <pc:docChg chg="undo custSel addSld delSld modSld sldOrd modMainMaster">
-      <pc:chgData name="Di Mattia Alessandro Edoardo Giorgio David" userId="f8954a66-e5ad-4a1c-9536-1d2117047f5f" providerId="ADAL" clId="{44D5592E-0B8C-4B71-8BBC-22FE2CB53AF8}" dt="2021-11-15T10:33:17.228" v="4636" actId="207"/>
-      <pc:docMkLst>
-        <pc:docMk/>
-      </pc:docMkLst>
-      <pc:sldChg chg="addSp modSp mod modClrScheme chgLayout">
-        <pc:chgData name="Di Mattia Alessandro Edoardo Giorgio David" userId="f8954a66-e5ad-4a1c-9536-1d2117047f5f" providerId="ADAL" clId="{44D5592E-0B8C-4B71-8BBC-22FE2CB53AF8}" dt="2021-11-15T10:06:59.600" v="4313" actId="20577"/>
-        <pc:sldMkLst>
-          <pc:docMk/>
-          <pc:sldMk cId="355505243" sldId="281"/>
-        </pc:sldMkLst>
-        <pc:spChg chg="mod ord">
-          <ac:chgData name="Di Mattia Alessandro Edoardo Giorgio David" userId="f8954a66-e5ad-4a1c-9536-1d2117047f5f" providerId="ADAL" clId="{44D5592E-0B8C-4B71-8BBC-22FE2CB53AF8}" dt="2021-11-08T10:06:01.534" v="17" actId="700"/>
-          <ac:spMkLst>
-            <pc:docMk/>
-            <pc:sldMk cId="355505243" sldId="281"/>
-            <ac:spMk id="2" creationId="{94D62104-75FA-4CA6-90BD-2DC738BC3A46}"/>
-          </ac:spMkLst>
-        </pc:spChg>
-        <pc:spChg chg="mod ord">
-          <ac:chgData name="Di Mattia Alessandro Edoardo Giorgio David" userId="f8954a66-e5ad-4a1c-9536-1d2117047f5f" providerId="ADAL" clId="{44D5592E-0B8C-4B71-8BBC-22FE2CB53AF8}" dt="2021-11-15T10:06:59.600" v="4313" actId="20577"/>
-          <ac:spMkLst>
-            <pc:docMk/>
-            <pc:sldMk cId="355505243" sldId="281"/>
-            <ac:spMk id="3" creationId="{861A6D1C-7FFE-4596-8F8F-BB8902D42B11}"/>
-          </ac:spMkLst>
-        </pc:spChg>
-        <pc:spChg chg="add mod ord">
-          <ac:chgData name="Di Mattia Alessandro Edoardo Giorgio David" userId="f8954a66-e5ad-4a1c-9536-1d2117047f5f" providerId="ADAL" clId="{44D5592E-0B8C-4B71-8BBC-22FE2CB53AF8}" dt="2021-11-08T10:11:25.483" v="78" actId="790"/>
-          <ac:spMkLst>
-            <pc:docMk/>
-            <pc:sldMk cId="355505243" sldId="281"/>
-            <ac:spMk id="6" creationId="{D1A1F7DA-CB6E-425A-9BFA-C7955230F08F}"/>
-          </ac:spMkLst>
-        </pc:spChg>
-        <pc:graphicFrameChg chg="add mod modGraphic">
-          <ac:chgData name="Di Mattia Alessandro Edoardo Giorgio David" userId="f8954a66-e5ad-4a1c-9536-1d2117047f5f" providerId="ADAL" clId="{44D5592E-0B8C-4B71-8BBC-22FE2CB53AF8}" dt="2021-11-15T10:05:25.975" v="4222" actId="27180"/>
-          <ac:graphicFrameMkLst>
-            <pc:docMk/>
-            <pc:sldMk cId="355505243" sldId="281"/>
-            <ac:graphicFrameMk id="5" creationId="{5E973843-8AFD-4F82-A57D-C6AAB8CC9B63}"/>
-          </ac:graphicFrameMkLst>
-        </pc:graphicFrameChg>
-        <pc:graphicFrameChg chg="add mod modGraphic">
-          <ac:chgData name="Di Mattia Alessandro Edoardo Giorgio David" userId="f8954a66-e5ad-4a1c-9536-1d2117047f5f" providerId="ADAL" clId="{44D5592E-0B8C-4B71-8BBC-22FE2CB53AF8}" dt="2021-11-15T10:05:35.958" v="4223" actId="27180"/>
-          <ac:graphicFrameMkLst>
-            <pc:docMk/>
-            <pc:sldMk cId="355505243" sldId="281"/>
-            <ac:graphicFrameMk id="8" creationId="{A3312C27-74D9-4C69-8446-34FFD478E96E}"/>
-          </ac:graphicFrameMkLst>
-        </pc:graphicFrameChg>
-      </pc:sldChg>
-      <pc:sldChg chg="addSp delSp modSp new mod modClrScheme chgLayout">
-        <pc:chgData name="Di Mattia Alessandro Edoardo Giorgio David" userId="f8954a66-e5ad-4a1c-9536-1d2117047f5f" providerId="ADAL" clId="{44D5592E-0B8C-4B71-8BBC-22FE2CB53AF8}" dt="2021-11-15T10:07:17.674" v="4314" actId="14826"/>
-        <pc:sldMkLst>
-          <pc:docMk/>
-          <pc:sldMk cId="444844879" sldId="282"/>
-        </pc:sldMkLst>
-        <pc:spChg chg="del mod">
-          <ac:chgData name="Di Mattia Alessandro Edoardo Giorgio David" userId="f8954a66-e5ad-4a1c-9536-1d2117047f5f" providerId="ADAL" clId="{44D5592E-0B8C-4B71-8BBC-22FE2CB53AF8}" dt="2021-11-08T10:04:34.881" v="9" actId="700"/>
-          <ac:spMkLst>
-            <pc:docMk/>
-            <pc:sldMk cId="444844879" sldId="282"/>
-            <ac:spMk id="2" creationId="{DC6B7206-9E43-4DA6-AA4C-2C7067140996}"/>
-          </ac:spMkLst>
-        </pc:spChg>
-        <pc:spChg chg="del">
-          <ac:chgData name="Di Mattia Alessandro Edoardo Giorgio David" userId="f8954a66-e5ad-4a1c-9536-1d2117047f5f" providerId="ADAL" clId="{44D5592E-0B8C-4B71-8BBC-22FE2CB53AF8}" dt="2021-11-08T10:04:20.016" v="1" actId="931"/>
-          <ac:spMkLst>
-            <pc:docMk/>
-            <pc:sldMk cId="444844879" sldId="282"/>
-            <ac:spMk id="3" creationId="{2C2B7FA5-517C-4F02-B713-654205497CAB}"/>
-          </ac:spMkLst>
-        </pc:spChg>
-        <pc:picChg chg="add mod ord">
-          <ac:chgData name="Di Mattia Alessandro Edoardo Giorgio David" userId="f8954a66-e5ad-4a1c-9536-1d2117047f5f" providerId="ADAL" clId="{44D5592E-0B8C-4B71-8BBC-22FE2CB53AF8}" dt="2021-11-15T10:07:17.674" v="4314" actId="14826"/>
-          <ac:picMkLst>
-            <pc:docMk/>
-            <pc:sldMk cId="444844879" sldId="282"/>
-            <ac:picMk id="5" creationId="{8856FC2A-23A8-42CA-AD83-E2BAA2A8306D}"/>
-          </ac:picMkLst>
-        </pc:picChg>
-      </pc:sldChg>
-      <pc:sldChg chg="addSp delSp modSp new mod">
-        <pc:chgData name="Di Mattia Alessandro Edoardo Giorgio David" userId="f8954a66-e5ad-4a1c-9536-1d2117047f5f" providerId="ADAL" clId="{44D5592E-0B8C-4B71-8BBC-22FE2CB53AF8}" dt="2021-11-08T10:10:34.608" v="66" actId="12788"/>
-        <pc:sldMkLst>
-          <pc:docMk/>
-          <pc:sldMk cId="1235559135" sldId="283"/>
-        </pc:sldMkLst>
-        <pc:picChg chg="add del mod">
-          <ac:chgData name="Di Mattia Alessandro Edoardo Giorgio David" userId="f8954a66-e5ad-4a1c-9536-1d2117047f5f" providerId="ADAL" clId="{44D5592E-0B8C-4B71-8BBC-22FE2CB53AF8}" dt="2021-11-08T10:10:04.844" v="57" actId="478"/>
-          <ac:picMkLst>
-            <pc:docMk/>
-            <pc:sldMk cId="1235559135" sldId="283"/>
-            <ac:picMk id="3" creationId="{1B77EFA9-BA9B-4B27-B225-FCC603383C0F}"/>
-          </ac:picMkLst>
-        </pc:picChg>
-        <pc:picChg chg="add mod">
-          <ac:chgData name="Di Mattia Alessandro Edoardo Giorgio David" userId="f8954a66-e5ad-4a1c-9536-1d2117047f5f" providerId="ADAL" clId="{44D5592E-0B8C-4B71-8BBC-22FE2CB53AF8}" dt="2021-11-08T10:10:34.608" v="66" actId="12788"/>
-          <ac:picMkLst>
-            <pc:docMk/>
-            <pc:sldMk cId="1235559135" sldId="283"/>
-            <ac:picMk id="5" creationId="{AB5F727D-7343-42E4-9F15-15C0F0C1868F}"/>
-          </ac:picMkLst>
-        </pc:picChg>
-      </pc:sldChg>
-      <pc:sldChg chg="new del">
-        <pc:chgData name="Di Mattia Alessandro Edoardo Giorgio David" userId="f8954a66-e5ad-4a1c-9536-1d2117047f5f" providerId="ADAL" clId="{44D5592E-0B8C-4B71-8BBC-22FE2CB53AF8}" dt="2021-11-08T10:33:32.629" v="745" actId="2696"/>
-        <pc:sldMkLst>
-          <pc:docMk/>
-          <pc:sldMk cId="1068755811" sldId="284"/>
-        </pc:sldMkLst>
-      </pc:sldChg>
-      <pc:sldChg chg="addSp modSp new mod">
-        <pc:chgData name="Di Mattia Alessandro Edoardo Giorgio David" userId="f8954a66-e5ad-4a1c-9536-1d2117047f5f" providerId="ADAL" clId="{44D5592E-0B8C-4B71-8BBC-22FE2CB53AF8}" dt="2021-11-15T10:08:02.583" v="4316" actId="20577"/>
-        <pc:sldMkLst>
-          <pc:docMk/>
-          <pc:sldMk cId="920270259" sldId="285"/>
-        </pc:sldMkLst>
-        <pc:spChg chg="mod">
-          <ac:chgData name="Di Mattia Alessandro Edoardo Giorgio David" userId="f8954a66-e5ad-4a1c-9536-1d2117047f5f" providerId="ADAL" clId="{44D5592E-0B8C-4B71-8BBC-22FE2CB53AF8}" dt="2021-11-08T10:11:59.676" v="99" actId="122"/>
-          <ac:spMkLst>
-            <pc:docMk/>
-            <pc:sldMk cId="920270259" sldId="285"/>
-            <ac:spMk id="2" creationId="{47607DCF-5ECF-4798-8053-1C214A9F0386}"/>
-          </ac:spMkLst>
-        </pc:spChg>
-        <pc:spChg chg="mod">
-          <ac:chgData name="Di Mattia Alessandro Edoardo Giorgio David" userId="f8954a66-e5ad-4a1c-9536-1d2117047f5f" providerId="ADAL" clId="{44D5592E-0B8C-4B71-8BBC-22FE2CB53AF8}" dt="2021-11-15T10:08:02.583" v="4316" actId="20577"/>
-          <ac:spMkLst>
-            <pc:docMk/>
-            <pc:sldMk cId="920270259" sldId="285"/>
-            <ac:spMk id="3" creationId="{D661E272-C04A-4331-8457-C539650E8C13}"/>
-          </ac:spMkLst>
-        </pc:spChg>
-        <pc:graphicFrameChg chg="add mod modGraphic">
-          <ac:chgData name="Di Mattia Alessandro Edoardo Giorgio David" userId="f8954a66-e5ad-4a1c-9536-1d2117047f5f" providerId="ADAL" clId="{44D5592E-0B8C-4B71-8BBC-22FE2CB53AF8}" dt="2021-11-08T10:22:35.789" v="488" actId="1076"/>
-          <ac:graphicFrameMkLst>
-            <pc:docMk/>
-            <pc:sldMk cId="920270259" sldId="285"/>
-            <ac:graphicFrameMk id="5" creationId="{69313AC3-D865-418B-8B14-1EEED4B321E8}"/>
-          </ac:graphicFrameMkLst>
-        </pc:graphicFrameChg>
-        <pc:graphicFrameChg chg="add mod modGraphic">
-          <ac:chgData name="Di Mattia Alessandro Edoardo Giorgio David" userId="f8954a66-e5ad-4a1c-9536-1d2117047f5f" providerId="ADAL" clId="{44D5592E-0B8C-4B71-8BBC-22FE2CB53AF8}" dt="2021-11-08T10:47:47.707" v="1236" actId="1076"/>
-          <ac:graphicFrameMkLst>
-            <pc:docMk/>
-            <pc:sldMk cId="920270259" sldId="285"/>
-            <ac:graphicFrameMk id="7" creationId="{0EC01E11-498F-4387-AEEC-5BE2564DE53E}"/>
-          </ac:graphicFrameMkLst>
-        </pc:graphicFrameChg>
-      </pc:sldChg>
-      <pc:sldChg chg="addSp delSp modSp new mod modClrScheme chgLayout">
-        <pc:chgData name="Di Mattia Alessandro Edoardo Giorgio David" userId="f8954a66-e5ad-4a1c-9536-1d2117047f5f" providerId="ADAL" clId="{44D5592E-0B8C-4B71-8BBC-22FE2CB53AF8}" dt="2021-11-08T10:28:53.188" v="744" actId="1076"/>
-        <pc:sldMkLst>
-          <pc:docMk/>
-          <pc:sldMk cId="4039083811" sldId="286"/>
-        </pc:sldMkLst>
-        <pc:spChg chg="del">
-          <ac:chgData name="Di Mattia Alessandro Edoardo Giorgio David" userId="f8954a66-e5ad-4a1c-9536-1d2117047f5f" providerId="ADAL" clId="{44D5592E-0B8C-4B71-8BBC-22FE2CB53AF8}" dt="2021-11-08T10:20:41.553" v="431" actId="700"/>
-          <ac:spMkLst>
-            <pc:docMk/>
-            <pc:sldMk cId="4039083811" sldId="286"/>
-            <ac:spMk id="2" creationId="{235EC626-57A4-4822-B622-88932DEE48D0}"/>
-          </ac:spMkLst>
-        </pc:spChg>
-        <pc:spChg chg="del">
-          <ac:chgData name="Di Mattia Alessandro Edoardo Giorgio David" userId="f8954a66-e5ad-4a1c-9536-1d2117047f5f" providerId="ADAL" clId="{44D5592E-0B8C-4B71-8BBC-22FE2CB53AF8}" dt="2021-11-08T10:20:41.553" v="431" actId="700"/>
-          <ac:spMkLst>
-            <pc:docMk/>
-            <pc:sldMk cId="4039083811" sldId="286"/>
-            <ac:spMk id="3" creationId="{D6E7B874-D7CD-4ED9-8A60-25240D0DDF5A}"/>
-          </ac:spMkLst>
-        </pc:spChg>
-        <pc:spChg chg="add del mod ord">
-          <ac:chgData name="Di Mattia Alessandro Edoardo Giorgio David" userId="f8954a66-e5ad-4a1c-9536-1d2117047f5f" providerId="ADAL" clId="{44D5592E-0B8C-4B71-8BBC-22FE2CB53AF8}" dt="2021-11-08T10:21:02.792" v="438" actId="700"/>
-          <ac:spMkLst>
-            <pc:docMk/>
-            <pc:sldMk cId="4039083811" sldId="286"/>
-            <ac:spMk id="6" creationId="{2D005282-208E-49FE-8A19-141A62389F1E}"/>
-          </ac:spMkLst>
-        </pc:spChg>
-        <pc:spChg chg="add del mod ord">
-          <ac:chgData name="Di Mattia Alessandro Edoardo Giorgio David" userId="f8954a66-e5ad-4a1c-9536-1d2117047f5f" providerId="ADAL" clId="{44D5592E-0B8C-4B71-8BBC-22FE2CB53AF8}" dt="2021-11-08T10:21:02.792" v="438" actId="700"/>
-          <ac:spMkLst>
-            <pc:docMk/>
-            <pc:sldMk cId="4039083811" sldId="286"/>
-            <ac:spMk id="7" creationId="{7A9BAC65-A10A-4495-95F3-B7EBBAF58C77}"/>
-          </ac:spMkLst>
-        </pc:spChg>
-        <pc:spChg chg="add mod">
-          <ac:chgData name="Di Mattia Alessandro Edoardo Giorgio David" userId="f8954a66-e5ad-4a1c-9536-1d2117047f5f" providerId="ADAL" clId="{44D5592E-0B8C-4B71-8BBC-22FE2CB53AF8}" dt="2021-11-08T10:22:08.424" v="481" actId="122"/>
-          <ac:spMkLst>
-            <pc:docMk/>
-            <pc:sldMk cId="4039083811" sldId="286"/>
-            <ac:spMk id="8" creationId="{30F08E57-6C8A-447B-8848-92A02C2B7BD8}"/>
-          </ac:spMkLst>
-        </pc:spChg>
-        <pc:spChg chg="add del mod">
-          <ac:chgData name="Di Mattia Alessandro Edoardo Giorgio David" userId="f8954a66-e5ad-4a1c-9536-1d2117047f5f" providerId="ADAL" clId="{44D5592E-0B8C-4B71-8BBC-22FE2CB53AF8}" dt="2021-11-08T10:21:09.770" v="442" actId="931"/>
-          <ac:spMkLst>
-            <pc:docMk/>
-            <pc:sldMk cId="4039083811" sldId="286"/>
-            <ac:spMk id="9" creationId="{D64A2C7E-3FFE-4028-8EA5-F81889BB3301}"/>
-          </ac:spMkLst>
-        </pc:spChg>
-        <pc:graphicFrameChg chg="add mod modGraphic">
-          <ac:chgData name="Di Mattia Alessandro Edoardo Giorgio David" userId="f8954a66-e5ad-4a1c-9536-1d2117047f5f" providerId="ADAL" clId="{44D5592E-0B8C-4B71-8BBC-22FE2CB53AF8}" dt="2021-11-08T10:28:53.188" v="744" actId="1076"/>
-          <ac:graphicFrameMkLst>
-            <pc:docMk/>
-            <pc:sldMk cId="4039083811" sldId="286"/>
-            <ac:graphicFrameMk id="13" creationId="{3C17D049-B080-4F91-9948-94F272E7B424}"/>
-          </ac:graphicFrameMkLst>
-        </pc:graphicFrameChg>
-        <pc:picChg chg="add del mod">
-          <ac:chgData name="Di Mattia Alessandro Edoardo Giorgio David" userId="f8954a66-e5ad-4a1c-9536-1d2117047f5f" providerId="ADAL" clId="{44D5592E-0B8C-4B71-8BBC-22FE2CB53AF8}" dt="2021-11-08T10:21:03.190" v="440" actId="931"/>
-          <ac:picMkLst>
-            <pc:docMk/>
-            <pc:sldMk cId="4039083811" sldId="286"/>
-            <ac:picMk id="5" creationId="{FDF9F9AB-4CE8-4603-A2F9-62FAB52A0AE6}"/>
-          </ac:picMkLst>
-        </pc:picChg>
-        <pc:picChg chg="add mod">
-          <ac:chgData name="Di Mattia Alessandro Edoardo Giorgio David" userId="f8954a66-e5ad-4a1c-9536-1d2117047f5f" providerId="ADAL" clId="{44D5592E-0B8C-4B71-8BBC-22FE2CB53AF8}" dt="2021-11-08T10:21:09.770" v="442" actId="931"/>
-          <ac:picMkLst>
-            <pc:docMk/>
-            <pc:sldMk cId="4039083811" sldId="286"/>
-            <ac:picMk id="11" creationId="{F44B281E-64C7-4CFA-887B-3AAA42E9F66B}"/>
-          </ac:picMkLst>
-        </pc:picChg>
-      </pc:sldChg>
-      <pc:sldChg chg="modSp new mod modClrScheme chgLayout">
-        <pc:chgData name="Di Mattia Alessandro Edoardo Giorgio David" userId="f8954a66-e5ad-4a1c-9536-1d2117047f5f" providerId="ADAL" clId="{44D5592E-0B8C-4B71-8BBC-22FE2CB53AF8}" dt="2021-11-08T10:35:53.679" v="923" actId="20577"/>
-        <pc:sldMkLst>
-          <pc:docMk/>
-          <pc:sldMk cId="2310254051" sldId="287"/>
-        </pc:sldMkLst>
-        <pc:spChg chg="mod ord">
-          <ac:chgData name="Di Mattia Alessandro Edoardo Giorgio David" userId="f8954a66-e5ad-4a1c-9536-1d2117047f5f" providerId="ADAL" clId="{44D5592E-0B8C-4B71-8BBC-22FE2CB53AF8}" dt="2021-11-08T10:28:38.727" v="743" actId="700"/>
-          <ac:spMkLst>
-            <pc:docMk/>
-            <pc:sldMk cId="2310254051" sldId="287"/>
-            <ac:spMk id="2" creationId="{B21B660B-1E0B-4D01-87CB-4B7D98486F54}"/>
-          </ac:spMkLst>
-        </pc:spChg>
-        <pc:spChg chg="mod ord">
-          <ac:chgData name="Di Mattia Alessandro Edoardo Giorgio David" userId="f8954a66-e5ad-4a1c-9536-1d2117047f5f" providerId="ADAL" clId="{44D5592E-0B8C-4B71-8BBC-22FE2CB53AF8}" dt="2021-11-08T10:35:53.679" v="923" actId="20577"/>
-          <ac:spMkLst>
-            <pc:docMk/>
-            <pc:sldMk cId="2310254051" sldId="287"/>
-            <ac:spMk id="3" creationId="{6285D6BC-086B-479F-9F72-15CA362D665B}"/>
-          </ac:spMkLst>
-        </pc:spChg>
-      </pc:sldChg>
-      <pc:sldChg chg="addSp delSp modSp new mod modClrScheme chgLayout">
-        <pc:chgData name="Di Mattia Alessandro Edoardo Giorgio David" userId="f8954a66-e5ad-4a1c-9536-1d2117047f5f" providerId="ADAL" clId="{44D5592E-0B8C-4B71-8BBC-22FE2CB53AF8}" dt="2021-11-15T10:11:54.545" v="4440" actId="20577"/>
-        <pc:sldMkLst>
-          <pc:docMk/>
-          <pc:sldMk cId="2985729184" sldId="288"/>
-        </pc:sldMkLst>
-        <pc:spChg chg="del mod ord">
-          <ac:chgData name="Di Mattia Alessandro Edoardo Giorgio David" userId="f8954a66-e5ad-4a1c-9536-1d2117047f5f" providerId="ADAL" clId="{44D5592E-0B8C-4B71-8BBC-22FE2CB53AF8}" dt="2021-11-08T10:40:34.747" v="952" actId="700"/>
-          <ac:spMkLst>
-            <pc:docMk/>
-            <pc:sldMk cId="2985729184" sldId="288"/>
-            <ac:spMk id="2" creationId="{2A593378-7812-4D2E-BDD1-A12CA0E73855}"/>
-          </ac:spMkLst>
-        </pc:spChg>
-        <pc:spChg chg="del">
-          <ac:chgData name="Di Mattia Alessandro Edoardo Giorgio David" userId="f8954a66-e5ad-4a1c-9536-1d2117047f5f" providerId="ADAL" clId="{44D5592E-0B8C-4B71-8BBC-22FE2CB53AF8}" dt="2021-11-08T10:40:14.256" v="951"/>
-          <ac:spMkLst>
-            <pc:docMk/>
-            <pc:sldMk cId="2985729184" sldId="288"/>
-            <ac:spMk id="3" creationId="{F8751E3E-50A6-41D9-8D83-48CF073C37ED}"/>
-          </ac:spMkLst>
-        </pc:spChg>
-        <pc:spChg chg="add del mod ord">
-          <ac:chgData name="Di Mattia Alessandro Edoardo Giorgio David" userId="f8954a66-e5ad-4a1c-9536-1d2117047f5f" providerId="ADAL" clId="{44D5592E-0B8C-4B71-8BBC-22FE2CB53AF8}" dt="2021-11-08T10:40:41.255" v="953" actId="700"/>
-          <ac:spMkLst>
-            <pc:docMk/>
-            <pc:sldMk cId="2985729184" sldId="288"/>
-            <ac:spMk id="5" creationId="{6DC2EECD-197A-4C1B-9151-A2E242250B59}"/>
-          </ac:spMkLst>
-        </pc:spChg>
-        <pc:spChg chg="add del mod ord">
-          <ac:chgData name="Di Mattia Alessandro Edoardo Giorgio David" userId="f8954a66-e5ad-4a1c-9536-1d2117047f5f" providerId="ADAL" clId="{44D5592E-0B8C-4B71-8BBC-22FE2CB53AF8}" dt="2021-11-08T10:40:41.255" v="953" actId="700"/>
-          <ac:spMkLst>
-            <pc:docMk/>
-            <pc:sldMk cId="2985729184" sldId="288"/>
-            <ac:spMk id="6" creationId="{78C5B188-3B37-4812-B91B-D038AD09AE7C}"/>
-          </ac:spMkLst>
-        </pc:spChg>
-        <pc:spChg chg="add mod ord">
-          <ac:chgData name="Di Mattia Alessandro Edoardo Giorgio David" userId="f8954a66-e5ad-4a1c-9536-1d2117047f5f" providerId="ADAL" clId="{44D5592E-0B8C-4B71-8BBC-22FE2CB53AF8}" dt="2021-11-08T10:40:57.995" v="978" actId="790"/>
-          <ac:spMkLst>
-            <pc:docMk/>
-            <pc:sldMk cId="2985729184" sldId="288"/>
-            <ac:spMk id="7" creationId="{9C9DAA16-8412-4B11-9A6E-756F522F23AF}"/>
-          </ac:spMkLst>
-        </pc:spChg>
-        <pc:spChg chg="add mod ord">
-          <ac:chgData name="Di Mattia Alessandro Edoardo Giorgio David" userId="f8954a66-e5ad-4a1c-9536-1d2117047f5f" providerId="ADAL" clId="{44D5592E-0B8C-4B71-8BBC-22FE2CB53AF8}" dt="2021-11-15T10:11:54.545" v="4440" actId="20577"/>
-          <ac:spMkLst>
-            <pc:docMk/>
-            <pc:sldMk cId="2985729184" sldId="288"/>
-            <ac:spMk id="8" creationId="{83793555-E5F1-4C21-8F5F-E5CBB0F327A5}"/>
-          </ac:spMkLst>
-        </pc:spChg>
-        <pc:picChg chg="add mod ord">
-          <ac:chgData name="Di Mattia Alessandro Edoardo Giorgio David" userId="f8954a66-e5ad-4a1c-9536-1d2117047f5f" providerId="ADAL" clId="{44D5592E-0B8C-4B71-8BBC-22FE2CB53AF8}" dt="2021-11-08T10:41:04.186" v="979" actId="1076"/>
-          <ac:picMkLst>
-            <pc:docMk/>
-            <pc:sldMk cId="2985729184" sldId="288"/>
-            <ac:picMk id="4" creationId="{F5A99F33-5B05-4B85-BCEA-2D9504B4A961}"/>
-          </ac:picMkLst>
-        </pc:picChg>
-      </pc:sldChg>
-      <pc:sldChg chg="addSp delSp modSp new mod modClrScheme chgLayout">
-        <pc:chgData name="Di Mattia Alessandro Edoardo Giorgio David" userId="f8954a66-e5ad-4a1c-9536-1d2117047f5f" providerId="ADAL" clId="{44D5592E-0B8C-4B71-8BBC-22FE2CB53AF8}" dt="2021-11-15T10:12:26.913" v="4446" actId="20577"/>
-        <pc:sldMkLst>
-          <pc:docMk/>
-          <pc:sldMk cId="2513854311" sldId="289"/>
-        </pc:sldMkLst>
-        <pc:spChg chg="del mod ord">
-          <ac:chgData name="Di Mattia Alessandro Edoardo Giorgio David" userId="f8954a66-e5ad-4a1c-9536-1d2117047f5f" providerId="ADAL" clId="{44D5592E-0B8C-4B71-8BBC-22FE2CB53AF8}" dt="2021-11-08T10:54:44.973" v="1625" actId="700"/>
-          <ac:spMkLst>
-            <pc:docMk/>
-            <pc:sldMk cId="2513854311" sldId="289"/>
-            <ac:spMk id="2" creationId="{501E4F37-6592-4D6B-9B5A-25A81F6928FC}"/>
-          </ac:spMkLst>
-        </pc:spChg>
-        <pc:spChg chg="del mod ord">
-          <ac:chgData name="Di Mattia Alessandro Edoardo Giorgio David" userId="f8954a66-e5ad-4a1c-9536-1d2117047f5f" providerId="ADAL" clId="{44D5592E-0B8C-4B71-8BBC-22FE2CB53AF8}" dt="2021-11-08T10:54:44.973" v="1625" actId="700"/>
-          <ac:spMkLst>
-            <pc:docMk/>
-            <pc:sldMk cId="2513854311" sldId="289"/>
-            <ac:spMk id="3" creationId="{42927192-2C47-4664-8EF5-86A0F81543C6}"/>
-          </ac:spMkLst>
-        </pc:spChg>
-        <pc:spChg chg="del">
-          <ac:chgData name="Di Mattia Alessandro Edoardo Giorgio David" userId="f8954a66-e5ad-4a1c-9536-1d2117047f5f" providerId="ADAL" clId="{44D5592E-0B8C-4B71-8BBC-22FE2CB53AF8}" dt="2021-11-08T10:54:44.973" v="1625" actId="700"/>
-          <ac:spMkLst>
-            <pc:docMk/>
-            <pc:sldMk cId="2513854311" sldId="289"/>
-            <ac:spMk id="4" creationId="{0EBEA154-A114-4F9D-896D-FD26644BB26F}"/>
-          </ac:spMkLst>
-        </pc:spChg>
-        <pc:spChg chg="add mod ord">
-          <ac:chgData name="Di Mattia Alessandro Edoardo Giorgio David" userId="f8954a66-e5ad-4a1c-9536-1d2117047f5f" providerId="ADAL" clId="{44D5592E-0B8C-4B71-8BBC-22FE2CB53AF8}" dt="2021-11-08T10:57:04.470" v="1749" actId="20577"/>
-          <ac:spMkLst>
-            <pc:docMk/>
-            <pc:sldMk cId="2513854311" sldId="289"/>
-            <ac:spMk id="5" creationId="{846176CF-B5A6-4CAE-8CA9-A1AD6D78A99F}"/>
-          </ac:spMkLst>
-        </pc:spChg>
-        <pc:spChg chg="add mod ord">
-          <ac:chgData name="Di Mattia Alessandro Edoardo Giorgio David" userId="f8954a66-e5ad-4a1c-9536-1d2117047f5f" providerId="ADAL" clId="{44D5592E-0B8C-4B71-8BBC-22FE2CB53AF8}" dt="2021-11-15T10:12:26.913" v="4446" actId="20577"/>
-          <ac:spMkLst>
-            <pc:docMk/>
-            <pc:sldMk cId="2513854311" sldId="289"/>
-            <ac:spMk id="6" creationId="{EF84CF5D-A2C2-4BFE-8484-66DBEBBD2B3A}"/>
-          </ac:spMkLst>
-        </pc:spChg>
-      </pc:sldChg>
-      <pc:sldChg chg="modSp new mod">
-        <pc:chgData name="Di Mattia Alessandro Edoardo Giorgio David" userId="f8954a66-e5ad-4a1c-9536-1d2117047f5f" providerId="ADAL" clId="{44D5592E-0B8C-4B71-8BBC-22FE2CB53AF8}" dt="2021-11-15T10:33:17.228" v="4636" actId="207"/>
-        <pc:sldMkLst>
-          <pc:docMk/>
-          <pc:sldMk cId="443818849" sldId="290"/>
-        </pc:sldMkLst>
-        <pc:spChg chg="mod">
-          <ac:chgData name="Di Mattia Alessandro Edoardo Giorgio David" userId="f8954a66-e5ad-4a1c-9536-1d2117047f5f" providerId="ADAL" clId="{44D5592E-0B8C-4B71-8BBC-22FE2CB53AF8}" dt="2021-11-08T10:55:07.671" v="1670" actId="122"/>
-          <ac:spMkLst>
-            <pc:docMk/>
-            <pc:sldMk cId="443818849" sldId="290"/>
-            <ac:spMk id="2" creationId="{E2AE4C11-9E77-4E42-B948-994E09BDC9C6}"/>
-          </ac:spMkLst>
-        </pc:spChg>
-        <pc:spChg chg="mod">
-          <ac:chgData name="Di Mattia Alessandro Edoardo Giorgio David" userId="f8954a66-e5ad-4a1c-9536-1d2117047f5f" providerId="ADAL" clId="{44D5592E-0B8C-4B71-8BBC-22FE2CB53AF8}" dt="2021-11-15T10:33:17.228" v="4636" actId="207"/>
-          <ac:spMkLst>
-            <pc:docMk/>
-            <pc:sldMk cId="443818849" sldId="290"/>
-            <ac:spMk id="3" creationId="{4D078D51-D572-4CA1-96D6-5B20ECD70331}"/>
-          </ac:spMkLst>
-        </pc:spChg>
-      </pc:sldChg>
-      <pc:sldChg chg="addSp modSp new mod modClrScheme chgLayout">
-        <pc:chgData name="Di Mattia Alessandro Edoardo Giorgio David" userId="f8954a66-e5ad-4a1c-9536-1d2117047f5f" providerId="ADAL" clId="{44D5592E-0B8C-4B71-8BBC-22FE2CB53AF8}" dt="2021-11-15T10:27:11.838" v="4625" actId="20577"/>
-        <pc:sldMkLst>
-          <pc:docMk/>
-          <pc:sldMk cId="1543532996" sldId="291"/>
-        </pc:sldMkLst>
-        <pc:spChg chg="add mod">
-          <ac:chgData name="Di Mattia Alessandro Edoardo Giorgio David" userId="f8954a66-e5ad-4a1c-9536-1d2117047f5f" providerId="ADAL" clId="{44D5592E-0B8C-4B71-8BBC-22FE2CB53AF8}" dt="2021-11-08T13:24:37.719" v="2039" actId="122"/>
-          <ac:spMkLst>
-            <pc:docMk/>
-            <pc:sldMk cId="1543532996" sldId="291"/>
-            <ac:spMk id="2" creationId="{CC21FEAC-8D56-4DC7-8493-6BB253A7FD19}"/>
-          </ac:spMkLst>
-        </pc:spChg>
-        <pc:spChg chg="add mod">
-          <ac:chgData name="Di Mattia Alessandro Edoardo Giorgio David" userId="f8954a66-e5ad-4a1c-9536-1d2117047f5f" providerId="ADAL" clId="{44D5592E-0B8C-4B71-8BBC-22FE2CB53AF8}" dt="2021-11-15T10:27:11.838" v="4625" actId="20577"/>
-          <ac:spMkLst>
-            <pc:docMk/>
-            <pc:sldMk cId="1543532996" sldId="291"/>
-            <ac:spMk id="3" creationId="{7480CFB9-0C18-4717-BD62-42DFEF2F14F9}"/>
-          </ac:spMkLst>
-        </pc:spChg>
-        <pc:graphicFrameChg chg="add mod modGraphic">
-          <ac:chgData name="Di Mattia Alessandro Edoardo Giorgio David" userId="f8954a66-e5ad-4a1c-9536-1d2117047f5f" providerId="ADAL" clId="{44D5592E-0B8C-4B71-8BBC-22FE2CB53AF8}" dt="2021-11-15T10:26:46.933" v="4623" actId="1076"/>
-          <ac:graphicFrameMkLst>
-            <pc:docMk/>
-            <pc:sldMk cId="1543532996" sldId="291"/>
-            <ac:graphicFrameMk id="5" creationId="{7A106121-6E48-4CDF-A06D-0BB49F2BA4EC}"/>
-          </ac:graphicFrameMkLst>
-        </pc:graphicFrameChg>
-      </pc:sldChg>
-      <pc:sldChg chg="addSp delSp modSp new mod modClrScheme chgLayout">
-        <pc:chgData name="Di Mattia Alessandro Edoardo Giorgio David" userId="f8954a66-e5ad-4a1c-9536-1d2117047f5f" providerId="ADAL" clId="{44D5592E-0B8C-4B71-8BBC-22FE2CB53AF8}" dt="2021-11-08T15:04:38.285" v="4207" actId="1076"/>
-        <pc:sldMkLst>
-          <pc:docMk/>
-          <pc:sldMk cId="1825306434" sldId="292"/>
-        </pc:sldMkLst>
-        <pc:spChg chg="mod ord">
-          <ac:chgData name="Di Mattia Alessandro Edoardo Giorgio David" userId="f8954a66-e5ad-4a1c-9536-1d2117047f5f" providerId="ADAL" clId="{44D5592E-0B8C-4B71-8BBC-22FE2CB53AF8}" dt="2021-11-08T15:04:04.614" v="4201" actId="700"/>
-          <ac:spMkLst>
-            <pc:docMk/>
-            <pc:sldMk cId="1825306434" sldId="292"/>
-            <ac:spMk id="2" creationId="{19B8F9D7-1BD1-4AAB-82A3-7592C0F53AFD}"/>
-          </ac:spMkLst>
-        </pc:spChg>
-        <pc:spChg chg="del mod ord">
-          <ac:chgData name="Di Mattia Alessandro Edoardo Giorgio David" userId="f8954a66-e5ad-4a1c-9536-1d2117047f5f" providerId="ADAL" clId="{44D5592E-0B8C-4B71-8BBC-22FE2CB53AF8}" dt="2021-11-08T15:03:58.969" v="4200" actId="700"/>
-          <ac:spMkLst>
-            <pc:docMk/>
-            <pc:sldMk cId="1825306434" sldId="292"/>
-            <ac:spMk id="3" creationId="{2F4D8887-9EBA-4ADD-9376-C03A54183CE1}"/>
-          </ac:spMkLst>
-        </pc:spChg>
-        <pc:spChg chg="add del mod ord">
-          <ac:chgData name="Di Mattia Alessandro Edoardo Giorgio David" userId="f8954a66-e5ad-4a1c-9536-1d2117047f5f" providerId="ADAL" clId="{44D5592E-0B8C-4B71-8BBC-22FE2CB53AF8}" dt="2021-11-08T15:03:33.910" v="4189" actId="700"/>
-          <ac:spMkLst>
-            <pc:docMk/>
-            <pc:sldMk cId="1825306434" sldId="292"/>
-            <ac:spMk id="6" creationId="{573E944F-669E-4A60-8A53-C0146ABD43B9}"/>
-          </ac:spMkLst>
-        </pc:spChg>
-        <pc:spChg chg="add del mod ord">
-          <ac:chgData name="Di Mattia Alessandro Edoardo Giorgio David" userId="f8954a66-e5ad-4a1c-9536-1d2117047f5f" providerId="ADAL" clId="{44D5592E-0B8C-4B71-8BBC-22FE2CB53AF8}" dt="2021-11-08T15:04:04.614" v="4201" actId="700"/>
-          <ac:spMkLst>
-            <pc:docMk/>
-            <pc:sldMk cId="1825306434" sldId="292"/>
-            <ac:spMk id="7" creationId="{CB6E3C0E-EAFB-4B11-BA99-978313648174}"/>
-          </ac:spMkLst>
-        </pc:spChg>
-        <pc:spChg chg="add del mod ord">
-          <ac:chgData name="Di Mattia Alessandro Edoardo Giorgio David" userId="f8954a66-e5ad-4a1c-9536-1d2117047f5f" providerId="ADAL" clId="{44D5592E-0B8C-4B71-8BBC-22FE2CB53AF8}" dt="2021-11-08T15:04:04.614" v="4201" actId="700"/>
-          <ac:spMkLst>
-            <pc:docMk/>
-            <pc:sldMk cId="1825306434" sldId="292"/>
-            <ac:spMk id="8" creationId="{BB38EA53-A027-42B0-9FCD-1C5063A2F71E}"/>
-          </ac:spMkLst>
-        </pc:spChg>
-        <pc:spChg chg="add mod ord">
-          <ac:chgData name="Di Mattia Alessandro Edoardo Giorgio David" userId="f8954a66-e5ad-4a1c-9536-1d2117047f5f" providerId="ADAL" clId="{44D5592E-0B8C-4B71-8BBC-22FE2CB53AF8}" dt="2021-11-08T15:04:04.614" v="4201" actId="700"/>
-          <ac:spMkLst>
-            <pc:docMk/>
-            <pc:sldMk cId="1825306434" sldId="292"/>
-            <ac:spMk id="9" creationId="{FE8EA41F-A8A2-4341-AE88-84965D7739FE}"/>
-          </ac:spMkLst>
-        </pc:spChg>
-        <pc:graphicFrameChg chg="add mod modGraphic">
-          <ac:chgData name="Di Mattia Alessandro Edoardo Giorgio David" userId="f8954a66-e5ad-4a1c-9536-1d2117047f5f" providerId="ADAL" clId="{44D5592E-0B8C-4B71-8BBC-22FE2CB53AF8}" dt="2021-11-08T15:04:38.285" v="4207" actId="1076"/>
-          <ac:graphicFrameMkLst>
-            <pc:docMk/>
-            <pc:sldMk cId="1825306434" sldId="292"/>
-            <ac:graphicFrameMk id="5" creationId="{FDF0CF8C-C505-4EDA-A1DD-0C08B3CA620E}"/>
-          </ac:graphicFrameMkLst>
-        </pc:graphicFrameChg>
-      </pc:sldChg>
-      <pc:sldChg chg="modSp add del mod ord">
-        <pc:chgData name="Di Mattia Alessandro Edoardo Giorgio David" userId="f8954a66-e5ad-4a1c-9536-1d2117047f5f" providerId="ADAL" clId="{44D5592E-0B8C-4B71-8BBC-22FE2CB53AF8}" dt="2021-11-08T14:31:52.701" v="3320" actId="2696"/>
-        <pc:sldMkLst>
-          <pc:docMk/>
-          <pc:sldMk cId="2453736661" sldId="292"/>
-        </pc:sldMkLst>
-        <pc:spChg chg="mod">
-          <ac:chgData name="Di Mattia Alessandro Edoardo Giorgio David" userId="f8954a66-e5ad-4a1c-9536-1d2117047f5f" providerId="ADAL" clId="{44D5592E-0B8C-4B71-8BBC-22FE2CB53AF8}" dt="2021-11-08T14:31:14.802" v="3301" actId="20577"/>
-          <ac:spMkLst>
-            <pc:docMk/>
-            <pc:sldMk cId="2453736661" sldId="292"/>
-            <ac:spMk id="2" creationId="{E2AE4C11-9E77-4E42-B948-994E09BDC9C6}"/>
-          </ac:spMkLst>
-        </pc:spChg>
-        <pc:spChg chg="mod">
-          <ac:chgData name="Di Mattia Alessandro Edoardo Giorgio David" userId="f8954a66-e5ad-4a1c-9536-1d2117047f5f" providerId="ADAL" clId="{44D5592E-0B8C-4B71-8BBC-22FE2CB53AF8}" dt="2021-11-08T14:31:32.596" v="3319" actId="20577"/>
-          <ac:spMkLst>
-            <pc:docMk/>
-            <pc:sldMk cId="2453736661" sldId="292"/>
-            <ac:spMk id="3" creationId="{4D078D51-D572-4CA1-96D6-5B20ECD70331}"/>
-          </ac:spMkLst>
-        </pc:spChg>
-      </pc:sldChg>
-      <pc:sldChg chg="addSp modSp new mod">
-        <pc:chgData name="Di Mattia Alessandro Edoardo Giorgio David" userId="f8954a66-e5ad-4a1c-9536-1d2117047f5f" providerId="ADAL" clId="{44D5592E-0B8C-4B71-8BBC-22FE2CB53AF8}" dt="2021-11-15T10:32:15.924" v="4634" actId="207"/>
-        <pc:sldMkLst>
-          <pc:docMk/>
-          <pc:sldMk cId="883794286" sldId="293"/>
-        </pc:sldMkLst>
-        <pc:spChg chg="mod">
-          <ac:chgData name="Di Mattia Alessandro Edoardo Giorgio David" userId="f8954a66-e5ad-4a1c-9536-1d2117047f5f" providerId="ADAL" clId="{44D5592E-0B8C-4B71-8BBC-22FE2CB53AF8}" dt="2021-11-08T14:49:41.104" v="3798" actId="20577"/>
-          <ac:spMkLst>
-            <pc:docMk/>
-            <pc:sldMk cId="883794286" sldId="293"/>
-            <ac:spMk id="2" creationId="{88531A44-87A1-4DF4-993F-E7C266C40349}"/>
-          </ac:spMkLst>
-        </pc:spChg>
-        <pc:spChg chg="mod">
-          <ac:chgData name="Di Mattia Alessandro Edoardo Giorgio David" userId="f8954a66-e5ad-4a1c-9536-1d2117047f5f" providerId="ADAL" clId="{44D5592E-0B8C-4B71-8BBC-22FE2CB53AF8}" dt="2021-11-15T10:32:15.924" v="4634" actId="207"/>
-          <ac:spMkLst>
-            <pc:docMk/>
-            <pc:sldMk cId="883794286" sldId="293"/>
-            <ac:spMk id="3" creationId="{901BFA49-436A-4F8B-BF7B-4323A039D922}"/>
-          </ac:spMkLst>
-        </pc:spChg>
-        <pc:graphicFrameChg chg="add mod modGraphic">
-          <ac:chgData name="Di Mattia Alessandro Edoardo Giorgio David" userId="f8954a66-e5ad-4a1c-9536-1d2117047f5f" providerId="ADAL" clId="{44D5592E-0B8C-4B71-8BBC-22FE2CB53AF8}" dt="2021-11-08T14:59:59.509" v="4123" actId="1076"/>
-          <ac:graphicFrameMkLst>
-            <pc:docMk/>
-            <pc:sldMk cId="883794286" sldId="293"/>
-            <ac:graphicFrameMk id="5" creationId="{BE968108-985A-45F3-AE05-61BE6C503DE5}"/>
-          </ac:graphicFrameMkLst>
-        </pc:graphicFrameChg>
-      </pc:sldChg>
-      <pc:sldChg chg="addSp delSp modSp new mod modClrScheme chgLayout">
-        <pc:chgData name="Di Mattia Alessandro Edoardo Giorgio David" userId="f8954a66-e5ad-4a1c-9536-1d2117047f5f" providerId="ADAL" clId="{44D5592E-0B8C-4B71-8BBC-22FE2CB53AF8}" dt="2021-11-08T14:48:39.997" v="3792" actId="12789"/>
-        <pc:sldMkLst>
-          <pc:docMk/>
-          <pc:sldMk cId="872569027" sldId="294"/>
-        </pc:sldMkLst>
-        <pc:spChg chg="del">
-          <ac:chgData name="Di Mattia Alessandro Edoardo Giorgio David" userId="f8954a66-e5ad-4a1c-9536-1d2117047f5f" providerId="ADAL" clId="{44D5592E-0B8C-4B71-8BBC-22FE2CB53AF8}" dt="2021-11-08T14:48:08.522" v="3788" actId="700"/>
-          <ac:spMkLst>
-            <pc:docMk/>
-            <pc:sldMk cId="872569027" sldId="294"/>
-            <ac:spMk id="2" creationId="{D206A12E-73BF-467A-91DE-F444446E8477}"/>
-          </ac:spMkLst>
-        </pc:spChg>
-        <pc:spChg chg="del">
-          <ac:chgData name="Di Mattia Alessandro Edoardo Giorgio David" userId="f8954a66-e5ad-4a1c-9536-1d2117047f5f" providerId="ADAL" clId="{44D5592E-0B8C-4B71-8BBC-22FE2CB53AF8}" dt="2021-11-08T14:48:08.522" v="3788" actId="700"/>
-          <ac:spMkLst>
-            <pc:docMk/>
-            <pc:sldMk cId="872569027" sldId="294"/>
-            <ac:spMk id="3" creationId="{C06C9E30-E2B5-4ED6-9EE0-5CC1BEEA2D35}"/>
-          </ac:spMkLst>
-        </pc:spChg>
-        <pc:picChg chg="add mod">
-          <ac:chgData name="Di Mattia Alessandro Edoardo Giorgio David" userId="f8954a66-e5ad-4a1c-9536-1d2117047f5f" providerId="ADAL" clId="{44D5592E-0B8C-4B71-8BBC-22FE2CB53AF8}" dt="2021-11-08T14:48:39.997" v="3792" actId="12789"/>
-          <ac:picMkLst>
-            <pc:docMk/>
-            <pc:sldMk cId="872569027" sldId="294"/>
-            <ac:picMk id="5" creationId="{24D07324-61C3-4501-9D4F-E95A71F02A61}"/>
-          </ac:picMkLst>
-        </pc:picChg>
-      </pc:sldChg>
-      <pc:sldChg chg="addSp modSp new mod">
-        <pc:chgData name="Di Mattia Alessandro Edoardo Giorgio David" userId="f8954a66-e5ad-4a1c-9536-1d2117047f5f" providerId="ADAL" clId="{44D5592E-0B8C-4B71-8BBC-22FE2CB53AF8}" dt="2021-11-08T15:10:33.880" v="4211"/>
-        <pc:sldMkLst>
-          <pc:docMk/>
-          <pc:sldMk cId="2402026329" sldId="295"/>
-        </pc:sldMkLst>
-        <pc:picChg chg="add mod">
-          <ac:chgData name="Di Mattia Alessandro Edoardo Giorgio David" userId="f8954a66-e5ad-4a1c-9536-1d2117047f5f" providerId="ADAL" clId="{44D5592E-0B8C-4B71-8BBC-22FE2CB53AF8}" dt="2021-11-08T15:10:33.880" v="4211"/>
-          <ac:picMkLst>
-            <pc:docMk/>
-            <pc:sldMk cId="2402026329" sldId="295"/>
-            <ac:picMk id="3" creationId="{C6FDEF4D-DD92-4DE7-9A93-D7A3F0785557}"/>
-          </ac:picMkLst>
-        </pc:picChg>
-      </pc:sldChg>
-      <pc:sldMasterChg chg="modSp mod">
-        <pc:chgData name="Di Mattia Alessandro Edoardo Giorgio David" userId="f8954a66-e5ad-4a1c-9536-1d2117047f5f" providerId="ADAL" clId="{44D5592E-0B8C-4B71-8BBC-22FE2CB53AF8}" dt="2021-11-09T12:21:09.192" v="4221" actId="1076"/>
-        <pc:sldMasterMkLst>
-          <pc:docMk/>
-          <pc:sldMasterMk cId="626235760" sldId="2147483684"/>
-        </pc:sldMasterMkLst>
-        <pc:spChg chg="mod">
-          <ac:chgData name="Di Mattia Alessandro Edoardo Giorgio David" userId="f8954a66-e5ad-4a1c-9536-1d2117047f5f" providerId="ADAL" clId="{44D5592E-0B8C-4B71-8BBC-22FE2CB53AF8}" dt="2021-11-09T12:21:09.192" v="4221" actId="1076"/>
-          <ac:spMkLst>
-            <pc:docMk/>
-            <pc:sldMasterMk cId="626235760" sldId="2147483684"/>
-            <ac:spMk id="2" creationId="{694CB108-4A1C-4218-9FA9-7C3065D8017E}"/>
-          </ac:spMkLst>
-        </pc:spChg>
-      </pc:sldMasterChg>
-      <pc:sldMasterChg chg="addSp modSp mod">
-        <pc:chgData name="Di Mattia Alessandro Edoardo Giorgio David" userId="f8954a66-e5ad-4a1c-9536-1d2117047f5f" providerId="ADAL" clId="{44D5592E-0B8C-4B71-8BBC-22FE2CB53AF8}" dt="2021-11-09T12:20:59.139" v="4220" actId="1076"/>
-        <pc:sldMasterMkLst>
-          <pc:docMk/>
-          <pc:sldMasterMk cId="2778224394" sldId="2147483694"/>
-        </pc:sldMasterMkLst>
-        <pc:spChg chg="mod">
-          <ac:chgData name="Di Mattia Alessandro Edoardo Giorgio David" userId="f8954a66-e5ad-4a1c-9536-1d2117047f5f" providerId="ADAL" clId="{44D5592E-0B8C-4B71-8BBC-22FE2CB53AF8}" dt="2021-11-09T12:19:27.813" v="4215" actId="1076"/>
-          <ac:spMkLst>
-            <pc:docMk/>
-            <pc:sldMasterMk cId="2778224394" sldId="2147483694"/>
-            <ac:spMk id="7" creationId="{859F6C5B-4AF5-454D-AF1A-B8C3480E7A71}"/>
-          </ac:spMkLst>
-        </pc:spChg>
-        <pc:spChg chg="add mod">
-          <ac:chgData name="Di Mattia Alessandro Edoardo Giorgio David" userId="f8954a66-e5ad-4a1c-9536-1d2117047f5f" providerId="ADAL" clId="{44D5592E-0B8C-4B71-8BBC-22FE2CB53AF8}" dt="2021-11-09T12:20:59.139" v="4220" actId="1076"/>
-          <ac:spMkLst>
-            <pc:docMk/>
-            <pc:sldMasterMk cId="2778224394" sldId="2147483694"/>
-            <ac:spMk id="9" creationId="{0AF44514-FDE4-4AF7-AEDD-4F0C1FF0E3A8}"/>
-          </ac:spMkLst>
-        </pc:spChg>
-      </pc:sldMasterChg>
-    </pc:docChg>
-  </pc:docChgLst>
-  <pc:docChgLst>
-    <pc:chgData name="Alessandro Edoardo Giorgio David" userId="f8954a66-e5ad-4a1c-9536-1d2117047f5f" providerId="ADAL" clId="{D93D8B19-FA20-47A5-B3D7-0A6BF3F53C46}"/>
-    <pc:docChg chg="undo custSel addSld delSld modSld sldOrd">
-      <pc:chgData name="Alessandro Edoardo Giorgio David" userId="f8954a66-e5ad-4a1c-9536-1d2117047f5f" providerId="ADAL" clId="{D93D8B19-FA20-47A5-B3D7-0A6BF3F53C46}" dt="2021-08-10T13:18:36.419" v="625"/>
-      <pc:docMkLst>
-        <pc:docMk/>
-      </pc:docMkLst>
-      <pc:sldChg chg="modSp mod">
-        <pc:chgData name="Alessandro Edoardo Giorgio David" userId="f8954a66-e5ad-4a1c-9536-1d2117047f5f" providerId="ADAL" clId="{D93D8B19-FA20-47A5-B3D7-0A6BF3F53C46}" dt="2021-08-10T10:46:13.837" v="233" actId="790"/>
-        <pc:sldMkLst>
-          <pc:docMk/>
-          <pc:sldMk cId="3153607966" sldId="280"/>
-        </pc:sldMkLst>
-        <pc:spChg chg="mod">
-          <ac:chgData name="Alessandro Edoardo Giorgio David" userId="f8954a66-e5ad-4a1c-9536-1d2117047f5f" providerId="ADAL" clId="{D93D8B19-FA20-47A5-B3D7-0A6BF3F53C46}" dt="2021-08-10T10:46:13.837" v="233" actId="790"/>
-          <ac:spMkLst>
-            <pc:docMk/>
-            <pc:sldMk cId="3153607966" sldId="280"/>
-            <ac:spMk id="2" creationId="{683FD103-5EF1-48AB-8EC6-4C1921FB118B}"/>
-          </ac:spMkLst>
-        </pc:spChg>
-      </pc:sldChg>
-      <pc:sldChg chg="modSp new mod">
-        <pc:chgData name="Alessandro Edoardo Giorgio David" userId="f8954a66-e5ad-4a1c-9536-1d2117047f5f" providerId="ADAL" clId="{D93D8B19-FA20-47A5-B3D7-0A6BF3F53C46}" dt="2021-08-10T10:28:51.472" v="62" actId="207"/>
-        <pc:sldMkLst>
-          <pc:docMk/>
-          <pc:sldMk cId="82894947" sldId="281"/>
-        </pc:sldMkLst>
-        <pc:spChg chg="mod">
-          <ac:chgData name="Alessandro Edoardo Giorgio David" userId="f8954a66-e5ad-4a1c-9536-1d2117047f5f" providerId="ADAL" clId="{D93D8B19-FA20-47A5-B3D7-0A6BF3F53C46}" dt="2021-08-10T10:14:51.966" v="22" actId="20577"/>
-          <ac:spMkLst>
-            <pc:docMk/>
-            <pc:sldMk cId="82894947" sldId="281"/>
-            <ac:spMk id="2" creationId="{BE245DFD-974C-438A-8A62-383465C76576}"/>
-          </ac:spMkLst>
-        </pc:spChg>
-        <pc:spChg chg="mod">
-          <ac:chgData name="Alessandro Edoardo Giorgio David" userId="f8954a66-e5ad-4a1c-9536-1d2117047f5f" providerId="ADAL" clId="{D93D8B19-FA20-47A5-B3D7-0A6BF3F53C46}" dt="2021-08-10T10:28:51.472" v="62" actId="207"/>
-          <ac:spMkLst>
-            <pc:docMk/>
-            <pc:sldMk cId="82894947" sldId="281"/>
-            <ac:spMk id="3" creationId="{3E1E0E27-35DF-4C52-9582-63B1D4BF7111}"/>
-          </ac:spMkLst>
-        </pc:spChg>
-      </pc:sldChg>
-      <pc:sldChg chg="del">
-        <pc:chgData name="Alessandro Edoardo Giorgio David" userId="f8954a66-e5ad-4a1c-9536-1d2117047f5f" providerId="ADAL" clId="{D93D8B19-FA20-47A5-B3D7-0A6BF3F53C46}" dt="2021-08-10T10:13:12.792" v="0" actId="2696"/>
-        <pc:sldMkLst>
-          <pc:docMk/>
-          <pc:sldMk cId="153053765" sldId="281"/>
-        </pc:sldMkLst>
-      </pc:sldChg>
-      <pc:sldChg chg="del">
-        <pc:chgData name="Alessandro Edoardo Giorgio David" userId="f8954a66-e5ad-4a1c-9536-1d2117047f5f" providerId="ADAL" clId="{D93D8B19-FA20-47A5-B3D7-0A6BF3F53C46}" dt="2021-08-10T10:13:12.792" v="0" actId="2696"/>
-        <pc:sldMkLst>
-          <pc:docMk/>
-          <pc:sldMk cId="1400904179" sldId="282"/>
-        </pc:sldMkLst>
-      </pc:sldChg>
-      <pc:sldChg chg="addSp delSp modSp new mod">
-        <pc:chgData name="Alessandro Edoardo Giorgio David" userId="f8954a66-e5ad-4a1c-9536-1d2117047f5f" providerId="ADAL" clId="{D93D8B19-FA20-47A5-B3D7-0A6BF3F53C46}" dt="2021-08-10T10:38:07.634" v="232" actId="1076"/>
-        <pc:sldMkLst>
-          <pc:docMk/>
-          <pc:sldMk cId="1895599324" sldId="282"/>
-        </pc:sldMkLst>
-        <pc:spChg chg="mod">
-          <ac:chgData name="Alessandro Edoardo Giorgio David" userId="f8954a66-e5ad-4a1c-9536-1d2117047f5f" providerId="ADAL" clId="{D93D8B19-FA20-47A5-B3D7-0A6BF3F53C46}" dt="2021-08-10T10:16:08.123" v="32" actId="122"/>
-          <ac:spMkLst>
-            <pc:docMk/>
-            <pc:sldMk cId="1895599324" sldId="282"/>
-            <ac:spMk id="2" creationId="{87D71CA4-FA28-4119-9FA4-29A4F73E7090}"/>
-          </ac:spMkLst>
-        </pc:spChg>
-        <pc:spChg chg="del">
-          <ac:chgData name="Alessandro Edoardo Giorgio David" userId="f8954a66-e5ad-4a1c-9536-1d2117047f5f" providerId="ADAL" clId="{D93D8B19-FA20-47A5-B3D7-0A6BF3F53C46}" dt="2021-08-10T10:17:09.636" v="33"/>
-          <ac:spMkLst>
-            <pc:docMk/>
-            <pc:sldMk cId="1895599324" sldId="282"/>
-            <ac:spMk id="3" creationId="{3964FC0C-D925-4B0E-8291-EAA55CC211B1}"/>
-          </ac:spMkLst>
-        </pc:spChg>
-        <pc:spChg chg="add del mod">
-          <ac:chgData name="Alessandro Edoardo Giorgio David" userId="f8954a66-e5ad-4a1c-9536-1d2117047f5f" providerId="ADAL" clId="{D93D8B19-FA20-47A5-B3D7-0A6BF3F53C46}" dt="2021-08-10T10:37:58.383" v="230"/>
-          <ac:spMkLst>
-            <pc:docMk/>
-            <pc:sldMk cId="1895599324" sldId="282"/>
-            <ac:spMk id="6" creationId="{885E4550-8130-4F7F-9D52-4F66C2144B16}"/>
-          </ac:spMkLst>
-        </pc:spChg>
-        <pc:spChg chg="add del mod">
-          <ac:chgData name="Alessandro Edoardo Giorgio David" userId="f8954a66-e5ad-4a1c-9536-1d2117047f5f" providerId="ADAL" clId="{D93D8B19-FA20-47A5-B3D7-0A6BF3F53C46}" dt="2021-08-10T10:37:56.537" v="229"/>
-          <ac:spMkLst>
-            <pc:docMk/>
-            <pc:sldMk cId="1895599324" sldId="282"/>
-            <ac:spMk id="7" creationId="{2A424E35-37C5-4BB7-AEFD-7946AA8222DA}"/>
-          </ac:spMkLst>
-        </pc:spChg>
-        <pc:spChg chg="add del mod">
-          <ac:chgData name="Alessandro Edoardo Giorgio David" userId="f8954a66-e5ad-4a1c-9536-1d2117047f5f" providerId="ADAL" clId="{D93D8B19-FA20-47A5-B3D7-0A6BF3F53C46}" dt="2021-08-10T10:37:56.537" v="229"/>
-          <ac:spMkLst>
-            <pc:docMk/>
-            <pc:sldMk cId="1895599324" sldId="282"/>
-            <ac:spMk id="8" creationId="{44C2E0E1-D8A5-4A24-BE0B-79EC78EBE026}"/>
-          </ac:spMkLst>
-        </pc:spChg>
-        <pc:spChg chg="add del mod">
-          <ac:chgData name="Alessandro Edoardo Giorgio David" userId="f8954a66-e5ad-4a1c-9536-1d2117047f5f" providerId="ADAL" clId="{D93D8B19-FA20-47A5-B3D7-0A6BF3F53C46}" dt="2021-08-10T10:37:56.537" v="229"/>
-          <ac:spMkLst>
-            <pc:docMk/>
-            <pc:sldMk cId="1895599324" sldId="282"/>
-            <ac:spMk id="9" creationId="{8198573A-8C28-4217-A85B-862A88DCED6E}"/>
-          </ac:spMkLst>
-        </pc:spChg>
-        <pc:spChg chg="add del mod">
-          <ac:chgData name="Alessandro Edoardo Giorgio David" userId="f8954a66-e5ad-4a1c-9536-1d2117047f5f" providerId="ADAL" clId="{D93D8B19-FA20-47A5-B3D7-0A6BF3F53C46}" dt="2021-08-10T10:37:56.537" v="229"/>
-          <ac:spMkLst>
-            <pc:docMk/>
-            <pc:sldMk cId="1895599324" sldId="282"/>
-            <ac:spMk id="10" creationId="{1E390A35-27E2-40B5-8E8D-7FEEBE6CE226}"/>
-          </ac:spMkLst>
-        </pc:spChg>
-        <pc:spChg chg="add del mod">
-          <ac:chgData name="Alessandro Edoardo Giorgio David" userId="f8954a66-e5ad-4a1c-9536-1d2117047f5f" providerId="ADAL" clId="{D93D8B19-FA20-47A5-B3D7-0A6BF3F53C46}" dt="2021-08-10T10:37:56.537" v="229"/>
-          <ac:spMkLst>
-            <pc:docMk/>
-            <pc:sldMk cId="1895599324" sldId="282"/>
-            <ac:spMk id="11" creationId="{EC0EAA35-06DF-4699-993E-23771BD22099}"/>
-          </ac:spMkLst>
-        </pc:spChg>
-        <pc:spChg chg="add del mod">
-          <ac:chgData name="Alessandro Edoardo Giorgio David" userId="f8954a66-e5ad-4a1c-9536-1d2117047f5f" providerId="ADAL" clId="{D93D8B19-FA20-47A5-B3D7-0A6BF3F53C46}" dt="2021-08-10T10:37:56.537" v="229"/>
-          <ac:spMkLst>
-            <pc:docMk/>
-            <pc:sldMk cId="1895599324" sldId="282"/>
-            <ac:spMk id="12" creationId="{CA606416-93E9-42D9-AA61-D6EE5458D484}"/>
-          </ac:spMkLst>
-        </pc:spChg>
-        <pc:spChg chg="add del mod">
-          <ac:chgData name="Alessandro Edoardo Giorgio David" userId="f8954a66-e5ad-4a1c-9536-1d2117047f5f" providerId="ADAL" clId="{D93D8B19-FA20-47A5-B3D7-0A6BF3F53C46}" dt="2021-08-10T10:37:56.537" v="229"/>
-          <ac:spMkLst>
-            <pc:docMk/>
-            <pc:sldMk cId="1895599324" sldId="282"/>
-            <ac:spMk id="13" creationId="{C0340826-EC2D-45DE-B93E-F35862B6763F}"/>
-          </ac:spMkLst>
-        </pc:spChg>
-        <pc:spChg chg="add del mod">
-          <ac:chgData name="Alessandro Edoardo Giorgio David" userId="f8954a66-e5ad-4a1c-9536-1d2117047f5f" providerId="ADAL" clId="{D93D8B19-FA20-47A5-B3D7-0A6BF3F53C46}" dt="2021-08-10T10:37:56.537" v="229"/>
-          <ac:spMkLst>
-            <pc:docMk/>
-            <pc:sldMk cId="1895599324" sldId="282"/>
-            <ac:spMk id="14" creationId="{627EC2C5-ACD9-4F36-ACCB-A890F2B84790}"/>
-          </ac:spMkLst>
-        </pc:spChg>
-        <pc:spChg chg="add del mod">
-          <ac:chgData name="Alessandro Edoardo Giorgio David" userId="f8954a66-e5ad-4a1c-9536-1d2117047f5f" providerId="ADAL" clId="{D93D8B19-FA20-47A5-B3D7-0A6BF3F53C46}" dt="2021-08-10T10:37:56.537" v="229"/>
-          <ac:spMkLst>
-            <pc:docMk/>
-            <pc:sldMk cId="1895599324" sldId="282"/>
-            <ac:spMk id="15" creationId="{EB70D244-E4BC-4AFA-95F6-DAF3B8332756}"/>
-          </ac:spMkLst>
-        </pc:spChg>
-        <pc:spChg chg="add del mod">
-          <ac:chgData name="Alessandro Edoardo Giorgio David" userId="f8954a66-e5ad-4a1c-9536-1d2117047f5f" providerId="ADAL" clId="{D93D8B19-FA20-47A5-B3D7-0A6BF3F53C46}" dt="2021-08-10T10:37:56.537" v="229"/>
-          <ac:spMkLst>
-            <pc:docMk/>
-            <pc:sldMk cId="1895599324" sldId="282"/>
-            <ac:spMk id="16" creationId="{BC7EAA22-D807-4009-B776-7B37E3281949}"/>
-          </ac:spMkLst>
-        </pc:spChg>
-        <pc:spChg chg="add del mod">
-          <ac:chgData name="Alessandro Edoardo Giorgio David" userId="f8954a66-e5ad-4a1c-9536-1d2117047f5f" providerId="ADAL" clId="{D93D8B19-FA20-47A5-B3D7-0A6BF3F53C46}" dt="2021-08-10T10:37:56.537" v="229"/>
-          <ac:spMkLst>
-            <pc:docMk/>
-            <pc:sldMk cId="1895599324" sldId="282"/>
-            <ac:spMk id="17" creationId="{E6876750-ED10-4516-B12A-766615DA7F5F}"/>
-          </ac:spMkLst>
-        </pc:spChg>
-        <pc:spChg chg="add del mod">
-          <ac:chgData name="Alessandro Edoardo Giorgio David" userId="f8954a66-e5ad-4a1c-9536-1d2117047f5f" providerId="ADAL" clId="{D93D8B19-FA20-47A5-B3D7-0A6BF3F53C46}" dt="2021-08-10T10:37:56.537" v="229"/>
-          <ac:spMkLst>
-            <pc:docMk/>
-            <pc:sldMk cId="1895599324" sldId="282"/>
-            <ac:spMk id="18" creationId="{BBA170D5-161D-4106-9F6D-28DF6D145718}"/>
-          </ac:spMkLst>
-        </pc:spChg>
-        <pc:spChg chg="add del mod">
-          <ac:chgData name="Alessandro Edoardo Giorgio David" userId="f8954a66-e5ad-4a1c-9536-1d2117047f5f" providerId="ADAL" clId="{D93D8B19-FA20-47A5-B3D7-0A6BF3F53C46}" dt="2021-08-10T10:37:56.537" v="229"/>
-          <ac:spMkLst>
-            <pc:docMk/>
-            <pc:sldMk cId="1895599324" sldId="282"/>
-            <ac:spMk id="19" creationId="{42D6E6A3-2E91-458F-A94D-9CF6BCD3D80F}"/>
-          </ac:spMkLst>
-        </pc:spChg>
-        <pc:spChg chg="add del mod">
-          <ac:chgData name="Alessandro Edoardo Giorgio David" userId="f8954a66-e5ad-4a1c-9536-1d2117047f5f" providerId="ADAL" clId="{D93D8B19-FA20-47A5-B3D7-0A6BF3F53C46}" dt="2021-08-10T10:37:56.537" v="229"/>
-          <ac:spMkLst>
-            <pc:docMk/>
-            <pc:sldMk cId="1895599324" sldId="282"/>
-            <ac:spMk id="20" creationId="{CB2ED075-60A6-4645-BDDD-643E5A2D19A4}"/>
-          </ac:spMkLst>
-        </pc:spChg>
-        <pc:spChg chg="add del mod">
-          <ac:chgData name="Alessandro Edoardo Giorgio David" userId="f8954a66-e5ad-4a1c-9536-1d2117047f5f" providerId="ADAL" clId="{D93D8B19-FA20-47A5-B3D7-0A6BF3F53C46}" dt="2021-08-10T10:37:56.537" v="229"/>
-          <ac:spMkLst>
-            <pc:docMk/>
-            <pc:sldMk cId="1895599324" sldId="282"/>
-            <ac:spMk id="21" creationId="{7DCCC8F3-7542-4668-93BD-298426BC6ECA}"/>
-          </ac:spMkLst>
-        </pc:spChg>
-        <pc:spChg chg="add del mod">
-          <ac:chgData name="Alessandro Edoardo Giorgio David" userId="f8954a66-e5ad-4a1c-9536-1d2117047f5f" providerId="ADAL" clId="{D93D8B19-FA20-47A5-B3D7-0A6BF3F53C46}" dt="2021-08-10T10:37:56.537" v="229"/>
-          <ac:spMkLst>
-            <pc:docMk/>
-            <pc:sldMk cId="1895599324" sldId="282"/>
-            <ac:spMk id="22" creationId="{52C17F89-292C-43F7-92D4-F63885EC0909}"/>
-          </ac:spMkLst>
-        </pc:spChg>
-        <pc:spChg chg="add del mod">
-          <ac:chgData name="Alessandro Edoardo Giorgio David" userId="f8954a66-e5ad-4a1c-9536-1d2117047f5f" providerId="ADAL" clId="{D93D8B19-FA20-47A5-B3D7-0A6BF3F53C46}" dt="2021-08-10T10:37:56.537" v="229"/>
-          <ac:spMkLst>
-            <pc:docMk/>
-            <pc:sldMk cId="1895599324" sldId="282"/>
-            <ac:spMk id="23" creationId="{CFC0F26A-396A-423F-9A68-4FF321EC5CF6}"/>
-          </ac:spMkLst>
-        </pc:spChg>
-        <pc:picChg chg="add del mod">
-          <ac:chgData name="Alessandro Edoardo Giorgio David" userId="f8954a66-e5ad-4a1c-9536-1d2117047f5f" providerId="ADAL" clId="{D93D8B19-FA20-47A5-B3D7-0A6BF3F53C46}" dt="2021-08-10T10:37:53.344" v="227" actId="478"/>
-          <ac:picMkLst>
-            <pc:docMk/>
-            <pc:sldMk cId="1895599324" sldId="282"/>
-            <ac:picMk id="4" creationId="{C57ECC0F-431A-420F-AA1D-6673B1FA11EF}"/>
-          </ac:picMkLst>
-        </pc:picChg>
-        <pc:picChg chg="add mod">
-          <ac:chgData name="Alessandro Edoardo Giorgio David" userId="f8954a66-e5ad-4a1c-9536-1d2117047f5f" providerId="ADAL" clId="{D93D8B19-FA20-47A5-B3D7-0A6BF3F53C46}" dt="2021-08-10T10:38:07.634" v="232" actId="1076"/>
-          <ac:picMkLst>
-            <pc:docMk/>
-            <pc:sldMk cId="1895599324" sldId="282"/>
-            <ac:picMk id="24" creationId="{999DE7FE-82DE-48AD-BB23-F15CA56C5C1A}"/>
-          </ac:picMkLst>
-        </pc:picChg>
-      </pc:sldChg>
-      <pc:sldChg chg="del">
-        <pc:chgData name="Alessandro Edoardo Giorgio David" userId="f8954a66-e5ad-4a1c-9536-1d2117047f5f" providerId="ADAL" clId="{D93D8B19-FA20-47A5-B3D7-0A6BF3F53C46}" dt="2021-08-10T10:13:12.792" v="0" actId="2696"/>
-        <pc:sldMkLst>
-          <pc:docMk/>
-          <pc:sldMk cId="194577708" sldId="283"/>
-        </pc:sldMkLst>
-      </pc:sldChg>
-      <pc:sldChg chg="modSp new mod ord">
-        <pc:chgData name="Alessandro Edoardo Giorgio David" userId="f8954a66-e5ad-4a1c-9536-1d2117047f5f" providerId="ADAL" clId="{D93D8B19-FA20-47A5-B3D7-0A6BF3F53C46}" dt="2021-08-10T13:18:36.419" v="625"/>
-        <pc:sldMkLst>
-          <pc:docMk/>
-          <pc:sldMk cId="4096371522" sldId="283"/>
-        </pc:sldMkLst>
-        <pc:spChg chg="mod">
-          <ac:chgData name="Alessandro Edoardo Giorgio David" userId="f8954a66-e5ad-4a1c-9536-1d2117047f5f" providerId="ADAL" clId="{D93D8B19-FA20-47A5-B3D7-0A6BF3F53C46}" dt="2021-08-10T10:17:45.238" v="42" actId="122"/>
-          <ac:spMkLst>
-            <pc:docMk/>
-            <pc:sldMk cId="4096371522" sldId="283"/>
-            <ac:spMk id="2" creationId="{408B4B91-F23E-4673-8DB8-6A5A02D61CB6}"/>
-          </ac:spMkLst>
-        </pc:spChg>
-        <pc:spChg chg="mod">
-          <ac:chgData name="Alessandro Edoardo Giorgio David" userId="f8954a66-e5ad-4a1c-9536-1d2117047f5f" providerId="ADAL" clId="{D93D8B19-FA20-47A5-B3D7-0A6BF3F53C46}" dt="2021-08-10T13:14:41.330" v="611" actId="5793"/>
-          <ac:spMkLst>
-            <pc:docMk/>
-            <pc:sldMk cId="4096371522" sldId="283"/>
-            <ac:spMk id="3" creationId="{83BD5FD3-58A3-4593-BA71-B00F2D7F8C6A}"/>
-          </ac:spMkLst>
-        </pc:spChg>
-      </pc:sldChg>
-      <pc:sldChg chg="modSp new mod">
-        <pc:chgData name="Alessandro Edoardo Giorgio David" userId="f8954a66-e5ad-4a1c-9536-1d2117047f5f" providerId="ADAL" clId="{D93D8B19-FA20-47A5-B3D7-0A6BF3F53C46}" dt="2021-08-10T10:52:43.487" v="551" actId="20577"/>
-        <pc:sldMkLst>
-          <pc:docMk/>
-          <pc:sldMk cId="2952385952" sldId="284"/>
-        </pc:sldMkLst>
-        <pc:spChg chg="mod">
-          <ac:chgData name="Alessandro Edoardo Giorgio David" userId="f8954a66-e5ad-4a1c-9536-1d2117047f5f" providerId="ADAL" clId="{D93D8B19-FA20-47A5-B3D7-0A6BF3F53C46}" dt="2021-08-10T10:47:33.137" v="259" actId="790"/>
-          <ac:spMkLst>
-            <pc:docMk/>
-            <pc:sldMk cId="2952385952" sldId="284"/>
-            <ac:spMk id="2" creationId="{A77BED49-8D96-4399-83D4-396828225BE7}"/>
-          </ac:spMkLst>
-        </pc:spChg>
-        <pc:spChg chg="mod">
-          <ac:chgData name="Alessandro Edoardo Giorgio David" userId="f8954a66-e5ad-4a1c-9536-1d2117047f5f" providerId="ADAL" clId="{D93D8B19-FA20-47A5-B3D7-0A6BF3F53C46}" dt="2021-08-10T10:52:43.487" v="551" actId="20577"/>
-          <ac:spMkLst>
-            <pc:docMk/>
-            <pc:sldMk cId="2952385952" sldId="284"/>
-            <ac:spMk id="3" creationId="{23098DAD-D0EB-4E6F-83C4-BF0416B344FF}"/>
-          </ac:spMkLst>
-        </pc:spChg>
-      </pc:sldChg>
-      <pc:sldChg chg="del">
-        <pc:chgData name="Alessandro Edoardo Giorgio David" userId="f8954a66-e5ad-4a1c-9536-1d2117047f5f" providerId="ADAL" clId="{D93D8B19-FA20-47A5-B3D7-0A6BF3F53C46}" dt="2021-08-10T10:13:12.792" v="0" actId="2696"/>
-        <pc:sldMkLst>
-          <pc:docMk/>
-          <pc:sldMk cId="3040764519" sldId="284"/>
-        </pc:sldMkLst>
-      </pc:sldChg>
-      <pc:sldChg chg="del">
-        <pc:chgData name="Alessandro Edoardo Giorgio David" userId="f8954a66-e5ad-4a1c-9536-1d2117047f5f" providerId="ADAL" clId="{D93D8B19-FA20-47A5-B3D7-0A6BF3F53C46}" dt="2021-08-10T10:13:12.792" v="0" actId="2696"/>
-        <pc:sldMkLst>
-          <pc:docMk/>
-          <pc:sldMk cId="1677543011" sldId="285"/>
-        </pc:sldMkLst>
-      </pc:sldChg>
-      <pc:sldChg chg="addSp delSp modSp new mod">
-        <pc:chgData name="Alessandro Edoardo Giorgio David" userId="f8954a66-e5ad-4a1c-9536-1d2117047f5f" providerId="ADAL" clId="{D93D8B19-FA20-47A5-B3D7-0A6BF3F53C46}" dt="2021-08-10T13:12:18.984" v="608" actId="1076"/>
-        <pc:sldMkLst>
-          <pc:docMk/>
-          <pc:sldMk cId="2360709121" sldId="285"/>
-        </pc:sldMkLst>
-        <pc:spChg chg="add del mod">
-          <ac:chgData name="Alessandro Edoardo Giorgio David" userId="f8954a66-e5ad-4a1c-9536-1d2117047f5f" providerId="ADAL" clId="{D93D8B19-FA20-47A5-B3D7-0A6BF3F53C46}" dt="2021-08-10T13:10:40.139" v="601" actId="122"/>
-          <ac:spMkLst>
-            <pc:docMk/>
-            <pc:sldMk cId="2360709121" sldId="285"/>
-            <ac:spMk id="2" creationId="{850F8AE4-D095-492B-B6BD-51B7ED3135F8}"/>
-          </ac:spMkLst>
-        </pc:spChg>
-        <pc:spChg chg="add del">
-          <ac:chgData name="Alessandro Edoardo Giorgio David" userId="f8954a66-e5ad-4a1c-9536-1d2117047f5f" providerId="ADAL" clId="{D93D8B19-FA20-47A5-B3D7-0A6BF3F53C46}" dt="2021-08-10T13:12:03.331" v="606"/>
-          <ac:spMkLst>
-            <pc:docMk/>
-            <pc:sldMk cId="2360709121" sldId="285"/>
-            <ac:spMk id="3" creationId="{929EB4A7-08BB-45A8-B065-13489C10CDB2}"/>
-          </ac:spMkLst>
-        </pc:spChg>
-        <pc:spChg chg="add del mod">
-          <ac:chgData name="Alessandro Edoardo Giorgio David" userId="f8954a66-e5ad-4a1c-9536-1d2117047f5f" providerId="ADAL" clId="{D93D8B19-FA20-47A5-B3D7-0A6BF3F53C46}" dt="2021-08-10T13:10:19.179" v="554"/>
-          <ac:spMkLst>
-            <pc:docMk/>
-            <pc:sldMk cId="2360709121" sldId="285"/>
-            <ac:spMk id="4" creationId="{0CA50546-66E0-4814-8773-47BC0BE9B3C9}"/>
-          </ac:spMkLst>
-        </pc:spChg>
-        <pc:picChg chg="add del mod">
-          <ac:chgData name="Alessandro Edoardo Giorgio David" userId="f8954a66-e5ad-4a1c-9536-1d2117047f5f" providerId="ADAL" clId="{D93D8B19-FA20-47A5-B3D7-0A6BF3F53C46}" dt="2021-08-10T13:10:59.357" v="605"/>
-          <ac:picMkLst>
-            <pc:docMk/>
-            <pc:sldMk cId="2360709121" sldId="285"/>
-            <ac:picMk id="5" creationId="{6EDF5A3D-5180-4B47-A43F-F58ACF23AF90}"/>
-          </ac:picMkLst>
-        </pc:picChg>
-        <pc:picChg chg="add mod">
-          <ac:chgData name="Alessandro Edoardo Giorgio David" userId="f8954a66-e5ad-4a1c-9536-1d2117047f5f" providerId="ADAL" clId="{D93D8B19-FA20-47A5-B3D7-0A6BF3F53C46}" dt="2021-08-10T13:12:18.984" v="608" actId="1076"/>
-          <ac:picMkLst>
-            <pc:docMk/>
-            <pc:sldMk cId="2360709121" sldId="285"/>
-            <ac:picMk id="6" creationId="{FB3986C0-44F4-4DC9-9E52-F7C4AC423527}"/>
-          </ac:picMkLst>
-        </pc:picChg>
-      </pc:sldChg>
-      <pc:sldChg chg="addSp delSp modSp new mod">
-        <pc:chgData name="Alessandro Edoardo Giorgio David" userId="f8954a66-e5ad-4a1c-9536-1d2117047f5f" providerId="ADAL" clId="{D93D8B19-FA20-47A5-B3D7-0A6BF3F53C46}" dt="2021-08-10T13:16:24.708" v="623" actId="122"/>
-        <pc:sldMkLst>
-          <pc:docMk/>
-          <pc:sldMk cId="2169398848" sldId="286"/>
-        </pc:sldMkLst>
-        <pc:spChg chg="mod">
-          <ac:chgData name="Alessandro Edoardo Giorgio David" userId="f8954a66-e5ad-4a1c-9536-1d2117047f5f" providerId="ADAL" clId="{D93D8B19-FA20-47A5-B3D7-0A6BF3F53C46}" dt="2021-08-10T13:16:24.708" v="623" actId="122"/>
-          <ac:spMkLst>
-            <pc:docMk/>
-            <pc:sldMk cId="2169398848" sldId="286"/>
-            <ac:spMk id="2" creationId="{E0281D5F-2FF9-472A-9E43-1E0BA5F276EA}"/>
-          </ac:spMkLst>
-        </pc:spChg>
-        <pc:spChg chg="del">
-          <ac:chgData name="Alessandro Edoardo Giorgio David" userId="f8954a66-e5ad-4a1c-9536-1d2117047f5f" providerId="ADAL" clId="{D93D8B19-FA20-47A5-B3D7-0A6BF3F53C46}" dt="2021-08-10T13:16:09.427" v="615"/>
-          <ac:spMkLst>
-            <pc:docMk/>
-            <pc:sldMk cId="2169398848" sldId="286"/>
-            <ac:spMk id="3" creationId="{3AEEC441-A224-4D27-A026-424493F51DF7}"/>
-          </ac:spMkLst>
-        </pc:spChg>
-        <pc:picChg chg="add mod">
-          <ac:chgData name="Alessandro Edoardo Giorgio David" userId="f8954a66-e5ad-4a1c-9536-1d2117047f5f" providerId="ADAL" clId="{D93D8B19-FA20-47A5-B3D7-0A6BF3F53C46}" dt="2021-08-10T13:16:17.535" v="617" actId="14100"/>
-          <ac:picMkLst>
-            <pc:docMk/>
-            <pc:sldMk cId="2169398848" sldId="286"/>
-            <ac:picMk id="4" creationId="{01EEE091-4AAC-4560-B6DB-CFE94541A2DF}"/>
-          </ac:picMkLst>
-        </pc:picChg>
-      </pc:sldChg>
-      <pc:sldChg chg="del">
-        <pc:chgData name="Alessandro Edoardo Giorgio David" userId="f8954a66-e5ad-4a1c-9536-1d2117047f5f" providerId="ADAL" clId="{D93D8B19-FA20-47A5-B3D7-0A6BF3F53C46}" dt="2021-08-10T10:13:12.792" v="0" actId="2696"/>
-        <pc:sldMkLst>
-          <pc:docMk/>
-          <pc:sldMk cId="2456525904" sldId="286"/>
-        </pc:sldMkLst>
-      </pc:sldChg>
-      <pc:sldChg chg="del">
-        <pc:chgData name="Alessandro Edoardo Giorgio David" userId="f8954a66-e5ad-4a1c-9536-1d2117047f5f" providerId="ADAL" clId="{D93D8B19-FA20-47A5-B3D7-0A6BF3F53C46}" dt="2021-08-10T10:13:12.792" v="0" actId="2696"/>
-        <pc:sldMkLst>
-          <pc:docMk/>
-          <pc:sldMk cId="2542539799" sldId="287"/>
-        </pc:sldMkLst>
-      </pc:sldChg>
-      <pc:sldChg chg="del">
-        <pc:chgData name="Alessandro Edoardo Giorgio David" userId="f8954a66-e5ad-4a1c-9536-1d2117047f5f" providerId="ADAL" clId="{D93D8B19-FA20-47A5-B3D7-0A6BF3F53C46}" dt="2021-08-10T10:13:12.792" v="0" actId="2696"/>
-        <pc:sldMkLst>
-          <pc:docMk/>
-          <pc:sldMk cId="776110747" sldId="288"/>
-        </pc:sldMkLst>
-      </pc:sldChg>
-      <pc:sldChg chg="del">
-        <pc:chgData name="Alessandro Edoardo Giorgio David" userId="f8954a66-e5ad-4a1c-9536-1d2117047f5f" providerId="ADAL" clId="{D93D8B19-FA20-47A5-B3D7-0A6BF3F53C46}" dt="2021-08-10T10:13:12.792" v="0" actId="2696"/>
-        <pc:sldMkLst>
-          <pc:docMk/>
-          <pc:sldMk cId="3865763563" sldId="289"/>
-        </pc:sldMkLst>
-      </pc:sldChg>
-      <pc:sldChg chg="del">
-        <pc:chgData name="Alessandro Edoardo Giorgio David" userId="f8954a66-e5ad-4a1c-9536-1d2117047f5f" providerId="ADAL" clId="{D93D8B19-FA20-47A5-B3D7-0A6BF3F53C46}" dt="2021-08-10T10:13:12.792" v="0" actId="2696"/>
-        <pc:sldMkLst>
-          <pc:docMk/>
-          <pc:sldMk cId="3364959005" sldId="290"/>
-        </pc:sldMkLst>
-      </pc:sldChg>
-      <pc:sldChg chg="del">
-        <pc:chgData name="Alessandro Edoardo Giorgio David" userId="f8954a66-e5ad-4a1c-9536-1d2117047f5f" providerId="ADAL" clId="{D93D8B19-FA20-47A5-B3D7-0A6BF3F53C46}" dt="2021-08-10T10:13:12.792" v="0" actId="2696"/>
-        <pc:sldMkLst>
-          <pc:docMk/>
-          <pc:sldMk cId="1841476595" sldId="291"/>
-        </pc:sldMkLst>
-      </pc:sldChg>
-      <pc:sldChg chg="del">
-        <pc:chgData name="Alessandro Edoardo Giorgio David" userId="f8954a66-e5ad-4a1c-9536-1d2117047f5f" providerId="ADAL" clId="{D93D8B19-FA20-47A5-B3D7-0A6BF3F53C46}" dt="2021-08-10T10:13:12.792" v="0" actId="2696"/>
-        <pc:sldMkLst>
-          <pc:docMk/>
-          <pc:sldMk cId="182014483" sldId="292"/>
-        </pc:sldMkLst>
-      </pc:sldChg>
-      <pc:sldChg chg="del">
-        <pc:chgData name="Alessandro Edoardo Giorgio David" userId="f8954a66-e5ad-4a1c-9536-1d2117047f5f" providerId="ADAL" clId="{D93D8B19-FA20-47A5-B3D7-0A6BF3F53C46}" dt="2021-08-10T10:13:12.792" v="0" actId="2696"/>
-        <pc:sldMkLst>
-          <pc:docMk/>
-          <pc:sldMk cId="2079178667" sldId="293"/>
-        </pc:sldMkLst>
-      </pc:sldChg>
-      <pc:sldChg chg="del">
-        <pc:chgData name="Alessandro Edoardo Giorgio David" userId="f8954a66-e5ad-4a1c-9536-1d2117047f5f" providerId="ADAL" clId="{D93D8B19-FA20-47A5-B3D7-0A6BF3F53C46}" dt="2021-08-10T10:13:12.792" v="0" actId="2696"/>
-        <pc:sldMkLst>
-          <pc:docMk/>
-          <pc:sldMk cId="2484884542" sldId="294"/>
-        </pc:sldMkLst>
-      </pc:sldChg>
-      <pc:sldChg chg="del">
-        <pc:chgData name="Alessandro Edoardo Giorgio David" userId="f8954a66-e5ad-4a1c-9536-1d2117047f5f" providerId="ADAL" clId="{D93D8B19-FA20-47A5-B3D7-0A6BF3F53C46}" dt="2021-08-10T10:13:12.792" v="0" actId="2696"/>
-        <pc:sldMkLst>
-          <pc:docMk/>
-          <pc:sldMk cId="2761851639" sldId="295"/>
-        </pc:sldMkLst>
-      </pc:sldChg>
-      <pc:sldChg chg="del">
-        <pc:chgData name="Alessandro Edoardo Giorgio David" userId="f8954a66-e5ad-4a1c-9536-1d2117047f5f" providerId="ADAL" clId="{D93D8B19-FA20-47A5-B3D7-0A6BF3F53C46}" dt="2021-08-10T10:13:12.792" v="0" actId="2696"/>
-        <pc:sldMkLst>
-          <pc:docMk/>
-          <pc:sldMk cId="3877361358" sldId="296"/>
-        </pc:sldMkLst>
-      </pc:sldChg>
-      <pc:sldChg chg="del">
-        <pc:chgData name="Alessandro Edoardo Giorgio David" userId="f8954a66-e5ad-4a1c-9536-1d2117047f5f" providerId="ADAL" clId="{D93D8B19-FA20-47A5-B3D7-0A6BF3F53C46}" dt="2021-08-10T10:13:12.792" v="0" actId="2696"/>
-        <pc:sldMkLst>
-          <pc:docMk/>
-          <pc:sldMk cId="3622387223" sldId="297"/>
-        </pc:sldMkLst>
-      </pc:sldChg>
-      <pc:sldChg chg="del">
-        <pc:chgData name="Alessandro Edoardo Giorgio David" userId="f8954a66-e5ad-4a1c-9536-1d2117047f5f" providerId="ADAL" clId="{D93D8B19-FA20-47A5-B3D7-0A6BF3F53C46}" dt="2021-08-10T10:13:12.792" v="0" actId="2696"/>
-        <pc:sldMkLst>
-          <pc:docMk/>
-          <pc:sldMk cId="1407459007" sldId="298"/>
-        </pc:sldMkLst>
-      </pc:sldChg>
-      <pc:sldChg chg="del">
-        <pc:chgData name="Alessandro Edoardo Giorgio David" userId="f8954a66-e5ad-4a1c-9536-1d2117047f5f" providerId="ADAL" clId="{D93D8B19-FA20-47A5-B3D7-0A6BF3F53C46}" dt="2021-08-10T10:13:12.792" v="0" actId="2696"/>
-        <pc:sldMkLst>
-          <pc:docMk/>
-          <pc:sldMk cId="2518038807" sldId="299"/>
-        </pc:sldMkLst>
-      </pc:sldChg>
-      <pc:sldChg chg="del">
-        <pc:chgData name="Alessandro Edoardo Giorgio David" userId="f8954a66-e5ad-4a1c-9536-1d2117047f5f" providerId="ADAL" clId="{D93D8B19-FA20-47A5-B3D7-0A6BF3F53C46}" dt="2021-08-10T10:13:12.792" v="0" actId="2696"/>
-        <pc:sldMkLst>
-          <pc:docMk/>
-          <pc:sldMk cId="3979447115" sldId="300"/>
-        </pc:sldMkLst>
-      </pc:sldChg>
-      <pc:sldChg chg="del">
-        <pc:chgData name="Alessandro Edoardo Giorgio David" userId="f8954a66-e5ad-4a1c-9536-1d2117047f5f" providerId="ADAL" clId="{D93D8B19-FA20-47A5-B3D7-0A6BF3F53C46}" dt="2021-08-10T10:13:12.792" v="0" actId="2696"/>
-        <pc:sldMkLst>
-          <pc:docMk/>
-          <pc:sldMk cId="1821133994" sldId="301"/>
-        </pc:sldMkLst>
-      </pc:sldChg>
-      <pc:sldChg chg="del">
-        <pc:chgData name="Alessandro Edoardo Giorgio David" userId="f8954a66-e5ad-4a1c-9536-1d2117047f5f" providerId="ADAL" clId="{D93D8B19-FA20-47A5-B3D7-0A6BF3F53C46}" dt="2021-08-10T10:13:12.792" v="0" actId="2696"/>
-        <pc:sldMkLst>
-          <pc:docMk/>
-          <pc:sldMk cId="2063098522" sldId="302"/>
-        </pc:sldMkLst>
-      </pc:sldChg>
-      <pc:sldChg chg="del">
-        <pc:chgData name="Alessandro Edoardo Giorgio David" userId="f8954a66-e5ad-4a1c-9536-1d2117047f5f" providerId="ADAL" clId="{D93D8B19-FA20-47A5-B3D7-0A6BF3F53C46}" dt="2021-08-10T10:13:12.792" v="0" actId="2696"/>
-        <pc:sldMkLst>
-          <pc:docMk/>
-          <pc:sldMk cId="1179535889" sldId="303"/>
-        </pc:sldMkLst>
-      </pc:sldChg>
-      <pc:sldChg chg="del">
-        <pc:chgData name="Alessandro Edoardo Giorgio David" userId="f8954a66-e5ad-4a1c-9536-1d2117047f5f" providerId="ADAL" clId="{D93D8B19-FA20-47A5-B3D7-0A6BF3F53C46}" dt="2021-08-10T10:13:12.792" v="0" actId="2696"/>
-        <pc:sldMkLst>
-          <pc:docMk/>
-          <pc:sldMk cId="2732596017" sldId="304"/>
-        </pc:sldMkLst>
-      </pc:sldChg>
-      <pc:sldChg chg="del">
-        <pc:chgData name="Alessandro Edoardo Giorgio David" userId="f8954a66-e5ad-4a1c-9536-1d2117047f5f" providerId="ADAL" clId="{D93D8B19-FA20-47A5-B3D7-0A6BF3F53C46}" dt="2021-08-10T10:13:12.792" v="0" actId="2696"/>
-        <pc:sldMkLst>
-          <pc:docMk/>
-          <pc:sldMk cId="4087049437" sldId="305"/>
-        </pc:sldMkLst>
-      </pc:sldChg>
-      <pc:sldChg chg="del">
-        <pc:chgData name="Alessandro Edoardo Giorgio David" userId="f8954a66-e5ad-4a1c-9536-1d2117047f5f" providerId="ADAL" clId="{D93D8B19-FA20-47A5-B3D7-0A6BF3F53C46}" dt="2021-08-10T10:13:12.792" v="0" actId="2696"/>
-        <pc:sldMkLst>
-          <pc:docMk/>
-          <pc:sldMk cId="3965762000" sldId="306"/>
-        </pc:sldMkLst>
-      </pc:sldChg>
-      <pc:sldChg chg="del">
-        <pc:chgData name="Alessandro Edoardo Giorgio David" userId="f8954a66-e5ad-4a1c-9536-1d2117047f5f" providerId="ADAL" clId="{D93D8B19-FA20-47A5-B3D7-0A6BF3F53C46}" dt="2021-08-10T10:13:12.792" v="0" actId="2696"/>
-        <pc:sldMkLst>
-          <pc:docMk/>
-          <pc:sldMk cId="990846201" sldId="307"/>
-        </pc:sldMkLst>
-      </pc:sldChg>
-      <pc:sldChg chg="del">
-        <pc:chgData name="Alessandro Edoardo Giorgio David" userId="f8954a66-e5ad-4a1c-9536-1d2117047f5f" providerId="ADAL" clId="{D93D8B19-FA20-47A5-B3D7-0A6BF3F53C46}" dt="2021-08-10T10:13:12.792" v="0" actId="2696"/>
-        <pc:sldMkLst>
-          <pc:docMk/>
-          <pc:sldMk cId="1459165216" sldId="308"/>
-        </pc:sldMkLst>
-      </pc:sldChg>
-      <pc:sldChg chg="del">
-        <pc:chgData name="Alessandro Edoardo Giorgio David" userId="f8954a66-e5ad-4a1c-9536-1d2117047f5f" providerId="ADAL" clId="{D93D8B19-FA20-47A5-B3D7-0A6BF3F53C46}" dt="2021-08-10T10:13:12.792" v="0" actId="2696"/>
-        <pc:sldMkLst>
-          <pc:docMk/>
-          <pc:sldMk cId="3495603576" sldId="309"/>
-        </pc:sldMkLst>
-      </pc:sldChg>
-      <pc:sldChg chg="del">
-        <pc:chgData name="Alessandro Edoardo Giorgio David" userId="f8954a66-e5ad-4a1c-9536-1d2117047f5f" providerId="ADAL" clId="{D93D8B19-FA20-47A5-B3D7-0A6BF3F53C46}" dt="2021-08-10T10:13:12.792" v="0" actId="2696"/>
-        <pc:sldMkLst>
-          <pc:docMk/>
-          <pc:sldMk cId="293460714" sldId="310"/>
-        </pc:sldMkLst>
-      </pc:sldChg>
-      <pc:sldChg chg="del">
-        <pc:chgData name="Alessandro Edoardo Giorgio David" userId="f8954a66-e5ad-4a1c-9536-1d2117047f5f" providerId="ADAL" clId="{D93D8B19-FA20-47A5-B3D7-0A6BF3F53C46}" dt="2021-08-10T10:13:12.792" v="0" actId="2696"/>
-        <pc:sldMkLst>
-          <pc:docMk/>
-          <pc:sldMk cId="3345643182" sldId="311"/>
-        </pc:sldMkLst>
-      </pc:sldChg>
-      <pc:sldChg chg="del">
-        <pc:chgData name="Alessandro Edoardo Giorgio David" userId="f8954a66-e5ad-4a1c-9536-1d2117047f5f" providerId="ADAL" clId="{D93D8B19-FA20-47A5-B3D7-0A6BF3F53C46}" dt="2021-08-10T10:13:12.792" v="0" actId="2696"/>
-        <pc:sldMkLst>
-          <pc:docMk/>
-          <pc:sldMk cId="20833125" sldId="312"/>
-        </pc:sldMkLst>
-      </pc:sldChg>
-      <pc:sldChg chg="del">
-        <pc:chgData name="Alessandro Edoardo Giorgio David" userId="f8954a66-e5ad-4a1c-9536-1d2117047f5f" providerId="ADAL" clId="{D93D8B19-FA20-47A5-B3D7-0A6BF3F53C46}" dt="2021-08-10T10:13:12.792" v="0" actId="2696"/>
-        <pc:sldMkLst>
-          <pc:docMk/>
-          <pc:sldMk cId="240118312" sldId="313"/>
-        </pc:sldMkLst>
-      </pc:sldChg>
-      <pc:sldChg chg="del">
-        <pc:chgData name="Alessandro Edoardo Giorgio David" userId="f8954a66-e5ad-4a1c-9536-1d2117047f5f" providerId="ADAL" clId="{D93D8B19-FA20-47A5-B3D7-0A6BF3F53C46}" dt="2021-08-10T10:13:12.792" v="0" actId="2696"/>
-        <pc:sldMkLst>
-          <pc:docMk/>
-          <pc:sldMk cId="2026102579" sldId="314"/>
-        </pc:sldMkLst>
-      </pc:sldChg>
-      <pc:sldChg chg="del">
-        <pc:chgData name="Alessandro Edoardo Giorgio David" userId="f8954a66-e5ad-4a1c-9536-1d2117047f5f" providerId="ADAL" clId="{D93D8B19-FA20-47A5-B3D7-0A6BF3F53C46}" dt="2021-08-10T10:13:12.792" v="0" actId="2696"/>
-        <pc:sldMkLst>
-          <pc:docMk/>
-          <pc:sldMk cId="1521168260" sldId="315"/>
-        </pc:sldMkLst>
-      </pc:sldChg>
-      <pc:sldChg chg="del">
-        <pc:chgData name="Alessandro Edoardo Giorgio David" userId="f8954a66-e5ad-4a1c-9536-1d2117047f5f" providerId="ADAL" clId="{D93D8B19-FA20-47A5-B3D7-0A6BF3F53C46}" dt="2021-08-10T10:13:12.792" v="0" actId="2696"/>
-        <pc:sldMkLst>
-          <pc:docMk/>
-          <pc:sldMk cId="3372665201" sldId="316"/>
-        </pc:sldMkLst>
-      </pc:sldChg>
-      <pc:sldChg chg="del">
-        <pc:chgData name="Alessandro Edoardo Giorgio David" userId="f8954a66-e5ad-4a1c-9536-1d2117047f5f" providerId="ADAL" clId="{D93D8B19-FA20-47A5-B3D7-0A6BF3F53C46}" dt="2021-08-10T10:13:12.792" v="0" actId="2696"/>
-        <pc:sldMkLst>
-          <pc:docMk/>
-          <pc:sldMk cId="2461815205" sldId="317"/>
-        </pc:sldMkLst>
-      </pc:sldChg>
-      <pc:sldChg chg="del">
-        <pc:chgData name="Alessandro Edoardo Giorgio David" userId="f8954a66-e5ad-4a1c-9536-1d2117047f5f" providerId="ADAL" clId="{D93D8B19-FA20-47A5-B3D7-0A6BF3F53C46}" dt="2021-08-10T10:13:12.792" v="0" actId="2696"/>
-        <pc:sldMkLst>
-          <pc:docMk/>
-          <pc:sldMk cId="1478560338" sldId="318"/>
-        </pc:sldMkLst>
-      </pc:sldChg>
-      <pc:sldChg chg="del">
-        <pc:chgData name="Alessandro Edoardo Giorgio David" userId="f8954a66-e5ad-4a1c-9536-1d2117047f5f" providerId="ADAL" clId="{D93D8B19-FA20-47A5-B3D7-0A6BF3F53C46}" dt="2021-08-10T10:13:12.792" v="0" actId="2696"/>
-        <pc:sldMkLst>
-          <pc:docMk/>
-          <pc:sldMk cId="618932863" sldId="319"/>
-        </pc:sldMkLst>
-      </pc:sldChg>
-      <pc:sldChg chg="del">
-        <pc:chgData name="Alessandro Edoardo Giorgio David" userId="f8954a66-e5ad-4a1c-9536-1d2117047f5f" providerId="ADAL" clId="{D93D8B19-FA20-47A5-B3D7-0A6BF3F53C46}" dt="2021-08-10T10:13:12.792" v="0" actId="2696"/>
-        <pc:sldMkLst>
-          <pc:docMk/>
-          <pc:sldMk cId="3339501348" sldId="320"/>
-        </pc:sldMkLst>
-      </pc:sldChg>
-      <pc:sldChg chg="del">
-        <pc:chgData name="Alessandro Edoardo Giorgio David" userId="f8954a66-e5ad-4a1c-9536-1d2117047f5f" providerId="ADAL" clId="{D93D8B19-FA20-47A5-B3D7-0A6BF3F53C46}" dt="2021-08-10T10:13:12.792" v="0" actId="2696"/>
-        <pc:sldMkLst>
-          <pc:docMk/>
-          <pc:sldMk cId="1078668927" sldId="321"/>
-        </pc:sldMkLst>
-      </pc:sldChg>
-      <pc:sldChg chg="del">
-        <pc:chgData name="Alessandro Edoardo Giorgio David" userId="f8954a66-e5ad-4a1c-9536-1d2117047f5f" providerId="ADAL" clId="{D93D8B19-FA20-47A5-B3D7-0A6BF3F53C46}" dt="2021-08-10T10:13:12.792" v="0" actId="2696"/>
-        <pc:sldMkLst>
-          <pc:docMk/>
-          <pc:sldMk cId="3535521216" sldId="322"/>
-        </pc:sldMkLst>
-      </pc:sldChg>
-      <pc:sldChg chg="del">
-        <pc:chgData name="Alessandro Edoardo Giorgio David" userId="f8954a66-e5ad-4a1c-9536-1d2117047f5f" providerId="ADAL" clId="{D93D8B19-FA20-47A5-B3D7-0A6BF3F53C46}" dt="2021-08-10T10:13:12.792" v="0" actId="2696"/>
-        <pc:sldMkLst>
-          <pc:docMk/>
-          <pc:sldMk cId="879024289" sldId="323"/>
-        </pc:sldMkLst>
-      </pc:sldChg>
-      <pc:sldChg chg="del">
-        <pc:chgData name="Alessandro Edoardo Giorgio David" userId="f8954a66-e5ad-4a1c-9536-1d2117047f5f" providerId="ADAL" clId="{D93D8B19-FA20-47A5-B3D7-0A6BF3F53C46}" dt="2021-08-10T10:13:12.792" v="0" actId="2696"/>
-        <pc:sldMkLst>
-          <pc:docMk/>
-          <pc:sldMk cId="2507292240" sldId="324"/>
-        </pc:sldMkLst>
-      </pc:sldChg>
-      <pc:sldChg chg="del">
-        <pc:chgData name="Alessandro Edoardo Giorgio David" userId="f8954a66-e5ad-4a1c-9536-1d2117047f5f" providerId="ADAL" clId="{D93D8B19-FA20-47A5-B3D7-0A6BF3F53C46}" dt="2021-08-10T10:13:12.792" v="0" actId="2696"/>
-        <pc:sldMkLst>
-          <pc:docMk/>
-          <pc:sldMk cId="2212003161" sldId="325"/>
-        </pc:sldMkLst>
-      </pc:sldChg>
-      <pc:sldChg chg="del">
-        <pc:chgData name="Alessandro Edoardo Giorgio David" userId="f8954a66-e5ad-4a1c-9536-1d2117047f5f" providerId="ADAL" clId="{D93D8B19-FA20-47A5-B3D7-0A6BF3F53C46}" dt="2021-08-10T10:13:12.792" v="0" actId="2696"/>
-        <pc:sldMkLst>
-          <pc:docMk/>
-          <pc:sldMk cId="1071665624" sldId="326"/>
-        </pc:sldMkLst>
-      </pc:sldChg>
-      <pc:sldChg chg="del">
-        <pc:chgData name="Alessandro Edoardo Giorgio David" userId="f8954a66-e5ad-4a1c-9536-1d2117047f5f" providerId="ADAL" clId="{D93D8B19-FA20-47A5-B3D7-0A6BF3F53C46}" dt="2021-08-10T10:13:12.792" v="0" actId="2696"/>
-        <pc:sldMkLst>
-          <pc:docMk/>
-          <pc:sldMk cId="2140800234" sldId="327"/>
-        </pc:sldMkLst>
-      </pc:sldChg>
-      <pc:sldChg chg="del">
-        <pc:chgData name="Alessandro Edoardo Giorgio David" userId="f8954a66-e5ad-4a1c-9536-1d2117047f5f" providerId="ADAL" clId="{D93D8B19-FA20-47A5-B3D7-0A6BF3F53C46}" dt="2021-08-10T10:13:12.792" v="0" actId="2696"/>
-        <pc:sldMkLst>
-          <pc:docMk/>
-          <pc:sldMk cId="2741554749" sldId="328"/>
-        </pc:sldMkLst>
-      </pc:sldChg>
-      <pc:sldChg chg="del">
-        <pc:chgData name="Alessandro Edoardo Giorgio David" userId="f8954a66-e5ad-4a1c-9536-1d2117047f5f" providerId="ADAL" clId="{D93D8B19-FA20-47A5-B3D7-0A6BF3F53C46}" dt="2021-08-10T10:13:12.792" v="0" actId="2696"/>
-        <pc:sldMkLst>
-          <pc:docMk/>
-          <pc:sldMk cId="1026349041" sldId="329"/>
-        </pc:sldMkLst>
-      </pc:sldChg>
-      <pc:sldChg chg="del">
-        <pc:chgData name="Alessandro Edoardo Giorgio David" userId="f8954a66-e5ad-4a1c-9536-1d2117047f5f" providerId="ADAL" clId="{D93D8B19-FA20-47A5-B3D7-0A6BF3F53C46}" dt="2021-08-10T10:13:12.792" v="0" actId="2696"/>
-        <pc:sldMkLst>
-          <pc:docMk/>
-          <pc:sldMk cId="2892898324" sldId="330"/>
-        </pc:sldMkLst>
-      </pc:sldChg>
-      <pc:sldChg chg="del">
-        <pc:chgData name="Alessandro Edoardo Giorgio David" userId="f8954a66-e5ad-4a1c-9536-1d2117047f5f" providerId="ADAL" clId="{D93D8B19-FA20-47A5-B3D7-0A6BF3F53C46}" dt="2021-08-10T10:13:12.792" v="0" actId="2696"/>
-        <pc:sldMkLst>
-          <pc:docMk/>
-          <pc:sldMk cId="3188304425" sldId="331"/>
-        </pc:sldMkLst>
-      </pc:sldChg>
-      <pc:sldChg chg="del">
-        <pc:chgData name="Alessandro Edoardo Giorgio David" userId="f8954a66-e5ad-4a1c-9536-1d2117047f5f" providerId="ADAL" clId="{D93D8B19-FA20-47A5-B3D7-0A6BF3F53C46}" dt="2021-08-10T10:13:12.792" v="0" actId="2696"/>
-        <pc:sldMkLst>
-          <pc:docMk/>
-          <pc:sldMk cId="3922909339" sldId="332"/>
-        </pc:sldMkLst>
-      </pc:sldChg>
-      <pc:sldChg chg="del">
-        <pc:chgData name="Alessandro Edoardo Giorgio David" userId="f8954a66-e5ad-4a1c-9536-1d2117047f5f" providerId="ADAL" clId="{D93D8B19-FA20-47A5-B3D7-0A6BF3F53C46}" dt="2021-08-10T10:13:12.792" v="0" actId="2696"/>
-        <pc:sldMkLst>
-          <pc:docMk/>
-          <pc:sldMk cId="1049072842" sldId="333"/>
-        </pc:sldMkLst>
-      </pc:sldChg>
-      <pc:sldChg chg="del">
-        <pc:chgData name="Alessandro Edoardo Giorgio David" userId="f8954a66-e5ad-4a1c-9536-1d2117047f5f" providerId="ADAL" clId="{D93D8B19-FA20-47A5-B3D7-0A6BF3F53C46}" dt="2021-08-10T10:13:12.792" v="0" actId="2696"/>
-        <pc:sldMkLst>
-          <pc:docMk/>
-          <pc:sldMk cId="2210811804" sldId="334"/>
-        </pc:sldMkLst>
-      </pc:sldChg>
-      <pc:sldChg chg="del">
-        <pc:chgData name="Alessandro Edoardo Giorgio David" userId="f8954a66-e5ad-4a1c-9536-1d2117047f5f" providerId="ADAL" clId="{D93D8B19-FA20-47A5-B3D7-0A6BF3F53C46}" dt="2021-08-10T10:13:12.792" v="0" actId="2696"/>
-        <pc:sldMkLst>
-          <pc:docMk/>
-          <pc:sldMk cId="2200792181" sldId="335"/>
-        </pc:sldMkLst>
-      </pc:sldChg>
-      <pc:sldChg chg="del">
-        <pc:chgData name="Alessandro Edoardo Giorgio David" userId="f8954a66-e5ad-4a1c-9536-1d2117047f5f" providerId="ADAL" clId="{D93D8B19-FA20-47A5-B3D7-0A6BF3F53C46}" dt="2021-08-10T10:13:12.792" v="0" actId="2696"/>
-        <pc:sldMkLst>
-          <pc:docMk/>
-          <pc:sldMk cId="2223886345" sldId="336"/>
-        </pc:sldMkLst>
-      </pc:sldChg>
-      <pc:sldChg chg="del">
-        <pc:chgData name="Alessandro Edoardo Giorgio David" userId="f8954a66-e5ad-4a1c-9536-1d2117047f5f" providerId="ADAL" clId="{D93D8B19-FA20-47A5-B3D7-0A6BF3F53C46}" dt="2021-08-10T10:13:12.792" v="0" actId="2696"/>
-        <pc:sldMkLst>
-          <pc:docMk/>
-          <pc:sldMk cId="2386622032" sldId="337"/>
-        </pc:sldMkLst>
-      </pc:sldChg>
-      <pc:sldChg chg="del">
-        <pc:chgData name="Alessandro Edoardo Giorgio David" userId="f8954a66-e5ad-4a1c-9536-1d2117047f5f" providerId="ADAL" clId="{D93D8B19-FA20-47A5-B3D7-0A6BF3F53C46}" dt="2021-08-10T10:13:12.792" v="0" actId="2696"/>
-        <pc:sldMkLst>
-          <pc:docMk/>
-          <pc:sldMk cId="863600783" sldId="338"/>
-        </pc:sldMkLst>
-      </pc:sldChg>
-      <pc:sldChg chg="del">
-        <pc:chgData name="Alessandro Edoardo Giorgio David" userId="f8954a66-e5ad-4a1c-9536-1d2117047f5f" providerId="ADAL" clId="{D93D8B19-FA20-47A5-B3D7-0A6BF3F53C46}" dt="2021-08-10T10:13:12.792" v="0" actId="2696"/>
-        <pc:sldMkLst>
-          <pc:docMk/>
-          <pc:sldMk cId="3760396929" sldId="339"/>
-        </pc:sldMkLst>
-      </pc:sldChg>
-      <pc:sldChg chg="del">
-        <pc:chgData name="Alessandro Edoardo Giorgio David" userId="f8954a66-e5ad-4a1c-9536-1d2117047f5f" providerId="ADAL" clId="{D93D8B19-FA20-47A5-B3D7-0A6BF3F53C46}" dt="2021-08-10T10:13:12.792" v="0" actId="2696"/>
-        <pc:sldMkLst>
-          <pc:docMk/>
-          <pc:sldMk cId="4043709138" sldId="340"/>
-        </pc:sldMkLst>
       </pc:sldChg>
     </pc:docChg>
   </pc:docChgLst>
@@ -5208,7 +5208,7 @@
           <a:p>
             <a:fld id="{2A8A781A-1859-4C85-BF75-12C8100C455E}" type="datetimeFigureOut">
               <a:rPr lang="nb-NO" smtClean="0"/>
-              <a:t>15.11.2021</a:t>
+              <a:t>28.09.2026</a:t>
             </a:fld>
             <a:endParaRPr lang="nb-NO" dirty="0"/>
           </a:p>
@@ -5385,7 +5385,7 @@
           <a:p>
             <a:fld id="{8B442447-825E-F44A-AE66-BBD0FC2F1FF6}" type="datetimeFigureOut">
               <a:rPr lang="nb-NO" smtClean="0"/>
-              <a:t>15.11.2021</a:t>
+              <a:t>28.09.2026</a:t>
             </a:fld>
             <a:endParaRPr lang="nb-NO" dirty="0"/>
           </a:p>
@@ -14132,41 +14132,6 @@
           </a:p>
         </p:txBody>
       </p:sp>
-      <mc:AlternateContent xmlns:mc="http://schemas.openxmlformats.org/markup-compatibility/2006">
-        <mc:Choice xmlns:pslz="http://schemas.microsoft.com/office/powerpoint/2016/slidezoom" Requires="pslz"/>
-        <mc:Fallback>
-          <p:pic>
-            <p:nvPicPr>
-              <p:cNvPr id="5" name="Slide Zoom 4">
-                <a:extLst>
-                  <a:ext uri="{FF2B5EF4-FFF2-40B4-BE49-F238E27FC236}">
-                    <a16:creationId xmlns:a16="http://schemas.microsoft.com/office/drawing/2014/main" id="{7A106121-6E48-4CDF-A06D-0BB49F2BA4EC}"/>
-                  </a:ext>
-                </a:extLst>
-              </p:cNvPr>
-              <p:cNvPicPr>
-                <a:picLocks noGrp="1" noRot="1" noChangeAspect="1" noMove="1" noResize="1" noEditPoints="1" noAdjustHandles="1" noChangeArrowheads="1" noChangeShapeType="1"/>
-              </p:cNvPicPr>
-              <p:nvPr/>
-            </p:nvPicPr>
-            <p:blipFill>
-              <a:blip r:embed="rId2"/>
-              <a:stretch>
-                <a:fillRect/>
-              </a:stretch>
-            </p:blipFill>
-            <p:spPr>
-              <a:xfrm>
-                <a:off x="3631804" y="1682255"/>
-                <a:ext cx="1880392" cy="1175245"/>
-              </a:xfrm>
-              <a:prstGeom prst="rect">
-                <a:avLst/>
-              </a:prstGeom>
-            </p:spPr>
-          </p:pic>
-        </mc:Fallback>
-      </mc:AlternateContent>
     </p:spTree>
     <p:extLst>
       <p:ext uri="{BB962C8B-B14F-4D97-AF65-F5344CB8AC3E}">
@@ -14427,8 +14392,8 @@
           </a:p>
         </p:txBody>
       </p:sp>
-      <mc:AlternateContent xmlns:mc="http://schemas.openxmlformats.org/markup-compatibility/2006">
-        <mc:Choice xmlns:a14="http://schemas.microsoft.com/office/drawing/2010/main" Requires="a14">
+      <mc:AlternateContent xmlns:mc="http://schemas.openxmlformats.org/markup-compatibility/2006" xmlns:a14="http://schemas.microsoft.com/office/drawing/2010/main">
+        <mc:Choice Requires="a14">
           <p:sp>
             <p:nvSpPr>
               <p:cNvPr id="3" name="Content Placeholder 2">
@@ -14566,7 +14531,7 @@
             </p:txBody>
           </p:sp>
         </mc:Choice>
-        <mc:Fallback>
+        <mc:Fallback xmlns="">
           <p:sp>
             <p:nvSpPr>
               <p:cNvPr id="3" name="Content Placeholder 2">
@@ -14706,7 +14671,7 @@
 </file>
 
 <file path=ppt/slides/slide15.xml><?xml version="1.0" encoding="utf-8"?>
-<p:sld xmlns:a="http://schemas.openxmlformats.org/drawingml/2006/main" xmlns:p="http://schemas.openxmlformats.org/presentationml/2006/main" xmlns:r="http://schemas.openxmlformats.org/officeDocument/2006/relationships">
+<p:sld xmlns:a="http://schemas.openxmlformats.org/drawingml/2006/main" xmlns:r="http://schemas.openxmlformats.org/officeDocument/2006/relationships" xmlns:p="http://schemas.openxmlformats.org/presentationml/2006/main">
   <p:cSld>
     <p:spTree>
       <p:nvGrpSpPr>
@@ -14714,7 +14679,14 @@
         <p:cNvGrpSpPr/>
         <p:nvPr/>
       </p:nvGrpSpPr>
-      <p:grpSpPr/>
+      <p:grpSpPr>
+        <a:xfrm>
+          <a:off x="0" y="0"/>
+          <a:ext cx="0" cy="0"/>
+          <a:chOff x="0" y="0"/>
+          <a:chExt cx="0" cy="0"/>
+        </a:xfrm>
+      </p:grpSpPr>
       <p:sp>
         <p:nvSpPr>
           <p:cNvPr id="2" name="Title 1"/>
@@ -14751,45 +14723,64 @@
           <a:bodyPr wrap="square"/>
           <a:lstStyle/>
           <a:p>
-            <a:pPr/>
-            <a:r>
+            <a:r>
+              <a:rPr dirty="0"/>
               <a:t>Contracted (nominal) salary in Year 3: $3,250K</a:t>
             </a:r>
           </a:p>
           <a:p>
-            <a:pPr/>
-            <a:r>
-              <a:t>Step 1 — discount for time only, at i = 8%:</a:t>
+            <a:r>
+              <a:rPr dirty="0"/>
+              <a:t>Step 1 — discount for time only, at </a:t>
+            </a:r>
+            <a:r>
+              <a:rPr dirty="0" err="1"/>
+              <a:t>i</a:t>
+            </a:r>
+            <a:r>
+              <a:rPr dirty="0"/>
+              <a:t> = 8%:</a:t>
             </a:r>
           </a:p>
           <a:p>
             <a:pPr lvl="1"/>
             <a:r>
+              <a:rPr dirty="0"/>
               <a:t>PV = 3,250 / (1.08)³ = 3,250 / 1.2597 ≈ $2,580K</a:t>
             </a:r>
           </a:p>
           <a:p>
-            <a:pPr/>
-            <a:r>
+            <a:r>
+              <a:rPr dirty="0"/>
               <a:t>Step 2 — weight by the compounding chance he is still on the roster in year 3, p = 0.8:</a:t>
             </a:r>
           </a:p>
           <a:p>
             <a:pPr lvl="1"/>
             <a:r>
+              <a:rPr dirty="0"/>
               <a:t>Survival to year 3 = p³ = 0.8³ = 0.512</a:t>
             </a:r>
           </a:p>
           <a:p>
             <a:pPr lvl="1"/>
             <a:r>
+              <a:rPr dirty="0"/>
               <a:t>Expected PV = 2,580 × 0.512 ≈ $1,321K</a:t>
             </a:r>
           </a:p>
           <a:p>
-            <a:pPr/>
-            <a:r>
-              <a:t>Result: a $3,250K salary line is really worth about $1,321K today — a 59% reduction once time and retention risk are both priced in</a:t>
+            <a:r>
+              <a:rPr dirty="0"/>
+              <a:t>Result: a $3,250K salary line is really worth about $1,321K today</a:t>
+            </a:r>
+            <a:r>
+              <a:rPr lang="it-IT" dirty="0"/>
+              <a:t>,</a:t>
+            </a:r>
+            <a:r>
+              <a:rPr dirty="0"/>
+              <a:t> a 59% reduction once time and retention risk are both priced in</a:t>
             </a:r>
           </a:p>
         </p:txBody>
@@ -14923,7 +14914,7 @@
 </file>
 
 <file path=ppt/slides/slide17.xml><?xml version="1.0" encoding="utf-8"?>
-<p:sld xmlns:a="http://schemas.openxmlformats.org/drawingml/2006/main" xmlns:p="http://schemas.openxmlformats.org/presentationml/2006/main" xmlns:r="http://schemas.openxmlformats.org/officeDocument/2006/relationships">
+<p:sld xmlns:a="http://schemas.openxmlformats.org/drawingml/2006/main" xmlns:r="http://schemas.openxmlformats.org/officeDocument/2006/relationships" xmlns:p="http://schemas.openxmlformats.org/presentationml/2006/main">
   <p:cSld>
     <p:spTree>
       <p:nvGrpSpPr>
@@ -14931,7 +14922,14 @@
         <p:cNvGrpSpPr/>
         <p:nvPr/>
       </p:nvGrpSpPr>
-      <p:grpSpPr/>
+      <p:grpSpPr>
+        <a:xfrm>
+          <a:off x="0" y="0"/>
+          <a:ext cx="0" cy="0"/>
+          <a:chOff x="0" y="0"/>
+          <a:chExt cx="0" cy="0"/>
+        </a:xfrm>
+      </p:grpSpPr>
       <p:sp>
         <p:nvSpPr>
           <p:cNvPr id="2" name="Title 1"/>
@@ -14986,7 +14984,7 @@
 </file>
 
 <file path=ppt/slides/slide18.xml><?xml version="1.0" encoding="utf-8"?>
-<p:sld xmlns:a="http://schemas.openxmlformats.org/drawingml/2006/main" xmlns:p="http://schemas.openxmlformats.org/presentationml/2006/main" xmlns:r="http://schemas.openxmlformats.org/officeDocument/2006/relationships">
+<p:sld xmlns:a="http://schemas.openxmlformats.org/drawingml/2006/main" xmlns:r="http://schemas.openxmlformats.org/officeDocument/2006/relationships" xmlns:p="http://schemas.openxmlformats.org/presentationml/2006/main">
   <p:cSld>
     <p:spTree>
       <p:nvGrpSpPr>
@@ -14994,7 +14992,14 @@
         <p:cNvGrpSpPr/>
         <p:nvPr/>
       </p:nvGrpSpPr>
-      <p:grpSpPr/>
+      <p:grpSpPr>
+        <a:xfrm>
+          <a:off x="0" y="0"/>
+          <a:ext cx="0" cy="0"/>
+          <a:chOff x="0" y="0"/>
+          <a:chExt cx="0" cy="0"/>
+        </a:xfrm>
+      </p:grpSpPr>
       <p:sp>
         <p:nvSpPr>
           <p:cNvPr id="2" name="Title 1"/>
@@ -15031,44 +15036,54 @@
           <a:bodyPr wrap="square"/>
           <a:lstStyle/>
           <a:p>
-            <a:pPr/>
-            <a:r>
-              <a:t>NFL: contracts are mostly not guaranteed — a cut player forfeits future salary (keeps only the bonus, per the earlier slide)</a:t>
-            </a:r>
-          </a:p>
-          <a:p>
-            <a:pPr/>
-            <a:r>
+            <a:r>
+              <a:rPr dirty="0"/>
+              <a:t>NFL: contracts are mostly not guaranteed — a cut player forfeits future salary (keeps only the bonus)</a:t>
+            </a:r>
+          </a:p>
+          <a:p>
+            <a:r>
+              <a:rPr dirty="0"/>
               <a:t>NBA (from Lecture 8): contracts are fully guaranteed — salary is owed even if the player is cut, so p = 1 and only time is discounted</a:t>
             </a:r>
           </a:p>
           <a:p>
-            <a:pPr/>
-            <a:r>
+            <a:r>
+              <a:rPr dirty="0"/>
               <a:t>Same nominal salary → higher expected value under a guaranteed contract</a:t>
             </a:r>
           </a:p>
           <a:p>
-            <a:pPr/>
-            <a:r>
-              <a:t>Ronde Barber, at i = 8%:</a:t>
+            <a:r>
+              <a:rPr dirty="0"/>
+              <a:t>Ronde Barber, at </a:t>
+            </a:r>
+            <a:r>
+              <a:rPr dirty="0" err="1"/>
+              <a:t>i</a:t>
+            </a:r>
+            <a:r>
+              <a:rPr dirty="0"/>
+              <a:t> = 8%:</a:t>
             </a:r>
           </a:p>
           <a:p>
             <a:pPr lvl="1"/>
             <a:r>
+              <a:rPr dirty="0"/>
               <a:t>NFL-style (p = 0.8): Expected PV = $7,118K</a:t>
             </a:r>
           </a:p>
           <a:p>
             <a:pPr lvl="1"/>
             <a:r>
+              <a:rPr dirty="0"/>
               <a:t>If fully guaranteed, NBA-style (p = 1): PV = $13,826K — about 94% more, for the exact same salary numbers</a:t>
             </a:r>
           </a:p>
           <a:p>
-            <a:pPr/>
-            <a:r>
+            <a:r>
+              <a:rPr dirty="0"/>
               <a:t>Guarantee structure is itself a form of value — not just the dollar amount on paper</a:t>
             </a:r>
           </a:p>
@@ -15083,7 +15098,7 @@
 </file>
 
 <file path=ppt/slides/slide19.xml><?xml version="1.0" encoding="utf-8"?>
-<p:sld xmlns:a="http://schemas.openxmlformats.org/drawingml/2006/main" xmlns:p="http://schemas.openxmlformats.org/presentationml/2006/main" xmlns:r="http://schemas.openxmlformats.org/officeDocument/2006/relationships">
+<p:sld xmlns:a="http://schemas.openxmlformats.org/drawingml/2006/main" xmlns:r="http://schemas.openxmlformats.org/officeDocument/2006/relationships" xmlns:p="http://schemas.openxmlformats.org/presentationml/2006/main">
   <p:cSld>
     <p:spTree>
       <p:nvGrpSpPr>
@@ -15091,7 +15106,14 @@
         <p:cNvGrpSpPr/>
         <p:nvPr/>
       </p:nvGrpSpPr>
-      <p:grpSpPr/>
+      <p:grpSpPr>
+        <a:xfrm>
+          <a:off x="0" y="0"/>
+          <a:ext cx="0" cy="0"/>
+          <a:chOff x="0" y="0"/>
+          <a:chExt cx="0" cy="0"/>
+        </a:xfrm>
+      </p:grpSpPr>
       <p:sp>
         <p:nvSpPr>
           <p:cNvPr id="2" name="Title 1"/>
@@ -15128,31 +15150,26 @@
           <a:bodyPr wrap="square"/>
           <a:lstStyle/>
           <a:p>
-            <a:pPr/>
             <a:r>
               <a:t>Money today is worth more than the same money tomorrow — always discount future cash flows before comparing them</a:t>
             </a:r>
           </a:p>
           <a:p>
-            <a:pPr/>
             <a:r>
               <a:t>Discount rate (i) ≠ inflation (π) — related but distinct concepts</a:t>
             </a:r>
           </a:p>
           <a:p>
-            <a:pPr/>
             <a:r>
               <a:t>A contract’s reported (nominal) value overstates its true worth once you account for both time and risk</a:t>
             </a:r>
           </a:p>
           <a:p>
-            <a:pPr/>
             <a:r>
               <a:t>Expected PV = discount for time, (1+i)ᵗ, AND for the probability the cash flow actually happens, pᵗ</a:t>
             </a:r>
           </a:p>
           <a:p>
-            <a:pPr/>
             <a:r>
               <a:t>Whether a cash flow is guaranteed changes its value — before you’ve even factored in risk aversion</a:t>
             </a:r>
@@ -15301,8 +15318,8 @@
           </a:p>
         </p:txBody>
       </p:sp>
-      <mc:AlternateContent xmlns:mc="http://schemas.openxmlformats.org/markup-compatibility/2006">
-        <mc:Choice xmlns:pslz="http://schemas.microsoft.com/office/powerpoint/2016/slidezoom" Requires="pslz">
+      <mc:AlternateContent xmlns:mc="http://schemas.openxmlformats.org/markup-compatibility/2006" xmlns:pslz="http://schemas.microsoft.com/office/powerpoint/2016/slidezoom">
+        <mc:Choice Requires="pslz">
           <p:graphicFrame>
             <p:nvGraphicFramePr>
               <p:cNvPr id="5" name="Slide Zoom 4">
@@ -15354,7 +15371,7 @@
             </a:graphic>
           </p:graphicFrame>
         </mc:Choice>
-        <mc:Fallback>
+        <mc:Fallback xmlns="">
           <p:pic>
             <p:nvPicPr>
               <p:cNvPr id="5" name="Slide Zoom 4">
@@ -15370,7 +15387,7 @@
               <p:nvPr/>
             </p:nvPicPr>
             <p:blipFill>
-              <a:blip r:embed="rId2"/>
+              <a:blip r:embed="rId3"/>
               <a:stretch>
                 <a:fillRect/>
               </a:stretch>
@@ -15387,8 +15404,8 @@
           </p:pic>
         </mc:Fallback>
       </mc:AlternateContent>
-      <mc:AlternateContent xmlns:mc="http://schemas.openxmlformats.org/markup-compatibility/2006">
-        <mc:Choice xmlns:pslz="http://schemas.microsoft.com/office/powerpoint/2016/slidezoom" Requires="pslz">
+      <mc:AlternateContent xmlns:mc="http://schemas.openxmlformats.org/markup-compatibility/2006" xmlns:pslz="http://schemas.microsoft.com/office/powerpoint/2016/slidezoom">
+        <mc:Choice Requires="pslz">
           <p:graphicFrame>
             <p:nvGraphicFramePr>
               <p:cNvPr id="8" name="Slide Zoom 7">
@@ -15419,7 +15436,7 @@
                   <pslz:sldZmObj sldId="283" cId="1235559135">
                     <pslz:zmPr id="{54BAD520-6A24-402D-89D9-3CE3A327AB89}" imageType="cover" transitionDur="1000" showBg="0">
                       <p166:blipFill xmlns:p166="http://schemas.microsoft.com/office/powerpoint/2016/6/main">
-                        <a:blip r:embed="rId3"/>
+                        <a:blip r:embed="rId4"/>
                         <a:stretch>
                           <a:fillRect/>
                         </a:stretch>
@@ -15440,7 +15457,7 @@
             </a:graphic>
           </p:graphicFrame>
         </mc:Choice>
-        <mc:Fallback>
+        <mc:Fallback xmlns="">
           <p:pic>
             <p:nvPicPr>
               <p:cNvPr id="8" name="Slide Zoom 7">
@@ -15456,7 +15473,7 @@
               <p:nvPr/>
             </p:nvPicPr>
             <p:blipFill>
-              <a:blip r:embed="rId3"/>
+              <a:blip r:embed="rId5"/>
               <a:stretch>
                 <a:fillRect/>
               </a:stretch>
@@ -15617,87 +15634,65 @@
               <a:lstStyle/>
               <a:p>
                 <a:r>
-                  <a:rPr lang="it-IT" sz="2000" dirty="0"/>
-                  <a:t>Today’s money is worth more that the same amount in the future</a:t>
+                  <a:rPr lang="en-US" sz="2000" dirty="0"/>
+                  <a:t>Today’s money is worth more than the same amount in the future, for two separate reasons:</a:t>
                 </a:r>
               </a:p>
               <a:p>
                 <a:pPr lvl="1"/>
                 <a:r>
-                  <a:rPr lang="it-IT" sz="2000" dirty="0"/>
-                  <a:t>Today’s money takes into account any interest rate (i) </a:t>
-                </a:r>
-                <a:r>
-                  <a:rPr lang="it-IT" sz="2000" dirty="0">
-                    <a:sym typeface="Wingdings" panose="05000000000000000000" pitchFamily="2" charset="2"/>
-                  </a:rPr>
-                  <a:t>  investing</a:t>
-                </a:r>
-              </a:p>
-              <a:p>
-                <a:pPr lvl="1"/>
-                <a:r>
-                  <a:rPr lang="it-IT" sz="2000" dirty="0">
-                    <a:sym typeface="Wingdings" panose="05000000000000000000" pitchFamily="2" charset="2"/>
-                  </a:rPr>
-                  <a:t>Unspent money today can lose value in the future </a:t>
-                </a:r>
-              </a:p>
-              <a:p>
-                <a:pPr lvl="2"/>
-                <a:r>
-                  <a:rPr lang="it-IT" sz="2000" dirty="0">
-                    <a:sym typeface="Wingdings" panose="05000000000000000000" pitchFamily="2" charset="2"/>
-                  </a:rPr>
-                  <a:t>Inflation (</a:t>
+                  <a:rPr lang="en-US" sz="2000" b="1" dirty="0"/>
+                  <a:t>Reason 1 — Inflation (</a:t>
                 </a:r>
                 <a14:m>
                   <m:oMath xmlns:m="http://schemas.openxmlformats.org/officeDocument/2006/math">
                     <m:r>
-                      <a:rPr lang="nb-NO" sz="2000" b="0" i="1" smtClean="0">
+                      <a:rPr lang="nb-NO" sz="2000" b="1" i="1" smtClean="0">
                         <a:latin typeface="Cambria Math" panose="02040503050406030204" pitchFamily="18" charset="0"/>
-                        <a:sym typeface="Wingdings" panose="05000000000000000000" pitchFamily="2" charset="2"/>
                       </a:rPr>
                       <m:t>𝜋</m:t>
                     </m:r>
                   </m:oMath>
                 </a14:m>
                 <a:r>
-                  <a:rPr lang="it-IT" sz="2000" dirty="0">
-                    <a:sym typeface="Wingdings" panose="05000000000000000000" pitchFamily="2" charset="2"/>
-                  </a:rPr>
+                  <a:rPr lang="en-US" sz="2000" b="1" dirty="0"/>
                   <a:t>)</a:t>
                 </a:r>
               </a:p>
               <a:p>
                 <a:pPr lvl="2"/>
                 <a:r>
-                  <a:rPr lang="it-IT" sz="2000" dirty="0">
-                    <a:sym typeface="Wingdings" panose="05000000000000000000" pitchFamily="2" charset="2"/>
-                  </a:rPr>
-                  <a:t>Rate of return for money invested</a:t>
+                  <a:rPr lang="en-US" sz="1800" dirty="0"/>
+                  <a:t>Prices rise over time, so a dollar today buys more than the same dollar will buy later</a:t>
                 </a:r>
               </a:p>
               <a:p>
-                <a:pPr lvl="3"/>
+                <a:pPr lvl="1"/>
                 <a:r>
-                  <a:rPr lang="it-IT" sz="1800" dirty="0">
-                    <a:sym typeface="Wingdings" panose="05000000000000000000" pitchFamily="2" charset="2"/>
-                  </a:rPr>
-                  <a:t>Discount rate </a:t>
+                  <a:rPr lang="en-US" sz="2000" b="1" dirty="0"/>
+                  <a:t>Reason 2 — The Discount Rate (</a:t>
+                </a:r>
+                <a14:m>
+                  <m:oMath xmlns:m="http://schemas.openxmlformats.org/officeDocument/2006/math">
+                    <m:r>
+                      <a:rPr lang="nb-NO" sz="2000" b="1" i="1" smtClean="0">
+                        <a:latin typeface="Cambria Math" panose="02040503050406030204" pitchFamily="18" charset="0"/>
+                      </a:rPr>
+                      <m:t>𝑖</m:t>
+                    </m:r>
+                  </m:oMath>
+                </a14:m>
+                <a:r>
+                  <a:rPr lang="en-US" sz="2000" b="1" dirty="0"/>
+                  <a:t>)</a:t>
                 </a:r>
               </a:p>
               <a:p>
                 <a:pPr lvl="2"/>
-                <a:endParaRPr lang="it-IT" sz="2000" dirty="0">
-                  <a:sym typeface="Wingdings" panose="05000000000000000000" pitchFamily="2" charset="2"/>
-                </a:endParaRPr>
-              </a:p>
-              <a:p>
-                <a:pPr marL="685800" lvl="2" indent="0">
-                  <a:buNone/>
-                </a:pPr>
-                <a:endParaRPr lang="en-US" sz="2000" dirty="0"/>
+                <a:r>
+                  <a:rPr lang="en-US" sz="1800" dirty="0"/>
+                  <a:t>Today’s money could be invested right now — a future payment has to compete with what that money could already have earned</a:t>
+                </a:r>
               </a:p>
             </p:txBody>
           </p:sp>
@@ -15723,7 +15718,7 @@
               <a:blipFill>
                 <a:blip r:embed="rId2"/>
                 <a:stretch>
-                  <a:fillRect l="-696" t="-2015"/>
+                  <a:fillRect l="-696" t="-2015" r="-1005"/>
                 </a:stretch>
               </a:blipFill>
             </p:spPr>
@@ -15765,8 +15760,8 @@
               </p:nvPr>
             </p:nvGraphicFramePr>
             <p:xfrm>
-              <a:off x="4950000" y="2300000"/>
-              <a:ext cx="4194000" cy="2620000"/>
+              <a:off x="4750000" y="3550000"/>
+              <a:ext cx="4194000" cy="1990000"/>
             </p:xfrm>
             <a:graphic>
               <a:graphicData uri="http://schemas.microsoft.com/office/powerpoint/2016/slidezoom">
@@ -15782,7 +15777,7 @@
                       <p166:spPr xmlns:p166="http://schemas.microsoft.com/office/powerpoint/2016/6/main">
                         <a:xfrm>
                           <a:off x="0" y="0"/>
-                          <a:ext cx="3275056" cy="2046910"/>
+                          <a:ext cx="4194000" cy="1990000"/>
                         </a:xfrm>
                         <a:prstGeom prst="rect">
                           <a:avLst/>
@@ -15851,8 +15846,8 @@
               </p:nvPr>
             </p:nvGraphicFramePr>
             <p:xfrm>
-              <a:off x="1400000" y="3050000"/>
-              <a:ext cx="3200000" cy="2000000"/>
+              <a:off x="350000" y="3700000"/>
+              <a:ext cx="2000000" cy="1250000"/>
             </p:xfrm>
             <a:graphic>
               <a:graphicData uri="http://schemas.microsoft.com/office/powerpoint/2016/slidezoom">
@@ -15868,7 +15863,7 @@
                       <p166:spPr xmlns:p166="http://schemas.microsoft.com/office/powerpoint/2016/6/main">
                         <a:xfrm>
                           <a:off x="0" y="0"/>
-                          <a:ext cx="2286000" cy="1428750"/>
+                          <a:ext cx="2000000" cy="1250000"/>
                         </a:xfrm>
                         <a:prstGeom prst="rect">
                           <a:avLst/>
@@ -16138,8 +16133,8 @@
           </a:p>
         </p:txBody>
       </p:sp>
-      <mc:AlternateContent xmlns:mc="http://schemas.openxmlformats.org/markup-compatibility/2006">
-        <mc:Choice xmlns:a14="http://schemas.microsoft.com/office/drawing/2010/main" Requires="a14">
+      <mc:AlternateContent xmlns:mc="http://schemas.openxmlformats.org/markup-compatibility/2006" xmlns:a14="http://schemas.microsoft.com/office/drawing/2010/main">
+        <mc:Choice Requires="a14">
           <p:sp>
             <p:nvSpPr>
               <p:cNvPr id="6" name="Content Placeholder 5">
@@ -16209,7 +16204,7 @@
                         <m:sSup>
                           <m:sSupPr>
                             <m:ctrlPr>
-                              <a:rPr lang="nb-NO" b="0" i="1" smtClean="0">
+                              <a:rPr lang="it-IT" b="0" i="1" smtClean="0">
                                 <a:latin typeface="Cambria Math" panose="02040503050406030204" pitchFamily="18" charset="0"/>
                               </a:rPr>
                             </m:ctrlPr>
@@ -16409,7 +16404,7 @@
             </p:txBody>
           </p:sp>
         </mc:Choice>
-        <mc:Fallback>
+        <mc:Fallback xmlns="">
           <p:sp>
             <p:nvSpPr>
               <p:cNvPr id="6" name="Content Placeholder 5">
@@ -16463,7 +16458,7 @@
 </file>
 
 <file path=ppt/slides/slide7.xml><?xml version="1.0" encoding="utf-8"?>
-<p:sld xmlns:a="http://schemas.openxmlformats.org/drawingml/2006/main" xmlns:p="http://schemas.openxmlformats.org/presentationml/2006/main" xmlns:r="http://schemas.openxmlformats.org/officeDocument/2006/relationships">
+<p:sld xmlns:a="http://schemas.openxmlformats.org/drawingml/2006/main" xmlns:r="http://schemas.openxmlformats.org/officeDocument/2006/relationships" xmlns:p="http://schemas.openxmlformats.org/presentationml/2006/main">
   <p:cSld>
     <p:spTree>
       <p:nvGrpSpPr>
@@ -16471,7 +16466,14 @@
         <p:cNvGrpSpPr/>
         <p:nvPr/>
       </p:nvGrpSpPr>
-      <p:grpSpPr/>
+      <p:grpSpPr>
+        <a:xfrm>
+          <a:off x="0" y="0"/>
+          <a:ext cx="0" cy="0"/>
+          <a:chOff x="0" y="0"/>
+          <a:chExt cx="0" cy="0"/>
+        </a:xfrm>
+      </p:grpSpPr>
       <p:sp>
         <p:nvSpPr>
           <p:cNvPr id="2" name="Title 1"/>
@@ -16508,38 +16510,65 @@
           <a:bodyPr wrap="square"/>
           <a:lstStyle/>
           <a:p>
-            <a:pPr/>
-            <a:r>
-              <a:t>A contract is not a single payment — it is a stream of cash flows spread over several years</a:t>
-            </a:r>
-          </a:p>
-          <a:p>
-            <a:pPr/>
-            <a:r>
+            <a:r>
+              <a:rPr dirty="0"/>
+              <a:t>A contract is not a single payment</a:t>
+            </a:r>
+            <a:r>
+              <a:rPr lang="it-IT" dirty="0"/>
+              <a:t>,</a:t>
+            </a:r>
+            <a:r>
+              <a:rPr dirty="0"/>
+              <a:t> it is a stream of cash flows spread over several years</a:t>
+            </a:r>
+          </a:p>
+          <a:p>
+            <a:r>
+              <a:rPr dirty="0"/>
               <a:t>Extend the single-payment PV formula by discounting and summing each year’s cash flow separately:</a:t>
             </a:r>
           </a:p>
           <a:p>
             <a:pPr lvl="1"/>
             <a:r>
+              <a:rPr dirty="0"/>
               <a:t>PV = Σ CFₜ / (1+i)ᵗ   (t = 1 to n)</a:t>
             </a:r>
           </a:p>
           <a:p>
             <a:pPr lvl="1"/>
             <a:r>
+              <a:rPr dirty="0"/>
               <a:t>CFₜ = the cash flow in year t (e.g. that year’s salary)</a:t>
             </a:r>
           </a:p>
           <a:p>
             <a:pPr lvl="1"/>
             <a:r>
-              <a:t>Every term uses the same discount rate i, but a different exponent t — later cash flows get discounted more</a:t>
-            </a:r>
-          </a:p>
-          <a:p>
-            <a:pPr/>
-            <a:r>
+              <a:rPr dirty="0"/>
+              <a:t>Every term uses the same discount rate </a:t>
+            </a:r>
+            <a:r>
+              <a:rPr dirty="0" err="1"/>
+              <a:t>i</a:t>
+            </a:r>
+            <a:r>
+              <a:rPr dirty="0"/>
+              <a:t>, but a different exponent t</a:t>
+            </a:r>
+            <a:r>
+              <a:rPr lang="it-IT" dirty="0"/>
+              <a:t>,</a:t>
+            </a:r>
+            <a:r>
+              <a:rPr dirty="0"/>
+              <a:t> later cash flows get discounted more</a:t>
+            </a:r>
+          </a:p>
+          <a:p>
+            <a:r>
+              <a:rPr dirty="0"/>
               <a:t>This is exactly what the NFL contract table (coming up) applies year-by-year to each player’s salary</a:t>
             </a:r>
           </a:p>
@@ -16689,13 +16718,6 @@
               <a:rPr lang="it-IT" dirty="0"/>
               <a:t>Pension obligations</a:t>
             </a:r>
-          </a:p>
-          <a:p>
-            <a:r>
-              <a:rPr lang="it-IT" dirty="0"/>
-              <a:t>Always remember that no interest rate is guaranteed, espcially when you are managing a portfolio with different projects and different interest rates</a:t>
-            </a:r>
-            <a:endParaRPr lang="en-US" dirty="0"/>
           </a:p>
         </p:txBody>
       </p:sp>
@@ -16890,7 +16912,7 @@
                       <p166:spPr xmlns:p166="http://schemas.microsoft.com/office/powerpoint/2016/6/main">
                         <a:xfrm>
                           <a:off x="0" y="0"/>
-                          <a:ext cx="1143000" cy="714375"/>
+                          <a:ext cx="900000" cy="562500"/>
                         </a:xfrm>
                         <a:prstGeom prst="rect">
                           <a:avLst/>
@@ -18795,6 +18817,15 @@
 </file>
 
 <file path=customXml/item1.xml><?xml version="1.0" encoding="utf-8"?>
+<?mso-contentType ?>
+<FormTemplates xmlns="http://schemas.microsoft.com/sharepoint/v3/contenttype/forms">
+  <Display>DocumentLibraryForm</Display>
+  <Edit>DocumentLibraryForm</Edit>
+  <New>DocumentLibraryForm</New>
+</FormTemplates>
+</file>
+
+<file path=customXml/item2.xml><?xml version="1.0" encoding="utf-8"?>
 <ct:contentTypeSchema xmlns:ct="http://schemas.microsoft.com/office/2006/metadata/contentType" xmlns:ma="http://schemas.microsoft.com/office/2006/metadata/properties/metaAttributes" ct:_="" ma:_="" ma:contentTypeName="Dokument" ma:contentTypeID="0x010100086B82B2E673BB48BBFD907EF88B1F72" ma:contentTypeVersion="0" ma:contentTypeDescription="Opprett et nytt dokument." ma:contentTypeScope="" ma:versionID="0653049da3c7d6103ba0b9e54f21c3f6">
   <xsd:schema xmlns:xsd="http://www.w3.org/2001/XMLSchema" xmlns:xs="http://www.w3.org/2001/XMLSchema" xmlns:p="http://schemas.microsoft.com/office/2006/metadata/properties" targetNamespace="http://schemas.microsoft.com/office/2006/metadata/properties" ma:root="true" ma:fieldsID="3e2500873ed525c1cf306a41cba81ed5">
     <xsd:element name="properties">
@@ -18908,22 +18939,21 @@
 </ct:contentTypeSchema>
 </file>
 
-<file path=customXml/item2.xml><?xml version="1.0" encoding="utf-8"?>
+<file path=customXml/item3.xml><?xml version="1.0" encoding="utf-8"?>
 <p:properties xmlns:p="http://schemas.microsoft.com/office/2006/metadata/properties" xmlns:xsi="http://www.w3.org/2001/XMLSchema-instance" xmlns:pc="http://schemas.microsoft.com/office/infopath/2007/PartnerControls">
   <documentManagement/>
 </p:properties>
 </file>
 
-<file path=customXml/item3.xml><?xml version="1.0" encoding="utf-8"?>
-<?mso-contentType ?>
-<FormTemplates xmlns="http://schemas.microsoft.com/sharepoint/v3/contenttype/forms">
-  <Display>DocumentLibraryForm</Display>
-  <Edit>DocumentLibraryForm</Edit>
-  <New>DocumentLibraryForm</New>
-</FormTemplates>
+<file path=customXml/itemProps1.xml><?xml version="1.0" encoding="utf-8"?>
+<ds:datastoreItem xmlns:ds="http://schemas.openxmlformats.org/officeDocument/2006/customXml" ds:itemID="{27479CE2-CFF2-495B-B6E0-2F66375CDBBB}">
+  <ds:schemaRefs>
+    <ds:schemaRef ds:uri="http://schemas.microsoft.com/sharepoint/v3/contenttype/forms"/>
+  </ds:schemaRefs>
+</ds:datastoreItem>
 </file>
 
-<file path=customXml/itemProps1.xml><?xml version="1.0" encoding="utf-8"?>
+<file path=customXml/itemProps2.xml><?xml version="1.0" encoding="utf-8"?>
 <ds:datastoreItem xmlns:ds="http://schemas.openxmlformats.org/officeDocument/2006/customXml" ds:itemID="{C299F0B8-F1FA-4547-8345-D1C345C8ADDE}">
   <ds:schemaRefs>
     <ds:schemaRef ds:uri="http://schemas.microsoft.com/office/2006/metadata/contentType"/>
@@ -18939,7 +18969,7 @@
 </ds:datastoreItem>
 </file>
 
-<file path=customXml/itemProps2.xml><?xml version="1.0" encoding="utf-8"?>
+<file path=customXml/itemProps3.xml><?xml version="1.0" encoding="utf-8"?>
 <ds:datastoreItem xmlns:ds="http://schemas.openxmlformats.org/officeDocument/2006/customXml" ds:itemID="{3CAC7484-FE6E-40E6-83CA-83D55D847BA8}">
   <ds:schemaRefs>
     <ds:schemaRef ds:uri="http://schemas.microsoft.com/office/2006/documentManagement/types"/>
@@ -18952,12 +18982,4 @@
     <ds:schemaRef ds:uri="http://purl.org/dc/elements/1.1/"/>
   </ds:schemaRefs>
 </ds:datastoreItem>
-</file>
-
-<file path=customXml/itemProps3.xml><?xml version="1.0" encoding="utf-8"?>
-<ds:datastoreItem xmlns:ds="http://schemas.openxmlformats.org/officeDocument/2006/customXml" ds:itemID="{27479CE2-CFF2-495B-B6E0-2F66375CDBBB}">
-  <ds:schemaRefs>
-    <ds:schemaRef ds:uri="http://schemas.microsoft.com/sharepoint/v3/contenttype/forms"/>
-  </ds:schemaRefs>
-</ds:datastoreItem>
 </file>